--- a/docs/entreprise/deck/Quantinvo-prise-en-main-marque.pptx
+++ b/docs/entreprise/deck/Quantinvo-prise-en-main-marque.pptx
@@ -20,9 +20,13 @@
     <p:sldId id="268" r:id="rId14"/>
     <p:sldId id="269" r:id="rId15"/>
     <p:sldId id="270" r:id="rId16"/>
+    <p:sldId id="271" r:id="rId17"/>
+    <p:sldId id="272" r:id="rId18"/>
+    <p:sldId id="273" r:id="rId19"/>
+    <p:sldId id="274" r:id="rId20"/>
   </p:sldIdLst>
   <p:notesMasterIdLst>
-    <p:notesMasterId r:id="rId17"/>
+    <p:notesMasterId r:id="rId21"/>
   </p:notesMasterIdLst>
   <p:sldSz cx="12192000" cy="6858000"/>
   <p:notesSz cx="6858000" cy="12192000"/>
@@ -516,7 +520,7 @@
           <a:p>
             <a:r>
               <a:rPr lang="en-US" dirty="0"/>
-              <a:t>Ce guide se remet au client après la signature, avec le plan de déploiement. La partie compteur tient en trois pages : c'est voulu, elle peut être imprimée seule.</a:t>
+              <a:t>Ce guide se remet au client après la signature, avec le plan de déploiement. La partie compteur tient en cinq pages : c'est voulu, elle peut être imprimée seule.</a:t>
             </a:r>
             <a:endParaRPr lang="en-US" dirty="0"/>
           </a:p>
@@ -604,7 +608,7 @@
           <a:p>
             <a:r>
               <a:rPr lang="en-US" dirty="0"/>
-              <a:t>Tant qu'un écart n'est pas arbitré, le rapport l'annonce en bandeau : c'est la quantité de l'auditeur qui part. Trancher avant d'exporter.</a:t>
+              <a:t>La comparaison n'a lieu que dans une balise dont l'audit est clôturé : sinon tout article pas encore repassé ressortirait à tort en écart.</a:t>
             </a:r>
             <a:endParaRPr lang="en-US" dirty="0"/>
           </a:p>
@@ -692,7 +696,7 @@
           <a:p>
             <a:r>
               <a:rPr lang="en-US" dirty="0"/>
-              <a:t/>
+              <a:t>Tant qu'un écart n'est pas arbitré, le rapport l'annonce en bandeau. Trancher avant d'exporter.</a:t>
             </a:r>
             <a:endParaRPr lang="en-US" dirty="0"/>
           </a:p>
@@ -780,7 +784,7 @@
           <a:p>
             <a:r>
               <a:rPr lang="en-US" dirty="0"/>
-              <a:t>Le numéro et le code sont affichés sur l'écran de l'inventaire du superviseur, avec un bouton « Partager les identifiants ».</a:t>
+              <a:t/>
             </a:r>
             <a:endParaRPr lang="en-US" dirty="0"/>
           </a:p>
@@ -868,7 +872,7 @@
           <a:p>
             <a:r>
               <a:rPr lang="en-US" dirty="0"/>
-              <a:t>Le geste qu'on oublie le plus : clôturer la balise. Sans lui, la zone reste « en cours » sur le tableau de bord et l'audit ne peut pas se comparer.</a:t>
+              <a:t>Le numéro et le code sont affichés sur la fiche de l'inventaire côté superviseur, avec un bouton « Partager les identifiants ».</a:t>
             </a:r>
             <a:endParaRPr lang="en-US" dirty="0"/>
           </a:p>
@@ -956,7 +960,7 @@
           <a:p>
             <a:r>
               <a:rPr lang="en-US" dirty="0"/>
-              <a:t>Hors ligne, l'ajout d'une balise inconnue n'est pas proposé : l'échec se découvre à la synchronisation. À connaître si le cas se présente.</a:t>
+              <a:t>Le geste qu'on oublie le plus : clôturer la balise. Sans lui, la zone reste « en cours » sur le tableau de bord et l'audit ne peut pas se comparer.</a:t>
             </a:r>
             <a:endParaRPr lang="en-US" dirty="0"/>
           </a:p>
@@ -1044,7 +1048,7 @@
           <a:p>
             <a:r>
               <a:rPr lang="en-US" dirty="0"/>
-              <a:t>La liste à lire à voix haute la veille. Si un point manque, c'est celui-là qui fera perdre une heure le lendemain.</a:t>
+              <a:t>Cette feuille n'apparaît qu'à la première clôture, par appareil et par personne : c'est un repère, pas une confirmation à chaque fois.</a:t>
             </a:r>
             <a:endParaRPr lang="en-US" dirty="0"/>
           </a:p>
@@ -1068,6 +1072,358 @@
             <a:fld id="{F7021451-1387-4CA6-816F-3879F97B5CBC}" type="slidenum">
               <a:rPr lang="en-US"/>
               <a:t>15</a:t>
+            </a:fld>
+            <a:endParaRPr lang="en-US"/>
+          </a:p>
+        </p:txBody>
+      </p:sp>
+    </p:spTree>
+    <p:extLst>
+      <p:ext uri="{BB962C8B-B14F-4D97-AF65-F5344CB8AC3E}">
+        <p14:creationId xmlns:p14="http://schemas.microsoft.com/office/powerpoint/2010/main" val="1024086991"/>
+      </p:ext>
+    </p:extLst>
+  </p:cSld>
+  <p:clrMapOvr>
+    <a:masterClrMapping/>
+  </p:clrMapOvr>
+</p:notes>
+</file>
+
+<file path=ppt/notesSlides/notesSlide16.xml><?xml version="1.0" encoding="utf-8"?>
+<p:notes xmlns:a="http://schemas.openxmlformats.org/drawingml/2006/main" xmlns:r="http://schemas.openxmlformats.org/officeDocument/2006/relationships" xmlns:p="http://schemas.openxmlformats.org/presentationml/2006/main">
+  <p:cSld>
+    <p:spTree>
+      <p:nvGrpSpPr>
+        <p:cNvPr id="1" name=""/>
+        <p:cNvGrpSpPr/>
+        <p:nvPr/>
+      </p:nvGrpSpPr>
+      <p:grpSpPr>
+        <a:xfrm>
+          <a:off x="0" y="0"/>
+          <a:ext cx="0" cy="0"/>
+          <a:chOff x="0" y="0"/>
+          <a:chExt cx="0" cy="0"/>
+        </a:xfrm>
+      </p:grpSpPr>
+      <p:sp>
+        <p:nvSpPr>
+          <p:cNvPr id="2" name="Slide Image Placeholder 1"/>
+          <p:cNvSpPr>
+            <a:spLocks noGrp="1" noRot="1" noChangeAspect="1"/>
+          </p:cNvSpPr>
+          <p:nvPr>
+            <p:ph type="sldImg"/>
+          </p:nvPr>
+        </p:nvSpPr>
+        <p:spPr/>
+      </p:sp>
+      <p:sp>
+        <p:nvSpPr>
+          <p:cNvPr id="3" name="Notes Placeholder 2"/>
+          <p:cNvSpPr>
+            <a:spLocks noGrp="1"/>
+          </p:cNvSpPr>
+          <p:nvPr>
+            <p:ph type="body" idx="1"/>
+          </p:nvPr>
+        </p:nvSpPr>
+        <p:spPr/>
+        <p:txBody>
+          <a:bodyPr/>
+          <a:lstStyle/>
+          <a:p>
+            <a:r>
+              <a:rPr lang="en-US" dirty="0"/>
+              <a:t>Le point à dire à voix haute avant un audit : ne pas montrer le premier comptage à l'auditeur. C'est ce qui fait qu'un écart veut dire quelque chose.</a:t>
+            </a:r>
+            <a:endParaRPr lang="en-US" dirty="0"/>
+          </a:p>
+        </p:txBody>
+      </p:sp>
+      <p:sp>
+        <p:nvSpPr>
+          <p:cNvPr id="4" name="Slide Number Placeholder 3"/>
+          <p:cNvSpPr>
+            <a:spLocks noGrp="1"/>
+          </p:cNvSpPr>
+          <p:nvPr>
+            <p:ph type="sldNum" sz="quarter" idx="10"/>
+          </p:nvPr>
+        </p:nvSpPr>
+        <p:spPr/>
+        <p:txBody>
+          <a:bodyPr/>
+          <a:lstStyle/>
+          <a:p>
+            <a:fld id="{F7021451-1387-4CA6-816F-3879F97B5CBC}" type="slidenum">
+              <a:rPr lang="en-US"/>
+              <a:t>16</a:t>
+            </a:fld>
+            <a:endParaRPr lang="en-US"/>
+          </a:p>
+        </p:txBody>
+      </p:sp>
+    </p:spTree>
+    <p:extLst>
+      <p:ext uri="{BB962C8B-B14F-4D97-AF65-F5344CB8AC3E}">
+        <p14:creationId xmlns:p14="http://schemas.microsoft.com/office/powerpoint/2010/main" val="1024086991"/>
+      </p:ext>
+    </p:extLst>
+  </p:cSld>
+  <p:clrMapOvr>
+    <a:masterClrMapping/>
+  </p:clrMapOvr>
+</p:notes>
+</file>
+
+<file path=ppt/notesSlides/notesSlide17.xml><?xml version="1.0" encoding="utf-8"?>
+<p:notes xmlns:a="http://schemas.openxmlformats.org/drawingml/2006/main" xmlns:r="http://schemas.openxmlformats.org/officeDocument/2006/relationships" xmlns:p="http://schemas.openxmlformats.org/presentationml/2006/main">
+  <p:cSld>
+    <p:spTree>
+      <p:nvGrpSpPr>
+        <p:cNvPr id="1" name=""/>
+        <p:cNvGrpSpPr/>
+        <p:nvPr/>
+      </p:nvGrpSpPr>
+      <p:grpSpPr>
+        <a:xfrm>
+          <a:off x="0" y="0"/>
+          <a:ext cx="0" cy="0"/>
+          <a:chOff x="0" y="0"/>
+          <a:chExt cx="0" cy="0"/>
+        </a:xfrm>
+      </p:grpSpPr>
+      <p:sp>
+        <p:nvSpPr>
+          <p:cNvPr id="2" name="Slide Image Placeholder 1"/>
+          <p:cNvSpPr>
+            <a:spLocks noGrp="1" noRot="1" noChangeAspect="1"/>
+          </p:cNvSpPr>
+          <p:nvPr>
+            <p:ph type="sldImg"/>
+          </p:nvPr>
+        </p:nvSpPr>
+        <p:spPr/>
+      </p:sp>
+      <p:sp>
+        <p:nvSpPr>
+          <p:cNvPr id="3" name="Notes Placeholder 2"/>
+          <p:cNvSpPr>
+            <a:spLocks noGrp="1"/>
+          </p:cNvSpPr>
+          <p:nvPr>
+            <p:ph type="body" idx="1"/>
+          </p:nvPr>
+        </p:nvSpPr>
+        <p:spPr/>
+        <p:txBody>
+          <a:bodyPr/>
+          <a:lstStyle/>
+          <a:p>
+            <a:r>
+              <a:rPr lang="en-US" dirty="0"/>
+              <a:t>Insister : ne pas désinstaller l'application et ne pas laisser effacer le téléphone tant que le bandeau signale des balises en attente. C'est le seul moyen de perdre du travail.</a:t>
+            </a:r>
+            <a:endParaRPr lang="en-US" dirty="0"/>
+          </a:p>
+        </p:txBody>
+      </p:sp>
+      <p:sp>
+        <p:nvSpPr>
+          <p:cNvPr id="4" name="Slide Number Placeholder 3"/>
+          <p:cNvSpPr>
+            <a:spLocks noGrp="1"/>
+          </p:cNvSpPr>
+          <p:nvPr>
+            <p:ph type="sldNum" sz="quarter" idx="10"/>
+          </p:nvPr>
+        </p:nvSpPr>
+        <p:spPr/>
+        <p:txBody>
+          <a:bodyPr/>
+          <a:lstStyle/>
+          <a:p>
+            <a:fld id="{F7021451-1387-4CA6-816F-3879F97B5CBC}" type="slidenum">
+              <a:rPr lang="en-US"/>
+              <a:t>17</a:t>
+            </a:fld>
+            <a:endParaRPr lang="en-US"/>
+          </a:p>
+        </p:txBody>
+      </p:sp>
+    </p:spTree>
+    <p:extLst>
+      <p:ext uri="{BB962C8B-B14F-4D97-AF65-F5344CB8AC3E}">
+        <p14:creationId xmlns:p14="http://schemas.microsoft.com/office/powerpoint/2010/main" val="1024086991"/>
+      </p:ext>
+    </p:extLst>
+  </p:cSld>
+  <p:clrMapOvr>
+    <a:masterClrMapping/>
+  </p:clrMapOvr>
+</p:notes>
+</file>
+
+<file path=ppt/notesSlides/notesSlide18.xml><?xml version="1.0" encoding="utf-8"?>
+<p:notes xmlns:a="http://schemas.openxmlformats.org/drawingml/2006/main" xmlns:r="http://schemas.openxmlformats.org/officeDocument/2006/relationships" xmlns:p="http://schemas.openxmlformats.org/presentationml/2006/main">
+  <p:cSld>
+    <p:spTree>
+      <p:nvGrpSpPr>
+        <p:cNvPr id="1" name=""/>
+        <p:cNvGrpSpPr/>
+        <p:nvPr/>
+      </p:nvGrpSpPr>
+      <p:grpSpPr>
+        <a:xfrm>
+          <a:off x="0" y="0"/>
+          <a:ext cx="0" cy="0"/>
+          <a:chOff x="0" y="0"/>
+          <a:chExt cx="0" cy="0"/>
+        </a:xfrm>
+      </p:grpSpPr>
+      <p:sp>
+        <p:nvSpPr>
+          <p:cNvPr id="2" name="Slide Image Placeholder 1"/>
+          <p:cNvSpPr>
+            <a:spLocks noGrp="1" noRot="1" noChangeAspect="1"/>
+          </p:cNvSpPr>
+          <p:nvPr>
+            <p:ph type="sldImg"/>
+          </p:nvPr>
+        </p:nvSpPr>
+        <p:spPr/>
+      </p:sp>
+      <p:sp>
+        <p:nvSpPr>
+          <p:cNvPr id="3" name="Notes Placeholder 2"/>
+          <p:cNvSpPr>
+            <a:spLocks noGrp="1"/>
+          </p:cNvSpPr>
+          <p:nvPr>
+            <p:ph type="body" idx="1"/>
+          </p:nvPr>
+        </p:nvSpPr>
+        <p:spPr/>
+        <p:txBody>
+          <a:bodyPr/>
+          <a:lstStyle/>
+          <a:p>
+            <a:r>
+              <a:rPr lang="en-US" dirty="0"/>
+              <a:t>Hors ligne, l'ajout d'une balise inconnue n'est pas proposé : l'échec se découvre à la synchronisation. À dire si le magasin travaille en zone sans réseau.</a:t>
+            </a:r>
+            <a:endParaRPr lang="en-US" dirty="0"/>
+          </a:p>
+        </p:txBody>
+      </p:sp>
+      <p:sp>
+        <p:nvSpPr>
+          <p:cNvPr id="4" name="Slide Number Placeholder 3"/>
+          <p:cNvSpPr>
+            <a:spLocks noGrp="1"/>
+          </p:cNvSpPr>
+          <p:nvPr>
+            <p:ph type="sldNum" sz="quarter" idx="10"/>
+          </p:nvPr>
+        </p:nvSpPr>
+        <p:spPr/>
+        <p:txBody>
+          <a:bodyPr/>
+          <a:lstStyle/>
+          <a:p>
+            <a:fld id="{F7021451-1387-4CA6-816F-3879F97B5CBC}" type="slidenum">
+              <a:rPr lang="en-US"/>
+              <a:t>18</a:t>
+            </a:fld>
+            <a:endParaRPr lang="en-US"/>
+          </a:p>
+        </p:txBody>
+      </p:sp>
+    </p:spTree>
+    <p:extLst>
+      <p:ext uri="{BB962C8B-B14F-4D97-AF65-F5344CB8AC3E}">
+        <p14:creationId xmlns:p14="http://schemas.microsoft.com/office/powerpoint/2010/main" val="1024086991"/>
+      </p:ext>
+    </p:extLst>
+  </p:cSld>
+  <p:clrMapOvr>
+    <a:masterClrMapping/>
+  </p:clrMapOvr>
+</p:notes>
+</file>
+
+<file path=ppt/notesSlides/notesSlide19.xml><?xml version="1.0" encoding="utf-8"?>
+<p:notes xmlns:a="http://schemas.openxmlformats.org/drawingml/2006/main" xmlns:r="http://schemas.openxmlformats.org/officeDocument/2006/relationships" xmlns:p="http://schemas.openxmlformats.org/presentationml/2006/main">
+  <p:cSld>
+    <p:spTree>
+      <p:nvGrpSpPr>
+        <p:cNvPr id="1" name=""/>
+        <p:cNvGrpSpPr/>
+        <p:nvPr/>
+      </p:nvGrpSpPr>
+      <p:grpSpPr>
+        <a:xfrm>
+          <a:off x="0" y="0"/>
+          <a:ext cx="0" cy="0"/>
+          <a:chOff x="0" y="0"/>
+          <a:chExt cx="0" cy="0"/>
+        </a:xfrm>
+      </p:grpSpPr>
+      <p:sp>
+        <p:nvSpPr>
+          <p:cNvPr id="2" name="Slide Image Placeholder 1"/>
+          <p:cNvSpPr>
+            <a:spLocks noGrp="1" noRot="1" noChangeAspect="1"/>
+          </p:cNvSpPr>
+          <p:nvPr>
+            <p:ph type="sldImg"/>
+          </p:nvPr>
+        </p:nvSpPr>
+        <p:spPr/>
+      </p:sp>
+      <p:sp>
+        <p:nvSpPr>
+          <p:cNvPr id="3" name="Notes Placeholder 2"/>
+          <p:cNvSpPr>
+            <a:spLocks noGrp="1"/>
+          </p:cNvSpPr>
+          <p:nvPr>
+            <p:ph type="body" idx="1"/>
+          </p:nvPr>
+        </p:nvSpPr>
+        <p:spPr/>
+        <p:txBody>
+          <a:bodyPr/>
+          <a:lstStyle/>
+          <a:p>
+            <a:r>
+              <a:rPr lang="en-US" dirty="0"/>
+              <a:t>La liste à lire à voix haute la veille. Si un point manque, c'est celui-là qui fera perdre une heure le lendemain.</a:t>
+            </a:r>
+            <a:endParaRPr lang="en-US" dirty="0"/>
+          </a:p>
+        </p:txBody>
+      </p:sp>
+      <p:sp>
+        <p:nvSpPr>
+          <p:cNvPr id="4" name="Slide Number Placeholder 3"/>
+          <p:cNvSpPr>
+            <a:spLocks noGrp="1"/>
+          </p:cNvSpPr>
+          <p:nvPr>
+            <p:ph type="sldNum" sz="quarter" idx="10"/>
+          </p:nvPr>
+        </p:nvSpPr>
+        <p:spPr/>
+        <p:txBody>
+          <a:bodyPr/>
+          <a:lstStyle/>
+          <a:p>
+            <a:fld id="{F7021451-1387-4CA6-816F-3879F97B5CBC}" type="slidenum">
+              <a:rPr lang="en-US"/>
+              <a:t>19</a:t>
             </a:fld>
             <a:endParaRPr lang="en-US"/>
           </a:p>
@@ -1396,7 +1752,7 @@
           <a:p>
             <a:r>
               <a:rPr lang="en-US" dirty="0"/>
-              <a:t>La planche se dessine sur le téléphone ou l'ordinateur et part à l'impression : rien n'est enregistré côté serveur. Si on change de téléphone, on réimprime, les balises collées restent valables.</a:t>
+              <a:t>La planche se dessine sur l'appareil et part à l'impression : rien n'est enregistré côté serveur. Changer de téléphone n'invalide pas les balises déjà collées, il faut seulement réimprimer si on en veut d'autres.</a:t>
             </a:r>
             <a:endParaRPr lang="en-US" dirty="0"/>
           </a:p>
@@ -1484,7 +1840,7 @@
           <a:p>
             <a:r>
               <a:rPr lang="en-US" dirty="0"/>
-              <a:t>Après la création, l'écran enchaîne sur Set up : zones, puis fichiers. C'est la page suivante.</a:t>
+              <a:t>La question qui revient : « combien de balises ? » Réponse de terrain : une par rayon, et on ne regrette jamais d'en avoir mis trop.</a:t>
             </a:r>
             <a:endParaRPr lang="en-US" dirty="0"/>
           </a:p>
@@ -1572,7 +1928,7 @@
           <a:p>
             <a:r>
               <a:rPr lang="en-US" dirty="0"/>
-              <a:t>Le message clé : on n'a pas à retravailler ses fichiers. Le second : le stock théorique est ce qui fait foi pour le rapport.</a:t>
+              <a:t>Le code d'accès sert à faire entrer un renfort de dernière minute sans l'inviter nommément. Il s'affiche sur la fiche de l'inventaire, avec un bouton de partage.</a:t>
             </a:r>
             <a:endParaRPr lang="en-US" dirty="0"/>
           </a:p>
@@ -1660,7 +2016,7 @@
           <a:p>
             <a:r>
               <a:rPr lang="en-US" dirty="0"/>
-              <a:t>Le suivi est agrégé par construction. Si un compteur demande « est-ce qu'on me voit ? », la réponse est : on voit qu'un appareil compte, pas lequel.</a:t>
+              <a:t>Le message clé : on n'a pas à retravailler ses fichiers. Le second : le stock théorique est ce qui fait foi pour le rapport.</a:t>
             </a:r>
             <a:endParaRPr lang="en-US" dirty="0"/>
           </a:p>
@@ -1748,7 +2104,7 @@
           <a:p>
             <a:r>
               <a:rPr lang="en-US" dirty="0"/>
-              <a:t>La comparaison n'a lieu que dans une balise dont l'audit est terminé : sinon tout article pas encore repassé ressortirait à tort en écart.</a:t>
+              <a:t>Le suivi est agrégé par construction. Si un compteur demande « est-ce qu'on me voit ? », la réponse est : on voit qu'un appareil compte, pas lequel.</a:t>
             </a:r>
             <a:endParaRPr lang="en-US" dirty="0"/>
           </a:p>
@@ -2326,7 +2682,7 @@
                 <a:ea typeface="Inter" pitchFamily="34" charset="-122"/>
                 <a:cs typeface="Inter" pitchFamily="34" charset="-120"/>
               </a:rPr>
-              <a:t>Pour les superviseurs, qui préparent et pilotent. Pour les compteurs, qui scannent. Chacun sa partie, et une page d'avance pour savoir ce que fait l'autre.</a:t>
+              <a:t>Pour les superviseurs, qui préparent et pilotent. Pour les compteurs, qui scannent. Les écrans de ce guide sont ceux de l'application, tels quels.</a:t>
             </a:r>
             <a:endParaRPr lang="en-US" sz="1500" dirty="0"/>
           </a:p>
@@ -2499,7 +2855,7 @@
                 <a:ea typeface="Inter" pitchFamily="34" charset="-122"/>
                 <a:cs typeface="Inter" pitchFamily="34" charset="-120"/>
               </a:rPr>
-              <a:t>Superviseur · après</a:t>
+              <a:t>Superviseur · pendant et après</a:t>
             </a:r>
             <a:endParaRPr lang="en-US" sz="1000" dirty="0"/>
           </a:p>
@@ -2538,8 +2894,8 @@
         </p:nvSpPr>
         <p:spPr>
           <a:xfrm>
-            <a:off x="731520" y="1325880"/>
-            <a:ext cx="4206240" cy="1097280"/>
+            <a:off x="731520" y="1280160"/>
+            <a:ext cx="10725912" cy="822960"/>
           </a:xfrm>
           <a:prstGeom prst="rect">
             <a:avLst/>
@@ -2558,7 +2914,7 @@
               <a:buNone/>
             </a:pPr>
             <a:r>
-              <a:rPr lang="en-US" sz="2400" b="1" dirty="0">
+              <a:rPr lang="en-US" sz="2600" b="1" dirty="0">
                 <a:solidFill>
                   <a:srgbClr val="4636B0"/>
                 </a:solidFill>
@@ -2566,9 +2922,9 @@
                 <a:ea typeface="Sora" pitchFamily="34" charset="-122"/>
                 <a:cs typeface="Sora" pitchFamily="34" charset="-120"/>
               </a:rPr>
-              <a:t>Le rapport, puis la clôture.</a:t>
-            </a:r>
-            <a:endParaRPr lang="en-US" sz="2400" dirty="0"/>
+              <a:t>Auditer, puis arbitrer. L'écart se règle à chaud.</a:t>
+            </a:r>
+            <a:endParaRPr lang="en-US" sz="2600" dirty="0"/>
           </a:p>
         </p:txBody>
       </p:sp>
@@ -2580,50 +2936,27 @@
         </p:nvSpPr>
         <p:spPr>
           <a:xfrm>
-            <a:off x="731520" y="2514600"/>
-            <a:ext cx="4206240" cy="3474720"/>
-          </a:xfrm>
-          <a:prstGeom prst="rect">
-            <a:avLst/>
-          </a:prstGeom>
-          <a:noFill/>
-          <a:ln/>
-        </p:spPr>
-        <p:txBody>
-          <a:bodyPr wrap="square" lIns="0" tIns="0" rIns="0" bIns="0" rtlCol="0" anchor="t"/>
-          <a:lstStyle/>
-          <a:p>
-            <a:pPr indent="0" marL="0">
+            <a:off x="731520" y="2103120"/>
+            <a:ext cx="10725912" cy="777240"/>
+          </a:xfrm>
+          <a:prstGeom prst="rect">
+            <a:avLst/>
+          </a:prstGeom>
+          <a:noFill/>
+          <a:ln/>
+        </p:spPr>
+        <p:txBody>
+          <a:bodyPr wrap="square" lIns="0" tIns="0" rIns="0" bIns="0" rtlCol="0" anchor="t"/>
+          <a:lstStyle/>
+          <a:p>
+            <a:pPr algn="l" indent="0" marL="0">
               <a:lnSpc>
                 <a:spcPct val="118000"/>
               </a:lnSpc>
-              <a:spcAft>
-                <a:spcPts val="800"/>
-              </a:spcAft>
-              <a:buNone/>
-            </a:pPr>
-            <a:r>
-              <a:rPr lang="en-US" sz="1150" b="1" dirty="0">
-                <a:solidFill>
-                  <a:srgbClr val="0B0F19"/>
-                </a:solidFill>
-                <a:latin typeface="Inter" pitchFamily="34" charset="0"/>
-                <a:ea typeface="Inter" pitchFamily="34" charset="-122"/>
-                <a:cs typeface="Inter" pitchFamily="34" charset="-120"/>
-              </a:rPr>
-              <a:t>Télécharger. </a:t>
-            </a:r>
-            <a:pPr indent="0" marL="0">
-              <a:lnSpc>
-                <a:spcPct val="118000"/>
-              </a:lnSpc>
-              <a:spcAft>
-                <a:spcPts val="800"/>
-              </a:spcAft>
-              <a:buNone/>
-            </a:pPr>
-            <a:r>
-              <a:rPr lang="en-US" sz="1150" dirty="0">
+              <a:buNone/>
+            </a:pPr>
+            <a:r>
+              <a:rPr lang="en-US" sz="1250" dirty="0">
                 <a:solidFill>
                   <a:srgbClr val="3D4556"/>
                 </a:solidFill>
@@ -2631,138 +2964,9 @@
                 <a:ea typeface="Inter" pitchFamily="34" charset="-122"/>
                 <a:cs typeface="Inter" pitchFamily="34" charset="-120"/>
               </a:rPr>
-              <a:t>Un fichier Excel : résultats par article, écarts en pièces et en valeur d'achat, détail par zone. La quantité retenue suit une règle simple : l'arbitrage, sinon l'auditeur, sinon le compteur.</a:t>
-            </a:r>
-            <a:endParaRPr lang="en-US" sz="1150" dirty="0"/>
-          </a:p>
-          <a:p>
-            <a:pPr indent="0" marL="0">
-              <a:lnSpc>
-                <a:spcPct val="118000"/>
-              </a:lnSpc>
-              <a:spcAft>
-                <a:spcPts val="800"/>
-              </a:spcAft>
-              <a:buNone/>
-            </a:pPr>
-            <a:r>
-              <a:rPr lang="en-US" sz="1150" b="1" dirty="0">
-                <a:solidFill>
-                  <a:srgbClr val="0B0F19"/>
-                </a:solidFill>
-                <a:latin typeface="Inter" pitchFamily="34" charset="0"/>
-                <a:ea typeface="Inter" pitchFamily="34" charset="-122"/>
-                <a:cs typeface="Inter" pitchFamily="34" charset="-120"/>
-              </a:rPr>
-              <a:t>« Non compté ». </a:t>
-            </a:r>
-            <a:pPr indent="0" marL="0">
-              <a:lnSpc>
-                <a:spcPct val="118000"/>
-              </a:lnSpc>
-              <a:spcAft>
-                <a:spcPts val="800"/>
-              </a:spcAft>
-              <a:buNone/>
-            </a:pPr>
-            <a:r>
-              <a:rPr lang="en-US" sz="1150" dirty="0">
-                <a:solidFill>
-                  <a:srgbClr val="3D4556"/>
-                </a:solidFill>
-                <a:latin typeface="Inter" pitchFamily="34" charset="0"/>
-                <a:ea typeface="Inter" pitchFamily="34" charset="-122"/>
-                <a:cs typeface="Inter" pitchFamily="34" charset="-120"/>
-              </a:rPr>
-              <a:t>Les articles du stock théorique jamais scannés. C'est la ligne à regarder en premier.</a:t>
-            </a:r>
-            <a:endParaRPr lang="en-US" sz="1150" dirty="0"/>
-          </a:p>
-          <a:p>
-            <a:pPr indent="0" marL="0">
-              <a:lnSpc>
-                <a:spcPct val="118000"/>
-              </a:lnSpc>
-              <a:spcAft>
-                <a:spcPts val="800"/>
-              </a:spcAft>
-              <a:buNone/>
-            </a:pPr>
-            <a:r>
-              <a:rPr lang="en-US" sz="1150" b="1" dirty="0">
-                <a:solidFill>
-                  <a:srgbClr val="0B0F19"/>
-                </a:solidFill>
-                <a:latin typeface="Inter" pitchFamily="34" charset="0"/>
-                <a:ea typeface="Inter" pitchFamily="34" charset="-122"/>
-                <a:cs typeface="Inter" pitchFamily="34" charset="-120"/>
-              </a:rPr>
-              <a:t>Clôturer. </a:t>
-            </a:r>
-            <a:pPr indent="0" marL="0">
-              <a:lnSpc>
-                <a:spcPct val="118000"/>
-              </a:lnSpc>
-              <a:spcAft>
-                <a:spcPts val="800"/>
-              </a:spcAft>
-              <a:buNone/>
-            </a:pPr>
-            <a:r>
-              <a:rPr lang="en-US" sz="1150" dirty="0">
-                <a:solidFill>
-                  <a:srgbClr val="3D4556"/>
-                </a:solidFill>
-                <a:latin typeface="Inter" pitchFamily="34" charset="0"/>
-                <a:ea typeface="Inter" pitchFamily="34" charset="-122"/>
-                <a:cs typeface="Inter" pitchFamily="34" charset="-120"/>
-              </a:rPr>
-              <a:t>Depuis l'onglet Équipe. Plus aucun scan n'est accepté, le rapport ne bouge plus. Tout superviseur de l'inventaire peut clôturer ; seul celui qui l'a créé, ou l'administrateur d'entreprise, peut rouvrir ou supprimer.</a:t>
-            </a:r>
-            <a:endParaRPr lang="en-US" sz="1150" dirty="0"/>
-          </a:p>
-          <a:p>
-            <a:pPr indent="0" marL="0">
-              <a:lnSpc>
-                <a:spcPct val="118000"/>
-              </a:lnSpc>
-              <a:spcAft>
-                <a:spcPts val="800"/>
-              </a:spcAft>
-              <a:buNone/>
-            </a:pPr>
-            <a:r>
-              <a:rPr lang="en-US" sz="1150" b="1" dirty="0">
-                <a:solidFill>
-                  <a:srgbClr val="0B0F19"/>
-                </a:solidFill>
-                <a:latin typeface="Inter" pitchFamily="34" charset="0"/>
-                <a:ea typeface="Inter" pitchFamily="34" charset="-122"/>
-                <a:cs typeface="Inter" pitchFamily="34" charset="-120"/>
-              </a:rPr>
-              <a:t>Supprimer. </a:t>
-            </a:r>
-            <a:pPr indent="0" marL="0">
-              <a:lnSpc>
-                <a:spcPct val="118000"/>
-              </a:lnSpc>
-              <a:spcAft>
-                <a:spcPts val="800"/>
-              </a:spcAft>
-              <a:buNone/>
-            </a:pPr>
-            <a:r>
-              <a:rPr lang="en-US" sz="1150" dirty="0">
-                <a:solidFill>
-                  <a:srgbClr val="3D4556"/>
-                </a:solidFill>
-                <a:latin typeface="Inter" pitchFamily="34" charset="0"/>
-                <a:ea typeface="Inter" pitchFamily="34" charset="-122"/>
-                <a:cs typeface="Inter" pitchFamily="34" charset="-120"/>
-              </a:rPr>
-              <a:t>Efface comptages, fichiers, audits et membres. La confirmation nomme l'inventaire ; lisez-la.</a:t>
-            </a:r>
-            <a:endParaRPr lang="en-US" sz="1150" dirty="0"/>
+              <a:t>L'audit est un second comptage d'une zone déjà comptée, par une autre personne. Quand la balise auditée est clôturée, chaque article dont les deux quantités diffèrent apparaît ici. Vous retenez la quantité du compteur, celle de l'auditeur, ou une troisième que vous avez vérifiée vous-même.</a:t>
+            </a:r>
+            <a:endParaRPr lang="en-US" sz="1250" dirty="0"/>
           </a:p>
         </p:txBody>
       </p:sp>
@@ -2774,12 +2978,12 @@
         </p:nvSpPr>
         <p:spPr>
           <a:xfrm>
-            <a:off x="5340096" y="1316736"/>
-            <a:ext cx="6172200" cy="4187624"/>
+            <a:off x="2139696" y="2916936"/>
+            <a:ext cx="7909560" cy="3082758"/>
           </a:xfrm>
           <a:prstGeom prst="roundRect">
             <a:avLst>
-              <a:gd name="adj" fmla="val 1747"/>
+              <a:gd name="adj" fmla="val 2373"/>
             </a:avLst>
           </a:prstGeom>
           <a:solidFill>
@@ -2809,8 +3013,8 @@
         </p:blipFill>
         <p:spPr>
           <a:xfrm>
-            <a:off x="5394960" y="1371600"/>
-            <a:ext cx="6062472" cy="4077896"/>
+            <a:off x="2194560" y="2971800"/>
+            <a:ext cx="7799832" cy="2973030"/>
           </a:xfrm>
           <a:prstGeom prst="rect">
             <a:avLst/>
@@ -2825,8 +3029,8 @@
         </p:nvSpPr>
         <p:spPr>
           <a:xfrm>
-            <a:off x="5394960" y="5586656"/>
-            <a:ext cx="6062472" cy="365760"/>
+            <a:off x="2194560" y="6081990"/>
+            <a:ext cx="7891272" cy="365760"/>
           </a:xfrm>
           <a:prstGeom prst="rect">
             <a:avLst/>
@@ -2850,7 +3054,7 @@
                 <a:ea typeface="Inter" pitchFamily="34" charset="-122"/>
                 <a:cs typeface="Inter" pitchFamily="34" charset="-120"/>
               </a:rPr>
-              <a:t>Onglet Rapport, données d'essai.</a:t>
+              <a:t>Onglet Écarts d'audit. Tant qu'un écart n'est pas arbitré, c'est la quantité de l'auditeur qui part au rapport.</a:t>
             </a:r>
             <a:endParaRPr lang="en-US" sz="1000" dirty="0"/>
           </a:p>
@@ -3062,7 +3266,7 @@
                 <a:ea typeface="Inter" pitchFamily="34" charset="-122"/>
                 <a:cs typeface="Inter" pitchFamily="34" charset="-120"/>
               </a:rPr>
-              <a:t>Compteur</a:t>
+              <a:t>Superviseur · après</a:t>
             </a:r>
             <a:endParaRPr lang="en-US" sz="1000" dirty="0"/>
           </a:p>
@@ -3101,34 +3305,37 @@
         </p:nvSpPr>
         <p:spPr>
           <a:xfrm>
-            <a:off x="731520" y="2011680"/>
-            <a:ext cx="2743200" cy="1097280"/>
-          </a:xfrm>
-          <a:prstGeom prst="rect">
-            <a:avLst/>
-          </a:prstGeom>
-          <a:noFill/>
-          <a:ln/>
-        </p:spPr>
-        <p:txBody>
-          <a:bodyPr wrap="square" lIns="0" tIns="0" rIns="0" bIns="0" rtlCol="0" anchor="t"/>
-          <a:lstStyle/>
-          <a:p>
-            <a:pPr indent="0" marL="0">
-              <a:buNone/>
-            </a:pPr>
-            <a:r>
-              <a:rPr lang="en-US" sz="7200" b="1" dirty="0">
-                <a:solidFill>
-                  <a:srgbClr val="EEEEFC"/>
+            <a:off x="731520" y="1325880"/>
+            <a:ext cx="4206240" cy="2011680"/>
+          </a:xfrm>
+          <a:prstGeom prst="rect">
+            <a:avLst/>
+          </a:prstGeom>
+          <a:noFill/>
+          <a:ln/>
+        </p:spPr>
+        <p:txBody>
+          <a:bodyPr wrap="square" lIns="0" tIns="0" rIns="0" bIns="0" rtlCol="0" anchor="t"/>
+          <a:lstStyle/>
+          <a:p>
+            <a:pPr indent="0" marL="0">
+              <a:lnSpc>
+                <a:spcPct val="105000"/>
+              </a:lnSpc>
+              <a:buNone/>
+            </a:pPr>
+            <a:r>
+              <a:rPr lang="en-US" sz="2600" b="1" dirty="0">
+                <a:solidFill>
+                  <a:srgbClr val="4636B0"/>
                 </a:solidFill>
                 <a:latin typeface="Sora" pitchFamily="34" charset="0"/>
                 <a:ea typeface="Sora" pitchFamily="34" charset="-122"/>
                 <a:cs typeface="Sora" pitchFamily="34" charset="-120"/>
               </a:rPr>
-              <a:t>2</a:t>
-            </a:r>
-            <a:endParaRPr lang="en-US" sz="7200" dirty="0"/>
+              <a:t>Le rapport, puis la clôture.</a:t>
+            </a:r>
+            <a:endParaRPr lang="en-US" sz="2600" dirty="0"/>
           </a:p>
         </p:txBody>
       </p:sp>
@@ -3140,24 +3347,221 @@
         </p:nvSpPr>
         <p:spPr>
           <a:xfrm>
-            <a:off x="731520" y="3063240"/>
-            <a:ext cx="8229600" cy="822960"/>
-          </a:xfrm>
-          <a:prstGeom prst="rect">
-            <a:avLst/>
-          </a:prstGeom>
-          <a:noFill/>
-          <a:ln/>
-        </p:spPr>
-        <p:txBody>
-          <a:bodyPr wrap="square" lIns="0" tIns="0" rIns="0" bIns="0" rtlCol="0" anchor="t"/>
-          <a:lstStyle/>
-          <a:p>
-            <a:pPr indent="0" marL="0">
-              <a:buNone/>
-            </a:pPr>
-            <a:r>
-              <a:rPr lang="en-US" sz="3400" b="1" dirty="0">
+            <a:off x="731520" y="2697480"/>
+            <a:ext cx="7223760" cy="3291840"/>
+          </a:xfrm>
+          <a:prstGeom prst="rect">
+            <a:avLst/>
+          </a:prstGeom>
+          <a:noFill/>
+          <a:ln/>
+        </p:spPr>
+        <p:txBody>
+          <a:bodyPr wrap="square" lIns="0" tIns="0" rIns="0" bIns="0" rtlCol="0" anchor="t"/>
+          <a:lstStyle/>
+          <a:p>
+            <a:pPr indent="0" marL="0">
+              <a:lnSpc>
+                <a:spcPct val="118000"/>
+              </a:lnSpc>
+              <a:spcAft>
+                <a:spcPts val="1100"/>
+              </a:spcAft>
+              <a:buNone/>
+            </a:pPr>
+            <a:r>
+              <a:rPr lang="en-US" sz="1200" b="1" dirty="0">
+                <a:solidFill>
+                  <a:srgbClr val="0B0F19"/>
+                </a:solidFill>
+                <a:latin typeface="Inter" pitchFamily="34" charset="0"/>
+                <a:ea typeface="Inter" pitchFamily="34" charset="-122"/>
+                <a:cs typeface="Inter" pitchFamily="34" charset="-120"/>
+              </a:rPr>
+              <a:t>Télécharger. </a:t>
+            </a:r>
+            <a:pPr indent="0" marL="0">
+              <a:lnSpc>
+                <a:spcPct val="118000"/>
+              </a:lnSpc>
+              <a:spcAft>
+                <a:spcPts val="1100"/>
+              </a:spcAft>
+              <a:buNone/>
+            </a:pPr>
+            <a:r>
+              <a:rPr lang="en-US" sz="1200" dirty="0">
+                <a:solidFill>
+                  <a:srgbClr val="3D4556"/>
+                </a:solidFill>
+                <a:latin typeface="Inter" pitchFamily="34" charset="0"/>
+                <a:ea typeface="Inter" pitchFamily="34" charset="-122"/>
+                <a:cs typeface="Inter" pitchFamily="34" charset="-120"/>
+              </a:rPr>
+              <a:t>Un fichier Excel : résultats par article, écarts en pièces et en valeur d'achat, détail par zone. La quantité retenue suit une règle simple — l'arbitrage, sinon l'auditeur, sinon le compteur.</a:t>
+            </a:r>
+            <a:endParaRPr lang="en-US" sz="1200" dirty="0"/>
+          </a:p>
+          <a:p>
+            <a:pPr indent="0" marL="0">
+              <a:lnSpc>
+                <a:spcPct val="118000"/>
+              </a:lnSpc>
+              <a:spcAft>
+                <a:spcPts val="1100"/>
+              </a:spcAft>
+              <a:buNone/>
+            </a:pPr>
+            <a:r>
+              <a:rPr lang="en-US" sz="1200" b="1" dirty="0">
+                <a:solidFill>
+                  <a:srgbClr val="0B0F19"/>
+                </a:solidFill>
+                <a:latin typeface="Inter" pitchFamily="34" charset="0"/>
+                <a:ea typeface="Inter" pitchFamily="34" charset="-122"/>
+                <a:cs typeface="Inter" pitchFamily="34" charset="-120"/>
+              </a:rPr>
+              <a:t>Regarder « Non compté » d’abord. </a:t>
+            </a:r>
+            <a:pPr indent="0" marL="0">
+              <a:lnSpc>
+                <a:spcPct val="118000"/>
+              </a:lnSpc>
+              <a:spcAft>
+                <a:spcPts val="1100"/>
+              </a:spcAft>
+              <a:buNone/>
+            </a:pPr>
+            <a:r>
+              <a:rPr lang="en-US" sz="1200" dirty="0">
+                <a:solidFill>
+                  <a:srgbClr val="3D4556"/>
+                </a:solidFill>
+                <a:latin typeface="Inter" pitchFamily="34" charset="0"/>
+                <a:ea typeface="Inter" pitchFamily="34" charset="-122"/>
+                <a:cs typeface="Inter" pitchFamily="34" charset="-120"/>
+              </a:rPr>
+              <a:t>Ce sont les articles attendus que personne n'a scannés. C'est là que se lit la démarque.</a:t>
+            </a:r>
+            <a:endParaRPr lang="en-US" sz="1200" dirty="0"/>
+          </a:p>
+          <a:p>
+            <a:pPr indent="0" marL="0">
+              <a:lnSpc>
+                <a:spcPct val="118000"/>
+              </a:lnSpc>
+              <a:spcAft>
+                <a:spcPts val="1100"/>
+              </a:spcAft>
+              <a:buNone/>
+            </a:pPr>
+            <a:r>
+              <a:rPr lang="en-US" sz="1200" b="1" dirty="0">
+                <a:solidFill>
+                  <a:srgbClr val="0B0F19"/>
+                </a:solidFill>
+                <a:latin typeface="Inter" pitchFamily="34" charset="0"/>
+                <a:ea typeface="Inter" pitchFamily="34" charset="-122"/>
+                <a:cs typeface="Inter" pitchFamily="34" charset="-120"/>
+              </a:rPr>
+              <a:t>Clôturer. </a:t>
+            </a:r>
+            <a:pPr indent="0" marL="0">
+              <a:lnSpc>
+                <a:spcPct val="118000"/>
+              </a:lnSpc>
+              <a:spcAft>
+                <a:spcPts val="1100"/>
+              </a:spcAft>
+              <a:buNone/>
+            </a:pPr>
+            <a:r>
+              <a:rPr lang="en-US" sz="1200" dirty="0">
+                <a:solidFill>
+                  <a:srgbClr val="3D4556"/>
+                </a:solidFill>
+                <a:latin typeface="Inter" pitchFamily="34" charset="0"/>
+                <a:ea typeface="Inter" pitchFamily="34" charset="-122"/>
+                <a:cs typeface="Inter" pitchFamily="34" charset="-120"/>
+              </a:rPr>
+              <a:t>Plus aucun scan n'est accepté, le rapport ne bouge plus. Tout superviseur de l'inventaire peut clôturer ; seul son créateur, ou l'administrateur d'entreprise, peut le rouvrir ou le supprimer.</a:t>
+            </a:r>
+            <a:endParaRPr lang="en-US" sz="1200" dirty="0"/>
+          </a:p>
+          <a:p>
+            <a:pPr indent="0" marL="0">
+              <a:lnSpc>
+                <a:spcPct val="118000"/>
+              </a:lnSpc>
+              <a:spcAft>
+                <a:spcPts val="1100"/>
+              </a:spcAft>
+              <a:buNone/>
+            </a:pPr>
+            <a:r>
+              <a:rPr lang="en-US" sz="1200" b="1" dirty="0">
+                <a:solidFill>
+                  <a:srgbClr val="0B0F19"/>
+                </a:solidFill>
+                <a:latin typeface="Inter" pitchFamily="34" charset="0"/>
+                <a:ea typeface="Inter" pitchFamily="34" charset="-122"/>
+                <a:cs typeface="Inter" pitchFamily="34" charset="-120"/>
+              </a:rPr>
+              <a:t>Supprimer. </a:t>
+            </a:r>
+            <a:pPr indent="0" marL="0">
+              <a:lnSpc>
+                <a:spcPct val="118000"/>
+              </a:lnSpc>
+              <a:spcAft>
+                <a:spcPts val="1100"/>
+              </a:spcAft>
+              <a:buNone/>
+            </a:pPr>
+            <a:r>
+              <a:rPr lang="en-US" sz="1200" dirty="0">
+                <a:solidFill>
+                  <a:srgbClr val="3D4556"/>
+                </a:solidFill>
+                <a:latin typeface="Inter" pitchFamily="34" charset="0"/>
+                <a:ea typeface="Inter" pitchFamily="34" charset="-122"/>
+                <a:cs typeface="Inter" pitchFamily="34" charset="-120"/>
+              </a:rPr>
+              <a:t>Efface comptages, fichiers, audits et membres. La confirmation nomme l'inventaire ; lisez-la.</a:t>
+            </a:r>
+            <a:endParaRPr lang="en-US" sz="1200" dirty="0"/>
+          </a:p>
+        </p:txBody>
+      </p:sp>
+      <p:sp>
+        <p:nvSpPr>
+          <p:cNvPr id="8" name="Text 5"/>
+          <p:cNvSpPr/>
+          <p:nvPr/>
+        </p:nvSpPr>
+        <p:spPr>
+          <a:xfrm>
+            <a:off x="8257032" y="1371600"/>
+            <a:ext cx="3200400" cy="365760"/>
+          </a:xfrm>
+          <a:prstGeom prst="rect">
+            <a:avLst/>
+          </a:prstGeom>
+          <a:noFill/>
+          <a:ln/>
+        </p:spPr>
+        <p:txBody>
+          <a:bodyPr wrap="square" lIns="0" tIns="0" rIns="0" bIns="0" rtlCol="0" anchor="t"/>
+          <a:lstStyle/>
+          <a:p>
+            <a:pPr indent="0" marL="0">
+              <a:lnSpc>
+                <a:spcPct val="100000"/>
+              </a:lnSpc>
+              <a:buNone/>
+            </a:pPr>
+            <a:r>
+              <a:rPr lang="en-US" sz="1350" b="1" dirty="0">
                 <a:solidFill>
                   <a:srgbClr val="4636B0"/>
                 </a:solidFill>
@@ -3165,22 +3569,22 @@
                 <a:ea typeface="Sora" pitchFamily="34" charset="-122"/>
                 <a:cs typeface="Sora" pitchFamily="34" charset="-120"/>
               </a:rPr>
-              <a:t>Compter</a:t>
-            </a:r>
-            <a:endParaRPr lang="en-US" sz="3400" dirty="0"/>
-          </a:p>
-        </p:txBody>
-      </p:sp>
-      <p:sp>
-        <p:nvSpPr>
-          <p:cNvPr id="8" name="Text 5"/>
-          <p:cNvSpPr/>
-          <p:nvPr/>
-        </p:nvSpPr>
-        <p:spPr>
-          <a:xfrm>
-            <a:off x="731520" y="3977640"/>
-            <a:ext cx="7772400" cy="1280160"/>
+              <a:t>Les gestes de fin</a:t>
+            </a:r>
+            <a:endParaRPr lang="en-US" sz="1350" dirty="0"/>
+          </a:p>
+        </p:txBody>
+      </p:sp>
+      <p:sp>
+        <p:nvSpPr>
+          <p:cNvPr id="9" name="Text 6"/>
+          <p:cNvSpPr/>
+          <p:nvPr/>
+        </p:nvSpPr>
+        <p:spPr>
+          <a:xfrm>
+            <a:off x="8257032" y="1755648"/>
+            <a:ext cx="3200400" cy="585216"/>
           </a:xfrm>
           <a:prstGeom prst="rect">
             <a:avLst/>
@@ -3194,12 +3598,12 @@
           <a:p>
             <a:pPr indent="0" marL="0">
               <a:lnSpc>
-                <a:spcPct val="120000"/>
+                <a:spcPct val="115000"/>
               </a:lnSpc>
               <a:buNone/>
             </a:pPr>
             <a:r>
-              <a:rPr lang="en-US" sz="1400" dirty="0">
+              <a:rPr lang="en-US" sz="1100" dirty="0">
                 <a:solidFill>
                   <a:srgbClr val="3D4556"/>
                 </a:solidFill>
@@ -3207,15 +3611,66 @@
                 <a:ea typeface="Inter" pitchFamily="34" charset="-122"/>
                 <a:cs typeface="Inter" pitchFamily="34" charset="-120"/>
               </a:rPr>
-              <a:t>La partie du compteur. Trois pages, à imprimer si on veut : rejoindre, compter en trois gestes, et quoi faire quand quelque chose ne se passe pas comme prévu.</a:t>
-            </a:r>
-            <a:endParaRPr lang="en-US" sz="1400" dirty="0"/>
-          </a:p>
-        </p:txBody>
-      </p:sp>
-      <p:sp>
-        <p:nvSpPr>
-          <p:cNvPr id="9" name="Text 6"/>
+              <a:t>Écarts, rapport, clôture, suppression : tous sur la même page, dans cet ordre.</a:t>
+            </a:r>
+            <a:endParaRPr lang="en-US" sz="1100" dirty="0"/>
+          </a:p>
+        </p:txBody>
+      </p:sp>
+      <p:sp>
+        <p:nvSpPr>
+          <p:cNvPr id="10" name="Shape 7"/>
+          <p:cNvSpPr/>
+          <p:nvPr/>
+        </p:nvSpPr>
+        <p:spPr>
+          <a:xfrm>
+            <a:off x="8257032" y="2377440"/>
+            <a:ext cx="3200400" cy="3822192"/>
+          </a:xfrm>
+          <a:prstGeom prst="roundRect">
+            <a:avLst>
+              <a:gd name="adj" fmla="val 4000"/>
+            </a:avLst>
+          </a:prstGeom>
+          <a:solidFill>
+            <a:srgbClr val="F4F5F9"/>
+          </a:solidFill>
+          <a:ln w="12700">
+            <a:solidFill>
+              <a:srgbClr val="F4F5F9"/>
+            </a:solidFill>
+            <a:prstDash val="solid"/>
+          </a:ln>
+        </p:spPr>
+      </p:sp>
+      <p:pic>
+        <p:nvPicPr>
+          <p:cNvPr id="11" name="Image 1" descr="preencoded.png">    </p:cNvPr>
+          <p:cNvPicPr>
+            <a:picLocks noChangeAspect="1"/>
+          </p:cNvPicPr>
+          <p:nvPr/>
+        </p:nvPicPr>
+        <p:blipFill>
+          <a:blip r:embed="rId2"/>
+          <a:stretch>
+            <a:fillRect/>
+          </a:stretch>
+        </p:blipFill>
+        <p:spPr>
+          <a:xfrm>
+            <a:off x="8567928" y="2378273"/>
+            <a:ext cx="2578608" cy="3821359"/>
+          </a:xfrm>
+          <a:prstGeom prst="rect">
+            <a:avLst/>
+          </a:prstGeom>
+        </p:spPr>
+      </p:pic>
+      <p:sp>
+        <p:nvSpPr>
+          <p:cNvPr id="12" name="Text 8"/>
           <p:cNvSpPr/>
           <p:nvPr/>
         </p:nvSpPr>
@@ -3254,7 +3709,7 @@
       </p:sp>
       <p:sp>
         <p:nvSpPr>
-          <p:cNvPr id="10" name="Text 7"/>
+          <p:cNvPr id="13" name="Text 9"/>
           <p:cNvSpPr/>
           <p:nvPr/>
         </p:nvSpPr>
@@ -3458,37 +3913,34 @@
         </p:nvSpPr>
         <p:spPr>
           <a:xfrm>
-            <a:off x="731520" y="1325880"/>
-            <a:ext cx="4206240" cy="2011680"/>
-          </a:xfrm>
-          <a:prstGeom prst="rect">
-            <a:avLst/>
-          </a:prstGeom>
-          <a:noFill/>
-          <a:ln/>
-        </p:spPr>
-        <p:txBody>
-          <a:bodyPr wrap="square" lIns="0" tIns="0" rIns="0" bIns="0" rtlCol="0" anchor="t"/>
-          <a:lstStyle/>
-          <a:p>
-            <a:pPr indent="0" marL="0">
-              <a:lnSpc>
-                <a:spcPct val="105000"/>
-              </a:lnSpc>
-              <a:buNone/>
-            </a:pPr>
-            <a:r>
-              <a:rPr lang="en-US" sz="2600" b="1" dirty="0">
-                <a:solidFill>
-                  <a:srgbClr val="4636B0"/>
+            <a:off x="731520" y="1920240"/>
+            <a:ext cx="2743200" cy="1188720"/>
+          </a:xfrm>
+          <a:prstGeom prst="rect">
+            <a:avLst/>
+          </a:prstGeom>
+          <a:noFill/>
+          <a:ln/>
+        </p:spPr>
+        <p:txBody>
+          <a:bodyPr wrap="square" lIns="0" tIns="0" rIns="0" bIns="0" rtlCol="0" anchor="t"/>
+          <a:lstStyle/>
+          <a:p>
+            <a:pPr indent="0" marL="0">
+              <a:buNone/>
+            </a:pPr>
+            <a:r>
+              <a:rPr lang="en-US" sz="7200" b="1" dirty="0">
+                <a:solidFill>
+                  <a:srgbClr val="EEEEFC"/>
                 </a:solidFill>
                 <a:latin typeface="Sora" pitchFamily="34" charset="0"/>
                 <a:ea typeface="Sora" pitchFamily="34" charset="-122"/>
                 <a:cs typeface="Sora" pitchFamily="34" charset="-120"/>
               </a:rPr>
-              <a:t>Rejoindre un inventaire. Deux façons, la première suffit presque toujours.</a:t>
-            </a:r>
-            <a:endParaRPr lang="en-US" sz="2600" dirty="0"/>
+              <a:t>2</a:t>
+            </a:r>
+            <a:endParaRPr lang="en-US" sz="7200" dirty="0"/>
           </a:p>
         </p:txBody>
       </p:sp>
@@ -3500,8 +3952,47 @@
         </p:nvSpPr>
         <p:spPr>
           <a:xfrm>
-            <a:off x="731520" y="3429000"/>
-            <a:ext cx="5303520" cy="2743200"/>
+            <a:off x="731520" y="3017520"/>
+            <a:ext cx="7863840" cy="822960"/>
+          </a:xfrm>
+          <a:prstGeom prst="rect">
+            <a:avLst/>
+          </a:prstGeom>
+          <a:noFill/>
+          <a:ln/>
+        </p:spPr>
+        <p:txBody>
+          <a:bodyPr wrap="square" lIns="0" tIns="0" rIns="0" bIns="0" rtlCol="0" anchor="t"/>
+          <a:lstStyle/>
+          <a:p>
+            <a:pPr indent="0" marL="0">
+              <a:buNone/>
+            </a:pPr>
+            <a:r>
+              <a:rPr lang="en-US" sz="3400" b="1" dirty="0">
+                <a:solidFill>
+                  <a:srgbClr val="4636B0"/>
+                </a:solidFill>
+                <a:latin typeface="Sora" pitchFamily="34" charset="0"/>
+                <a:ea typeface="Sora" pitchFamily="34" charset="-122"/>
+                <a:cs typeface="Sora" pitchFamily="34" charset="-120"/>
+              </a:rPr>
+              <a:t>Compter</a:t>
+            </a:r>
+            <a:endParaRPr lang="en-US" sz="3400" dirty="0"/>
+          </a:p>
+        </p:txBody>
+      </p:sp>
+      <p:sp>
+        <p:nvSpPr>
+          <p:cNvPr id="8" name="Text 5"/>
+          <p:cNvSpPr/>
+          <p:nvPr/>
+        </p:nvSpPr>
+        <p:spPr>
+          <a:xfrm>
+            <a:off x="731520" y="3931920"/>
+            <a:ext cx="7498080" cy="1371600"/>
           </a:xfrm>
           <a:prstGeom prst="rect">
             <a:avLst/>
@@ -3515,35 +4006,12 @@
           <a:p>
             <a:pPr indent="0" marL="0">
               <a:lnSpc>
-                <a:spcPct val="118000"/>
+                <a:spcPct val="120000"/>
               </a:lnSpc>
-              <a:spcAft>
-                <a:spcPts val="900"/>
-              </a:spcAft>
-              <a:buNone/>
-            </a:pPr>
-            <a:r>
-              <a:rPr lang="en-US" sz="1150" b="1" dirty="0">
-                <a:solidFill>
-                  <a:srgbClr val="0B0F19"/>
-                </a:solidFill>
-                <a:latin typeface="Inter" pitchFamily="34" charset="0"/>
-                <a:ea typeface="Inter" pitchFamily="34" charset="-122"/>
-                <a:cs typeface="Inter" pitchFamily="34" charset="-120"/>
-              </a:rPr>
-              <a:t>On vous a ajouté. </a:t>
-            </a:r>
-            <a:pPr indent="0" marL="0">
-              <a:lnSpc>
-                <a:spcPct val="118000"/>
-              </a:lnSpc>
-              <a:spcAft>
-                <a:spcPts val="900"/>
-              </a:spcAft>
-              <a:buNone/>
-            </a:pPr>
-            <a:r>
-              <a:rPr lang="en-US" sz="1150" dirty="0">
+              <a:buNone/>
+            </a:pPr>
+            <a:r>
+              <a:rPr lang="en-US" sz="1400" dirty="0">
                 <a:solidFill>
                   <a:srgbClr val="3D4556"/>
                 </a:solidFill>
@@ -3551,663 +4019,15 @@
                 <a:ea typeface="Inter" pitchFamily="34" charset="-122"/>
                 <a:cs typeface="Inter" pitchFamily="34" charset="-120"/>
               </a:rPr>
-              <a:t>L'inventaire est dans « Mes inventaires » dès que vous ouvrez l'application, et vous avez reçu une notification. Touchez-le.</a:t>
-            </a:r>
-            <a:endParaRPr lang="en-US" sz="1150" dirty="0"/>
-          </a:p>
-          <a:p>
-            <a:pPr indent="0" marL="0">
-              <a:lnSpc>
-                <a:spcPct val="118000"/>
-              </a:lnSpc>
-              <a:spcAft>
-                <a:spcPts val="900"/>
-              </a:spcAft>
-              <a:buNone/>
-            </a:pPr>
-            <a:r>
-              <a:rPr lang="en-US" sz="1150" b="1" dirty="0">
-                <a:solidFill>
-                  <a:srgbClr val="0B0F19"/>
-                </a:solidFill>
-                <a:latin typeface="Inter" pitchFamily="34" charset="0"/>
-                <a:ea typeface="Inter" pitchFamily="34" charset="-122"/>
-                <a:cs typeface="Inter" pitchFamily="34" charset="-120"/>
-              </a:rPr>
-              <a:t>On vous a donné un numéro et un code. </a:t>
-            </a:r>
-            <a:pPr indent="0" marL="0">
-              <a:lnSpc>
-                <a:spcPct val="118000"/>
-              </a:lnSpc>
-              <a:spcAft>
-                <a:spcPts val="900"/>
-              </a:spcAft>
-              <a:buNone/>
-            </a:pPr>
-            <a:r>
-              <a:rPr lang="en-US" sz="1150" dirty="0">
-                <a:solidFill>
-                  <a:srgbClr val="3D4556"/>
-                </a:solidFill>
-                <a:latin typeface="Inter" pitchFamily="34" charset="0"/>
-                <a:ea typeface="Inter" pitchFamily="34" charset="-122"/>
-                <a:cs typeface="Inter" pitchFamily="34" charset="-120"/>
-              </a:rPr>
-              <a:t>« Rejoindre un inventaire », en bas de l'écran : le numéro (INV-…), le code. C'est le cas d'un renfort de dernière minute.</a:t>
-            </a:r>
-            <a:endParaRPr lang="en-US" sz="1150" dirty="0"/>
-          </a:p>
-          <a:p>
-            <a:pPr indent="0" marL="0">
-              <a:lnSpc>
-                <a:spcPct val="118000"/>
-              </a:lnSpc>
-              <a:spcAft>
-                <a:spcPts val="900"/>
-              </a:spcAft>
-              <a:buNone/>
-            </a:pPr>
-            <a:r>
-              <a:rPr lang="en-US" sz="1150" b="1" dirty="0">
-                <a:solidFill>
-                  <a:srgbClr val="0B0F19"/>
-                </a:solidFill>
-                <a:latin typeface="Inter" pitchFamily="34" charset="0"/>
-                <a:ea typeface="Inter" pitchFamily="34" charset="-122"/>
-                <a:cs typeface="Inter" pitchFamily="34" charset="-120"/>
-              </a:rPr>
-              <a:t>Ensuite. </a:t>
-            </a:r>
-            <a:pPr indent="0" marL="0">
-              <a:lnSpc>
-                <a:spcPct val="118000"/>
-              </a:lnSpc>
-              <a:spcAft>
-                <a:spcPts val="900"/>
-              </a:spcAft>
-              <a:buNone/>
-            </a:pPr>
-            <a:r>
-              <a:rPr lang="en-US" sz="1150" dirty="0">
-                <a:solidFill>
-                  <a:srgbClr val="3D4556"/>
-                </a:solidFill>
-                <a:latin typeface="Inter" pitchFamily="34" charset="0"/>
-                <a:ea typeface="Inter" pitchFamily="34" charset="-122"/>
-                <a:cs typeface="Inter" pitchFamily="34" charset="-120"/>
-              </a:rPr>
-              <a:t>L'écran de l'inventaire propose « Compter des articles », « Auditer des articles », et « Quitter l'inventaire ». Quitter ne supprime rien de ce que vous avez compté.</a:t>
-            </a:r>
-            <a:endParaRPr lang="en-US" sz="1150" dirty="0"/>
-          </a:p>
-        </p:txBody>
-      </p:sp>
-      <p:sp>
-        <p:nvSpPr>
-          <p:cNvPr id="8" name="Shape 5"/>
-          <p:cNvSpPr/>
-          <p:nvPr/>
-        </p:nvSpPr>
-        <p:spPr>
-          <a:xfrm>
-            <a:off x="7498080" y="1325880"/>
-            <a:ext cx="2194560" cy="4498848"/>
-          </a:xfrm>
-          <a:prstGeom prst="roundRect">
-            <a:avLst>
-              <a:gd name="adj" fmla="val 11667"/>
-            </a:avLst>
-          </a:prstGeom>
-          <a:solidFill>
-            <a:srgbClr val="FFFFFF"/>
-          </a:solidFill>
-          <a:ln w="19050">
-            <a:solidFill>
-              <a:srgbClr val="0B0F19"/>
-            </a:solidFill>
-            <a:prstDash val="solid"/>
-          </a:ln>
-        </p:spPr>
-      </p:sp>
-      <p:sp>
-        <p:nvSpPr>
-          <p:cNvPr id="9" name="Shape 6"/>
-          <p:cNvSpPr/>
-          <p:nvPr/>
-        </p:nvSpPr>
-        <p:spPr>
-          <a:xfrm>
-            <a:off x="8275320" y="1472184"/>
-            <a:ext cx="640080" cy="91440"/>
-          </a:xfrm>
-          <a:prstGeom prst="roundRect">
-            <a:avLst>
-              <a:gd name="adj" fmla="val 50000"/>
-            </a:avLst>
-          </a:prstGeom>
-          <a:solidFill>
-            <a:srgbClr val="0B0F19"/>
-          </a:solidFill>
-          <a:ln w="12700">
-            <a:solidFill>
-              <a:srgbClr val="0B0F19"/>
-            </a:solidFill>
-            <a:prstDash val="solid"/>
-          </a:ln>
-        </p:spPr>
-      </p:sp>
-      <p:sp>
-        <p:nvSpPr>
-          <p:cNvPr id="10" name="Text 7"/>
-          <p:cNvSpPr/>
-          <p:nvPr/>
-        </p:nvSpPr>
-        <p:spPr>
-          <a:xfrm>
-            <a:off x="7699248" y="1783080"/>
-            <a:ext cx="1792224" cy="457200"/>
-          </a:xfrm>
-          <a:prstGeom prst="rect">
-            <a:avLst/>
-          </a:prstGeom>
-          <a:noFill/>
-          <a:ln/>
-        </p:spPr>
-        <p:txBody>
-          <a:bodyPr wrap="square" lIns="0" tIns="0" rIns="0" bIns="0" rtlCol="0" anchor="t"/>
-          <a:lstStyle/>
-          <a:p>
-            <a:pPr indent="0" marL="0">
-              <a:lnSpc>
-                <a:spcPct val="112000"/>
-              </a:lnSpc>
-              <a:buNone/>
-            </a:pPr>
-            <a:r>
-              <a:rPr lang="en-US" sz="1050" dirty="0">
-                <a:solidFill>
-                  <a:srgbClr val="0B0F19"/>
-                </a:solidFill>
-                <a:latin typeface="Inter" pitchFamily="34" charset="0"/>
-                <a:ea typeface="Inter" pitchFamily="34" charset="-122"/>
-                <a:cs typeface="Inter" pitchFamily="34" charset="-120"/>
-              </a:rPr>
-              <a:t>Bonjour, Camille</a:t>
-            </a:r>
-            <a:endParaRPr lang="en-US" sz="1050" dirty="0"/>
-          </a:p>
-        </p:txBody>
-      </p:sp>
-      <p:sp>
-        <p:nvSpPr>
-          <p:cNvPr id="11" name="Text 8"/>
-          <p:cNvSpPr/>
-          <p:nvPr/>
-        </p:nvSpPr>
-        <p:spPr>
-          <a:xfrm>
-            <a:off x="7699248" y="2148840"/>
-            <a:ext cx="1792224" cy="256032"/>
-          </a:xfrm>
-          <a:prstGeom prst="rect">
-            <a:avLst/>
-          </a:prstGeom>
-          <a:noFill/>
-          <a:ln/>
-        </p:spPr>
-        <p:txBody>
-          <a:bodyPr wrap="square" lIns="0" tIns="0" rIns="0" bIns="0" rtlCol="0" anchor="t"/>
-          <a:lstStyle/>
-          <a:p>
-            <a:pPr indent="0" marL="0">
-              <a:buNone/>
-            </a:pPr>
-            <a:r>
-              <a:rPr lang="en-US" sz="900" b="1" dirty="0">
-                <a:solidFill>
-                  <a:srgbClr val="5B6475"/>
-                </a:solidFill>
-                <a:latin typeface="Inter" pitchFamily="34" charset="0"/>
-                <a:ea typeface="Inter" pitchFamily="34" charset="-122"/>
-                <a:cs typeface="Inter" pitchFamily="34" charset="-120"/>
-              </a:rPr>
-              <a:t>MES INVENTAIRES</a:t>
-            </a:r>
-            <a:endParaRPr lang="en-US" sz="900" dirty="0"/>
-          </a:p>
-        </p:txBody>
-      </p:sp>
-      <p:sp>
-        <p:nvSpPr>
-          <p:cNvPr id="12" name="Text 9"/>
-          <p:cNvSpPr/>
-          <p:nvPr/>
-        </p:nvSpPr>
-        <p:spPr>
-          <a:xfrm>
-            <a:off x="7699248" y="2441448"/>
-            <a:ext cx="1792224" cy="457200"/>
-          </a:xfrm>
-          <a:prstGeom prst="rect">
-            <a:avLst/>
-          </a:prstGeom>
-          <a:noFill/>
-          <a:ln/>
-        </p:spPr>
-        <p:txBody>
-          <a:bodyPr wrap="square" lIns="0" tIns="0" rIns="0" bIns="0" rtlCol="0" anchor="t"/>
-          <a:lstStyle/>
-          <a:p>
-            <a:pPr indent="0" marL="0">
-              <a:lnSpc>
-                <a:spcPct val="112000"/>
-              </a:lnSpc>
-              <a:buNone/>
-            </a:pPr>
-            <a:r>
-              <a:rPr lang="en-US" sz="1050" dirty="0">
-                <a:solidFill>
-                  <a:srgbClr val="0B0F19"/>
-                </a:solidFill>
-                <a:latin typeface="Inter" pitchFamily="34" charset="0"/>
-                <a:ea typeface="Inter" pitchFamily="34" charset="-122"/>
-                <a:cs typeface="Inter" pitchFamily="34" charset="-120"/>
-              </a:rPr>
-              <a:t>Rayon textile · En cours</a:t>
-            </a:r>
-            <a:endParaRPr lang="en-US" sz="1050" dirty="0"/>
-          </a:p>
-          <a:p>
-            <a:pPr indent="0" marL="0">
-              <a:lnSpc>
-                <a:spcPct val="112000"/>
-              </a:lnSpc>
-              <a:buNone/>
-            </a:pPr>
-            <a:r>
-              <a:rPr lang="en-US" sz="1050" dirty="0">
-                <a:solidFill>
-                  <a:srgbClr val="0B0F19"/>
-                </a:solidFill>
-                <a:latin typeface="Inter" pitchFamily="34" charset="0"/>
-                <a:ea typeface="Inter" pitchFamily="34" charset="-122"/>
-                <a:cs typeface="Inter" pitchFamily="34" charset="-120"/>
-              </a:rPr>
-              <a:t>INV-20260901-A3F2</a:t>
-            </a:r>
-            <a:endParaRPr lang="en-US" sz="1050" dirty="0"/>
-          </a:p>
-        </p:txBody>
-      </p:sp>
-      <p:sp>
-        <p:nvSpPr>
-          <p:cNvPr id="13" name="Text 10"/>
-          <p:cNvSpPr/>
-          <p:nvPr/>
-        </p:nvSpPr>
-        <p:spPr>
-          <a:xfrm>
-            <a:off x="7699248" y="2990088"/>
-            <a:ext cx="1792224" cy="457200"/>
-          </a:xfrm>
-          <a:prstGeom prst="rect">
-            <a:avLst/>
-          </a:prstGeom>
-          <a:noFill/>
-          <a:ln/>
-        </p:spPr>
-        <p:txBody>
-          <a:bodyPr wrap="square" lIns="0" tIns="0" rIns="0" bIns="0" rtlCol="0" anchor="t"/>
-          <a:lstStyle/>
-          <a:p>
-            <a:pPr indent="0" marL="0">
-              <a:lnSpc>
-                <a:spcPct val="112000"/>
-              </a:lnSpc>
-              <a:buNone/>
-            </a:pPr>
-            <a:r>
-              <a:rPr lang="en-US" sz="1050" dirty="0">
-                <a:solidFill>
-                  <a:srgbClr val="0B0F19"/>
-                </a:solidFill>
-                <a:latin typeface="Inter" pitchFamily="34" charset="0"/>
-                <a:ea typeface="Inter" pitchFamily="34" charset="-122"/>
-                <a:cs typeface="Inter" pitchFamily="34" charset="-120"/>
-              </a:rPr>
-              <a:t>Réserve · Préparation</a:t>
-            </a:r>
-            <a:endParaRPr lang="en-US" sz="1050" dirty="0"/>
-          </a:p>
-          <a:p>
-            <a:pPr indent="0" marL="0">
-              <a:lnSpc>
-                <a:spcPct val="112000"/>
-              </a:lnSpc>
-              <a:buNone/>
-            </a:pPr>
-            <a:r>
-              <a:rPr lang="en-US" sz="1050" dirty="0">
-                <a:solidFill>
-                  <a:srgbClr val="0B0F19"/>
-                </a:solidFill>
-                <a:latin typeface="Inter" pitchFamily="34" charset="0"/>
-                <a:ea typeface="Inter" pitchFamily="34" charset="-122"/>
-                <a:cs typeface="Inter" pitchFamily="34" charset="-120"/>
-              </a:rPr>
-              <a:t>INV-20260828-C9B1</a:t>
-            </a:r>
-            <a:endParaRPr lang="en-US" sz="1050" dirty="0"/>
-          </a:p>
-        </p:txBody>
-      </p:sp>
-      <p:sp>
-        <p:nvSpPr>
-          <p:cNvPr id="14" name="Shape 11"/>
-          <p:cNvSpPr/>
-          <p:nvPr/>
-        </p:nvSpPr>
-        <p:spPr>
-          <a:xfrm>
-            <a:off x="7699248" y="3675888"/>
-            <a:ext cx="1792224" cy="402336"/>
-          </a:xfrm>
-          <a:prstGeom prst="roundRect">
-            <a:avLst>
-              <a:gd name="adj" fmla="val 22727"/>
-            </a:avLst>
-          </a:prstGeom>
-          <a:solidFill>
-            <a:srgbClr val="F4F5F9"/>
-          </a:solidFill>
-          <a:ln w="12700">
-            <a:solidFill>
-              <a:srgbClr val="F4F5F9"/>
-            </a:solidFill>
-            <a:prstDash val="solid"/>
-          </a:ln>
-        </p:spPr>
-      </p:sp>
-      <p:sp>
-        <p:nvSpPr>
-          <p:cNvPr id="15" name="Text 12"/>
-          <p:cNvSpPr/>
-          <p:nvPr/>
-        </p:nvSpPr>
-        <p:spPr>
-          <a:xfrm>
-            <a:off x="7699248" y="3675888"/>
-            <a:ext cx="1792224" cy="402336"/>
-          </a:xfrm>
-          <a:prstGeom prst="rect">
-            <a:avLst/>
-          </a:prstGeom>
-          <a:noFill/>
-          <a:ln/>
-        </p:spPr>
-        <p:txBody>
-          <a:bodyPr wrap="square" lIns="0" tIns="0" rIns="0" bIns="0" rtlCol="0" anchor="ctr"/>
-          <a:lstStyle/>
-          <a:p>
-            <a:pPr algn="ctr" indent="0" marL="0">
-              <a:buNone/>
-            </a:pPr>
-            <a:r>
-              <a:rPr lang="en-US" sz="1050" b="1" dirty="0">
-                <a:solidFill>
-                  <a:srgbClr val="0B0F19"/>
-                </a:solidFill>
-                <a:latin typeface="Inter" pitchFamily="34" charset="0"/>
-                <a:ea typeface="Inter" pitchFamily="34" charset="-122"/>
-                <a:cs typeface="Inter" pitchFamily="34" charset="-120"/>
-              </a:rPr>
-              <a:t>Rejoindre un autre inventaire</a:t>
-            </a:r>
-            <a:endParaRPr lang="en-US" sz="1050" dirty="0"/>
-          </a:p>
-        </p:txBody>
-      </p:sp>
-      <p:sp>
-        <p:nvSpPr>
-          <p:cNvPr id="16" name="Shape 13"/>
-          <p:cNvSpPr/>
-          <p:nvPr/>
-        </p:nvSpPr>
-        <p:spPr>
-          <a:xfrm>
-            <a:off x="7699248" y="4187952"/>
-            <a:ext cx="1792224" cy="365760"/>
-          </a:xfrm>
-          <a:prstGeom prst="roundRect">
-            <a:avLst>
-              <a:gd name="adj" fmla="val 20000"/>
-            </a:avLst>
-          </a:prstGeom>
-          <a:solidFill>
-            <a:srgbClr val="FFFFFF"/>
-          </a:solidFill>
-          <a:ln w="12700">
-            <a:solidFill>
-              <a:srgbClr val="E3E6EE"/>
-            </a:solidFill>
-            <a:prstDash val="solid"/>
-          </a:ln>
-        </p:spPr>
-      </p:sp>
-      <p:sp>
-        <p:nvSpPr>
-          <p:cNvPr id="17" name="Text 14"/>
-          <p:cNvSpPr/>
-          <p:nvPr/>
-        </p:nvSpPr>
-        <p:spPr>
-          <a:xfrm>
-            <a:off x="7808976" y="4187952"/>
-            <a:ext cx="1572768" cy="365760"/>
-          </a:xfrm>
-          <a:prstGeom prst="rect">
-            <a:avLst/>
-          </a:prstGeom>
-          <a:noFill/>
-          <a:ln/>
-        </p:spPr>
-        <p:txBody>
-          <a:bodyPr wrap="square" lIns="0" tIns="0" rIns="0" bIns="0" rtlCol="0" anchor="ctr"/>
-          <a:lstStyle/>
-          <a:p>
-            <a:pPr indent="0" marL="0">
-              <a:buNone/>
-            </a:pPr>
-            <a:r>
-              <a:rPr lang="en-US" sz="1000" dirty="0">
-                <a:solidFill>
-                  <a:srgbClr val="5B6475"/>
-                </a:solidFill>
-                <a:latin typeface="Inter" pitchFamily="34" charset="0"/>
-                <a:ea typeface="Inter" pitchFamily="34" charset="-122"/>
-                <a:cs typeface="Inter" pitchFamily="34" charset="-120"/>
-              </a:rPr>
-              <a:t>N° d'inventaire</a:t>
-            </a:r>
-            <a:endParaRPr lang="en-US" sz="1000" dirty="0"/>
-          </a:p>
-        </p:txBody>
-      </p:sp>
-      <p:sp>
-        <p:nvSpPr>
-          <p:cNvPr id="18" name="Shape 15"/>
-          <p:cNvSpPr/>
-          <p:nvPr/>
-        </p:nvSpPr>
-        <p:spPr>
-          <a:xfrm>
-            <a:off x="7699248" y="4645152"/>
-            <a:ext cx="1792224" cy="365760"/>
-          </a:xfrm>
-          <a:prstGeom prst="roundRect">
-            <a:avLst>
-              <a:gd name="adj" fmla="val 20000"/>
-            </a:avLst>
-          </a:prstGeom>
-          <a:solidFill>
-            <a:srgbClr val="FFFFFF"/>
-          </a:solidFill>
-          <a:ln w="12700">
-            <a:solidFill>
-              <a:srgbClr val="E3E6EE"/>
-            </a:solidFill>
-            <a:prstDash val="solid"/>
-          </a:ln>
-        </p:spPr>
-      </p:sp>
-      <p:sp>
-        <p:nvSpPr>
-          <p:cNvPr id="19" name="Text 16"/>
-          <p:cNvSpPr/>
-          <p:nvPr/>
-        </p:nvSpPr>
-        <p:spPr>
-          <a:xfrm>
-            <a:off x="7808976" y="4645152"/>
-            <a:ext cx="1572768" cy="365760"/>
-          </a:xfrm>
-          <a:prstGeom prst="rect">
-            <a:avLst/>
-          </a:prstGeom>
-          <a:noFill/>
-          <a:ln/>
-        </p:spPr>
-        <p:txBody>
-          <a:bodyPr wrap="square" lIns="0" tIns="0" rIns="0" bIns="0" rtlCol="0" anchor="ctr"/>
-          <a:lstStyle/>
-          <a:p>
-            <a:pPr indent="0" marL="0">
-              <a:buNone/>
-            </a:pPr>
-            <a:r>
-              <a:rPr lang="en-US" sz="1000" dirty="0">
-                <a:solidFill>
-                  <a:srgbClr val="5B6475"/>
-                </a:solidFill>
-                <a:latin typeface="Inter" pitchFamily="34" charset="0"/>
-                <a:ea typeface="Inter" pitchFamily="34" charset="-122"/>
-                <a:cs typeface="Inter" pitchFamily="34" charset="-120"/>
-              </a:rPr>
-              <a:t>Code inventaire</a:t>
-            </a:r>
-            <a:endParaRPr lang="en-US" sz="1000" dirty="0"/>
-          </a:p>
-        </p:txBody>
-      </p:sp>
-      <p:sp>
-        <p:nvSpPr>
-          <p:cNvPr id="20" name="Shape 17"/>
-          <p:cNvSpPr/>
-          <p:nvPr/>
-        </p:nvSpPr>
-        <p:spPr>
-          <a:xfrm>
-            <a:off x="7699248" y="5102352"/>
-            <a:ext cx="1792224" cy="402336"/>
-          </a:xfrm>
-          <a:prstGeom prst="roundRect">
-            <a:avLst>
-              <a:gd name="adj" fmla="val 22727"/>
-            </a:avLst>
-          </a:prstGeom>
-          <a:solidFill>
-            <a:srgbClr val="6366F1"/>
-          </a:solidFill>
-          <a:ln w="12700">
-            <a:solidFill>
-              <a:srgbClr val="6366F1"/>
-            </a:solidFill>
-            <a:prstDash val="solid"/>
-          </a:ln>
-        </p:spPr>
-      </p:sp>
-      <p:sp>
-        <p:nvSpPr>
-          <p:cNvPr id="21" name="Text 18"/>
-          <p:cNvSpPr/>
-          <p:nvPr/>
-        </p:nvSpPr>
-        <p:spPr>
-          <a:xfrm>
-            <a:off x="7699248" y="5102352"/>
-            <a:ext cx="1792224" cy="402336"/>
-          </a:xfrm>
-          <a:prstGeom prst="rect">
-            <a:avLst/>
-          </a:prstGeom>
-          <a:noFill/>
-          <a:ln/>
-        </p:spPr>
-        <p:txBody>
-          <a:bodyPr wrap="square" lIns="0" tIns="0" rIns="0" bIns="0" rtlCol="0" anchor="ctr"/>
-          <a:lstStyle/>
-          <a:p>
-            <a:pPr algn="ctr" indent="0" marL="0">
-              <a:buNone/>
-            </a:pPr>
-            <a:r>
-              <a:rPr lang="en-US" sz="1050" b="1" dirty="0">
-                <a:solidFill>
-                  <a:srgbClr val="FFFFFF"/>
-                </a:solidFill>
-                <a:latin typeface="Inter" pitchFamily="34" charset="0"/>
-                <a:ea typeface="Inter" pitchFamily="34" charset="-122"/>
-                <a:cs typeface="Inter" pitchFamily="34" charset="-120"/>
-              </a:rPr>
-              <a:t>Rejoindre</a:t>
-            </a:r>
-            <a:endParaRPr lang="en-US" sz="1050" dirty="0"/>
-          </a:p>
-        </p:txBody>
-      </p:sp>
-      <p:sp>
-        <p:nvSpPr>
-          <p:cNvPr id="22" name="Text 19"/>
-          <p:cNvSpPr/>
-          <p:nvPr/>
-        </p:nvSpPr>
-        <p:spPr>
-          <a:xfrm>
-            <a:off x="7040880" y="5916168"/>
-            <a:ext cx="3108960" cy="365760"/>
-          </a:xfrm>
-          <a:prstGeom prst="rect">
-            <a:avLst/>
-          </a:prstGeom>
-          <a:noFill/>
-          <a:ln/>
-        </p:spPr>
-        <p:txBody>
-          <a:bodyPr wrap="square" lIns="0" tIns="0" rIns="0" bIns="0" rtlCol="0" anchor="t"/>
-          <a:lstStyle/>
-          <a:p>
-            <a:pPr indent="0" marL="0">
-              <a:buNone/>
-            </a:pPr>
-            <a:r>
-              <a:rPr lang="en-US" sz="1000" i="1" dirty="0">
-                <a:solidFill>
-                  <a:srgbClr val="5B6475"/>
-                </a:solidFill>
-                <a:latin typeface="Inter" pitchFamily="34" charset="0"/>
-                <a:ea typeface="Inter" pitchFamily="34" charset="-122"/>
-                <a:cs typeface="Inter" pitchFamily="34" charset="-120"/>
-              </a:rPr>
-              <a:t>Schéma de l'écran d'accueil du compteur.</a:t>
-            </a:r>
-            <a:endParaRPr lang="en-US" sz="1000" dirty="0"/>
-          </a:p>
-        </p:txBody>
-      </p:sp>
-      <p:sp>
-        <p:nvSpPr>
-          <p:cNvPr id="23" name="Text 20"/>
+              <a:t>La partie du compteur. Cinq pages, à imprimer seules si on veut : rejoindre, les trois gestes, l'audit, et quoi faire quand quelque chose ne se passe pas comme prévu.</a:t>
+            </a:r>
+            <a:endParaRPr lang="en-US" sz="1400" dirty="0"/>
+          </a:p>
+        </p:txBody>
+      </p:sp>
+      <p:sp>
+        <p:nvSpPr>
+          <p:cNvPr id="9" name="Text 6"/>
           <p:cNvSpPr/>
           <p:nvPr/>
         </p:nvSpPr>
@@ -4246,7 +4066,7 @@
       </p:sp>
       <p:sp>
         <p:nvSpPr>
-          <p:cNvPr id="24" name="Text 21"/>
+          <p:cNvPr id="10" name="Text 7"/>
           <p:cNvSpPr/>
           <p:nvPr/>
         </p:nvSpPr>
@@ -4450,8 +4270,8 @@
         </p:nvSpPr>
         <p:spPr>
           <a:xfrm>
-            <a:off x="731520" y="1280160"/>
-            <a:ext cx="10725912" cy="822960"/>
+            <a:off x="731520" y="1325880"/>
+            <a:ext cx="4206240" cy="2011680"/>
           </a:xfrm>
           <a:prstGeom prst="rect">
             <a:avLst/>
@@ -4478,7 +4298,7 @@
                 <a:ea typeface="Sora" pitchFamily="34" charset="-122"/>
                 <a:cs typeface="Sora" pitchFamily="34" charset="-120"/>
               </a:rPr>
-              <a:t>Compter, en trois gestes. Puis la balise suivante.</a:t>
+              <a:t>Rejoindre un inventaire. La première façon suffit presque toujours.</a:t>
             </a:r>
             <a:endParaRPr lang="en-US" sz="2600" dirty="0"/>
           </a:p>
@@ -4492,79 +4312,188 @@
         </p:nvSpPr>
         <p:spPr>
           <a:xfrm>
-            <a:off x="731520" y="2377440"/>
-            <a:ext cx="457200" cy="457200"/>
-          </a:xfrm>
-          <a:prstGeom prst="ellipse">
-            <a:avLst/>
-          </a:prstGeom>
-          <a:solidFill>
-            <a:srgbClr val="4636B0"/>
-          </a:solidFill>
-          <a:ln>
-            <a:solidFill>
-              <a:srgbClr val="4636B0"/>
-            </a:solidFill>
-          </a:ln>
-        </p:spPr>
-        <p:txBody>
-          <a:bodyPr wrap="square" lIns="0" tIns="0" rIns="0" bIns="0" rtlCol="0" anchor="ctr"/>
-          <a:lstStyle/>
-          <a:p>
-            <a:pPr algn="ctr" indent="0" marL="0">
+            <a:off x="731520" y="2697480"/>
+            <a:ext cx="7223760" cy="2926080"/>
+          </a:xfrm>
+          <a:prstGeom prst="rect">
+            <a:avLst/>
+          </a:prstGeom>
+          <a:noFill/>
+          <a:ln/>
+        </p:spPr>
+        <p:txBody>
+          <a:bodyPr wrap="square" lIns="0" tIns="0" rIns="0" bIns="0" rtlCol="0" anchor="t"/>
+          <a:lstStyle/>
+          <a:p>
+            <a:pPr indent="0" marL="0">
+              <a:lnSpc>
+                <a:spcPct val="118000"/>
+              </a:lnSpc>
+              <a:spcAft>
+                <a:spcPts val="1100"/>
+              </a:spcAft>
               <a:buNone/>
             </a:pPr>
             <a:r>
               <a:rPr lang="en-US" sz="1200" b="1" dirty="0">
                 <a:solidFill>
-                  <a:srgbClr val="FFFFFF"/>
+                  <a:srgbClr val="0B0F19"/>
+                </a:solidFill>
+                <a:latin typeface="Inter" pitchFamily="34" charset="0"/>
+                <a:ea typeface="Inter" pitchFamily="34" charset="-122"/>
+                <a:cs typeface="Inter" pitchFamily="34" charset="-120"/>
+              </a:rPr>
+              <a:t>On vous a ajouté. </a:t>
+            </a:r>
+            <a:pPr indent="0" marL="0">
+              <a:lnSpc>
+                <a:spcPct val="118000"/>
+              </a:lnSpc>
+              <a:spcAft>
+                <a:spcPts val="1100"/>
+              </a:spcAft>
+              <a:buNone/>
+            </a:pPr>
+            <a:r>
+              <a:rPr lang="en-US" sz="1200" dirty="0">
+                <a:solidFill>
+                  <a:srgbClr val="3D4556"/>
+                </a:solidFill>
+                <a:latin typeface="Inter" pitchFamily="34" charset="0"/>
+                <a:ea typeface="Inter" pitchFamily="34" charset="-122"/>
+                <a:cs typeface="Inter" pitchFamily="34" charset="-120"/>
+              </a:rPr>
+              <a:t>L'inventaire est dans « Mes inventaires » dès l'ouverture de l'application, et vous avez reçu une notification. Touchez-le.</a:t>
+            </a:r>
+            <a:endParaRPr lang="en-US" sz="1200" dirty="0"/>
+          </a:p>
+          <a:p>
+            <a:pPr indent="0" marL="0">
+              <a:lnSpc>
+                <a:spcPct val="118000"/>
+              </a:lnSpc>
+              <a:spcAft>
+                <a:spcPts val="1100"/>
+              </a:spcAft>
+              <a:buNone/>
+            </a:pPr>
+            <a:r>
+              <a:rPr lang="en-US" sz="1200" b="1" dirty="0">
+                <a:solidFill>
+                  <a:srgbClr val="0B0F19"/>
+                </a:solidFill>
+                <a:latin typeface="Inter" pitchFamily="34" charset="0"/>
+                <a:ea typeface="Inter" pitchFamily="34" charset="-122"/>
+                <a:cs typeface="Inter" pitchFamily="34" charset="-120"/>
+              </a:rPr>
+              <a:t>On vous a donné un numéro et un code. </a:t>
+            </a:r>
+            <a:pPr indent="0" marL="0">
+              <a:lnSpc>
+                <a:spcPct val="118000"/>
+              </a:lnSpc>
+              <a:spcAft>
+                <a:spcPts val="1100"/>
+              </a:spcAft>
+              <a:buNone/>
+            </a:pPr>
+            <a:r>
+              <a:rPr lang="en-US" sz="1200" dirty="0">
+                <a:solidFill>
+                  <a:srgbClr val="3D4556"/>
+                </a:solidFill>
+                <a:latin typeface="Inter" pitchFamily="34" charset="0"/>
+                <a:ea typeface="Inter" pitchFamily="34" charset="-122"/>
+                <a:cs typeface="Inter" pitchFamily="34" charset="-120"/>
+              </a:rPr>
+              <a:t>Le formulaire du bas : le numéro (INV-…), le code. C'est le cas d'un renfort de dernière minute.</a:t>
+            </a:r>
+            <a:endParaRPr lang="en-US" sz="1200" dirty="0"/>
+          </a:p>
+          <a:p>
+            <a:pPr indent="0" marL="0">
+              <a:lnSpc>
+                <a:spcPct val="118000"/>
+              </a:lnSpc>
+              <a:spcAft>
+                <a:spcPts val="1100"/>
+              </a:spcAft>
+              <a:buNone/>
+            </a:pPr>
+            <a:r>
+              <a:rPr lang="en-US" sz="1200" b="1" dirty="0">
+                <a:solidFill>
+                  <a:srgbClr val="0B0F19"/>
+                </a:solidFill>
+                <a:latin typeface="Inter" pitchFamily="34" charset="0"/>
+                <a:ea typeface="Inter" pitchFamily="34" charset="-122"/>
+                <a:cs typeface="Inter" pitchFamily="34" charset="-120"/>
+              </a:rPr>
+              <a:t>Ensuite. </a:t>
+            </a:r>
+            <a:pPr indent="0" marL="0">
+              <a:lnSpc>
+                <a:spcPct val="118000"/>
+              </a:lnSpc>
+              <a:spcAft>
+                <a:spcPts val="1100"/>
+              </a:spcAft>
+              <a:buNone/>
+            </a:pPr>
+            <a:r>
+              <a:rPr lang="en-US" sz="1200" dirty="0">
+                <a:solidFill>
+                  <a:srgbClr val="3D4556"/>
+                </a:solidFill>
+                <a:latin typeface="Inter" pitchFamily="34" charset="0"/>
+                <a:ea typeface="Inter" pitchFamily="34" charset="-122"/>
+                <a:cs typeface="Inter" pitchFamily="34" charset="-120"/>
+              </a:rPr>
+              <a:t>L'écran de l'inventaire propose « Compter des articles », « Auditer des articles », et « Quitter l'inventaire ». Quitter ne supprime rien de ce que vous avez compté.</a:t>
+            </a:r>
+            <a:endParaRPr lang="en-US" sz="1200" dirty="0"/>
+          </a:p>
+        </p:txBody>
+      </p:sp>
+      <p:sp>
+        <p:nvSpPr>
+          <p:cNvPr id="8" name="Text 5"/>
+          <p:cNvSpPr/>
+          <p:nvPr/>
+        </p:nvSpPr>
+        <p:spPr>
+          <a:xfrm>
+            <a:off x="8257032" y="1371600"/>
+            <a:ext cx="3200400" cy="365760"/>
+          </a:xfrm>
+          <a:prstGeom prst="rect">
+            <a:avLst/>
+          </a:prstGeom>
+          <a:noFill/>
+          <a:ln/>
+        </p:spPr>
+        <p:txBody>
+          <a:bodyPr wrap="square" lIns="0" tIns="0" rIns="0" bIns="0" rtlCol="0" anchor="t"/>
+          <a:lstStyle/>
+          <a:p>
+            <a:pPr indent="0" marL="0">
+              <a:lnSpc>
+                <a:spcPct val="100000"/>
+              </a:lnSpc>
+              <a:buNone/>
+            </a:pPr>
+            <a:r>
+              <a:rPr lang="en-US" sz="1350" b="1" dirty="0">
+                <a:solidFill>
+                  <a:srgbClr val="4636B0"/>
                 </a:solidFill>
                 <a:latin typeface="Sora" pitchFamily="34" charset="0"/>
                 <a:ea typeface="Sora" pitchFamily="34" charset="-122"/>
                 <a:cs typeface="Sora" pitchFamily="34" charset="-120"/>
               </a:rPr>
-              <a:t>1</a:t>
-            </a:r>
-            <a:endParaRPr lang="en-US" sz="1200" dirty="0"/>
-          </a:p>
-        </p:txBody>
-      </p:sp>
-      <p:sp>
-        <p:nvSpPr>
-          <p:cNvPr id="8" name="Text 5"/>
-          <p:cNvSpPr/>
-          <p:nvPr/>
-        </p:nvSpPr>
-        <p:spPr>
-          <a:xfrm>
-            <a:off x="731520" y="2971800"/>
-            <a:ext cx="3270504" cy="411480"/>
-          </a:xfrm>
-          <a:prstGeom prst="rect">
-            <a:avLst/>
-          </a:prstGeom>
-          <a:noFill/>
-          <a:ln/>
-        </p:spPr>
-        <p:txBody>
-          <a:bodyPr wrap="square" lIns="0" tIns="0" rIns="0" bIns="0" rtlCol="0" anchor="t"/>
-          <a:lstStyle/>
-          <a:p>
-            <a:pPr indent="0" marL="0">
-              <a:buNone/>
-            </a:pPr>
-            <a:r>
-              <a:rPr lang="en-US" sz="1600" b="1" dirty="0">
-                <a:solidFill>
-                  <a:srgbClr val="4636B0"/>
-                </a:solidFill>
-                <a:latin typeface="Sora" pitchFamily="34" charset="0"/>
-                <a:ea typeface="Sora" pitchFamily="34" charset="-122"/>
-                <a:cs typeface="Sora" pitchFamily="34" charset="-120"/>
-              </a:rPr>
-              <a:t>Scannez la balise du rayon</a:t>
-            </a:r>
-            <a:endParaRPr lang="en-US" sz="1600" dirty="0"/>
+              <a:t>Votre accueil</a:t>
+            </a:r>
+            <a:endParaRPr lang="en-US" sz="1350" dirty="0"/>
           </a:p>
         </p:txBody>
       </p:sp>
@@ -4576,8 +4505,8 @@
         </p:nvSpPr>
         <p:spPr>
           <a:xfrm>
-            <a:off x="731520" y="3429000"/>
-            <a:ext cx="3270504" cy="1737360"/>
+            <a:off x="8257032" y="1755648"/>
+            <a:ext cx="3200400" cy="585216"/>
           </a:xfrm>
           <a:prstGeom prst="rect">
             <a:avLst/>
@@ -4591,12 +4520,12 @@
           <a:p>
             <a:pPr indent="0" marL="0">
               <a:lnSpc>
-                <a:spcPct val="118000"/>
+                <a:spcPct val="115000"/>
               </a:lnSpc>
               <a:buNone/>
             </a:pPr>
             <a:r>
-              <a:rPr lang="en-US" sz="1200" dirty="0">
+              <a:rPr lang="en-US" sz="1100" dirty="0">
                 <a:solidFill>
                   <a:srgbClr val="3D4556"/>
                 </a:solidFill>
@@ -4604,278 +4533,26 @@
                 <a:ea typeface="Inter" pitchFamily="34" charset="-122"/>
                 <a:cs typeface="Inter" pitchFamily="34" charset="-120"/>
               </a:rPr>
-              <a:t>Elle ouvre la zone. Tant qu'elle est ouverte, tout ce que vous scannez compte ici. L'application vous le rappelle si vous essayez de scanner un article sans balise.</a:t>
-            </a:r>
-            <a:endParaRPr lang="en-US" sz="1200" dirty="0"/>
-          </a:p>
-        </p:txBody>
-      </p:sp>
-      <p:sp>
-        <p:nvSpPr>
-          <p:cNvPr id="10" name="Text 7"/>
-          <p:cNvSpPr/>
-          <p:nvPr/>
-        </p:nvSpPr>
-        <p:spPr>
-          <a:xfrm>
-            <a:off x="4459224" y="2377440"/>
-            <a:ext cx="457200" cy="457200"/>
-          </a:xfrm>
-          <a:prstGeom prst="ellipse">
-            <a:avLst/>
-          </a:prstGeom>
-          <a:solidFill>
-            <a:srgbClr val="4636B0"/>
-          </a:solidFill>
-          <a:ln>
-            <a:solidFill>
-              <a:srgbClr val="4636B0"/>
-            </a:solidFill>
-          </a:ln>
-        </p:spPr>
-        <p:txBody>
-          <a:bodyPr wrap="square" lIns="0" tIns="0" rIns="0" bIns="0" rtlCol="0" anchor="ctr"/>
-          <a:lstStyle/>
-          <a:p>
-            <a:pPr algn="ctr" indent="0" marL="0">
-              <a:buNone/>
-            </a:pPr>
-            <a:r>
-              <a:rPr lang="en-US" sz="1200" b="1" dirty="0">
-                <a:solidFill>
-                  <a:srgbClr val="FFFFFF"/>
-                </a:solidFill>
-                <a:latin typeface="Sora" pitchFamily="34" charset="0"/>
-                <a:ea typeface="Sora" pitchFamily="34" charset="-122"/>
-                <a:cs typeface="Sora" pitchFamily="34" charset="-120"/>
-              </a:rPr>
-              <a:t>2</a:t>
-            </a:r>
-            <a:endParaRPr lang="en-US" sz="1200" dirty="0"/>
-          </a:p>
-        </p:txBody>
-      </p:sp>
-      <p:sp>
-        <p:nvSpPr>
-          <p:cNvPr id="11" name="Text 8"/>
-          <p:cNvSpPr/>
-          <p:nvPr/>
-        </p:nvSpPr>
-        <p:spPr>
-          <a:xfrm>
-            <a:off x="4459224" y="2971800"/>
-            <a:ext cx="3270504" cy="411480"/>
-          </a:xfrm>
-          <a:prstGeom prst="rect">
-            <a:avLst/>
-          </a:prstGeom>
-          <a:noFill/>
-          <a:ln/>
-        </p:spPr>
-        <p:txBody>
-          <a:bodyPr wrap="square" lIns="0" tIns="0" rIns="0" bIns="0" rtlCol="0" anchor="t"/>
-          <a:lstStyle/>
-          <a:p>
-            <a:pPr indent="0" marL="0">
-              <a:buNone/>
-            </a:pPr>
-            <a:r>
-              <a:rPr lang="en-US" sz="1600" b="1" dirty="0">
-                <a:solidFill>
-                  <a:srgbClr val="4636B0"/>
-                </a:solidFill>
-                <a:latin typeface="Sora" pitchFamily="34" charset="0"/>
-                <a:ea typeface="Sora" pitchFamily="34" charset="-122"/>
-                <a:cs typeface="Sora" pitchFamily="34" charset="-120"/>
-              </a:rPr>
-              <a:t>Scannez les articles</a:t>
-            </a:r>
-            <a:endParaRPr lang="en-US" sz="1600" dirty="0"/>
-          </a:p>
-        </p:txBody>
-      </p:sp>
-      <p:sp>
-        <p:nvSpPr>
-          <p:cNvPr id="12" name="Text 9"/>
-          <p:cNvSpPr/>
-          <p:nvPr/>
-        </p:nvSpPr>
-        <p:spPr>
-          <a:xfrm>
-            <a:off x="4459224" y="3429000"/>
-            <a:ext cx="3270504" cy="1737360"/>
-          </a:xfrm>
-          <a:prstGeom prst="rect">
-            <a:avLst/>
-          </a:prstGeom>
-          <a:noFill/>
-          <a:ln/>
-        </p:spPr>
-        <p:txBody>
-          <a:bodyPr wrap="square" lIns="0" tIns="0" rIns="0" bIns="0" rtlCol="0" anchor="t"/>
-          <a:lstStyle/>
-          <a:p>
-            <a:pPr indent="0" marL="0">
-              <a:lnSpc>
-                <a:spcPct val="118000"/>
-              </a:lnSpc>
-              <a:buNone/>
-            </a:pPr>
-            <a:r>
-              <a:rPr lang="en-US" sz="1200" dirty="0">
-                <a:solidFill>
-                  <a:srgbClr val="3D4556"/>
-                </a:solidFill>
-                <a:latin typeface="Inter" pitchFamily="34" charset="0"/>
-                <a:ea typeface="Inter" pitchFamily="34" charset="-122"/>
-                <a:cs typeface="Inter" pitchFamily="34" charset="-120"/>
-              </a:rPr>
-              <a:t>Pointez la caméra vers le code-barres : le scan est automatique. Un article scanné trois fois compte trois. Pour une pile, scannez une fois puis ajustez la quantité avec + et − dans la liste. Pas de code-barres lisible ? Tapez le code (EAN ou SKU) dans le champ.</a:t>
-            </a:r>
-            <a:endParaRPr lang="en-US" sz="1200" dirty="0"/>
-          </a:p>
-        </p:txBody>
-      </p:sp>
-      <p:sp>
-        <p:nvSpPr>
-          <p:cNvPr id="13" name="Text 10"/>
-          <p:cNvSpPr/>
-          <p:nvPr/>
-        </p:nvSpPr>
-        <p:spPr>
-          <a:xfrm>
-            <a:off x="8186928" y="2377440"/>
-            <a:ext cx="457200" cy="457200"/>
-          </a:xfrm>
-          <a:prstGeom prst="ellipse">
-            <a:avLst/>
-          </a:prstGeom>
-          <a:solidFill>
-            <a:srgbClr val="4636B0"/>
-          </a:solidFill>
-          <a:ln>
-            <a:solidFill>
-              <a:srgbClr val="4636B0"/>
-            </a:solidFill>
-          </a:ln>
-        </p:spPr>
-        <p:txBody>
-          <a:bodyPr wrap="square" lIns="0" tIns="0" rIns="0" bIns="0" rtlCol="0" anchor="ctr"/>
-          <a:lstStyle/>
-          <a:p>
-            <a:pPr algn="ctr" indent="0" marL="0">
-              <a:buNone/>
-            </a:pPr>
-            <a:r>
-              <a:rPr lang="en-US" sz="1200" b="1" dirty="0">
-                <a:solidFill>
-                  <a:srgbClr val="FFFFFF"/>
-                </a:solidFill>
-                <a:latin typeface="Sora" pitchFamily="34" charset="0"/>
-                <a:ea typeface="Sora" pitchFamily="34" charset="-122"/>
-                <a:cs typeface="Sora" pitchFamily="34" charset="-120"/>
-              </a:rPr>
-              <a:t>3</a:t>
-            </a:r>
-            <a:endParaRPr lang="en-US" sz="1200" dirty="0"/>
-          </a:p>
-        </p:txBody>
-      </p:sp>
-      <p:sp>
-        <p:nvSpPr>
-          <p:cNvPr id="14" name="Text 11"/>
-          <p:cNvSpPr/>
-          <p:nvPr/>
-        </p:nvSpPr>
-        <p:spPr>
-          <a:xfrm>
-            <a:off x="8186928" y="2971800"/>
-            <a:ext cx="3270504" cy="411480"/>
-          </a:xfrm>
-          <a:prstGeom prst="rect">
-            <a:avLst/>
-          </a:prstGeom>
-          <a:noFill/>
-          <a:ln/>
-        </p:spPr>
-        <p:txBody>
-          <a:bodyPr wrap="square" lIns="0" tIns="0" rIns="0" bIns="0" rtlCol="0" anchor="t"/>
-          <a:lstStyle/>
-          <a:p>
-            <a:pPr indent="0" marL="0">
-              <a:buNone/>
-            </a:pPr>
-            <a:r>
-              <a:rPr lang="en-US" sz="1600" b="1" dirty="0">
-                <a:solidFill>
-                  <a:srgbClr val="4636B0"/>
-                </a:solidFill>
-                <a:latin typeface="Sora" pitchFamily="34" charset="0"/>
-                <a:ea typeface="Sora" pitchFamily="34" charset="-122"/>
-                <a:cs typeface="Sora" pitchFamily="34" charset="-120"/>
-              </a:rPr>
-              <a:t>Clôturez la balise</a:t>
-            </a:r>
-            <a:endParaRPr lang="en-US" sz="1600" dirty="0"/>
-          </a:p>
-        </p:txBody>
-      </p:sp>
-      <p:sp>
-        <p:nvSpPr>
-          <p:cNvPr id="15" name="Text 12"/>
-          <p:cNvSpPr/>
-          <p:nvPr/>
-        </p:nvSpPr>
-        <p:spPr>
-          <a:xfrm>
-            <a:off x="8186928" y="3429000"/>
-            <a:ext cx="3270504" cy="1737360"/>
-          </a:xfrm>
-          <a:prstGeom prst="rect">
-            <a:avLst/>
-          </a:prstGeom>
-          <a:noFill/>
-          <a:ln/>
-        </p:spPr>
-        <p:txBody>
-          <a:bodyPr wrap="square" lIns="0" tIns="0" rIns="0" bIns="0" rtlCol="0" anchor="t"/>
-          <a:lstStyle/>
-          <a:p>
-            <a:pPr indent="0" marL="0">
-              <a:lnSpc>
-                <a:spcPct val="118000"/>
-              </a:lnSpc>
-              <a:buNone/>
-            </a:pPr>
-            <a:r>
-              <a:rPr lang="en-US" sz="1200" dirty="0">
-                <a:solidFill>
-                  <a:srgbClr val="3D4556"/>
-                </a:solidFill>
-                <a:latin typeface="Inter" pitchFamily="34" charset="0"/>
-                <a:ea typeface="Inter" pitchFamily="34" charset="-122"/>
-                <a:cs typeface="Inter" pitchFamily="34" charset="-120"/>
-              </a:rPr>
-              <a:t>« Clôturer la balise » dit « j'ai fini ici ». Le superviseur voit la zone passer en comptée. Passez à la balise suivante. « Revenir sur une balise » la rouvre si vous avez oublié un rayonnage.</a:t>
-            </a:r>
-            <a:endParaRPr lang="en-US" sz="1200" dirty="0"/>
-          </a:p>
-        </p:txBody>
-      </p:sp>
-      <p:sp>
-        <p:nvSpPr>
-          <p:cNvPr id="16" name="Shape 13"/>
-          <p:cNvSpPr/>
-          <p:nvPr/>
-        </p:nvSpPr>
-        <p:spPr>
-          <a:xfrm>
-            <a:off x="731520" y="5303520"/>
-            <a:ext cx="10725912" cy="914400"/>
+              <a:t>Les inventaires où vous êtes attendu, et la porte d'entrée pour les autres.</a:t>
+            </a:r>
+            <a:endParaRPr lang="en-US" sz="1100" dirty="0"/>
+          </a:p>
+        </p:txBody>
+      </p:sp>
+      <p:sp>
+        <p:nvSpPr>
+          <p:cNvPr id="10" name="Shape 7"/>
+          <p:cNvSpPr/>
+          <p:nvPr/>
+        </p:nvSpPr>
+        <p:spPr>
+          <a:xfrm>
+            <a:off x="8257032" y="2377440"/>
+            <a:ext cx="3200400" cy="3822192"/>
           </a:xfrm>
           <a:prstGeom prst="roundRect">
             <a:avLst>
-              <a:gd name="adj" fmla="val 8000"/>
+              <a:gd name="adj" fmla="val 4000"/>
             </a:avLst>
           </a:prstGeom>
           <a:solidFill>
@@ -4889,90 +4566,33 @@
           </a:ln>
         </p:spPr>
       </p:sp>
-      <p:sp>
-        <p:nvSpPr>
-          <p:cNvPr id="17" name="Text 14"/>
-          <p:cNvSpPr/>
-          <p:nvPr/>
-        </p:nvSpPr>
-        <p:spPr>
-          <a:xfrm>
-            <a:off x="1005840" y="5468112"/>
-            <a:ext cx="10177272" cy="228600"/>
-          </a:xfrm>
-          <a:prstGeom prst="rect">
-            <a:avLst/>
-          </a:prstGeom>
-          <a:noFill/>
-          <a:ln/>
-        </p:spPr>
-        <p:txBody>
-          <a:bodyPr wrap="square" lIns="0" tIns="0" rIns="0" bIns="0" rtlCol="0" anchor="t"/>
-          <a:lstStyle/>
-          <a:p>
-            <a:pPr indent="0" marL="0">
-              <a:buNone/>
-            </a:pPr>
-            <a:r>
-              <a:rPr lang="en-US" sz="950" b="1" dirty="0">
-                <a:solidFill>
-                  <a:srgbClr val="5B6475"/>
-                </a:solidFill>
-                <a:latin typeface="Inter" pitchFamily="34" charset="0"/>
-                <a:ea typeface="Inter" pitchFamily="34" charset="-122"/>
-                <a:cs typeface="Inter" pitchFamily="34" charset="-120"/>
-              </a:rPr>
-              <a:t>Se corriger</a:t>
-            </a:r>
-            <a:endParaRPr lang="en-US" sz="950" dirty="0"/>
-          </a:p>
-        </p:txBody>
-      </p:sp>
-      <p:sp>
-        <p:nvSpPr>
-          <p:cNvPr id="18" name="Text 15"/>
-          <p:cNvSpPr/>
-          <p:nvPr/>
-        </p:nvSpPr>
-        <p:spPr>
-          <a:xfrm>
-            <a:off x="1005840" y="5724144"/>
-            <a:ext cx="10177272" cy="365760"/>
-          </a:xfrm>
-          <a:prstGeom prst="rect">
-            <a:avLst/>
-          </a:prstGeom>
-          <a:noFill/>
-          <a:ln/>
-        </p:spPr>
-        <p:txBody>
-          <a:bodyPr wrap="square" lIns="0" tIns="0" rIns="0" bIns="0" rtlCol="0" anchor="t"/>
-          <a:lstStyle/>
-          <a:p>
-            <a:pPr indent="0" marL="0">
-              <a:lnSpc>
-                <a:spcPct val="115000"/>
-              </a:lnSpc>
-              <a:buNone/>
-            </a:pPr>
-            <a:r>
-              <a:rPr lang="en-US" sz="1150" i="1" dirty="0">
-                <a:solidFill>
-                  <a:srgbClr val="3D4556"/>
-                </a:solidFill>
-                <a:latin typeface="Inter" pitchFamily="34" charset="0"/>
-                <a:ea typeface="Inter" pitchFamily="34" charset="-122"/>
-                <a:cs typeface="Inter" pitchFamily="34" charset="-120"/>
-              </a:rPr>
-              <a:t>Une ligne de trop se supprime, une quantité se modifie, depuis la liste sous le scanner. Rien n'est définitif avant la clôture par le superviseur. Et si vous quittez l'application, vos comptages restent.</a:t>
-            </a:r>
-            <a:endParaRPr lang="en-US" sz="1150" dirty="0"/>
-          </a:p>
-        </p:txBody>
-      </p:sp>
-      <p:sp>
-        <p:nvSpPr>
-          <p:cNvPr id="19" name="Text 16"/>
+      <p:pic>
+        <p:nvPicPr>
+          <p:cNvPr id="11" name="Image 1" descr="preencoded.png">    </p:cNvPr>
+          <p:cNvPicPr>
+            <a:picLocks noChangeAspect="1"/>
+          </p:cNvPicPr>
+          <p:nvPr/>
+        </p:nvPicPr>
+        <p:blipFill>
+          <a:blip r:embed="rId2"/>
+          <a:stretch>
+            <a:fillRect/>
+          </a:stretch>
+        </p:blipFill>
+        <p:spPr>
+          <a:xfrm>
+            <a:off x="8567928" y="2378273"/>
+            <a:ext cx="2578608" cy="3821359"/>
+          </a:xfrm>
+          <a:prstGeom prst="rect">
+            <a:avLst/>
+          </a:prstGeom>
+        </p:spPr>
+      </p:pic>
+      <p:sp>
+        <p:nvSpPr>
+          <p:cNvPr id="12" name="Text 8"/>
           <p:cNvSpPr/>
           <p:nvPr/>
         </p:nvSpPr>
@@ -5011,7 +4631,7 @@
       </p:sp>
       <p:sp>
         <p:nvSpPr>
-          <p:cNvPr id="20" name="Text 17"/>
+          <p:cNvPr id="13" name="Text 9"/>
           <p:cNvSpPr/>
           <p:nvPr/>
         </p:nvSpPr>
@@ -5243,7 +4863,7 @@
                 <a:ea typeface="Sora" pitchFamily="34" charset="-122"/>
                 <a:cs typeface="Sora" pitchFamily="34" charset="-120"/>
               </a:rPr>
-              <a:t>Quand ça ne se passe pas comme prévu</a:t>
+              <a:t>Compter, en trois gestes. Puis la balise suivante.</a:t>
             </a:r>
             <a:endParaRPr lang="en-US" sz="2600" dirty="0"/>
           </a:p>
@@ -5257,34 +4877,40 @@
         </p:nvSpPr>
         <p:spPr>
           <a:xfrm>
-            <a:off x="731520" y="2103120"/>
-            <a:ext cx="3657600" cy="274320"/>
-          </a:xfrm>
-          <a:prstGeom prst="rect">
-            <a:avLst/>
-          </a:prstGeom>
-          <a:noFill/>
-          <a:ln/>
-        </p:spPr>
-        <p:txBody>
-          <a:bodyPr wrap="square" lIns="0" tIns="0" rIns="0" bIns="0" rtlCol="0" anchor="t"/>
-          <a:lstStyle/>
-          <a:p>
-            <a:pPr indent="0" marL="0">
-              <a:buNone/>
-            </a:pPr>
-            <a:r>
-              <a:rPr lang="en-US" sz="1050" b="1" dirty="0">
-                <a:solidFill>
-                  <a:srgbClr val="5B6475"/>
-                </a:solidFill>
-                <a:latin typeface="Inter" pitchFamily="34" charset="0"/>
-                <a:ea typeface="Inter" pitchFamily="34" charset="-122"/>
-                <a:cs typeface="Inter" pitchFamily="34" charset="-120"/>
-              </a:rPr>
-              <a:t>Ce qui arrive</a:t>
-            </a:r>
-            <a:endParaRPr lang="en-US" sz="1050" dirty="0"/>
+            <a:off x="731520" y="2167128"/>
+            <a:ext cx="365760" cy="365760"/>
+          </a:xfrm>
+          <a:prstGeom prst="ellipse">
+            <a:avLst/>
+          </a:prstGeom>
+          <a:solidFill>
+            <a:srgbClr val="4636B0"/>
+          </a:solidFill>
+          <a:ln>
+            <a:solidFill>
+              <a:srgbClr val="4636B0"/>
+            </a:solidFill>
+          </a:ln>
+        </p:spPr>
+        <p:txBody>
+          <a:bodyPr wrap="square" lIns="0" tIns="0" rIns="0" bIns="0" rtlCol="0" anchor="ctr"/>
+          <a:lstStyle/>
+          <a:p>
+            <a:pPr algn="ctr" indent="0" marL="0">
+              <a:buNone/>
+            </a:pPr>
+            <a:r>
+              <a:rPr lang="en-US" sz="1200" b="1" dirty="0">
+                <a:solidFill>
+                  <a:srgbClr val="FFFFFF"/>
+                </a:solidFill>
+                <a:latin typeface="Sora" pitchFamily="34" charset="0"/>
+                <a:ea typeface="Sora" pitchFamily="34" charset="-122"/>
+                <a:cs typeface="Sora" pitchFamily="34" charset="-120"/>
+              </a:rPr>
+              <a:t>1</a:t>
+            </a:r>
+            <a:endParaRPr lang="en-US" sz="1200" dirty="0"/>
           </a:p>
         </p:txBody>
       </p:sp>
@@ -5296,583 +4922,431 @@
         </p:nvSpPr>
         <p:spPr>
           <a:xfrm>
-            <a:off x="4663440" y="2103120"/>
-            <a:ext cx="6793992" cy="274320"/>
-          </a:xfrm>
-          <a:prstGeom prst="rect">
-            <a:avLst/>
-          </a:prstGeom>
-          <a:noFill/>
-          <a:ln/>
-        </p:spPr>
-        <p:txBody>
-          <a:bodyPr wrap="square" lIns="0" tIns="0" rIns="0" bIns="0" rtlCol="0" anchor="t"/>
-          <a:lstStyle/>
-          <a:p>
-            <a:pPr indent="0" marL="0">
-              <a:buNone/>
-            </a:pPr>
-            <a:r>
-              <a:rPr lang="en-US" sz="1050" b="1" dirty="0">
+            <a:off x="1243584" y="2148840"/>
+            <a:ext cx="5852160" cy="329184"/>
+          </a:xfrm>
+          <a:prstGeom prst="rect">
+            <a:avLst/>
+          </a:prstGeom>
+          <a:noFill/>
+          <a:ln/>
+        </p:spPr>
+        <p:txBody>
+          <a:bodyPr wrap="square" lIns="0" tIns="0" rIns="0" bIns="0" rtlCol="0" anchor="t"/>
+          <a:lstStyle/>
+          <a:p>
+            <a:pPr indent="0" marL="0">
+              <a:buNone/>
+            </a:pPr>
+            <a:r>
+              <a:rPr lang="en-US" sz="1500" b="1" dirty="0">
                 <a:solidFill>
                   <a:srgbClr val="4636B0"/>
                 </a:solidFill>
-                <a:latin typeface="Inter" pitchFamily="34" charset="0"/>
-                <a:ea typeface="Inter" pitchFamily="34" charset="-122"/>
-                <a:cs typeface="Inter" pitchFamily="34" charset="-120"/>
-              </a:rPr>
-              <a:t>Ce que vous faites</a:t>
-            </a:r>
-            <a:endParaRPr lang="en-US" sz="1050" dirty="0"/>
-          </a:p>
-        </p:txBody>
-      </p:sp>
-      <p:sp>
-        <p:nvSpPr>
-          <p:cNvPr id="9" name="Shape 6"/>
-          <p:cNvSpPr/>
-          <p:nvPr/>
-        </p:nvSpPr>
-        <p:spPr>
-          <a:xfrm>
-            <a:off x="731520" y="2468880"/>
-            <a:ext cx="10725912" cy="0"/>
-          </a:xfrm>
-          <a:prstGeom prst="line">
-            <a:avLst/>
-          </a:prstGeom>
-          <a:noFill/>
-          <a:ln w="9525">
+                <a:latin typeface="Sora" pitchFamily="34" charset="0"/>
+                <a:ea typeface="Sora" pitchFamily="34" charset="-122"/>
+                <a:cs typeface="Sora" pitchFamily="34" charset="-120"/>
+              </a:rPr>
+              <a:t>Scannez la balise du rayon</a:t>
+            </a:r>
+            <a:endParaRPr lang="en-US" sz="1500" dirty="0"/>
+          </a:p>
+        </p:txBody>
+      </p:sp>
+      <p:sp>
+        <p:nvSpPr>
+          <p:cNvPr id="9" name="Text 6"/>
+          <p:cNvSpPr/>
+          <p:nvPr/>
+        </p:nvSpPr>
+        <p:spPr>
+          <a:xfrm>
+            <a:off x="1243584" y="2514600"/>
+            <a:ext cx="5852160" cy="822960"/>
+          </a:xfrm>
+          <a:prstGeom prst="rect">
+            <a:avLst/>
+          </a:prstGeom>
+          <a:noFill/>
+          <a:ln/>
+        </p:spPr>
+        <p:txBody>
+          <a:bodyPr wrap="square" lIns="0" tIns="0" rIns="0" bIns="0" rtlCol="0" anchor="t"/>
+          <a:lstStyle/>
+          <a:p>
+            <a:pPr indent="0" marL="0">
+              <a:lnSpc>
+                <a:spcPct val="115000"/>
+              </a:lnSpc>
+              <a:buNone/>
+            </a:pPr>
+            <a:r>
+              <a:rPr lang="en-US" sz="1150" dirty="0">
+                <a:solidFill>
+                  <a:srgbClr val="3D4556"/>
+                </a:solidFill>
+                <a:latin typeface="Inter" pitchFamily="34" charset="0"/>
+                <a:ea typeface="Inter" pitchFamily="34" charset="-122"/>
+                <a:cs typeface="Inter" pitchFamily="34" charset="-120"/>
+              </a:rPr>
+              <a:t>Elle ouvre la zone. Tant qu'elle est ouverte, tout ce que vous scannez compte ici. Vous pouvez aussi saisir son numéro au clavier.</a:t>
+            </a:r>
+            <a:endParaRPr lang="en-US" sz="1150" dirty="0"/>
+          </a:p>
+        </p:txBody>
+      </p:sp>
+      <p:sp>
+        <p:nvSpPr>
+          <p:cNvPr id="10" name="Text 7"/>
+          <p:cNvSpPr/>
+          <p:nvPr/>
+        </p:nvSpPr>
+        <p:spPr>
+          <a:xfrm>
+            <a:off x="731520" y="3493008"/>
+            <a:ext cx="365760" cy="365760"/>
+          </a:xfrm>
+          <a:prstGeom prst="ellipse">
+            <a:avLst/>
+          </a:prstGeom>
+          <a:solidFill>
+            <a:srgbClr val="4636B0"/>
+          </a:solidFill>
+          <a:ln>
             <a:solidFill>
-              <a:srgbClr val="E3E6EE"/>
+              <a:srgbClr val="4636B0"/>
+            </a:solidFill>
+          </a:ln>
+        </p:spPr>
+        <p:txBody>
+          <a:bodyPr wrap="square" lIns="0" tIns="0" rIns="0" bIns="0" rtlCol="0" anchor="ctr"/>
+          <a:lstStyle/>
+          <a:p>
+            <a:pPr algn="ctr" indent="0" marL="0">
+              <a:buNone/>
+            </a:pPr>
+            <a:r>
+              <a:rPr lang="en-US" sz="1200" b="1" dirty="0">
+                <a:solidFill>
+                  <a:srgbClr val="FFFFFF"/>
+                </a:solidFill>
+                <a:latin typeface="Sora" pitchFamily="34" charset="0"/>
+                <a:ea typeface="Sora" pitchFamily="34" charset="-122"/>
+                <a:cs typeface="Sora" pitchFamily="34" charset="-120"/>
+              </a:rPr>
+              <a:t>2</a:t>
+            </a:r>
+            <a:endParaRPr lang="en-US" sz="1200" dirty="0"/>
+          </a:p>
+        </p:txBody>
+      </p:sp>
+      <p:sp>
+        <p:nvSpPr>
+          <p:cNvPr id="11" name="Text 8"/>
+          <p:cNvSpPr/>
+          <p:nvPr/>
+        </p:nvSpPr>
+        <p:spPr>
+          <a:xfrm>
+            <a:off x="1243584" y="3474720"/>
+            <a:ext cx="5852160" cy="329184"/>
+          </a:xfrm>
+          <a:prstGeom prst="rect">
+            <a:avLst/>
+          </a:prstGeom>
+          <a:noFill/>
+          <a:ln/>
+        </p:spPr>
+        <p:txBody>
+          <a:bodyPr wrap="square" lIns="0" tIns="0" rIns="0" bIns="0" rtlCol="0" anchor="t"/>
+          <a:lstStyle/>
+          <a:p>
+            <a:pPr indent="0" marL="0">
+              <a:buNone/>
+            </a:pPr>
+            <a:r>
+              <a:rPr lang="en-US" sz="1500" b="1" dirty="0">
+                <a:solidFill>
+                  <a:srgbClr val="4636B0"/>
+                </a:solidFill>
+                <a:latin typeface="Sora" pitchFamily="34" charset="0"/>
+                <a:ea typeface="Sora" pitchFamily="34" charset="-122"/>
+                <a:cs typeface="Sora" pitchFamily="34" charset="-120"/>
+              </a:rPr>
+              <a:t>Scannez les articles</a:t>
+            </a:r>
+            <a:endParaRPr lang="en-US" sz="1500" dirty="0"/>
+          </a:p>
+        </p:txBody>
+      </p:sp>
+      <p:sp>
+        <p:nvSpPr>
+          <p:cNvPr id="12" name="Text 9"/>
+          <p:cNvSpPr/>
+          <p:nvPr/>
+        </p:nvSpPr>
+        <p:spPr>
+          <a:xfrm>
+            <a:off x="1243584" y="3840480"/>
+            <a:ext cx="5852160" cy="822960"/>
+          </a:xfrm>
+          <a:prstGeom prst="rect">
+            <a:avLst/>
+          </a:prstGeom>
+          <a:noFill/>
+          <a:ln/>
+        </p:spPr>
+        <p:txBody>
+          <a:bodyPr wrap="square" lIns="0" tIns="0" rIns="0" bIns="0" rtlCol="0" anchor="t"/>
+          <a:lstStyle/>
+          <a:p>
+            <a:pPr indent="0" marL="0">
+              <a:lnSpc>
+                <a:spcPct val="115000"/>
+              </a:lnSpc>
+              <a:buNone/>
+            </a:pPr>
+            <a:r>
+              <a:rPr lang="en-US" sz="1150" dirty="0">
+                <a:solidFill>
+                  <a:srgbClr val="3D4556"/>
+                </a:solidFill>
+                <a:latin typeface="Inter" pitchFamily="34" charset="0"/>
+                <a:ea typeface="Inter" pitchFamily="34" charset="-122"/>
+                <a:cs typeface="Inter" pitchFamily="34" charset="-120"/>
+              </a:rPr>
+              <a:t>Le scan est automatique. Un article scanné trois fois compte trois ; pour une pile, scannez une fois et ajustez avec + et −. Pas de code lisible ? L'onglet « Manuel ».</a:t>
+            </a:r>
+            <a:endParaRPr lang="en-US" sz="1150" dirty="0"/>
+          </a:p>
+        </p:txBody>
+      </p:sp>
+      <p:sp>
+        <p:nvSpPr>
+          <p:cNvPr id="13" name="Text 10"/>
+          <p:cNvSpPr/>
+          <p:nvPr/>
+        </p:nvSpPr>
+        <p:spPr>
+          <a:xfrm>
+            <a:off x="731520" y="4818888"/>
+            <a:ext cx="365760" cy="365760"/>
+          </a:xfrm>
+          <a:prstGeom prst="ellipse">
+            <a:avLst/>
+          </a:prstGeom>
+          <a:solidFill>
+            <a:srgbClr val="4636B0"/>
+          </a:solidFill>
+          <a:ln>
+            <a:solidFill>
+              <a:srgbClr val="4636B0"/>
+            </a:solidFill>
+          </a:ln>
+        </p:spPr>
+        <p:txBody>
+          <a:bodyPr wrap="square" lIns="0" tIns="0" rIns="0" bIns="0" rtlCol="0" anchor="ctr"/>
+          <a:lstStyle/>
+          <a:p>
+            <a:pPr algn="ctr" indent="0" marL="0">
+              <a:buNone/>
+            </a:pPr>
+            <a:r>
+              <a:rPr lang="en-US" sz="1200" b="1" dirty="0">
+                <a:solidFill>
+                  <a:srgbClr val="FFFFFF"/>
+                </a:solidFill>
+                <a:latin typeface="Sora" pitchFamily="34" charset="0"/>
+                <a:ea typeface="Sora" pitchFamily="34" charset="-122"/>
+                <a:cs typeface="Sora" pitchFamily="34" charset="-120"/>
+              </a:rPr>
+              <a:t>3</a:t>
+            </a:r>
+            <a:endParaRPr lang="en-US" sz="1200" dirty="0"/>
+          </a:p>
+        </p:txBody>
+      </p:sp>
+      <p:sp>
+        <p:nvSpPr>
+          <p:cNvPr id="14" name="Text 11"/>
+          <p:cNvSpPr/>
+          <p:nvPr/>
+        </p:nvSpPr>
+        <p:spPr>
+          <a:xfrm>
+            <a:off x="1243584" y="4800600"/>
+            <a:ext cx="5852160" cy="329184"/>
+          </a:xfrm>
+          <a:prstGeom prst="rect">
+            <a:avLst/>
+          </a:prstGeom>
+          <a:noFill/>
+          <a:ln/>
+        </p:spPr>
+        <p:txBody>
+          <a:bodyPr wrap="square" lIns="0" tIns="0" rIns="0" bIns="0" rtlCol="0" anchor="t"/>
+          <a:lstStyle/>
+          <a:p>
+            <a:pPr indent="0" marL="0">
+              <a:buNone/>
+            </a:pPr>
+            <a:r>
+              <a:rPr lang="en-US" sz="1500" b="1" dirty="0">
+                <a:solidFill>
+                  <a:srgbClr val="4636B0"/>
+                </a:solidFill>
+                <a:latin typeface="Sora" pitchFamily="34" charset="0"/>
+                <a:ea typeface="Sora" pitchFamily="34" charset="-122"/>
+                <a:cs typeface="Sora" pitchFamily="34" charset="-120"/>
+              </a:rPr>
+              <a:t>Clôturez la balise</a:t>
+            </a:r>
+            <a:endParaRPr lang="en-US" sz="1500" dirty="0"/>
+          </a:p>
+        </p:txBody>
+      </p:sp>
+      <p:sp>
+        <p:nvSpPr>
+          <p:cNvPr id="15" name="Text 12"/>
+          <p:cNvSpPr/>
+          <p:nvPr/>
+        </p:nvSpPr>
+        <p:spPr>
+          <a:xfrm>
+            <a:off x="1243584" y="5166360"/>
+            <a:ext cx="5852160" cy="822960"/>
+          </a:xfrm>
+          <a:prstGeom prst="rect">
+            <a:avLst/>
+          </a:prstGeom>
+          <a:noFill/>
+          <a:ln/>
+        </p:spPr>
+        <p:txBody>
+          <a:bodyPr wrap="square" lIns="0" tIns="0" rIns="0" bIns="0" rtlCol="0" anchor="t"/>
+          <a:lstStyle/>
+          <a:p>
+            <a:pPr indent="0" marL="0">
+              <a:lnSpc>
+                <a:spcPct val="115000"/>
+              </a:lnSpc>
+              <a:buNone/>
+            </a:pPr>
+            <a:r>
+              <a:rPr lang="en-US" sz="1150" dirty="0">
+                <a:solidFill>
+                  <a:srgbClr val="3D4556"/>
+                </a:solidFill>
+                <a:latin typeface="Inter" pitchFamily="34" charset="0"/>
+                <a:ea typeface="Inter" pitchFamily="34" charset="-122"/>
+                <a:cs typeface="Inter" pitchFamily="34" charset="-120"/>
+              </a:rPr>
+              <a:t>Le bouton rouge, en haut de l'écran ou en bas de la liste. Il dit « j'ai fini ici » : la zone passe en comptée chez le superviseur, et vous passez au rayon suivant.</a:t>
+            </a:r>
+            <a:endParaRPr lang="en-US" sz="1150" dirty="0"/>
+          </a:p>
+        </p:txBody>
+      </p:sp>
+      <p:sp>
+        <p:nvSpPr>
+          <p:cNvPr id="16" name="Shape 13"/>
+          <p:cNvSpPr/>
+          <p:nvPr/>
+        </p:nvSpPr>
+        <p:spPr>
+          <a:xfrm>
+            <a:off x="9262872" y="1325880"/>
+            <a:ext cx="2122020" cy="4480560"/>
+          </a:xfrm>
+          <a:prstGeom prst="roundRect">
+            <a:avLst>
+              <a:gd name="adj" fmla="val 12927"/>
+            </a:avLst>
+          </a:prstGeom>
+          <a:solidFill>
+            <a:srgbClr val="FFFFFF"/>
+          </a:solidFill>
+          <a:ln w="12700">
+            <a:solidFill>
+              <a:srgbClr val="FFFFFF"/>
             </a:solidFill>
             <a:prstDash val="solid"/>
           </a:ln>
-        </p:spPr>
-      </p:sp>
-      <p:sp>
-        <p:nvSpPr>
-          <p:cNvPr id="10" name="Text 7"/>
-          <p:cNvSpPr/>
-          <p:nvPr/>
-        </p:nvSpPr>
-        <p:spPr>
-          <a:xfrm>
-            <a:off x="731520" y="2560320"/>
-            <a:ext cx="3657600" cy="548640"/>
-          </a:xfrm>
-          <a:prstGeom prst="rect">
-            <a:avLst/>
-          </a:prstGeom>
-          <a:noFill/>
-          <a:ln/>
-        </p:spPr>
-        <p:txBody>
-          <a:bodyPr wrap="square" lIns="0" tIns="0" rIns="0" bIns="0" rtlCol="0" anchor="t"/>
-          <a:lstStyle/>
-          <a:p>
-            <a:pPr indent="0" marL="0">
-              <a:buNone/>
-            </a:pPr>
-            <a:r>
-              <a:rPr lang="en-US" sz="1250" b="1" dirty="0">
-                <a:solidFill>
-                  <a:srgbClr val="0B0F19"/>
-                </a:solidFill>
-                <a:latin typeface="Sora" pitchFamily="34" charset="0"/>
-                <a:ea typeface="Sora" pitchFamily="34" charset="-122"/>
-                <a:cs typeface="Sora" pitchFamily="34" charset="-120"/>
-              </a:rPr>
-              <a:t>« Balise non définie »</a:t>
-            </a:r>
-            <a:endParaRPr lang="en-US" sz="1250" dirty="0"/>
-          </a:p>
-        </p:txBody>
-      </p:sp>
-      <p:sp>
-        <p:nvSpPr>
-          <p:cNvPr id="11" name="Text 8"/>
-          <p:cNvSpPr/>
-          <p:nvPr/>
-        </p:nvSpPr>
-        <p:spPr>
-          <a:xfrm>
-            <a:off x="4663440" y="2560320"/>
-            <a:ext cx="6793992" cy="594360"/>
-          </a:xfrm>
-          <a:prstGeom prst="rect">
-            <a:avLst/>
-          </a:prstGeom>
-          <a:noFill/>
-          <a:ln/>
-        </p:spPr>
-        <p:txBody>
-          <a:bodyPr wrap="square" lIns="0" tIns="0" rIns="0" bIns="0" rtlCol="0" anchor="t"/>
-          <a:lstStyle/>
-          <a:p>
-            <a:pPr indent="0" marL="0">
-              <a:lnSpc>
-                <a:spcPct val="112000"/>
-              </a:lnSpc>
-              <a:buNone/>
-            </a:pPr>
-            <a:r>
-              <a:rPr lang="en-US" sz="1150" dirty="0">
-                <a:solidFill>
-                  <a:srgbClr val="3D4556"/>
-                </a:solidFill>
-                <a:latin typeface="Inter" pitchFamily="34" charset="0"/>
-                <a:ea typeface="Inter" pitchFamily="34" charset="-122"/>
-                <a:cs typeface="Inter" pitchFamily="34" charset="-120"/>
-              </a:rPr>
-              <a:t>Le numéro n'est dans aucune plage. Si l'étiquette est bien collée dans ce magasin, touchez « Ajouter » : la zone est créée, le superviseur la nommera. Sinon, vérifiez le numéro.</a:t>
-            </a:r>
-            <a:endParaRPr lang="en-US" sz="1150" dirty="0"/>
-          </a:p>
-        </p:txBody>
-      </p:sp>
-      <p:sp>
-        <p:nvSpPr>
-          <p:cNvPr id="12" name="Shape 9"/>
-          <p:cNvSpPr/>
-          <p:nvPr/>
-        </p:nvSpPr>
-        <p:spPr>
-          <a:xfrm>
-            <a:off x="731520" y="3182112"/>
-            <a:ext cx="10725912" cy="0"/>
-          </a:xfrm>
-          <a:prstGeom prst="line">
-            <a:avLst/>
-          </a:prstGeom>
-          <a:noFill/>
-          <a:ln w="9525">
-            <a:solidFill>
-              <a:srgbClr val="E3E6EE"/>
-            </a:solidFill>
-            <a:prstDash val="solid"/>
-          </a:ln>
-        </p:spPr>
-      </p:sp>
-      <p:sp>
-        <p:nvSpPr>
-          <p:cNvPr id="13" name="Text 10"/>
-          <p:cNvSpPr/>
-          <p:nvPr/>
-        </p:nvSpPr>
-        <p:spPr>
-          <a:xfrm>
-            <a:off x="731520" y="3273552"/>
-            <a:ext cx="3657600" cy="548640"/>
-          </a:xfrm>
-          <a:prstGeom prst="rect">
-            <a:avLst/>
-          </a:prstGeom>
-          <a:noFill/>
-          <a:ln/>
-        </p:spPr>
-        <p:txBody>
-          <a:bodyPr wrap="square" lIns="0" tIns="0" rIns="0" bIns="0" rtlCol="0" anchor="t"/>
-          <a:lstStyle/>
-          <a:p>
-            <a:pPr indent="0" marL="0">
-              <a:buNone/>
-            </a:pPr>
-            <a:r>
-              <a:rPr lang="en-US" sz="1250" b="1" dirty="0">
-                <a:solidFill>
-                  <a:srgbClr val="0B0F19"/>
-                </a:solidFill>
-                <a:latin typeface="Sora" pitchFamily="34" charset="0"/>
-                <a:ea typeface="Sora" pitchFamily="34" charset="-122"/>
-                <a:cs typeface="Sora" pitchFamily="34" charset="-120"/>
-              </a:rPr>
-              <a:t>Article inconnu</a:t>
-            </a:r>
-            <a:endParaRPr lang="en-US" sz="1250" dirty="0"/>
-          </a:p>
-        </p:txBody>
-      </p:sp>
-      <p:sp>
-        <p:nvSpPr>
-          <p:cNvPr id="14" name="Text 11"/>
-          <p:cNvSpPr/>
-          <p:nvPr/>
-        </p:nvSpPr>
-        <p:spPr>
-          <a:xfrm>
-            <a:off x="4663440" y="3273552"/>
-            <a:ext cx="6793992" cy="594360"/>
-          </a:xfrm>
-          <a:prstGeom prst="rect">
-            <a:avLst/>
-          </a:prstGeom>
-          <a:noFill/>
-          <a:ln/>
-        </p:spPr>
-        <p:txBody>
-          <a:bodyPr wrap="square" lIns="0" tIns="0" rIns="0" bIns="0" rtlCol="0" anchor="t"/>
-          <a:lstStyle/>
-          <a:p>
-            <a:pPr indent="0" marL="0">
-              <a:lnSpc>
-                <a:spcPct val="112000"/>
-              </a:lnSpc>
-              <a:buNone/>
-            </a:pPr>
-            <a:r>
-              <a:rPr lang="en-US" sz="1150" dirty="0">
-                <a:solidFill>
-                  <a:srgbClr val="3D4556"/>
-                </a:solidFill>
-                <a:latin typeface="Inter" pitchFamily="34" charset="0"/>
-                <a:ea typeface="Inter" pitchFamily="34" charset="-122"/>
-                <a:cs typeface="Inter" pitchFamily="34" charset="-120"/>
-              </a:rPr>
-              <a:t>Il n'est pas dans le référentiel. Vous pouvez l'ajouter avec un libellé ; il entrera dans le rapport avec un prix d'achat à zéro, que le superviseur complétera.</a:t>
-            </a:r>
-            <a:endParaRPr lang="en-US" sz="1150" dirty="0"/>
-          </a:p>
-        </p:txBody>
-      </p:sp>
-      <p:sp>
-        <p:nvSpPr>
-          <p:cNvPr id="15" name="Shape 12"/>
-          <p:cNvSpPr/>
-          <p:nvPr/>
-        </p:nvSpPr>
-        <p:spPr>
-          <a:xfrm>
-            <a:off x="731520" y="3895344"/>
-            <a:ext cx="10725912" cy="0"/>
-          </a:xfrm>
-          <a:prstGeom prst="line">
-            <a:avLst/>
-          </a:prstGeom>
-          <a:noFill/>
-          <a:ln w="9525">
-            <a:solidFill>
-              <a:srgbClr val="E3E6EE"/>
-            </a:solidFill>
-            <a:prstDash val="solid"/>
-          </a:ln>
-        </p:spPr>
-      </p:sp>
-      <p:sp>
-        <p:nvSpPr>
-          <p:cNvPr id="16" name="Text 13"/>
-          <p:cNvSpPr/>
-          <p:nvPr/>
-        </p:nvSpPr>
-        <p:spPr>
-          <a:xfrm>
-            <a:off x="731520" y="3986784"/>
-            <a:ext cx="3657600" cy="548640"/>
-          </a:xfrm>
-          <a:prstGeom prst="rect">
-            <a:avLst/>
-          </a:prstGeom>
-          <a:noFill/>
-          <a:ln/>
-        </p:spPr>
-        <p:txBody>
-          <a:bodyPr wrap="square" lIns="0" tIns="0" rIns="0" bIns="0" rtlCol="0" anchor="t"/>
-          <a:lstStyle/>
-          <a:p>
-            <a:pPr indent="0" marL="0">
-              <a:buNone/>
-            </a:pPr>
-            <a:r>
-              <a:rPr lang="en-US" sz="1250" b="1" dirty="0">
-                <a:solidFill>
-                  <a:srgbClr val="0B0F19"/>
-                </a:solidFill>
-                <a:latin typeface="Sora" pitchFamily="34" charset="0"/>
-                <a:ea typeface="Sora" pitchFamily="34" charset="-122"/>
-                <a:cs typeface="Sora" pitchFamily="34" charset="-120"/>
-              </a:rPr>
-              <a:t>Plus de réseau</a:t>
-            </a:r>
-            <a:endParaRPr lang="en-US" sz="1250" dirty="0"/>
-          </a:p>
-        </p:txBody>
-      </p:sp>
-      <p:sp>
-        <p:nvSpPr>
-          <p:cNvPr id="17" name="Text 14"/>
-          <p:cNvSpPr/>
-          <p:nvPr/>
-        </p:nvSpPr>
-        <p:spPr>
-          <a:xfrm>
-            <a:off x="4663440" y="3986784"/>
-            <a:ext cx="6793992" cy="594360"/>
-          </a:xfrm>
-          <a:prstGeom prst="rect">
-            <a:avLst/>
-          </a:prstGeom>
-          <a:noFill/>
-          <a:ln/>
-        </p:spPr>
-        <p:txBody>
-          <a:bodyPr wrap="square" lIns="0" tIns="0" rIns="0" bIns="0" rtlCol="0" anchor="t"/>
-          <a:lstStyle/>
-          <a:p>
-            <a:pPr indent="0" marL="0">
-              <a:lnSpc>
-                <a:spcPct val="112000"/>
-              </a:lnSpc>
-              <a:buNone/>
-            </a:pPr>
-            <a:r>
-              <a:rPr lang="en-US" sz="1150" dirty="0">
-                <a:solidFill>
-                  <a:srgbClr val="3D4556"/>
-                </a:solidFill>
-                <a:latin typeface="Inter" pitchFamily="34" charset="0"/>
-                <a:ea typeface="Inter" pitchFamily="34" charset="-122"/>
-                <a:cs typeface="Inter" pitchFamily="34" charset="-120"/>
-              </a:rPr>
-              <a:t>Continuez à compter. L'écran indique ce qui attend ; tout part au retour du réseau. Ne désinstallez pas l'application et ne laissez personne effacer le téléphone avant que ce soit parti.</a:t>
-            </a:r>
-            <a:endParaRPr lang="en-US" sz="1150" dirty="0"/>
-          </a:p>
-        </p:txBody>
-      </p:sp>
-      <p:sp>
-        <p:nvSpPr>
-          <p:cNvPr id="18" name="Shape 15"/>
-          <p:cNvSpPr/>
-          <p:nvPr/>
-        </p:nvSpPr>
-        <p:spPr>
-          <a:xfrm>
-            <a:off x="731520" y="4608576"/>
-            <a:ext cx="10725912" cy="0"/>
-          </a:xfrm>
-          <a:prstGeom prst="line">
-            <a:avLst/>
-          </a:prstGeom>
-          <a:noFill/>
-          <a:ln w="9525">
-            <a:solidFill>
-              <a:srgbClr val="E3E6EE"/>
-            </a:solidFill>
-            <a:prstDash val="solid"/>
-          </a:ln>
-        </p:spPr>
-      </p:sp>
-      <p:sp>
-        <p:nvSpPr>
-          <p:cNvPr id="19" name="Text 16"/>
-          <p:cNvSpPr/>
-          <p:nvPr/>
-        </p:nvSpPr>
-        <p:spPr>
-          <a:xfrm>
-            <a:off x="731520" y="4700016"/>
-            <a:ext cx="3657600" cy="548640"/>
-          </a:xfrm>
-          <a:prstGeom prst="rect">
-            <a:avLst/>
-          </a:prstGeom>
-          <a:noFill/>
-          <a:ln/>
-        </p:spPr>
-        <p:txBody>
-          <a:bodyPr wrap="square" lIns="0" tIns="0" rIns="0" bIns="0" rtlCol="0" anchor="t"/>
-          <a:lstStyle/>
-          <a:p>
-            <a:pPr indent="0" marL="0">
-              <a:buNone/>
-            </a:pPr>
-            <a:r>
-              <a:rPr lang="en-US" sz="1250" b="1" dirty="0">
-                <a:solidFill>
-                  <a:srgbClr val="0B0F19"/>
-                </a:solidFill>
-                <a:latin typeface="Sora" pitchFamily="34" charset="0"/>
-                <a:ea typeface="Sora" pitchFamily="34" charset="-122"/>
-                <a:cs typeface="Sora" pitchFamily="34" charset="-120"/>
-              </a:rPr>
-              <a:t>On vous demande d'auditer</a:t>
-            </a:r>
-            <a:endParaRPr lang="en-US" sz="1250" dirty="0"/>
-          </a:p>
-        </p:txBody>
-      </p:sp>
-      <p:sp>
-        <p:nvSpPr>
-          <p:cNvPr id="20" name="Text 17"/>
-          <p:cNvSpPr/>
-          <p:nvPr/>
-        </p:nvSpPr>
-        <p:spPr>
-          <a:xfrm>
-            <a:off x="4663440" y="4700016"/>
-            <a:ext cx="6793992" cy="594360"/>
-          </a:xfrm>
-          <a:prstGeom prst="rect">
-            <a:avLst/>
-          </a:prstGeom>
-          <a:noFill/>
-          <a:ln/>
-        </p:spPr>
-        <p:txBody>
-          <a:bodyPr wrap="square" lIns="0" tIns="0" rIns="0" bIns="0" rtlCol="0" anchor="t"/>
-          <a:lstStyle/>
-          <a:p>
-            <a:pPr indent="0" marL="0">
-              <a:lnSpc>
-                <a:spcPct val="112000"/>
-              </a:lnSpc>
-              <a:buNone/>
-            </a:pPr>
-            <a:r>
-              <a:rPr lang="en-US" sz="1150" dirty="0">
-                <a:solidFill>
-                  <a:srgbClr val="3D4556"/>
-                </a:solidFill>
-                <a:latin typeface="Inter" pitchFamily="34" charset="0"/>
-                <a:ea typeface="Inter" pitchFamily="34" charset="-122"/>
-                <a:cs typeface="Inter" pitchFamily="34" charset="-120"/>
-              </a:rPr>
-              <a:t>Mêmes gestes, bouton « Auditer des articles » à la place de « Compter ». Vous recomptez une zone que quelqu'un d'autre a déjà comptée ; l'écart se réglera sur le tableau de bord.</a:t>
-            </a:r>
-            <a:endParaRPr lang="en-US" sz="1150" dirty="0"/>
-          </a:p>
-        </p:txBody>
-      </p:sp>
-      <p:sp>
-        <p:nvSpPr>
-          <p:cNvPr id="21" name="Shape 18"/>
-          <p:cNvSpPr/>
-          <p:nvPr/>
-        </p:nvSpPr>
-        <p:spPr>
-          <a:xfrm>
-            <a:off x="731520" y="5321808"/>
-            <a:ext cx="10725912" cy="0"/>
-          </a:xfrm>
-          <a:prstGeom prst="line">
-            <a:avLst/>
-          </a:prstGeom>
-          <a:noFill/>
-          <a:ln w="9525">
-            <a:solidFill>
-              <a:srgbClr val="E3E6EE"/>
-            </a:solidFill>
-            <a:prstDash val="solid"/>
-          </a:ln>
-        </p:spPr>
-      </p:sp>
-      <p:sp>
-        <p:nvSpPr>
-          <p:cNvPr id="22" name="Text 19"/>
-          <p:cNvSpPr/>
-          <p:nvPr/>
-        </p:nvSpPr>
-        <p:spPr>
-          <a:xfrm>
-            <a:off x="731520" y="5413248"/>
-            <a:ext cx="3657600" cy="548640"/>
-          </a:xfrm>
-          <a:prstGeom prst="rect">
-            <a:avLst/>
-          </a:prstGeom>
-          <a:noFill/>
-          <a:ln/>
-        </p:spPr>
-        <p:txBody>
-          <a:bodyPr wrap="square" lIns="0" tIns="0" rIns="0" bIns="0" rtlCol="0" anchor="t"/>
-          <a:lstStyle/>
-          <a:p>
-            <a:pPr indent="0" marL="0">
-              <a:buNone/>
-            </a:pPr>
-            <a:r>
-              <a:rPr lang="en-US" sz="1250" b="1" dirty="0">
-                <a:solidFill>
-                  <a:srgbClr val="0B0F19"/>
-                </a:solidFill>
-                <a:latin typeface="Sora" pitchFamily="34" charset="0"/>
-                <a:ea typeface="Sora" pitchFamily="34" charset="-122"/>
-                <a:cs typeface="Sora" pitchFamily="34" charset="-120"/>
-              </a:rPr>
-              <a:t>Vous changez de téléphone en cours</a:t>
-            </a:r>
-            <a:endParaRPr lang="en-US" sz="1250" dirty="0"/>
-          </a:p>
-        </p:txBody>
-      </p:sp>
-      <p:sp>
-        <p:nvSpPr>
-          <p:cNvPr id="23" name="Text 20"/>
-          <p:cNvSpPr/>
-          <p:nvPr/>
-        </p:nvSpPr>
-        <p:spPr>
-          <a:xfrm>
-            <a:off x="4663440" y="5413248"/>
-            <a:ext cx="6793992" cy="594360"/>
-          </a:xfrm>
-          <a:prstGeom prst="rect">
-            <a:avLst/>
-          </a:prstGeom>
-          <a:noFill/>
-          <a:ln/>
-        </p:spPr>
-        <p:txBody>
-          <a:bodyPr wrap="square" lIns="0" tIns="0" rIns="0" bIns="0" rtlCol="0" anchor="t"/>
-          <a:lstStyle/>
-          <a:p>
-            <a:pPr indent="0" marL="0">
-              <a:lnSpc>
-                <a:spcPct val="112000"/>
-              </a:lnSpc>
-              <a:buNone/>
-            </a:pPr>
-            <a:r>
-              <a:rPr lang="en-US" sz="1150" dirty="0">
-                <a:solidFill>
-                  <a:srgbClr val="3D4556"/>
-                </a:solidFill>
-                <a:latin typeface="Inter" pitchFamily="34" charset="0"/>
-                <a:ea typeface="Inter" pitchFamily="34" charset="-122"/>
-                <a:cs typeface="Inter" pitchFamily="34" charset="-120"/>
-              </a:rPr>
-              <a:t>Reconnectez-vous : les comptages déjà envoyés sont sur le serveur. Ceux qui attendaient sur l'ancien téléphone partiront quand il retrouvera le réseau.</a:t>
-            </a:r>
-            <a:endParaRPr lang="en-US" sz="1150" dirty="0"/>
-          </a:p>
-        </p:txBody>
-      </p:sp>
-      <p:sp>
-        <p:nvSpPr>
-          <p:cNvPr id="24" name="Shape 21"/>
-          <p:cNvSpPr/>
-          <p:nvPr/>
-        </p:nvSpPr>
-        <p:spPr>
-          <a:xfrm>
-            <a:off x="731520" y="6035040"/>
-            <a:ext cx="10725912" cy="0"/>
-          </a:xfrm>
-          <a:prstGeom prst="line">
-            <a:avLst/>
-          </a:prstGeom>
-          <a:noFill/>
-          <a:ln w="9525">
-            <a:solidFill>
-              <a:srgbClr val="E3E6EE"/>
-            </a:solidFill>
-            <a:prstDash val="solid"/>
-          </a:ln>
-        </p:spPr>
-      </p:sp>
-      <p:sp>
-        <p:nvSpPr>
-          <p:cNvPr id="25" name="Text 22"/>
+          <a:effectLst>
+            <a:outerShdw sx="100000" sy="100000" kx="0" ky="0" algn="bl" rotWithShape="0" blurRad="177800" dist="38100" dir="5400000">
+              <a:srgbClr val="0B0F19">
+                <a:alpha val="18000"/>
+              </a:srgbClr>
+            </a:outerShdw>
+          </a:effectLst>
+        </p:spPr>
+      </p:sp>
+      <p:pic>
+        <p:nvPicPr>
+          <p:cNvPr id="17" name="Image 1" descr="preencoded.png">    </p:cNvPr>
+          <p:cNvPicPr>
+            <a:picLocks noChangeAspect="1"/>
+          </p:cNvPicPr>
+          <p:nvPr/>
+        </p:nvPicPr>
+        <p:blipFill>
+          <a:blip r:embed="rId2"/>
+          <a:stretch>
+            <a:fillRect/>
+          </a:stretch>
+        </p:blipFill>
+        <p:spPr>
+          <a:xfrm>
+            <a:off x="9262872" y="1325880"/>
+            <a:ext cx="2122020" cy="4480560"/>
+          </a:xfrm>
+          <a:prstGeom prst="rect">
+            <a:avLst/>
+          </a:prstGeom>
+        </p:spPr>
+      </p:pic>
+      <p:sp>
+        <p:nvSpPr>
+          <p:cNvPr id="18" name="Text 14"/>
+          <p:cNvSpPr/>
+          <p:nvPr/>
+        </p:nvSpPr>
+        <p:spPr>
+          <a:xfrm>
+            <a:off x="8805672" y="5934456"/>
+            <a:ext cx="3036420" cy="329184"/>
+          </a:xfrm>
+          <a:prstGeom prst="rect">
+            <a:avLst/>
+          </a:prstGeom>
+          <a:noFill/>
+          <a:ln/>
+        </p:spPr>
+        <p:txBody>
+          <a:bodyPr wrap="square" lIns="0" tIns="0" rIns="0" bIns="0" rtlCol="0" anchor="t"/>
+          <a:lstStyle/>
+          <a:p>
+            <a:pPr algn="ctr" indent="0" marL="0">
+              <a:buNone/>
+            </a:pPr>
+            <a:r>
+              <a:rPr lang="en-US" sz="1000" i="1" dirty="0">
+                <a:solidFill>
+                  <a:srgbClr val="5B6475"/>
+                </a:solidFill>
+                <a:latin typeface="Inter" pitchFamily="34" charset="0"/>
+                <a:ea typeface="Inter" pitchFamily="34" charset="-122"/>
+                <a:cs typeface="Inter" pitchFamily="34" charset="-120"/>
+              </a:rPr>
+              <a:t>L'écran de comptage, balise 6 ouverte.</a:t>
+            </a:r>
+            <a:endParaRPr lang="en-US" sz="1000" dirty="0"/>
+          </a:p>
+        </p:txBody>
+      </p:sp>
+      <p:sp>
+        <p:nvSpPr>
+          <p:cNvPr id="19" name="Text 15"/>
           <p:cNvSpPr/>
           <p:nvPr/>
         </p:nvSpPr>
@@ -5911,7 +5385,7 @@
       </p:sp>
       <p:sp>
         <p:nvSpPr>
-          <p:cNvPr id="26" name="Text 23"/>
+          <p:cNvPr id="20" name="Text 16"/>
           <p:cNvSpPr/>
           <p:nvPr/>
         </p:nvSpPr>
@@ -5996,8 +5470,8 @@
         </p:blipFill>
         <p:spPr>
           <a:xfrm>
-            <a:off x="731520" y="685800"/>
-            <a:ext cx="566928" cy="566928"/>
+            <a:off x="731520" y="384048"/>
+            <a:ext cx="329184" cy="329184"/>
           </a:xfrm>
           <a:prstGeom prst="rect">
             <a:avLst/>
@@ -6012,8 +5486,8 @@
         </p:nvSpPr>
         <p:spPr>
           <a:xfrm>
-            <a:off x="1444752" y="658368"/>
-            <a:ext cx="4572000" cy="621792"/>
+            <a:off x="1170432" y="347472"/>
+            <a:ext cx="2743200" cy="402336"/>
           </a:xfrm>
           <a:prstGeom prst="rect">
             <a:avLst/>
@@ -6029,7 +5503,7 @@
               <a:buNone/>
             </a:pPr>
             <a:r>
-              <a:rPr lang="en-US" sz="2400" b="1" dirty="0">
+              <a:rPr lang="en-US" sz="1600" b="1" dirty="0">
                 <a:solidFill>
                   <a:srgbClr val="0B0F19"/>
                 </a:solidFill>
@@ -6039,20 +5513,59 @@
               </a:rPr>
               <a:t>Quantinvo</a:t>
             </a:r>
-            <a:endParaRPr lang="en-US" sz="2400" dirty="0"/>
-          </a:p>
-        </p:txBody>
-      </p:sp>
-      <p:sp>
-        <p:nvSpPr>
-          <p:cNvPr id="4" name="Shape 1"/>
-          <p:cNvSpPr/>
-          <p:nvPr/>
-        </p:nvSpPr>
-        <p:spPr>
-          <a:xfrm>
-            <a:off x="731520" y="1481328"/>
-            <a:ext cx="2377440" cy="25603"/>
+            <a:endParaRPr lang="en-US" sz="1600" dirty="0"/>
+          </a:p>
+        </p:txBody>
+      </p:sp>
+      <p:sp>
+        <p:nvSpPr>
+          <p:cNvPr id="4" name="Text 1"/>
+          <p:cNvSpPr/>
+          <p:nvPr/>
+        </p:nvSpPr>
+        <p:spPr>
+          <a:xfrm>
+            <a:off x="5971032" y="347472"/>
+            <a:ext cx="5486400" cy="402336"/>
+          </a:xfrm>
+          <a:prstGeom prst="rect">
+            <a:avLst/>
+          </a:prstGeom>
+          <a:noFill/>
+          <a:ln/>
+        </p:spPr>
+        <p:txBody>
+          <a:bodyPr wrap="square" lIns="0" tIns="0" rIns="0" bIns="0" rtlCol="0" anchor="ctr"/>
+          <a:lstStyle/>
+          <a:p>
+            <a:pPr algn="r" indent="0" marL="0">
+              <a:buNone/>
+            </a:pPr>
+            <a:r>
+              <a:rPr lang="en-US" sz="1000" dirty="0">
+                <a:solidFill>
+                  <a:srgbClr val="5B6475"/>
+                </a:solidFill>
+                <a:latin typeface="Inter" pitchFamily="34" charset="0"/>
+                <a:ea typeface="Inter" pitchFamily="34" charset="-122"/>
+                <a:cs typeface="Inter" pitchFamily="34" charset="-120"/>
+              </a:rPr>
+              <a:t>Compteur</a:t>
+            </a:r>
+            <a:endParaRPr lang="en-US" sz="1000" dirty="0"/>
+          </a:p>
+        </p:txBody>
+      </p:sp>
+      <p:sp>
+        <p:nvSpPr>
+          <p:cNvPr id="5" name="Shape 2"/>
+          <p:cNvSpPr/>
+          <p:nvPr/>
+        </p:nvSpPr>
+        <p:spPr>
+          <a:xfrm>
+            <a:off x="731520" y="877824"/>
+            <a:ext cx="10725912" cy="25603"/>
           </a:xfrm>
           <a:prstGeom prst="rect">
             <a:avLst/>
@@ -6070,14 +5583,14 @@
       </p:sp>
       <p:sp>
         <p:nvSpPr>
-          <p:cNvPr id="5" name="Text 2"/>
-          <p:cNvSpPr/>
-          <p:nvPr/>
-        </p:nvSpPr>
-        <p:spPr>
-          <a:xfrm>
-            <a:off x="731520" y="2377440"/>
-            <a:ext cx="8686800" cy="1188720"/>
+          <p:cNvPr id="6" name="Text 3"/>
+          <p:cNvSpPr/>
+          <p:nvPr/>
+        </p:nvSpPr>
+        <p:spPr>
+          <a:xfrm>
+            <a:off x="731520" y="1325880"/>
+            <a:ext cx="4206240" cy="2011680"/>
           </a:xfrm>
           <a:prstGeom prst="rect">
             <a:avLst/>
@@ -6096,7 +5609,7 @@
               <a:buNone/>
             </a:pPr>
             <a:r>
-              <a:rPr lang="en-US" sz="3600" b="1" dirty="0">
+              <a:rPr lang="en-US" sz="2600" b="1" dirty="0">
                 <a:solidFill>
                   <a:srgbClr val="4636B0"/>
                 </a:solidFill>
@@ -6104,6 +5617,2524 @@
                 <a:ea typeface="Sora" pitchFamily="34" charset="-122"/>
                 <a:cs typeface="Sora" pitchFamily="34" charset="-120"/>
               </a:rPr>
+              <a:t>Ce que vous voyez quand une balise est finie.</a:t>
+            </a:r>
+            <a:endParaRPr lang="en-US" sz="2600" dirty="0"/>
+          </a:p>
+        </p:txBody>
+      </p:sp>
+      <p:sp>
+        <p:nvSpPr>
+          <p:cNvPr id="7" name="Text 4"/>
+          <p:cNvSpPr/>
+          <p:nvPr/>
+        </p:nvSpPr>
+        <p:spPr>
+          <a:xfrm>
+            <a:off x="731520" y="2743200"/>
+            <a:ext cx="7223760" cy="3108960"/>
+          </a:xfrm>
+          <a:prstGeom prst="rect">
+            <a:avLst/>
+          </a:prstGeom>
+          <a:noFill/>
+          <a:ln/>
+        </p:spPr>
+        <p:txBody>
+          <a:bodyPr wrap="square" lIns="0" tIns="0" rIns="0" bIns="0" rtlCol="0" anchor="t"/>
+          <a:lstStyle/>
+          <a:p>
+            <a:pPr indent="0" marL="0">
+              <a:lnSpc>
+                <a:spcPct val="118000"/>
+              </a:lnSpc>
+              <a:spcAft>
+                <a:spcPts val="1100"/>
+              </a:spcAft>
+              <a:buNone/>
+            </a:pPr>
+            <a:r>
+              <a:rPr lang="en-US" sz="1200" b="1" dirty="0">
+                <a:solidFill>
+                  <a:srgbClr val="0B0F19"/>
+                </a:solidFill>
+                <a:latin typeface="Inter" pitchFamily="34" charset="0"/>
+                <a:ea typeface="Inter" pitchFamily="34" charset="-122"/>
+                <a:cs typeface="Inter" pitchFamily="34" charset="-120"/>
+              </a:rPr>
+              <a:t>Les chiffres, tout de suite. </a:t>
+            </a:r>
+            <a:pPr indent="0" marL="0">
+              <a:lnSpc>
+                <a:spcPct val="118000"/>
+              </a:lnSpc>
+              <a:spcAft>
+                <a:spcPts val="1100"/>
+              </a:spcAft>
+              <a:buNone/>
+            </a:pPr>
+            <a:r>
+              <a:rPr lang="en-US" sz="1200" dirty="0">
+                <a:solidFill>
+                  <a:srgbClr val="3D4556"/>
+                </a:solidFill>
+                <a:latin typeface="Inter" pitchFamily="34" charset="0"/>
+                <a:ea typeface="Inter" pitchFamily="34" charset="-122"/>
+                <a:cs typeface="Inter" pitchFamily="34" charset="-120"/>
+              </a:rPr>
+              <a:t>Pièces et références de la balise que vous venez de fermer. C'est la vérification la plus simple : si le compte vous surprend, vous rouvrez la balise et vous revoyez le rayon.</a:t>
+            </a:r>
+            <a:endParaRPr lang="en-US" sz="1200" dirty="0"/>
+          </a:p>
+          <a:p>
+            <a:pPr indent="0" marL="0">
+              <a:lnSpc>
+                <a:spcPct val="118000"/>
+              </a:lnSpc>
+              <a:spcAft>
+                <a:spcPts val="1100"/>
+              </a:spcAft>
+              <a:buNone/>
+            </a:pPr>
+            <a:r>
+              <a:rPr lang="en-US" sz="1200" b="1" dirty="0">
+                <a:solidFill>
+                  <a:srgbClr val="0B0F19"/>
+                </a:solidFill>
+                <a:latin typeface="Inter" pitchFamily="34" charset="0"/>
+                <a:ea typeface="Inter" pitchFamily="34" charset="-122"/>
+                <a:cs typeface="Inter" pitchFamily="34" charset="-120"/>
+              </a:rPr>
+              <a:t>« déjà sur le tableau de bord ». </a:t>
+            </a:r>
+            <a:pPr indent="0" marL="0">
+              <a:lnSpc>
+                <a:spcPct val="118000"/>
+              </a:lnSpc>
+              <a:spcAft>
+                <a:spcPts val="1100"/>
+              </a:spcAft>
+              <a:buNone/>
+            </a:pPr>
+            <a:r>
+              <a:rPr lang="en-US" sz="1200" dirty="0">
+                <a:solidFill>
+                  <a:srgbClr val="3D4556"/>
+                </a:solidFill>
+                <a:latin typeface="Inter" pitchFamily="34" charset="0"/>
+                <a:ea typeface="Inter" pitchFamily="34" charset="-122"/>
+                <a:cs typeface="Inter" pitchFamily="34" charset="-120"/>
+              </a:rPr>
+              <a:t>La phrase est là pour ça : ce que vous venez de compter est parti. Le superviseur n'a rien à demander.</a:t>
+            </a:r>
+            <a:endParaRPr lang="en-US" sz="1200" dirty="0"/>
+          </a:p>
+          <a:p>
+            <a:pPr indent="0" marL="0">
+              <a:lnSpc>
+                <a:spcPct val="118000"/>
+              </a:lnSpc>
+              <a:spcAft>
+                <a:spcPts val="1100"/>
+              </a:spcAft>
+              <a:buNone/>
+            </a:pPr>
+            <a:r>
+              <a:rPr lang="en-US" sz="1200" b="1" dirty="0">
+                <a:solidFill>
+                  <a:srgbClr val="0B0F19"/>
+                </a:solidFill>
+                <a:latin typeface="Inter" pitchFamily="34" charset="0"/>
+                <a:ea typeface="Inter" pitchFamily="34" charset="-122"/>
+                <a:cs typeface="Inter" pitchFamily="34" charset="-120"/>
+              </a:rPr>
+              <a:t>Puis la suivante. </a:t>
+            </a:r>
+            <a:pPr indent="0" marL="0">
+              <a:lnSpc>
+                <a:spcPct val="118000"/>
+              </a:lnSpc>
+              <a:spcAft>
+                <a:spcPts val="1100"/>
+              </a:spcAft>
+              <a:buNone/>
+            </a:pPr>
+            <a:r>
+              <a:rPr lang="en-US" sz="1200" dirty="0">
+                <a:solidFill>
+                  <a:srgbClr val="3D4556"/>
+                </a:solidFill>
+                <a:latin typeface="Inter" pitchFamily="34" charset="0"/>
+                <a:ea typeface="Inter" pitchFamily="34" charset="-122"/>
+                <a:cs typeface="Inter" pitchFamily="34" charset="-120"/>
+              </a:rPr>
+              <a:t>L'écran revient de lui-même sur la lecture de balise. Vous marchez jusqu'au rayon d'après et vous scannez.</a:t>
+            </a:r>
+            <a:endParaRPr lang="en-US" sz="1200" dirty="0"/>
+          </a:p>
+        </p:txBody>
+      </p:sp>
+      <p:sp>
+        <p:nvSpPr>
+          <p:cNvPr id="8" name="Shape 5"/>
+          <p:cNvSpPr/>
+          <p:nvPr/>
+        </p:nvSpPr>
+        <p:spPr>
+          <a:xfrm>
+            <a:off x="9262872" y="1325880"/>
+            <a:ext cx="2122020" cy="4480560"/>
+          </a:xfrm>
+          <a:prstGeom prst="roundRect">
+            <a:avLst>
+              <a:gd name="adj" fmla="val 12927"/>
+            </a:avLst>
+          </a:prstGeom>
+          <a:solidFill>
+            <a:srgbClr val="FFFFFF"/>
+          </a:solidFill>
+          <a:ln w="12700">
+            <a:solidFill>
+              <a:srgbClr val="FFFFFF"/>
+            </a:solidFill>
+            <a:prstDash val="solid"/>
+          </a:ln>
+          <a:effectLst>
+            <a:outerShdw sx="100000" sy="100000" kx="0" ky="0" algn="bl" rotWithShape="0" blurRad="177800" dist="38100" dir="5400000">
+              <a:srgbClr val="0B0F19">
+                <a:alpha val="18000"/>
+              </a:srgbClr>
+            </a:outerShdw>
+          </a:effectLst>
+        </p:spPr>
+      </p:sp>
+      <p:pic>
+        <p:nvPicPr>
+          <p:cNvPr id="9" name="Image 1" descr="preencoded.png">    </p:cNvPr>
+          <p:cNvPicPr>
+            <a:picLocks noChangeAspect="1"/>
+          </p:cNvPicPr>
+          <p:nvPr/>
+        </p:nvPicPr>
+        <p:blipFill>
+          <a:blip r:embed="rId2"/>
+          <a:stretch>
+            <a:fillRect/>
+          </a:stretch>
+        </p:blipFill>
+        <p:spPr>
+          <a:xfrm>
+            <a:off x="9262872" y="1325880"/>
+            <a:ext cx="2122020" cy="4480560"/>
+          </a:xfrm>
+          <a:prstGeom prst="rect">
+            <a:avLst/>
+          </a:prstGeom>
+        </p:spPr>
+      </p:pic>
+      <p:sp>
+        <p:nvSpPr>
+          <p:cNvPr id="10" name="Text 6"/>
+          <p:cNvSpPr/>
+          <p:nvPr/>
+        </p:nvSpPr>
+        <p:spPr>
+          <a:xfrm>
+            <a:off x="8805672" y="5934456"/>
+            <a:ext cx="3036420" cy="329184"/>
+          </a:xfrm>
+          <a:prstGeom prst="rect">
+            <a:avLst/>
+          </a:prstGeom>
+          <a:noFill/>
+          <a:ln/>
+        </p:spPr>
+        <p:txBody>
+          <a:bodyPr wrap="square" lIns="0" tIns="0" rIns="0" bIns="0" rtlCol="0" anchor="t"/>
+          <a:lstStyle/>
+          <a:p>
+            <a:pPr algn="ctr" indent="0" marL="0">
+              <a:buNone/>
+            </a:pPr>
+            <a:r>
+              <a:rPr lang="en-US" sz="1000" i="1" dirty="0">
+                <a:solidFill>
+                  <a:srgbClr val="5B6475"/>
+                </a:solidFill>
+                <a:latin typeface="Inter" pitchFamily="34" charset="0"/>
+                <a:ea typeface="Inter" pitchFamily="34" charset="-122"/>
+                <a:cs typeface="Inter" pitchFamily="34" charset="-120"/>
+              </a:rPr>
+              <a:t>La feuille de fin de balise.</a:t>
+            </a:r>
+            <a:endParaRPr lang="en-US" sz="1000" dirty="0"/>
+          </a:p>
+        </p:txBody>
+      </p:sp>
+      <p:sp>
+        <p:nvSpPr>
+          <p:cNvPr id="11" name="Text 7"/>
+          <p:cNvSpPr/>
+          <p:nvPr/>
+        </p:nvSpPr>
+        <p:spPr>
+          <a:xfrm>
+            <a:off x="731520" y="6400800"/>
+            <a:ext cx="6400800" cy="274320"/>
+          </a:xfrm>
+          <a:prstGeom prst="rect">
+            <a:avLst/>
+          </a:prstGeom>
+          <a:noFill/>
+          <a:ln/>
+        </p:spPr>
+        <p:txBody>
+          <a:bodyPr wrap="square" lIns="0" tIns="0" rIns="0" bIns="0" rtlCol="0" anchor="t"/>
+          <a:lstStyle/>
+          <a:p>
+            <a:pPr indent="0" marL="0">
+              <a:buNone/>
+            </a:pPr>
+            <a:r>
+              <a:rPr lang="en-US" sz="900" dirty="0">
+                <a:solidFill>
+                  <a:srgbClr val="5B6475"/>
+                </a:solidFill>
+                <a:latin typeface="Inter" pitchFamily="34" charset="0"/>
+                <a:ea typeface="Inter" pitchFamily="34" charset="-122"/>
+                <a:cs typeface="Inter" pitchFamily="34" charset="-120"/>
+              </a:rPr>
+              <a:t>Quantinvo · prise en main · août 2026</a:t>
+            </a:r>
+            <a:endParaRPr lang="en-US" sz="900" dirty="0"/>
+          </a:p>
+        </p:txBody>
+      </p:sp>
+      <p:sp>
+        <p:nvSpPr>
+          <p:cNvPr id="12" name="Text 8"/>
+          <p:cNvSpPr/>
+          <p:nvPr/>
+        </p:nvSpPr>
+        <p:spPr>
+          <a:xfrm>
+            <a:off x="11000232" y="6400800"/>
+            <a:ext cx="457200" cy="274320"/>
+          </a:xfrm>
+          <a:prstGeom prst="rect">
+            <a:avLst/>
+          </a:prstGeom>
+          <a:noFill/>
+          <a:ln/>
+        </p:spPr>
+        <p:txBody>
+          <a:bodyPr wrap="square" lIns="0" tIns="0" rIns="0" bIns="0" rtlCol="0" anchor="t"/>
+          <a:lstStyle/>
+          <a:p>
+            <a:pPr algn="r" indent="0" marL="0">
+              <a:buNone/>
+            </a:pPr>
+            <a:r>
+              <a:rPr lang="en-US" sz="900" dirty="0">
+                <a:solidFill>
+                  <a:srgbClr val="5B6475"/>
+                </a:solidFill>
+                <a:latin typeface="Inter" pitchFamily="34" charset="0"/>
+                <a:ea typeface="Inter" pitchFamily="34" charset="-122"/>
+                <a:cs typeface="Inter" pitchFamily="34" charset="-120"/>
+              </a:rPr>
+              <a:t>15</a:t>
+            </a:r>
+            <a:endParaRPr lang="en-US" sz="900" dirty="0"/>
+          </a:p>
+        </p:txBody>
+      </p:sp>
+    </p:spTree>
+  </p:cSld>
+  <p:clrMapOvr>
+    <a:masterClrMapping/>
+  </p:clrMapOvr>
+</p:sld>
+</file>
+
+<file path=ppt/slides/slide16.xml><?xml version="1.0" encoding="utf-8"?>
+<p:sld xmlns:a="http://schemas.openxmlformats.org/drawingml/2006/main" xmlns:r="http://schemas.openxmlformats.org/officeDocument/2006/relationships" xmlns:p="http://schemas.openxmlformats.org/presentationml/2006/main">
+  <p:cSld name="Slide 16">
+    <p:bg>
+      <p:bgPr>
+        <a:solidFill>
+          <a:srgbClr val="FFFFFF"/>
+        </a:solidFill>
+      </p:bgPr>
+    </p:bg>
+    <p:spTree>
+      <p:nvGrpSpPr>
+        <p:cNvPr id="1" name=""/>
+        <p:cNvGrpSpPr/>
+        <p:nvPr/>
+      </p:nvGrpSpPr>
+      <p:grpSpPr>
+        <a:xfrm>
+          <a:off x="0" y="0"/>
+          <a:ext cx="0" cy="0"/>
+          <a:chOff x="0" y="0"/>
+          <a:chExt cx="0" cy="0"/>
+        </a:xfrm>
+      </p:grpSpPr>
+      <p:pic>
+        <p:nvPicPr>
+          <p:cNvPr id="2" name="Image 0" descr="preencoded.png">    </p:cNvPr>
+          <p:cNvPicPr>
+            <a:picLocks noChangeAspect="1"/>
+          </p:cNvPicPr>
+          <p:nvPr/>
+        </p:nvPicPr>
+        <p:blipFill>
+          <a:blip r:embed="rId1"/>
+          <a:stretch>
+            <a:fillRect/>
+          </a:stretch>
+        </p:blipFill>
+        <p:spPr>
+          <a:xfrm>
+            <a:off x="731520" y="384048"/>
+            <a:ext cx="329184" cy="329184"/>
+          </a:xfrm>
+          <a:prstGeom prst="rect">
+            <a:avLst/>
+          </a:prstGeom>
+        </p:spPr>
+      </p:pic>
+      <p:sp>
+        <p:nvSpPr>
+          <p:cNvPr id="3" name="Text 0"/>
+          <p:cNvSpPr/>
+          <p:nvPr/>
+        </p:nvSpPr>
+        <p:spPr>
+          <a:xfrm>
+            <a:off x="1170432" y="347472"/>
+            <a:ext cx="2743200" cy="402336"/>
+          </a:xfrm>
+          <a:prstGeom prst="rect">
+            <a:avLst/>
+          </a:prstGeom>
+          <a:noFill/>
+          <a:ln/>
+        </p:spPr>
+        <p:txBody>
+          <a:bodyPr wrap="square" lIns="0" tIns="0" rIns="0" bIns="0" rtlCol="0" anchor="ctr"/>
+          <a:lstStyle/>
+          <a:p>
+            <a:pPr indent="0" marL="0">
+              <a:buNone/>
+            </a:pPr>
+            <a:r>
+              <a:rPr lang="en-US" sz="1600" b="1" dirty="0">
+                <a:solidFill>
+                  <a:srgbClr val="0B0F19"/>
+                </a:solidFill>
+                <a:latin typeface="Sora" pitchFamily="34" charset="0"/>
+                <a:ea typeface="Sora" pitchFamily="34" charset="-122"/>
+                <a:cs typeface="Sora" pitchFamily="34" charset="-120"/>
+              </a:rPr>
+              <a:t>Quantinvo</a:t>
+            </a:r>
+            <a:endParaRPr lang="en-US" sz="1600" dirty="0"/>
+          </a:p>
+        </p:txBody>
+      </p:sp>
+      <p:sp>
+        <p:nvSpPr>
+          <p:cNvPr id="4" name="Text 1"/>
+          <p:cNvSpPr/>
+          <p:nvPr/>
+        </p:nvSpPr>
+        <p:spPr>
+          <a:xfrm>
+            <a:off x="5971032" y="347472"/>
+            <a:ext cx="5486400" cy="402336"/>
+          </a:xfrm>
+          <a:prstGeom prst="rect">
+            <a:avLst/>
+          </a:prstGeom>
+          <a:noFill/>
+          <a:ln/>
+        </p:spPr>
+        <p:txBody>
+          <a:bodyPr wrap="square" lIns="0" tIns="0" rIns="0" bIns="0" rtlCol="0" anchor="ctr"/>
+          <a:lstStyle/>
+          <a:p>
+            <a:pPr algn="r" indent="0" marL="0">
+              <a:buNone/>
+            </a:pPr>
+            <a:r>
+              <a:rPr lang="en-US" sz="1000" dirty="0">
+                <a:solidFill>
+                  <a:srgbClr val="5B6475"/>
+                </a:solidFill>
+                <a:latin typeface="Inter" pitchFamily="34" charset="0"/>
+                <a:ea typeface="Inter" pitchFamily="34" charset="-122"/>
+                <a:cs typeface="Inter" pitchFamily="34" charset="-120"/>
+              </a:rPr>
+              <a:t>Compteur</a:t>
+            </a:r>
+            <a:endParaRPr lang="en-US" sz="1000" dirty="0"/>
+          </a:p>
+        </p:txBody>
+      </p:sp>
+      <p:sp>
+        <p:nvSpPr>
+          <p:cNvPr id="5" name="Shape 2"/>
+          <p:cNvSpPr/>
+          <p:nvPr/>
+        </p:nvSpPr>
+        <p:spPr>
+          <a:xfrm>
+            <a:off x="731520" y="877824"/>
+            <a:ext cx="10725912" cy="25603"/>
+          </a:xfrm>
+          <a:prstGeom prst="rect">
+            <a:avLst/>
+          </a:prstGeom>
+          <a:solidFill>
+            <a:srgbClr val="38C9FF"/>
+          </a:solidFill>
+          <a:ln w="12700">
+            <a:solidFill>
+              <a:srgbClr val="38C9FF"/>
+            </a:solidFill>
+            <a:prstDash val="solid"/>
+          </a:ln>
+        </p:spPr>
+      </p:sp>
+      <p:sp>
+        <p:nvSpPr>
+          <p:cNvPr id="6" name="Text 3"/>
+          <p:cNvSpPr/>
+          <p:nvPr/>
+        </p:nvSpPr>
+        <p:spPr>
+          <a:xfrm>
+            <a:off x="731520" y="1325880"/>
+            <a:ext cx="4206240" cy="2011680"/>
+          </a:xfrm>
+          <a:prstGeom prst="rect">
+            <a:avLst/>
+          </a:prstGeom>
+          <a:noFill/>
+          <a:ln/>
+        </p:spPr>
+        <p:txBody>
+          <a:bodyPr wrap="square" lIns="0" tIns="0" rIns="0" bIns="0" rtlCol="0" anchor="t"/>
+          <a:lstStyle/>
+          <a:p>
+            <a:pPr indent="0" marL="0">
+              <a:lnSpc>
+                <a:spcPct val="105000"/>
+              </a:lnSpc>
+              <a:buNone/>
+            </a:pPr>
+            <a:r>
+              <a:rPr lang="en-US" sz="2600" b="1" dirty="0">
+                <a:solidFill>
+                  <a:srgbClr val="4636B0"/>
+                </a:solidFill>
+                <a:latin typeface="Sora" pitchFamily="34" charset="0"/>
+                <a:ea typeface="Sora" pitchFamily="34" charset="-122"/>
+                <a:cs typeface="Sora" pitchFamily="34" charset="-120"/>
+              </a:rPr>
+              <a:t>Auditer : les mêmes gestes, en ambre.</a:t>
+            </a:r>
+            <a:endParaRPr lang="en-US" sz="2600" dirty="0"/>
+          </a:p>
+        </p:txBody>
+      </p:sp>
+      <p:sp>
+        <p:nvSpPr>
+          <p:cNvPr id="7" name="Text 4"/>
+          <p:cNvSpPr/>
+          <p:nvPr/>
+        </p:nvSpPr>
+        <p:spPr>
+          <a:xfrm>
+            <a:off x="731520" y="2697480"/>
+            <a:ext cx="7223760" cy="3291840"/>
+          </a:xfrm>
+          <a:prstGeom prst="rect">
+            <a:avLst/>
+          </a:prstGeom>
+          <a:noFill/>
+          <a:ln/>
+        </p:spPr>
+        <p:txBody>
+          <a:bodyPr wrap="square" lIns="0" tIns="0" rIns="0" bIns="0" rtlCol="0" anchor="t"/>
+          <a:lstStyle/>
+          <a:p>
+            <a:pPr indent="0" marL="0">
+              <a:lnSpc>
+                <a:spcPct val="118000"/>
+              </a:lnSpc>
+              <a:spcAft>
+                <a:spcPts val="1100"/>
+              </a:spcAft>
+              <a:buNone/>
+            </a:pPr>
+            <a:r>
+              <a:rPr lang="en-US" sz="1200" b="1" dirty="0">
+                <a:solidFill>
+                  <a:srgbClr val="0B0F19"/>
+                </a:solidFill>
+                <a:latin typeface="Inter" pitchFamily="34" charset="0"/>
+                <a:ea typeface="Inter" pitchFamily="34" charset="-122"/>
+                <a:cs typeface="Inter" pitchFamily="34" charset="-120"/>
+              </a:rPr>
+              <a:t>C'est un second passage. </a:t>
+            </a:r>
+            <a:pPr indent="0" marL="0">
+              <a:lnSpc>
+                <a:spcPct val="118000"/>
+              </a:lnSpc>
+              <a:spcAft>
+                <a:spcPts val="1100"/>
+              </a:spcAft>
+              <a:buNone/>
+            </a:pPr>
+            <a:r>
+              <a:rPr lang="en-US" sz="1200" dirty="0">
+                <a:solidFill>
+                  <a:srgbClr val="3D4556"/>
+                </a:solidFill>
+                <a:latin typeface="Inter" pitchFamily="34" charset="0"/>
+                <a:ea typeface="Inter" pitchFamily="34" charset="-122"/>
+                <a:cs typeface="Inter" pitchFamily="34" charset="-120"/>
+              </a:rPr>
+              <a:t>Vous recomptez une zone que quelqu'un d'autre a déjà comptée. Le superviseur vous dit laquelle et quand.</a:t>
+            </a:r>
+            <a:endParaRPr lang="en-US" sz="1200" dirty="0"/>
+          </a:p>
+          <a:p>
+            <a:pPr indent="0" marL="0">
+              <a:lnSpc>
+                <a:spcPct val="118000"/>
+              </a:lnSpc>
+              <a:spcAft>
+                <a:spcPts val="1100"/>
+              </a:spcAft>
+              <a:buNone/>
+            </a:pPr>
+            <a:r>
+              <a:rPr lang="en-US" sz="1200" b="1" dirty="0">
+                <a:solidFill>
+                  <a:srgbClr val="0B0F19"/>
+                </a:solidFill>
+                <a:latin typeface="Inter" pitchFamily="34" charset="0"/>
+                <a:ea typeface="Inter" pitchFamily="34" charset="-122"/>
+                <a:cs typeface="Inter" pitchFamily="34" charset="-120"/>
+              </a:rPr>
+              <a:t>L'écran change de couleur. </a:t>
+            </a:r>
+            <a:pPr indent="0" marL="0">
+              <a:lnSpc>
+                <a:spcPct val="118000"/>
+              </a:lnSpc>
+              <a:spcAft>
+                <a:spcPts val="1100"/>
+              </a:spcAft>
+              <a:buNone/>
+            </a:pPr>
+            <a:r>
+              <a:rPr lang="en-US" sz="1200" dirty="0">
+                <a:solidFill>
+                  <a:srgbClr val="3D4556"/>
+                </a:solidFill>
+                <a:latin typeface="Inter" pitchFamily="34" charset="0"/>
+                <a:ea typeface="Inter" pitchFamily="34" charset="-122"/>
+                <a:cs typeface="Inter" pitchFamily="34" charset="-120"/>
+              </a:rPr>
+              <a:t>Ambre au lieu de violet, du bandeau au bouton. C'est le seul repère dont on a besoin pour savoir dans quel passage on est.</a:t>
+            </a:r>
+            <a:endParaRPr lang="en-US" sz="1200" dirty="0"/>
+          </a:p>
+          <a:p>
+            <a:pPr indent="0" marL="0">
+              <a:lnSpc>
+                <a:spcPct val="118000"/>
+              </a:lnSpc>
+              <a:spcAft>
+                <a:spcPts val="1100"/>
+              </a:spcAft>
+              <a:buNone/>
+            </a:pPr>
+            <a:r>
+              <a:rPr lang="en-US" sz="1200" b="1" dirty="0">
+                <a:solidFill>
+                  <a:srgbClr val="0B0F19"/>
+                </a:solidFill>
+                <a:latin typeface="Inter" pitchFamily="34" charset="0"/>
+                <a:ea typeface="Inter" pitchFamily="34" charset="-122"/>
+                <a:cs typeface="Inter" pitchFamily="34" charset="-120"/>
+              </a:rPr>
+              <a:t>Vous ne voyez pas le premier comptage. </a:t>
+            </a:r>
+            <a:pPr indent="0" marL="0">
+              <a:lnSpc>
+                <a:spcPct val="118000"/>
+              </a:lnSpc>
+              <a:spcAft>
+                <a:spcPts val="1100"/>
+              </a:spcAft>
+              <a:buNone/>
+            </a:pPr>
+            <a:r>
+              <a:rPr lang="en-US" sz="1200" dirty="0">
+                <a:solidFill>
+                  <a:srgbClr val="3D4556"/>
+                </a:solidFill>
+                <a:latin typeface="Inter" pitchFamily="34" charset="0"/>
+                <a:ea typeface="Inter" pitchFamily="34" charset="-122"/>
+                <a:cs typeface="Inter" pitchFamily="34" charset="-120"/>
+              </a:rPr>
+              <a:t>Et c'est voulu : un second comptage influencé ne vérifie rien. L'écart se calcule après, sur le tableau de bord.</a:t>
+            </a:r>
+            <a:endParaRPr lang="en-US" sz="1200" dirty="0"/>
+          </a:p>
+          <a:p>
+            <a:pPr indent="0" marL="0">
+              <a:lnSpc>
+                <a:spcPct val="118000"/>
+              </a:lnSpc>
+              <a:spcAft>
+                <a:spcPts val="1100"/>
+              </a:spcAft>
+              <a:buNone/>
+            </a:pPr>
+            <a:r>
+              <a:rPr lang="en-US" sz="1200" b="1" dirty="0">
+                <a:solidFill>
+                  <a:srgbClr val="0B0F19"/>
+                </a:solidFill>
+                <a:latin typeface="Inter" pitchFamily="34" charset="0"/>
+                <a:ea typeface="Inter" pitchFamily="34" charset="-122"/>
+                <a:cs typeface="Inter" pitchFamily="34" charset="-120"/>
+              </a:rPr>
+              <a:t>Vous clôturez pareil. </a:t>
+            </a:r>
+            <a:pPr indent="0" marL="0">
+              <a:lnSpc>
+                <a:spcPct val="118000"/>
+              </a:lnSpc>
+              <a:spcAft>
+                <a:spcPts val="1100"/>
+              </a:spcAft>
+              <a:buNone/>
+            </a:pPr>
+            <a:r>
+              <a:rPr lang="en-US" sz="1200" dirty="0">
+                <a:solidFill>
+                  <a:srgbClr val="3D4556"/>
+                </a:solidFill>
+                <a:latin typeface="Inter" pitchFamily="34" charset="0"/>
+                <a:ea typeface="Inter" pitchFamily="34" charset="-122"/>
+                <a:cs typeface="Inter" pitchFamily="34" charset="-120"/>
+              </a:rPr>
+              <a:t>La balise passe en auditée, et les articles dont les deux comptages diffèrent remontent au superviseur.</a:t>
+            </a:r>
+            <a:endParaRPr lang="en-US" sz="1200" dirty="0"/>
+          </a:p>
+        </p:txBody>
+      </p:sp>
+      <p:sp>
+        <p:nvSpPr>
+          <p:cNvPr id="8" name="Text 5"/>
+          <p:cNvSpPr/>
+          <p:nvPr/>
+        </p:nvSpPr>
+        <p:spPr>
+          <a:xfrm>
+            <a:off x="8257032" y="1371600"/>
+            <a:ext cx="3200400" cy="365760"/>
+          </a:xfrm>
+          <a:prstGeom prst="rect">
+            <a:avLst/>
+          </a:prstGeom>
+          <a:noFill/>
+          <a:ln/>
+        </p:spPr>
+        <p:txBody>
+          <a:bodyPr wrap="square" lIns="0" tIns="0" rIns="0" bIns="0" rtlCol="0" anchor="t"/>
+          <a:lstStyle/>
+          <a:p>
+            <a:pPr indent="0" marL="0">
+              <a:lnSpc>
+                <a:spcPct val="100000"/>
+              </a:lnSpc>
+              <a:buNone/>
+            </a:pPr>
+            <a:r>
+              <a:rPr lang="en-US" sz="1350" b="1" dirty="0">
+                <a:solidFill>
+                  <a:srgbClr val="4636B0"/>
+                </a:solidFill>
+                <a:latin typeface="Sora" pitchFamily="34" charset="0"/>
+                <a:ea typeface="Sora" pitchFamily="34" charset="-122"/>
+                <a:cs typeface="Sora" pitchFamily="34" charset="-120"/>
+              </a:rPr>
+              <a:t>L'écran d'audit</a:t>
+            </a:r>
+            <a:endParaRPr lang="en-US" sz="1350" dirty="0"/>
+          </a:p>
+        </p:txBody>
+      </p:sp>
+      <p:sp>
+        <p:nvSpPr>
+          <p:cNvPr id="9" name="Text 6"/>
+          <p:cNvSpPr/>
+          <p:nvPr/>
+        </p:nvSpPr>
+        <p:spPr>
+          <a:xfrm>
+            <a:off x="8257032" y="1755648"/>
+            <a:ext cx="3200400" cy="585216"/>
+          </a:xfrm>
+          <a:prstGeom prst="rect">
+            <a:avLst/>
+          </a:prstGeom>
+          <a:noFill/>
+          <a:ln/>
+        </p:spPr>
+        <p:txBody>
+          <a:bodyPr wrap="square" lIns="0" tIns="0" rIns="0" bIns="0" rtlCol="0" anchor="t"/>
+          <a:lstStyle/>
+          <a:p>
+            <a:pPr indent="0" marL="0">
+              <a:lnSpc>
+                <a:spcPct val="115000"/>
+              </a:lnSpc>
+              <a:buNone/>
+            </a:pPr>
+            <a:r>
+              <a:rPr lang="en-US" sz="1100" dirty="0">
+                <a:solidFill>
+                  <a:srgbClr val="3D4556"/>
+                </a:solidFill>
+                <a:latin typeface="Inter" pitchFamily="34" charset="0"/>
+                <a:ea typeface="Inter" pitchFamily="34" charset="-122"/>
+                <a:cs typeface="Inter" pitchFamily="34" charset="-120"/>
+              </a:rPr>
+              <a:t>Même disposition, même bouton de clôture — seule la couleur dit le passage.</a:t>
+            </a:r>
+            <a:endParaRPr lang="en-US" sz="1100" dirty="0"/>
+          </a:p>
+        </p:txBody>
+      </p:sp>
+      <p:sp>
+        <p:nvSpPr>
+          <p:cNvPr id="10" name="Shape 7"/>
+          <p:cNvSpPr/>
+          <p:nvPr/>
+        </p:nvSpPr>
+        <p:spPr>
+          <a:xfrm>
+            <a:off x="8257032" y="2377440"/>
+            <a:ext cx="3200400" cy="3822192"/>
+          </a:xfrm>
+          <a:prstGeom prst="roundRect">
+            <a:avLst>
+              <a:gd name="adj" fmla="val 4000"/>
+            </a:avLst>
+          </a:prstGeom>
+          <a:solidFill>
+            <a:srgbClr val="FDF3E0"/>
+          </a:solidFill>
+          <a:ln w="12700">
+            <a:solidFill>
+              <a:srgbClr val="FDF3E0"/>
+            </a:solidFill>
+            <a:prstDash val="solid"/>
+          </a:ln>
+        </p:spPr>
+      </p:sp>
+      <p:pic>
+        <p:nvPicPr>
+          <p:cNvPr id="11" name="Image 1" descr="preencoded.png">    </p:cNvPr>
+          <p:cNvPicPr>
+            <a:picLocks noChangeAspect="1"/>
+          </p:cNvPicPr>
+          <p:nvPr/>
+        </p:nvPicPr>
+        <p:blipFill>
+          <a:blip r:embed="rId2"/>
+          <a:stretch>
+            <a:fillRect/>
+          </a:stretch>
+        </p:blipFill>
+        <p:spPr>
+          <a:xfrm>
+            <a:off x="8567928" y="2378273"/>
+            <a:ext cx="2578608" cy="3821359"/>
+          </a:xfrm>
+          <a:prstGeom prst="rect">
+            <a:avLst/>
+          </a:prstGeom>
+        </p:spPr>
+      </p:pic>
+      <p:sp>
+        <p:nvSpPr>
+          <p:cNvPr id="12" name="Text 8"/>
+          <p:cNvSpPr/>
+          <p:nvPr/>
+        </p:nvSpPr>
+        <p:spPr>
+          <a:xfrm>
+            <a:off x="731520" y="6400800"/>
+            <a:ext cx="6400800" cy="274320"/>
+          </a:xfrm>
+          <a:prstGeom prst="rect">
+            <a:avLst/>
+          </a:prstGeom>
+          <a:noFill/>
+          <a:ln/>
+        </p:spPr>
+        <p:txBody>
+          <a:bodyPr wrap="square" lIns="0" tIns="0" rIns="0" bIns="0" rtlCol="0" anchor="t"/>
+          <a:lstStyle/>
+          <a:p>
+            <a:pPr indent="0" marL="0">
+              <a:buNone/>
+            </a:pPr>
+            <a:r>
+              <a:rPr lang="en-US" sz="900" dirty="0">
+                <a:solidFill>
+                  <a:srgbClr val="5B6475"/>
+                </a:solidFill>
+                <a:latin typeface="Inter" pitchFamily="34" charset="0"/>
+                <a:ea typeface="Inter" pitchFamily="34" charset="-122"/>
+                <a:cs typeface="Inter" pitchFamily="34" charset="-120"/>
+              </a:rPr>
+              <a:t>Quantinvo · prise en main · août 2026</a:t>
+            </a:r>
+            <a:endParaRPr lang="en-US" sz="900" dirty="0"/>
+          </a:p>
+        </p:txBody>
+      </p:sp>
+      <p:sp>
+        <p:nvSpPr>
+          <p:cNvPr id="13" name="Text 9"/>
+          <p:cNvSpPr/>
+          <p:nvPr/>
+        </p:nvSpPr>
+        <p:spPr>
+          <a:xfrm>
+            <a:off x="11000232" y="6400800"/>
+            <a:ext cx="457200" cy="274320"/>
+          </a:xfrm>
+          <a:prstGeom prst="rect">
+            <a:avLst/>
+          </a:prstGeom>
+          <a:noFill/>
+          <a:ln/>
+        </p:spPr>
+        <p:txBody>
+          <a:bodyPr wrap="square" lIns="0" tIns="0" rIns="0" bIns="0" rtlCol="0" anchor="t"/>
+          <a:lstStyle/>
+          <a:p>
+            <a:pPr algn="r" indent="0" marL="0">
+              <a:buNone/>
+            </a:pPr>
+            <a:r>
+              <a:rPr lang="en-US" sz="900" dirty="0">
+                <a:solidFill>
+                  <a:srgbClr val="5B6475"/>
+                </a:solidFill>
+                <a:latin typeface="Inter" pitchFamily="34" charset="0"/>
+                <a:ea typeface="Inter" pitchFamily="34" charset="-122"/>
+                <a:cs typeface="Inter" pitchFamily="34" charset="-120"/>
+              </a:rPr>
+              <a:t>16</a:t>
+            </a:r>
+            <a:endParaRPr lang="en-US" sz="900" dirty="0"/>
+          </a:p>
+        </p:txBody>
+      </p:sp>
+    </p:spTree>
+  </p:cSld>
+  <p:clrMapOvr>
+    <a:masterClrMapping/>
+  </p:clrMapOvr>
+</p:sld>
+</file>
+
+<file path=ppt/slides/slide17.xml><?xml version="1.0" encoding="utf-8"?>
+<p:sld xmlns:a="http://schemas.openxmlformats.org/drawingml/2006/main" xmlns:r="http://schemas.openxmlformats.org/officeDocument/2006/relationships" xmlns:p="http://schemas.openxmlformats.org/presentationml/2006/main">
+  <p:cSld name="Slide 17">
+    <p:bg>
+      <p:bgPr>
+        <a:solidFill>
+          <a:srgbClr val="FFFFFF"/>
+        </a:solidFill>
+      </p:bgPr>
+    </p:bg>
+    <p:spTree>
+      <p:nvGrpSpPr>
+        <p:cNvPr id="1" name=""/>
+        <p:cNvGrpSpPr/>
+        <p:nvPr/>
+      </p:nvGrpSpPr>
+      <p:grpSpPr>
+        <a:xfrm>
+          <a:off x="0" y="0"/>
+          <a:ext cx="0" cy="0"/>
+          <a:chOff x="0" y="0"/>
+          <a:chExt cx="0" cy="0"/>
+        </a:xfrm>
+      </p:grpSpPr>
+      <p:pic>
+        <p:nvPicPr>
+          <p:cNvPr id="2" name="Image 0" descr="preencoded.png">    </p:cNvPr>
+          <p:cNvPicPr>
+            <a:picLocks noChangeAspect="1"/>
+          </p:cNvPicPr>
+          <p:nvPr/>
+        </p:nvPicPr>
+        <p:blipFill>
+          <a:blip r:embed="rId1"/>
+          <a:stretch>
+            <a:fillRect/>
+          </a:stretch>
+        </p:blipFill>
+        <p:spPr>
+          <a:xfrm>
+            <a:off x="731520" y="384048"/>
+            <a:ext cx="329184" cy="329184"/>
+          </a:xfrm>
+          <a:prstGeom prst="rect">
+            <a:avLst/>
+          </a:prstGeom>
+        </p:spPr>
+      </p:pic>
+      <p:sp>
+        <p:nvSpPr>
+          <p:cNvPr id="3" name="Text 0"/>
+          <p:cNvSpPr/>
+          <p:nvPr/>
+        </p:nvSpPr>
+        <p:spPr>
+          <a:xfrm>
+            <a:off x="1170432" y="347472"/>
+            <a:ext cx="2743200" cy="402336"/>
+          </a:xfrm>
+          <a:prstGeom prst="rect">
+            <a:avLst/>
+          </a:prstGeom>
+          <a:noFill/>
+          <a:ln/>
+        </p:spPr>
+        <p:txBody>
+          <a:bodyPr wrap="square" lIns="0" tIns="0" rIns="0" bIns="0" rtlCol="0" anchor="ctr"/>
+          <a:lstStyle/>
+          <a:p>
+            <a:pPr indent="0" marL="0">
+              <a:buNone/>
+            </a:pPr>
+            <a:r>
+              <a:rPr lang="en-US" sz="1600" b="1" dirty="0">
+                <a:solidFill>
+                  <a:srgbClr val="0B0F19"/>
+                </a:solidFill>
+                <a:latin typeface="Sora" pitchFamily="34" charset="0"/>
+                <a:ea typeface="Sora" pitchFamily="34" charset="-122"/>
+                <a:cs typeface="Sora" pitchFamily="34" charset="-120"/>
+              </a:rPr>
+              <a:t>Quantinvo</a:t>
+            </a:r>
+            <a:endParaRPr lang="en-US" sz="1600" dirty="0"/>
+          </a:p>
+        </p:txBody>
+      </p:sp>
+      <p:sp>
+        <p:nvSpPr>
+          <p:cNvPr id="4" name="Text 1"/>
+          <p:cNvSpPr/>
+          <p:nvPr/>
+        </p:nvSpPr>
+        <p:spPr>
+          <a:xfrm>
+            <a:off x="5971032" y="347472"/>
+            <a:ext cx="5486400" cy="402336"/>
+          </a:xfrm>
+          <a:prstGeom prst="rect">
+            <a:avLst/>
+          </a:prstGeom>
+          <a:noFill/>
+          <a:ln/>
+        </p:spPr>
+        <p:txBody>
+          <a:bodyPr wrap="square" lIns="0" tIns="0" rIns="0" bIns="0" rtlCol="0" anchor="ctr"/>
+          <a:lstStyle/>
+          <a:p>
+            <a:pPr algn="r" indent="0" marL="0">
+              <a:buNone/>
+            </a:pPr>
+            <a:r>
+              <a:rPr lang="en-US" sz="1000" dirty="0">
+                <a:solidFill>
+                  <a:srgbClr val="5B6475"/>
+                </a:solidFill>
+                <a:latin typeface="Inter" pitchFamily="34" charset="0"/>
+                <a:ea typeface="Inter" pitchFamily="34" charset="-122"/>
+                <a:cs typeface="Inter" pitchFamily="34" charset="-120"/>
+              </a:rPr>
+              <a:t>Compteur</a:t>
+            </a:r>
+            <a:endParaRPr lang="en-US" sz="1000" dirty="0"/>
+          </a:p>
+        </p:txBody>
+      </p:sp>
+      <p:sp>
+        <p:nvSpPr>
+          <p:cNvPr id="5" name="Shape 2"/>
+          <p:cNvSpPr/>
+          <p:nvPr/>
+        </p:nvSpPr>
+        <p:spPr>
+          <a:xfrm>
+            <a:off x="731520" y="877824"/>
+            <a:ext cx="10725912" cy="25603"/>
+          </a:xfrm>
+          <a:prstGeom prst="rect">
+            <a:avLst/>
+          </a:prstGeom>
+          <a:solidFill>
+            <a:srgbClr val="38C9FF"/>
+          </a:solidFill>
+          <a:ln w="12700">
+            <a:solidFill>
+              <a:srgbClr val="38C9FF"/>
+            </a:solidFill>
+            <a:prstDash val="solid"/>
+          </a:ln>
+        </p:spPr>
+      </p:sp>
+      <p:sp>
+        <p:nvSpPr>
+          <p:cNvPr id="6" name="Text 3"/>
+          <p:cNvSpPr/>
+          <p:nvPr/>
+        </p:nvSpPr>
+        <p:spPr>
+          <a:xfrm>
+            <a:off x="731520" y="1280160"/>
+            <a:ext cx="10725912" cy="822960"/>
+          </a:xfrm>
+          <a:prstGeom prst="rect">
+            <a:avLst/>
+          </a:prstGeom>
+          <a:noFill/>
+          <a:ln/>
+        </p:spPr>
+        <p:txBody>
+          <a:bodyPr wrap="square" lIns="0" tIns="0" rIns="0" bIns="0" rtlCol="0" anchor="t"/>
+          <a:lstStyle/>
+          <a:p>
+            <a:pPr indent="0" marL="0">
+              <a:lnSpc>
+                <a:spcPct val="105000"/>
+              </a:lnSpc>
+              <a:buNone/>
+            </a:pPr>
+            <a:r>
+              <a:rPr lang="en-US" sz="2600" b="1" dirty="0">
+                <a:solidFill>
+                  <a:srgbClr val="4636B0"/>
+                </a:solidFill>
+                <a:latin typeface="Sora" pitchFamily="34" charset="0"/>
+                <a:ea typeface="Sora" pitchFamily="34" charset="-122"/>
+                <a:cs typeface="Sora" pitchFamily="34" charset="-120"/>
+              </a:rPr>
+              <a:t>Vérifier que tout est bien parti.</a:t>
+            </a:r>
+            <a:endParaRPr lang="en-US" sz="2600" dirty="0"/>
+          </a:p>
+        </p:txBody>
+      </p:sp>
+      <p:sp>
+        <p:nvSpPr>
+          <p:cNvPr id="7" name="Text 4"/>
+          <p:cNvSpPr/>
+          <p:nvPr/>
+        </p:nvSpPr>
+        <p:spPr>
+          <a:xfrm>
+            <a:off x="731520" y="2011680"/>
+            <a:ext cx="3392424" cy="365760"/>
+          </a:xfrm>
+          <a:prstGeom prst="rect">
+            <a:avLst/>
+          </a:prstGeom>
+          <a:noFill/>
+          <a:ln/>
+        </p:spPr>
+        <p:txBody>
+          <a:bodyPr wrap="square" lIns="0" tIns="0" rIns="0" bIns="0" rtlCol="0" anchor="t"/>
+          <a:lstStyle/>
+          <a:p>
+            <a:pPr indent="0" marL="0">
+              <a:lnSpc>
+                <a:spcPct val="100000"/>
+              </a:lnSpc>
+              <a:buNone/>
+            </a:pPr>
+            <a:r>
+              <a:rPr lang="en-US" sz="1350" b="1" dirty="0">
+                <a:solidFill>
+                  <a:srgbClr val="4636B0"/>
+                </a:solidFill>
+                <a:latin typeface="Sora" pitchFamily="34" charset="0"/>
+                <a:ea typeface="Sora" pitchFamily="34" charset="-122"/>
+                <a:cs typeface="Sora" pitchFamily="34" charset="-120"/>
+              </a:rPr>
+              <a:t>Vos totaux, en haut</a:t>
+            </a:r>
+            <a:endParaRPr lang="en-US" sz="1350" dirty="0"/>
+          </a:p>
+        </p:txBody>
+      </p:sp>
+      <p:sp>
+        <p:nvSpPr>
+          <p:cNvPr id="8" name="Text 5"/>
+          <p:cNvSpPr/>
+          <p:nvPr/>
+        </p:nvSpPr>
+        <p:spPr>
+          <a:xfrm>
+            <a:off x="731520" y="2395728"/>
+            <a:ext cx="3392424" cy="585216"/>
+          </a:xfrm>
+          <a:prstGeom prst="rect">
+            <a:avLst/>
+          </a:prstGeom>
+          <a:noFill/>
+          <a:ln/>
+        </p:spPr>
+        <p:txBody>
+          <a:bodyPr wrap="square" lIns="0" tIns="0" rIns="0" bIns="0" rtlCol="0" anchor="t"/>
+          <a:lstStyle/>
+          <a:p>
+            <a:pPr indent="0" marL="0">
+              <a:lnSpc>
+                <a:spcPct val="115000"/>
+              </a:lnSpc>
+              <a:buNone/>
+            </a:pPr>
+            <a:r>
+              <a:rPr lang="en-US" sz="1100" dirty="0">
+                <a:solidFill>
+                  <a:srgbClr val="3D4556"/>
+                </a:solidFill>
+                <a:latin typeface="Inter" pitchFamily="34" charset="0"/>
+                <a:ea typeface="Inter" pitchFamily="34" charset="-122"/>
+                <a:cs typeface="Inter" pitchFamily="34" charset="-120"/>
+              </a:rPr>
+              <a:t>Pièces comptées et auditées, à jour à chaque retour du scanner. Si le chiffre bouge, c'est arrivé.</a:t>
+            </a:r>
+            <a:endParaRPr lang="en-US" sz="1100" dirty="0"/>
+          </a:p>
+        </p:txBody>
+      </p:sp>
+      <p:sp>
+        <p:nvSpPr>
+          <p:cNvPr id="9" name="Shape 6"/>
+          <p:cNvSpPr/>
+          <p:nvPr/>
+        </p:nvSpPr>
+        <p:spPr>
+          <a:xfrm>
+            <a:off x="731520" y="3017520"/>
+            <a:ext cx="3392424" cy="3182112"/>
+          </a:xfrm>
+          <a:prstGeom prst="roundRect">
+            <a:avLst>
+              <a:gd name="adj" fmla="val 4023"/>
+            </a:avLst>
+          </a:prstGeom>
+          <a:solidFill>
+            <a:srgbClr val="F4F5F9"/>
+          </a:solidFill>
+          <a:ln w="12700">
+            <a:solidFill>
+              <a:srgbClr val="F4F5F9"/>
+            </a:solidFill>
+            <a:prstDash val="solid"/>
+          </a:ln>
+        </p:spPr>
+      </p:sp>
+      <p:pic>
+        <p:nvPicPr>
+          <p:cNvPr id="10" name="Image 1" descr="preencoded.png">    </p:cNvPr>
+          <p:cNvPicPr>
+            <a:picLocks noChangeAspect="1"/>
+          </p:cNvPicPr>
+          <p:nvPr/>
+        </p:nvPicPr>
+        <p:blipFill>
+          <a:blip r:embed="rId2"/>
+          <a:stretch>
+            <a:fillRect/>
+          </a:stretch>
+        </p:blipFill>
+        <p:spPr>
+          <a:xfrm>
+            <a:off x="1042416" y="3015797"/>
+            <a:ext cx="2770632" cy="3183835"/>
+          </a:xfrm>
+          <a:prstGeom prst="rect">
+            <a:avLst/>
+          </a:prstGeom>
+        </p:spPr>
+      </p:pic>
+      <p:sp>
+        <p:nvSpPr>
+          <p:cNvPr id="11" name="Text 7"/>
+          <p:cNvSpPr/>
+          <p:nvPr/>
+        </p:nvSpPr>
+        <p:spPr>
+          <a:xfrm>
+            <a:off x="4398264" y="2011680"/>
+            <a:ext cx="3392424" cy="365760"/>
+          </a:xfrm>
+          <a:prstGeom prst="rect">
+            <a:avLst/>
+          </a:prstGeom>
+          <a:noFill/>
+          <a:ln/>
+        </p:spPr>
+        <p:txBody>
+          <a:bodyPr wrap="square" lIns="0" tIns="0" rIns="0" bIns="0" rtlCol="0" anchor="t"/>
+          <a:lstStyle/>
+          <a:p>
+            <a:pPr indent="0" marL="0">
+              <a:lnSpc>
+                <a:spcPct val="100000"/>
+              </a:lnSpc>
+              <a:buNone/>
+            </a:pPr>
+            <a:r>
+              <a:rPr lang="en-US" sz="1350" b="1" dirty="0">
+                <a:solidFill>
+                  <a:srgbClr val="4636B0"/>
+                </a:solidFill>
+                <a:latin typeface="Sora" pitchFamily="34" charset="0"/>
+                <a:ea typeface="Sora" pitchFamily="34" charset="-122"/>
+                <a:cs typeface="Sora" pitchFamily="34" charset="-120"/>
+              </a:rPr>
+              <a:t>Le détail, balise par balise</a:t>
+            </a:r>
+            <a:endParaRPr lang="en-US" sz="1350" dirty="0"/>
+          </a:p>
+        </p:txBody>
+      </p:sp>
+      <p:sp>
+        <p:nvSpPr>
+          <p:cNvPr id="12" name="Text 8"/>
+          <p:cNvSpPr/>
+          <p:nvPr/>
+        </p:nvSpPr>
+        <p:spPr>
+          <a:xfrm>
+            <a:off x="4398264" y="2395728"/>
+            <a:ext cx="3392424" cy="585216"/>
+          </a:xfrm>
+          <a:prstGeom prst="rect">
+            <a:avLst/>
+          </a:prstGeom>
+          <a:noFill/>
+          <a:ln/>
+        </p:spPr>
+        <p:txBody>
+          <a:bodyPr wrap="square" lIns="0" tIns="0" rIns="0" bIns="0" rtlCol="0" anchor="t"/>
+          <a:lstStyle/>
+          <a:p>
+            <a:pPr indent="0" marL="0">
+              <a:lnSpc>
+                <a:spcPct val="115000"/>
+              </a:lnSpc>
+              <a:buNone/>
+            </a:pPr>
+            <a:r>
+              <a:rPr lang="en-US" sz="1100" dirty="0">
+                <a:solidFill>
+                  <a:srgbClr val="3D4556"/>
+                </a:solidFill>
+                <a:latin typeface="Inter" pitchFamily="34" charset="0"/>
+                <a:ea typeface="Inter" pitchFamily="34" charset="-122"/>
+                <a:cs typeface="Inter" pitchFamily="34" charset="-120"/>
+              </a:rPr>
+              <a:t>Touchez une balise : les articles, leur code, leur quantité, telles qu'elles sont arrivées.</a:t>
+            </a:r>
+            <a:endParaRPr lang="en-US" sz="1100" dirty="0"/>
+          </a:p>
+        </p:txBody>
+      </p:sp>
+      <p:sp>
+        <p:nvSpPr>
+          <p:cNvPr id="13" name="Shape 9"/>
+          <p:cNvSpPr/>
+          <p:nvPr/>
+        </p:nvSpPr>
+        <p:spPr>
+          <a:xfrm>
+            <a:off x="4398264" y="3017520"/>
+            <a:ext cx="3392424" cy="3182112"/>
+          </a:xfrm>
+          <a:prstGeom prst="roundRect">
+            <a:avLst>
+              <a:gd name="adj" fmla="val 4023"/>
+            </a:avLst>
+          </a:prstGeom>
+          <a:solidFill>
+            <a:srgbClr val="F4F5F9"/>
+          </a:solidFill>
+          <a:ln w="12700">
+            <a:solidFill>
+              <a:srgbClr val="F4F5F9"/>
+            </a:solidFill>
+            <a:prstDash val="solid"/>
+          </a:ln>
+        </p:spPr>
+      </p:sp>
+      <p:pic>
+        <p:nvPicPr>
+          <p:cNvPr id="14" name="Image 2" descr="preencoded.png">    </p:cNvPr>
+          <p:cNvPicPr>
+            <a:picLocks noChangeAspect="1"/>
+          </p:cNvPicPr>
+          <p:nvPr/>
+        </p:nvPicPr>
+        <p:blipFill>
+          <a:blip r:embed="rId3"/>
+          <a:stretch>
+            <a:fillRect/>
+          </a:stretch>
+        </p:blipFill>
+        <p:spPr>
+          <a:xfrm>
+            <a:off x="4709160" y="3015797"/>
+            <a:ext cx="2770632" cy="3183835"/>
+          </a:xfrm>
+          <a:prstGeom prst="rect">
+            <a:avLst/>
+          </a:prstGeom>
+        </p:spPr>
+      </p:pic>
+      <p:sp>
+        <p:nvSpPr>
+          <p:cNvPr id="15" name="Text 10"/>
+          <p:cNvSpPr/>
+          <p:nvPr/>
+        </p:nvSpPr>
+        <p:spPr>
+          <a:xfrm>
+            <a:off x="8065008" y="2011680"/>
+            <a:ext cx="3392424" cy="365760"/>
+          </a:xfrm>
+          <a:prstGeom prst="rect">
+            <a:avLst/>
+          </a:prstGeom>
+          <a:noFill/>
+          <a:ln/>
+        </p:spPr>
+        <p:txBody>
+          <a:bodyPr wrap="square" lIns="0" tIns="0" rIns="0" bIns="0" rtlCol="0" anchor="t"/>
+          <a:lstStyle/>
+          <a:p>
+            <a:pPr indent="0" marL="0">
+              <a:lnSpc>
+                <a:spcPct val="100000"/>
+              </a:lnSpc>
+              <a:buNone/>
+            </a:pPr>
+            <a:r>
+              <a:rPr lang="en-US" sz="1350" b="1" dirty="0">
+                <a:solidFill>
+                  <a:srgbClr val="4636B0"/>
+                </a:solidFill>
+                <a:latin typeface="Sora" pitchFamily="34" charset="0"/>
+                <a:ea typeface="Sora" pitchFamily="34" charset="-122"/>
+                <a:cs typeface="Sora" pitchFamily="34" charset="-120"/>
+              </a:rPr>
+              <a:t>Hors ligne, rien n’est perdu</a:t>
+            </a:r>
+            <a:endParaRPr lang="en-US" sz="1350" dirty="0"/>
+          </a:p>
+        </p:txBody>
+      </p:sp>
+      <p:sp>
+        <p:nvSpPr>
+          <p:cNvPr id="16" name="Text 11"/>
+          <p:cNvSpPr/>
+          <p:nvPr/>
+        </p:nvSpPr>
+        <p:spPr>
+          <a:xfrm>
+            <a:off x="8065008" y="2395728"/>
+            <a:ext cx="3392424" cy="585216"/>
+          </a:xfrm>
+          <a:prstGeom prst="rect">
+            <a:avLst/>
+          </a:prstGeom>
+          <a:noFill/>
+          <a:ln/>
+        </p:spPr>
+        <p:txBody>
+          <a:bodyPr wrap="square" lIns="0" tIns="0" rIns="0" bIns="0" rtlCol="0" anchor="t"/>
+          <a:lstStyle/>
+          <a:p>
+            <a:pPr indent="0" marL="0">
+              <a:lnSpc>
+                <a:spcPct val="115000"/>
+              </a:lnSpc>
+              <a:buNone/>
+            </a:pPr>
+            <a:r>
+              <a:rPr lang="en-US" sz="1100" dirty="0">
+                <a:solidFill>
+                  <a:srgbClr val="3D4556"/>
+                </a:solidFill>
+                <a:latin typeface="Inter" pitchFamily="34" charset="0"/>
+                <a:ea typeface="Inter" pitchFamily="34" charset="-122"/>
+                <a:cs typeface="Inter" pitchFamily="34" charset="-120"/>
+              </a:rPr>
+              <a:t>En réserve, les scans attendent sur l'appareil et partent seuls au retour du réseau.</a:t>
+            </a:r>
+            <a:endParaRPr lang="en-US" sz="1100" dirty="0"/>
+          </a:p>
+        </p:txBody>
+      </p:sp>
+      <p:sp>
+        <p:nvSpPr>
+          <p:cNvPr id="17" name="Shape 12"/>
+          <p:cNvSpPr/>
+          <p:nvPr/>
+        </p:nvSpPr>
+        <p:spPr>
+          <a:xfrm>
+            <a:off x="8065008" y="3017520"/>
+            <a:ext cx="3392424" cy="3182112"/>
+          </a:xfrm>
+          <a:prstGeom prst="roundRect">
+            <a:avLst>
+              <a:gd name="adj" fmla="val 4023"/>
+            </a:avLst>
+          </a:prstGeom>
+          <a:solidFill>
+            <a:srgbClr val="F4F5F9"/>
+          </a:solidFill>
+          <a:ln w="12700">
+            <a:solidFill>
+              <a:srgbClr val="F4F5F9"/>
+            </a:solidFill>
+            <a:prstDash val="solid"/>
+          </a:ln>
+        </p:spPr>
+      </p:sp>
+      <p:pic>
+        <p:nvPicPr>
+          <p:cNvPr id="18" name="Image 3" descr="preencoded.png">    </p:cNvPr>
+          <p:cNvPicPr>
+            <a:picLocks noChangeAspect="1"/>
+          </p:cNvPicPr>
+          <p:nvPr/>
+        </p:nvPicPr>
+        <p:blipFill>
+          <a:blip r:embed="rId4"/>
+          <a:stretch>
+            <a:fillRect/>
+          </a:stretch>
+        </p:blipFill>
+        <p:spPr>
+          <a:xfrm>
+            <a:off x="8375904" y="3015797"/>
+            <a:ext cx="2770632" cy="3183835"/>
+          </a:xfrm>
+          <a:prstGeom prst="rect">
+            <a:avLst/>
+          </a:prstGeom>
+        </p:spPr>
+      </p:pic>
+      <p:sp>
+        <p:nvSpPr>
+          <p:cNvPr id="19" name="Text 13"/>
+          <p:cNvSpPr/>
+          <p:nvPr/>
+        </p:nvSpPr>
+        <p:spPr>
+          <a:xfrm>
+            <a:off x="731520" y="6400800"/>
+            <a:ext cx="6400800" cy="274320"/>
+          </a:xfrm>
+          <a:prstGeom prst="rect">
+            <a:avLst/>
+          </a:prstGeom>
+          <a:noFill/>
+          <a:ln/>
+        </p:spPr>
+        <p:txBody>
+          <a:bodyPr wrap="square" lIns="0" tIns="0" rIns="0" bIns="0" rtlCol="0" anchor="t"/>
+          <a:lstStyle/>
+          <a:p>
+            <a:pPr indent="0" marL="0">
+              <a:buNone/>
+            </a:pPr>
+            <a:r>
+              <a:rPr lang="en-US" sz="900" dirty="0">
+                <a:solidFill>
+                  <a:srgbClr val="5B6475"/>
+                </a:solidFill>
+                <a:latin typeface="Inter" pitchFamily="34" charset="0"/>
+                <a:ea typeface="Inter" pitchFamily="34" charset="-122"/>
+                <a:cs typeface="Inter" pitchFamily="34" charset="-120"/>
+              </a:rPr>
+              <a:t>Quantinvo · prise en main · août 2026</a:t>
+            </a:r>
+            <a:endParaRPr lang="en-US" sz="900" dirty="0"/>
+          </a:p>
+        </p:txBody>
+      </p:sp>
+      <p:sp>
+        <p:nvSpPr>
+          <p:cNvPr id="20" name="Text 14"/>
+          <p:cNvSpPr/>
+          <p:nvPr/>
+        </p:nvSpPr>
+        <p:spPr>
+          <a:xfrm>
+            <a:off x="11000232" y="6400800"/>
+            <a:ext cx="457200" cy="274320"/>
+          </a:xfrm>
+          <a:prstGeom prst="rect">
+            <a:avLst/>
+          </a:prstGeom>
+          <a:noFill/>
+          <a:ln/>
+        </p:spPr>
+        <p:txBody>
+          <a:bodyPr wrap="square" lIns="0" tIns="0" rIns="0" bIns="0" rtlCol="0" anchor="t"/>
+          <a:lstStyle/>
+          <a:p>
+            <a:pPr algn="r" indent="0" marL="0">
+              <a:buNone/>
+            </a:pPr>
+            <a:r>
+              <a:rPr lang="en-US" sz="900" dirty="0">
+                <a:solidFill>
+                  <a:srgbClr val="5B6475"/>
+                </a:solidFill>
+                <a:latin typeface="Inter" pitchFamily="34" charset="0"/>
+                <a:ea typeface="Inter" pitchFamily="34" charset="-122"/>
+                <a:cs typeface="Inter" pitchFamily="34" charset="-120"/>
+              </a:rPr>
+              <a:t>17</a:t>
+            </a:r>
+            <a:endParaRPr lang="en-US" sz="900" dirty="0"/>
+          </a:p>
+        </p:txBody>
+      </p:sp>
+    </p:spTree>
+  </p:cSld>
+  <p:clrMapOvr>
+    <a:masterClrMapping/>
+  </p:clrMapOvr>
+</p:sld>
+</file>
+
+<file path=ppt/slides/slide18.xml><?xml version="1.0" encoding="utf-8"?>
+<p:sld xmlns:a="http://schemas.openxmlformats.org/drawingml/2006/main" xmlns:r="http://schemas.openxmlformats.org/officeDocument/2006/relationships" xmlns:p="http://schemas.openxmlformats.org/presentationml/2006/main">
+  <p:cSld name="Slide 18">
+    <p:bg>
+      <p:bgPr>
+        <a:solidFill>
+          <a:srgbClr val="FFFFFF"/>
+        </a:solidFill>
+      </p:bgPr>
+    </p:bg>
+    <p:spTree>
+      <p:nvGrpSpPr>
+        <p:cNvPr id="1" name=""/>
+        <p:cNvGrpSpPr/>
+        <p:nvPr/>
+      </p:nvGrpSpPr>
+      <p:grpSpPr>
+        <a:xfrm>
+          <a:off x="0" y="0"/>
+          <a:ext cx="0" cy="0"/>
+          <a:chOff x="0" y="0"/>
+          <a:chExt cx="0" cy="0"/>
+        </a:xfrm>
+      </p:grpSpPr>
+      <p:pic>
+        <p:nvPicPr>
+          <p:cNvPr id="2" name="Image 0" descr="preencoded.png">    </p:cNvPr>
+          <p:cNvPicPr>
+            <a:picLocks noChangeAspect="1"/>
+          </p:cNvPicPr>
+          <p:nvPr/>
+        </p:nvPicPr>
+        <p:blipFill>
+          <a:blip r:embed="rId1"/>
+          <a:stretch>
+            <a:fillRect/>
+          </a:stretch>
+        </p:blipFill>
+        <p:spPr>
+          <a:xfrm>
+            <a:off x="731520" y="384048"/>
+            <a:ext cx="329184" cy="329184"/>
+          </a:xfrm>
+          <a:prstGeom prst="rect">
+            <a:avLst/>
+          </a:prstGeom>
+        </p:spPr>
+      </p:pic>
+      <p:sp>
+        <p:nvSpPr>
+          <p:cNvPr id="3" name="Text 0"/>
+          <p:cNvSpPr/>
+          <p:nvPr/>
+        </p:nvSpPr>
+        <p:spPr>
+          <a:xfrm>
+            <a:off x="1170432" y="347472"/>
+            <a:ext cx="2743200" cy="402336"/>
+          </a:xfrm>
+          <a:prstGeom prst="rect">
+            <a:avLst/>
+          </a:prstGeom>
+          <a:noFill/>
+          <a:ln/>
+        </p:spPr>
+        <p:txBody>
+          <a:bodyPr wrap="square" lIns="0" tIns="0" rIns="0" bIns="0" rtlCol="0" anchor="ctr"/>
+          <a:lstStyle/>
+          <a:p>
+            <a:pPr indent="0" marL="0">
+              <a:buNone/>
+            </a:pPr>
+            <a:r>
+              <a:rPr lang="en-US" sz="1600" b="1" dirty="0">
+                <a:solidFill>
+                  <a:srgbClr val="0B0F19"/>
+                </a:solidFill>
+                <a:latin typeface="Sora" pitchFamily="34" charset="0"/>
+                <a:ea typeface="Sora" pitchFamily="34" charset="-122"/>
+                <a:cs typeface="Sora" pitchFamily="34" charset="-120"/>
+              </a:rPr>
+              <a:t>Quantinvo</a:t>
+            </a:r>
+            <a:endParaRPr lang="en-US" sz="1600" dirty="0"/>
+          </a:p>
+        </p:txBody>
+      </p:sp>
+      <p:sp>
+        <p:nvSpPr>
+          <p:cNvPr id="4" name="Text 1"/>
+          <p:cNvSpPr/>
+          <p:nvPr/>
+        </p:nvSpPr>
+        <p:spPr>
+          <a:xfrm>
+            <a:off x="5971032" y="347472"/>
+            <a:ext cx="5486400" cy="402336"/>
+          </a:xfrm>
+          <a:prstGeom prst="rect">
+            <a:avLst/>
+          </a:prstGeom>
+          <a:noFill/>
+          <a:ln/>
+        </p:spPr>
+        <p:txBody>
+          <a:bodyPr wrap="square" lIns="0" tIns="0" rIns="0" bIns="0" rtlCol="0" anchor="ctr"/>
+          <a:lstStyle/>
+          <a:p>
+            <a:pPr algn="r" indent="0" marL="0">
+              <a:buNone/>
+            </a:pPr>
+            <a:r>
+              <a:rPr lang="en-US" sz="1000" dirty="0">
+                <a:solidFill>
+                  <a:srgbClr val="5B6475"/>
+                </a:solidFill>
+                <a:latin typeface="Inter" pitchFamily="34" charset="0"/>
+                <a:ea typeface="Inter" pitchFamily="34" charset="-122"/>
+                <a:cs typeface="Inter" pitchFamily="34" charset="-120"/>
+              </a:rPr>
+              <a:t>Compteur</a:t>
+            </a:r>
+            <a:endParaRPr lang="en-US" sz="1000" dirty="0"/>
+          </a:p>
+        </p:txBody>
+      </p:sp>
+      <p:sp>
+        <p:nvSpPr>
+          <p:cNvPr id="5" name="Shape 2"/>
+          <p:cNvSpPr/>
+          <p:nvPr/>
+        </p:nvSpPr>
+        <p:spPr>
+          <a:xfrm>
+            <a:off x="731520" y="877824"/>
+            <a:ext cx="10725912" cy="25603"/>
+          </a:xfrm>
+          <a:prstGeom prst="rect">
+            <a:avLst/>
+          </a:prstGeom>
+          <a:solidFill>
+            <a:srgbClr val="38C9FF"/>
+          </a:solidFill>
+          <a:ln w="12700">
+            <a:solidFill>
+              <a:srgbClr val="38C9FF"/>
+            </a:solidFill>
+            <a:prstDash val="solid"/>
+          </a:ln>
+        </p:spPr>
+      </p:sp>
+      <p:sp>
+        <p:nvSpPr>
+          <p:cNvPr id="6" name="Text 3"/>
+          <p:cNvSpPr/>
+          <p:nvPr/>
+        </p:nvSpPr>
+        <p:spPr>
+          <a:xfrm>
+            <a:off x="731520" y="1325880"/>
+            <a:ext cx="4206240" cy="2011680"/>
+          </a:xfrm>
+          <a:prstGeom prst="rect">
+            <a:avLst/>
+          </a:prstGeom>
+          <a:noFill/>
+          <a:ln/>
+        </p:spPr>
+        <p:txBody>
+          <a:bodyPr wrap="square" lIns="0" tIns="0" rIns="0" bIns="0" rtlCol="0" anchor="t"/>
+          <a:lstStyle/>
+          <a:p>
+            <a:pPr indent="0" marL="0">
+              <a:lnSpc>
+                <a:spcPct val="105000"/>
+              </a:lnSpc>
+              <a:buNone/>
+            </a:pPr>
+            <a:r>
+              <a:rPr lang="en-US" sz="2600" b="1" dirty="0">
+                <a:solidFill>
+                  <a:srgbClr val="4636B0"/>
+                </a:solidFill>
+                <a:latin typeface="Sora" pitchFamily="34" charset="0"/>
+                <a:ea typeface="Sora" pitchFamily="34" charset="-122"/>
+                <a:cs typeface="Sora" pitchFamily="34" charset="-120"/>
+              </a:rPr>
+              <a:t>Quand ça ne se passe pas comme prévu.</a:t>
+            </a:r>
+            <a:endParaRPr lang="en-US" sz="2600" dirty="0"/>
+          </a:p>
+        </p:txBody>
+      </p:sp>
+      <p:sp>
+        <p:nvSpPr>
+          <p:cNvPr id="7" name="Text 4"/>
+          <p:cNvSpPr/>
+          <p:nvPr/>
+        </p:nvSpPr>
+        <p:spPr>
+          <a:xfrm>
+            <a:off x="731520" y="2651760"/>
+            <a:ext cx="7223760" cy="365760"/>
+          </a:xfrm>
+          <a:prstGeom prst="rect">
+            <a:avLst/>
+          </a:prstGeom>
+          <a:noFill/>
+          <a:ln/>
+        </p:spPr>
+        <p:txBody>
+          <a:bodyPr wrap="square" lIns="0" tIns="0" rIns="0" bIns="0" rtlCol="0" anchor="t"/>
+          <a:lstStyle/>
+          <a:p>
+            <a:pPr indent="0" marL="0">
+              <a:buNone/>
+            </a:pPr>
+            <a:r>
+              <a:rPr lang="en-US" sz="1300" b="1" dirty="0">
+                <a:solidFill>
+                  <a:srgbClr val="0B0F19"/>
+                </a:solidFill>
+                <a:latin typeface="Sora" pitchFamily="34" charset="0"/>
+                <a:ea typeface="Sora" pitchFamily="34" charset="-122"/>
+                <a:cs typeface="Sora" pitchFamily="34" charset="-120"/>
+              </a:rPr>
+              <a:t>« Balise hors plage »</a:t>
+            </a:r>
+            <a:endParaRPr lang="en-US" sz="1300" dirty="0"/>
+          </a:p>
+        </p:txBody>
+      </p:sp>
+      <p:sp>
+        <p:nvSpPr>
+          <p:cNvPr id="8" name="Text 5"/>
+          <p:cNvSpPr/>
+          <p:nvPr/>
+        </p:nvSpPr>
+        <p:spPr>
+          <a:xfrm>
+            <a:off x="731520" y="2980944"/>
+            <a:ext cx="7223760" cy="685800"/>
+          </a:xfrm>
+          <a:prstGeom prst="rect">
+            <a:avLst/>
+          </a:prstGeom>
+          <a:noFill/>
+          <a:ln/>
+        </p:spPr>
+        <p:txBody>
+          <a:bodyPr wrap="square" lIns="0" tIns="0" rIns="0" bIns="0" rtlCol="0" anchor="t"/>
+          <a:lstStyle/>
+          <a:p>
+            <a:pPr indent="0" marL="0">
+              <a:lnSpc>
+                <a:spcPct val="112000"/>
+              </a:lnSpc>
+              <a:buNone/>
+            </a:pPr>
+            <a:r>
+              <a:rPr lang="en-US" sz="1100" dirty="0">
+                <a:solidFill>
+                  <a:srgbClr val="3D4556"/>
+                </a:solidFill>
+                <a:latin typeface="Inter" pitchFamily="34" charset="0"/>
+                <a:ea typeface="Inter" pitchFamily="34" charset="-122"/>
+                <a:cs typeface="Inter" pitchFamily="34" charset="-120"/>
+              </a:rPr>
+              <a:t>Le numéro n'est dans aucune plage. Si l'étiquette est bien collée dans ce magasin, touchez « Ajouter » : la zone est créée, le superviseur la nommera. Sinon, vérifiez le numéro.</a:t>
+            </a:r>
+            <a:endParaRPr lang="en-US" sz="1100" dirty="0"/>
+          </a:p>
+        </p:txBody>
+      </p:sp>
+      <p:sp>
+        <p:nvSpPr>
+          <p:cNvPr id="9" name="Text 6"/>
+          <p:cNvSpPr/>
+          <p:nvPr/>
+        </p:nvSpPr>
+        <p:spPr>
+          <a:xfrm>
+            <a:off x="731520" y="3584448"/>
+            <a:ext cx="7223760" cy="365760"/>
+          </a:xfrm>
+          <a:prstGeom prst="rect">
+            <a:avLst/>
+          </a:prstGeom>
+          <a:noFill/>
+          <a:ln/>
+        </p:spPr>
+        <p:txBody>
+          <a:bodyPr wrap="square" lIns="0" tIns="0" rIns="0" bIns="0" rtlCol="0" anchor="t"/>
+          <a:lstStyle/>
+          <a:p>
+            <a:pPr indent="0" marL="0">
+              <a:buNone/>
+            </a:pPr>
+            <a:r>
+              <a:rPr lang="en-US" sz="1300" b="1" dirty="0">
+                <a:solidFill>
+                  <a:srgbClr val="0B0F19"/>
+                </a:solidFill>
+                <a:latin typeface="Sora" pitchFamily="34" charset="0"/>
+                <a:ea typeface="Sora" pitchFamily="34" charset="-122"/>
+                <a:cs typeface="Sora" pitchFamily="34" charset="-120"/>
+              </a:rPr>
+              <a:t>« Article inconnu »</a:t>
+            </a:r>
+            <a:endParaRPr lang="en-US" sz="1300" dirty="0"/>
+          </a:p>
+        </p:txBody>
+      </p:sp>
+      <p:sp>
+        <p:nvSpPr>
+          <p:cNvPr id="10" name="Text 7"/>
+          <p:cNvSpPr/>
+          <p:nvPr/>
+        </p:nvSpPr>
+        <p:spPr>
+          <a:xfrm>
+            <a:off x="731520" y="3913632"/>
+            <a:ext cx="7223760" cy="685800"/>
+          </a:xfrm>
+          <a:prstGeom prst="rect">
+            <a:avLst/>
+          </a:prstGeom>
+          <a:noFill/>
+          <a:ln/>
+        </p:spPr>
+        <p:txBody>
+          <a:bodyPr wrap="square" lIns="0" tIns="0" rIns="0" bIns="0" rtlCol="0" anchor="t"/>
+          <a:lstStyle/>
+          <a:p>
+            <a:pPr indent="0" marL="0">
+              <a:lnSpc>
+                <a:spcPct val="112000"/>
+              </a:lnSpc>
+              <a:buNone/>
+            </a:pPr>
+            <a:r>
+              <a:rPr lang="en-US" sz="1100" dirty="0">
+                <a:solidFill>
+                  <a:srgbClr val="3D4556"/>
+                </a:solidFill>
+                <a:latin typeface="Inter" pitchFamily="34" charset="0"/>
+                <a:ea typeface="Inter" pitchFamily="34" charset="-122"/>
+                <a:cs typeface="Inter" pitchFamily="34" charset="-120"/>
+              </a:rPr>
+              <a:t>Il n'est pas dans le référentiel. Ajoutez-le avec un libellé : il entrera dans le rapport avec un prix d'achat à zéro, que le superviseur complétera.</a:t>
+            </a:r>
+            <a:endParaRPr lang="en-US" sz="1100" dirty="0"/>
+          </a:p>
+        </p:txBody>
+      </p:sp>
+      <p:sp>
+        <p:nvSpPr>
+          <p:cNvPr id="11" name="Text 8"/>
+          <p:cNvSpPr/>
+          <p:nvPr/>
+        </p:nvSpPr>
+        <p:spPr>
+          <a:xfrm>
+            <a:off x="731520" y="4517136"/>
+            <a:ext cx="7223760" cy="365760"/>
+          </a:xfrm>
+          <a:prstGeom prst="rect">
+            <a:avLst/>
+          </a:prstGeom>
+          <a:noFill/>
+          <a:ln/>
+        </p:spPr>
+        <p:txBody>
+          <a:bodyPr wrap="square" lIns="0" tIns="0" rIns="0" bIns="0" rtlCol="0" anchor="t"/>
+          <a:lstStyle/>
+          <a:p>
+            <a:pPr indent="0" marL="0">
+              <a:buNone/>
+            </a:pPr>
+            <a:r>
+              <a:rPr lang="en-US" sz="1300" b="1" dirty="0">
+                <a:solidFill>
+                  <a:srgbClr val="0B0F19"/>
+                </a:solidFill>
+                <a:latin typeface="Sora" pitchFamily="34" charset="0"/>
+                <a:ea typeface="Sora" pitchFamily="34" charset="-122"/>
+                <a:cs typeface="Sora" pitchFamily="34" charset="-120"/>
+              </a:rPr>
+              <a:t>Plus de réseau</a:t>
+            </a:r>
+            <a:endParaRPr lang="en-US" sz="1300" dirty="0"/>
+          </a:p>
+        </p:txBody>
+      </p:sp>
+      <p:sp>
+        <p:nvSpPr>
+          <p:cNvPr id="12" name="Text 9"/>
+          <p:cNvSpPr/>
+          <p:nvPr/>
+        </p:nvSpPr>
+        <p:spPr>
+          <a:xfrm>
+            <a:off x="731520" y="4846320"/>
+            <a:ext cx="7223760" cy="685800"/>
+          </a:xfrm>
+          <a:prstGeom prst="rect">
+            <a:avLst/>
+          </a:prstGeom>
+          <a:noFill/>
+          <a:ln/>
+        </p:spPr>
+        <p:txBody>
+          <a:bodyPr wrap="square" lIns="0" tIns="0" rIns="0" bIns="0" rtlCol="0" anchor="t"/>
+          <a:lstStyle/>
+          <a:p>
+            <a:pPr indent="0" marL="0">
+              <a:lnSpc>
+                <a:spcPct val="112000"/>
+              </a:lnSpc>
+              <a:buNone/>
+            </a:pPr>
+            <a:r>
+              <a:rPr lang="en-US" sz="1100" dirty="0">
+                <a:solidFill>
+                  <a:srgbClr val="3D4556"/>
+                </a:solidFill>
+                <a:latin typeface="Inter" pitchFamily="34" charset="0"/>
+                <a:ea typeface="Inter" pitchFamily="34" charset="-122"/>
+                <a:cs typeface="Inter" pitchFamily="34" charset="-120"/>
+              </a:rPr>
+              <a:t>Continuez à compter. Tout part au retour du réseau. Ne désinstallez pas l'application, et ne laissez pas effacer le téléphone avant que ce soit parti.</a:t>
+            </a:r>
+            <a:endParaRPr lang="en-US" sz="1100" dirty="0"/>
+          </a:p>
+        </p:txBody>
+      </p:sp>
+      <p:sp>
+        <p:nvSpPr>
+          <p:cNvPr id="13" name="Text 10"/>
+          <p:cNvSpPr/>
+          <p:nvPr/>
+        </p:nvSpPr>
+        <p:spPr>
+          <a:xfrm>
+            <a:off x="731520" y="5449824"/>
+            <a:ext cx="7223760" cy="365760"/>
+          </a:xfrm>
+          <a:prstGeom prst="rect">
+            <a:avLst/>
+          </a:prstGeom>
+          <a:noFill/>
+          <a:ln/>
+        </p:spPr>
+        <p:txBody>
+          <a:bodyPr wrap="square" lIns="0" tIns="0" rIns="0" bIns="0" rtlCol="0" anchor="t"/>
+          <a:lstStyle/>
+          <a:p>
+            <a:pPr indent="0" marL="0">
+              <a:buNone/>
+            </a:pPr>
+            <a:r>
+              <a:rPr lang="en-US" sz="1300" b="1" dirty="0">
+                <a:solidFill>
+                  <a:srgbClr val="0B0F19"/>
+                </a:solidFill>
+                <a:latin typeface="Sora" pitchFamily="34" charset="0"/>
+                <a:ea typeface="Sora" pitchFamily="34" charset="-122"/>
+                <a:cs typeface="Sora" pitchFamily="34" charset="-120"/>
+              </a:rPr>
+              <a:t>Vous changez de téléphone</a:t>
+            </a:r>
+            <a:endParaRPr lang="en-US" sz="1300" dirty="0"/>
+          </a:p>
+        </p:txBody>
+      </p:sp>
+      <p:sp>
+        <p:nvSpPr>
+          <p:cNvPr id="14" name="Text 11"/>
+          <p:cNvSpPr/>
+          <p:nvPr/>
+        </p:nvSpPr>
+        <p:spPr>
+          <a:xfrm>
+            <a:off x="731520" y="5779008"/>
+            <a:ext cx="7223760" cy="685800"/>
+          </a:xfrm>
+          <a:prstGeom prst="rect">
+            <a:avLst/>
+          </a:prstGeom>
+          <a:noFill/>
+          <a:ln/>
+        </p:spPr>
+        <p:txBody>
+          <a:bodyPr wrap="square" lIns="0" tIns="0" rIns="0" bIns="0" rtlCol="0" anchor="t"/>
+          <a:lstStyle/>
+          <a:p>
+            <a:pPr indent="0" marL="0">
+              <a:lnSpc>
+                <a:spcPct val="112000"/>
+              </a:lnSpc>
+              <a:buNone/>
+            </a:pPr>
+            <a:r>
+              <a:rPr lang="en-US" sz="1100" dirty="0">
+                <a:solidFill>
+                  <a:srgbClr val="3D4556"/>
+                </a:solidFill>
+                <a:latin typeface="Inter" pitchFamily="34" charset="0"/>
+                <a:ea typeface="Inter" pitchFamily="34" charset="-122"/>
+                <a:cs typeface="Inter" pitchFamily="34" charset="-120"/>
+              </a:rPr>
+              <a:t>Reconnectez-vous : ce qui est déjà parti est sur le serveur. Ce qui attendait sur l'ancien partira quand il retrouvera du réseau.</a:t>
+            </a:r>
+            <a:endParaRPr lang="en-US" sz="1100" dirty="0"/>
+          </a:p>
+        </p:txBody>
+      </p:sp>
+      <p:sp>
+        <p:nvSpPr>
+          <p:cNvPr id="15" name="Text 12"/>
+          <p:cNvSpPr/>
+          <p:nvPr/>
+        </p:nvSpPr>
+        <p:spPr>
+          <a:xfrm>
+            <a:off x="8257032" y="1371600"/>
+            <a:ext cx="3200400" cy="365760"/>
+          </a:xfrm>
+          <a:prstGeom prst="rect">
+            <a:avLst/>
+          </a:prstGeom>
+          <a:noFill/>
+          <a:ln/>
+        </p:spPr>
+        <p:txBody>
+          <a:bodyPr wrap="square" lIns="0" tIns="0" rIns="0" bIns="0" rtlCol="0" anchor="t"/>
+          <a:lstStyle/>
+          <a:p>
+            <a:pPr indent="0" marL="0">
+              <a:lnSpc>
+                <a:spcPct val="100000"/>
+              </a:lnSpc>
+              <a:buNone/>
+            </a:pPr>
+            <a:r>
+              <a:rPr lang="en-US" sz="1350" b="1" dirty="0">
+                <a:solidFill>
+                  <a:srgbClr val="4636B0"/>
+                </a:solidFill>
+                <a:latin typeface="Sora" pitchFamily="34" charset="0"/>
+                <a:ea typeface="Sora" pitchFamily="34" charset="-122"/>
+                <a:cs typeface="Sora" pitchFamily="34" charset="-120"/>
+              </a:rPr>
+              <a:t>Une balise inconnue se rattrape</a:t>
+            </a:r>
+            <a:endParaRPr lang="en-US" sz="1350" dirty="0"/>
+          </a:p>
+        </p:txBody>
+      </p:sp>
+      <p:sp>
+        <p:nvSpPr>
+          <p:cNvPr id="16" name="Text 13"/>
+          <p:cNvSpPr/>
+          <p:nvPr/>
+        </p:nvSpPr>
+        <p:spPr>
+          <a:xfrm>
+            <a:off x="8257032" y="1755648"/>
+            <a:ext cx="3200400" cy="585216"/>
+          </a:xfrm>
+          <a:prstGeom prst="rect">
+            <a:avLst/>
+          </a:prstGeom>
+          <a:noFill/>
+          <a:ln/>
+        </p:spPr>
+        <p:txBody>
+          <a:bodyPr wrap="square" lIns="0" tIns="0" rIns="0" bIns="0" rtlCol="0" anchor="t"/>
+          <a:lstStyle/>
+          <a:p>
+            <a:pPr indent="0" marL="0">
+              <a:lnSpc>
+                <a:spcPct val="115000"/>
+              </a:lnSpc>
+              <a:buNone/>
+            </a:pPr>
+            <a:r>
+              <a:rPr lang="en-US" sz="1100" dirty="0">
+                <a:solidFill>
+                  <a:srgbClr val="3D4556"/>
+                </a:solidFill>
+                <a:latin typeface="Inter" pitchFamily="34" charset="0"/>
+                <a:ea typeface="Inter" pitchFamily="34" charset="-122"/>
+                <a:cs typeface="Inter" pitchFamily="34" charset="-120"/>
+              </a:rPr>
+              <a:t>L'alerte ne bloque pas : elle propose d'ajouter la balise et de compter tout de suite.</a:t>
+            </a:r>
+            <a:endParaRPr lang="en-US" sz="1100" dirty="0"/>
+          </a:p>
+        </p:txBody>
+      </p:sp>
+      <p:sp>
+        <p:nvSpPr>
+          <p:cNvPr id="17" name="Shape 14"/>
+          <p:cNvSpPr/>
+          <p:nvPr/>
+        </p:nvSpPr>
+        <p:spPr>
+          <a:xfrm>
+            <a:off x="8257032" y="2377440"/>
+            <a:ext cx="3200400" cy="3822192"/>
+          </a:xfrm>
+          <a:prstGeom prst="roundRect">
+            <a:avLst>
+              <a:gd name="adj" fmla="val 4000"/>
+            </a:avLst>
+          </a:prstGeom>
+          <a:solidFill>
+            <a:srgbClr val="F4F5F9"/>
+          </a:solidFill>
+          <a:ln w="12700">
+            <a:solidFill>
+              <a:srgbClr val="F4F5F9"/>
+            </a:solidFill>
+            <a:prstDash val="solid"/>
+          </a:ln>
+        </p:spPr>
+      </p:sp>
+      <p:pic>
+        <p:nvPicPr>
+          <p:cNvPr id="18" name="Image 1" descr="preencoded.png">    </p:cNvPr>
+          <p:cNvPicPr>
+            <a:picLocks noChangeAspect="1"/>
+          </p:cNvPicPr>
+          <p:nvPr/>
+        </p:nvPicPr>
+        <p:blipFill>
+          <a:blip r:embed="rId2"/>
+          <a:stretch>
+            <a:fillRect/>
+          </a:stretch>
+        </p:blipFill>
+        <p:spPr>
+          <a:xfrm>
+            <a:off x="8567928" y="2378273"/>
+            <a:ext cx="2578608" cy="3821359"/>
+          </a:xfrm>
+          <a:prstGeom prst="rect">
+            <a:avLst/>
+          </a:prstGeom>
+        </p:spPr>
+      </p:pic>
+      <p:sp>
+        <p:nvSpPr>
+          <p:cNvPr id="19" name="Text 15"/>
+          <p:cNvSpPr/>
+          <p:nvPr/>
+        </p:nvSpPr>
+        <p:spPr>
+          <a:xfrm>
+            <a:off x="731520" y="6400800"/>
+            <a:ext cx="6400800" cy="274320"/>
+          </a:xfrm>
+          <a:prstGeom prst="rect">
+            <a:avLst/>
+          </a:prstGeom>
+          <a:noFill/>
+          <a:ln/>
+        </p:spPr>
+        <p:txBody>
+          <a:bodyPr wrap="square" lIns="0" tIns="0" rIns="0" bIns="0" rtlCol="0" anchor="t"/>
+          <a:lstStyle/>
+          <a:p>
+            <a:pPr indent="0" marL="0">
+              <a:buNone/>
+            </a:pPr>
+            <a:r>
+              <a:rPr lang="en-US" sz="900" dirty="0">
+                <a:solidFill>
+                  <a:srgbClr val="5B6475"/>
+                </a:solidFill>
+                <a:latin typeface="Inter" pitchFamily="34" charset="0"/>
+                <a:ea typeface="Inter" pitchFamily="34" charset="-122"/>
+                <a:cs typeface="Inter" pitchFamily="34" charset="-120"/>
+              </a:rPr>
+              <a:t>Quantinvo · prise en main · août 2026</a:t>
+            </a:r>
+            <a:endParaRPr lang="en-US" sz="900" dirty="0"/>
+          </a:p>
+        </p:txBody>
+      </p:sp>
+      <p:sp>
+        <p:nvSpPr>
+          <p:cNvPr id="20" name="Text 16"/>
+          <p:cNvSpPr/>
+          <p:nvPr/>
+        </p:nvSpPr>
+        <p:spPr>
+          <a:xfrm>
+            <a:off x="11000232" y="6400800"/>
+            <a:ext cx="457200" cy="274320"/>
+          </a:xfrm>
+          <a:prstGeom prst="rect">
+            <a:avLst/>
+          </a:prstGeom>
+          <a:noFill/>
+          <a:ln/>
+        </p:spPr>
+        <p:txBody>
+          <a:bodyPr wrap="square" lIns="0" tIns="0" rIns="0" bIns="0" rtlCol="0" anchor="t"/>
+          <a:lstStyle/>
+          <a:p>
+            <a:pPr algn="r" indent="0" marL="0">
+              <a:buNone/>
+            </a:pPr>
+            <a:r>
+              <a:rPr lang="en-US" sz="900" dirty="0">
+                <a:solidFill>
+                  <a:srgbClr val="5B6475"/>
+                </a:solidFill>
+                <a:latin typeface="Inter" pitchFamily="34" charset="0"/>
+                <a:ea typeface="Inter" pitchFamily="34" charset="-122"/>
+                <a:cs typeface="Inter" pitchFamily="34" charset="-120"/>
+              </a:rPr>
+              <a:t>18</a:t>
+            </a:r>
+            <a:endParaRPr lang="en-US" sz="900" dirty="0"/>
+          </a:p>
+        </p:txBody>
+      </p:sp>
+    </p:spTree>
+  </p:cSld>
+  <p:clrMapOvr>
+    <a:masterClrMapping/>
+  </p:clrMapOvr>
+</p:sld>
+</file>
+
+<file path=ppt/slides/slide19.xml><?xml version="1.0" encoding="utf-8"?>
+<p:sld xmlns:a="http://schemas.openxmlformats.org/drawingml/2006/main" xmlns:r="http://schemas.openxmlformats.org/officeDocument/2006/relationships" xmlns:p="http://schemas.openxmlformats.org/presentationml/2006/main">
+  <p:cSld name="Slide 19">
+    <p:bg>
+      <p:bgPr>
+        <a:solidFill>
+          <a:srgbClr val="FFFFFF"/>
+        </a:solidFill>
+      </p:bgPr>
+    </p:bg>
+    <p:spTree>
+      <p:nvGrpSpPr>
+        <p:cNvPr id="1" name=""/>
+        <p:cNvGrpSpPr/>
+        <p:nvPr/>
+      </p:nvGrpSpPr>
+      <p:grpSpPr>
+        <a:xfrm>
+          <a:off x="0" y="0"/>
+          <a:ext cx="0" cy="0"/>
+          <a:chOff x="0" y="0"/>
+          <a:chExt cx="0" cy="0"/>
+        </a:xfrm>
+      </p:grpSpPr>
+      <p:pic>
+        <p:nvPicPr>
+          <p:cNvPr id="2" name="Image 0" descr="preencoded.png">    </p:cNvPr>
+          <p:cNvPicPr>
+            <a:picLocks noChangeAspect="1"/>
+          </p:cNvPicPr>
+          <p:nvPr/>
+        </p:nvPicPr>
+        <p:blipFill>
+          <a:blip r:embed="rId1"/>
+          <a:stretch>
+            <a:fillRect/>
+          </a:stretch>
+        </p:blipFill>
+        <p:spPr>
+          <a:xfrm>
+            <a:off x="731520" y="685800"/>
+            <a:ext cx="566928" cy="566928"/>
+          </a:xfrm>
+          <a:prstGeom prst="rect">
+            <a:avLst/>
+          </a:prstGeom>
+        </p:spPr>
+      </p:pic>
+      <p:sp>
+        <p:nvSpPr>
+          <p:cNvPr id="3" name="Text 0"/>
+          <p:cNvSpPr/>
+          <p:nvPr/>
+        </p:nvSpPr>
+        <p:spPr>
+          <a:xfrm>
+            <a:off x="1444752" y="658368"/>
+            <a:ext cx="4572000" cy="621792"/>
+          </a:xfrm>
+          <a:prstGeom prst="rect">
+            <a:avLst/>
+          </a:prstGeom>
+          <a:noFill/>
+          <a:ln/>
+        </p:spPr>
+        <p:txBody>
+          <a:bodyPr wrap="square" lIns="0" tIns="0" rIns="0" bIns="0" rtlCol="0" anchor="ctr"/>
+          <a:lstStyle/>
+          <a:p>
+            <a:pPr indent="0" marL="0">
+              <a:buNone/>
+            </a:pPr>
+            <a:r>
+              <a:rPr lang="en-US" sz="2400" b="1" dirty="0">
+                <a:solidFill>
+                  <a:srgbClr val="0B0F19"/>
+                </a:solidFill>
+                <a:latin typeface="Sora" pitchFamily="34" charset="0"/>
+                <a:ea typeface="Sora" pitchFamily="34" charset="-122"/>
+                <a:cs typeface="Sora" pitchFamily="34" charset="-120"/>
+              </a:rPr>
+              <a:t>Quantinvo</a:t>
+            </a:r>
+            <a:endParaRPr lang="en-US" sz="2400" dirty="0"/>
+          </a:p>
+        </p:txBody>
+      </p:sp>
+      <p:sp>
+        <p:nvSpPr>
+          <p:cNvPr id="4" name="Shape 1"/>
+          <p:cNvSpPr/>
+          <p:nvPr/>
+        </p:nvSpPr>
+        <p:spPr>
+          <a:xfrm>
+            <a:off x="731520" y="1481328"/>
+            <a:ext cx="2377440" cy="25603"/>
+          </a:xfrm>
+          <a:prstGeom prst="rect">
+            <a:avLst/>
+          </a:prstGeom>
+          <a:solidFill>
+            <a:srgbClr val="38C9FF"/>
+          </a:solidFill>
+          <a:ln w="12700">
+            <a:solidFill>
+              <a:srgbClr val="38C9FF"/>
+            </a:solidFill>
+            <a:prstDash val="solid"/>
+          </a:ln>
+        </p:spPr>
+      </p:sp>
+      <p:sp>
+        <p:nvSpPr>
+          <p:cNvPr id="5" name="Text 2"/>
+          <p:cNvSpPr/>
+          <p:nvPr/>
+        </p:nvSpPr>
+        <p:spPr>
+          <a:xfrm>
+            <a:off x="731520" y="2377440"/>
+            <a:ext cx="8686800" cy="1188720"/>
+          </a:xfrm>
+          <a:prstGeom prst="rect">
+            <a:avLst/>
+          </a:prstGeom>
+          <a:noFill/>
+          <a:ln/>
+        </p:spPr>
+        <p:txBody>
+          <a:bodyPr wrap="square" lIns="0" tIns="0" rIns="0" bIns="0" rtlCol="0" anchor="t"/>
+          <a:lstStyle/>
+          <a:p>
+            <a:pPr indent="0" marL="0">
+              <a:lnSpc>
+                <a:spcPct val="105000"/>
+              </a:lnSpc>
+              <a:buNone/>
+            </a:pPr>
+            <a:r>
+              <a:rPr lang="en-US" sz="3600" b="1" dirty="0">
+                <a:solidFill>
+                  <a:srgbClr val="4636B0"/>
+                </a:solidFill>
+                <a:latin typeface="Sora" pitchFamily="34" charset="0"/>
+                <a:ea typeface="Sora" pitchFamily="34" charset="-122"/>
+                <a:cs typeface="Sora" pitchFamily="34" charset="-120"/>
+              </a:rPr>
               <a:t>Le matin de l'inventaire.</a:t>
             </a:r>
             <a:endParaRPr lang="en-US" sz="3600" dirty="0"/>
@@ -6146,7 +8177,7 @@
                 <a:ea typeface="Inter" pitchFamily="34" charset="-122"/>
                 <a:cs typeface="Inter" pitchFamily="34" charset="-120"/>
               </a:rPr>
-              <a:t>Les balises sont collées. Les deux fichiers sont importés et l'en-tête de Set up dit « Prêt ». L'équipe est invitée et chacun s'est connecté une fois. Les téléphones sont chargés, le réseau a été essayé en réserve. Le superviseur a le tableau de bord ouvert. On peut compter.</a:t>
+              <a:t>Les balises sont collées et affectées. Les deux fichiers sont importés. L'équipe est invitée et chacun s'est connecté une fois. Les téléphones sont chargés, le réseau a été essayé en réserve. Le superviseur a le tableau de bord ouvert. On peut compter.</a:t>
             </a:r>
             <a:endParaRPr lang="en-US" sz="1450" dirty="0"/>
           </a:p>
@@ -6185,7 +8216,7 @@
                 <a:ea typeface="Sora" pitchFamily="34" charset="-122"/>
                 <a:cs typeface="Sora" pitchFamily="34" charset="-120"/>
               </a:rPr>
-              <a:t>Une question : contact@quantinvo.com</a:t>
+              <a:t>Une question : contact@quantinvo.com</a:t>
             </a:r>
             <a:endParaRPr lang="en-US" sz="1500" dirty="0"/>
           </a:p>
@@ -6467,7 +8498,7 @@
                 <a:ea typeface="Inter" pitchFamily="34" charset="-122"/>
                 <a:cs typeface="Inter" pitchFamily="34" charset="-120"/>
               </a:rPr>
-              <a:t>Le rôle est fixé à l'invitation. Un compteur n'a pas accès au site ; un superviseur a les deux.</a:t>
+              <a:t>Le rôle est fixé à l'invitation. Un compteur n'a pas accès au site ; un superviseur a les deux.</a:t>
             </a:r>
             <a:endParaRPr lang="en-US" sz="1200" dirty="0"/>
           </a:p>
@@ -6730,7 +8761,7 @@
                 <a:ea typeface="Inter" pitchFamily="34" charset="-122"/>
                 <a:cs typeface="Inter" pitchFamily="34" charset="-120"/>
               </a:rPr>
-              <a:t>Il prépare l'inventaire (balises, fichiers, équipe), le suit pendant qu'il se déroule, arbitre les écarts et clôture. Il peut compter lui-même. Ce guide lui consacre six pages.</a:t>
+              <a:t>Il prépare l'inventaire (balises, fichiers, équipe), le suit pendant qu'il se déroule, arbitre les écarts et clôture. Il peut compter lui-même. Ce guide lui consacre sept pages.</a:t>
             </a:r>
             <a:endParaRPr lang="en-US" sz="1200" dirty="0"/>
           </a:p>
@@ -6873,7 +8904,7 @@
                 <a:ea typeface="Inter" pitchFamily="34" charset="-122"/>
                 <a:cs typeface="Inter" pitchFamily="34" charset="-120"/>
               </a:rPr>
-              <a:t>Il ouvre l'inventaire sur son téléphone, scanne la balise du rayon, puis les articles. Il peut aussi auditer, c'est-à-dire recompter une zone déjà comptée par quelqu'un d'autre. Trois pages lui suffisent.</a:t>
+              <a:t>Il ouvre l'inventaire sur son téléphone, scanne la balise du rayon, puis les articles. Il peut aussi auditer, c'est-à-dire recompter une zone déjà comptée par quelqu'un d'autre. Cinq pages lui suffisent.</a:t>
             </a:r>
             <a:endParaRPr lang="en-US" sz="1200" dirty="0"/>
           </a:p>
@@ -7147,8 +9178,8 @@
         </p:nvSpPr>
         <p:spPr>
           <a:xfrm>
-            <a:off x="731520" y="1325880"/>
-            <a:ext cx="4206240" cy="2011680"/>
+            <a:off x="731520" y="1280160"/>
+            <a:ext cx="10725912" cy="822960"/>
           </a:xfrm>
           <a:prstGeom prst="rect">
             <a:avLst/>
@@ -7175,7 +9206,7 @@
                 <a:ea typeface="Sora" pitchFamily="34" charset="-122"/>
                 <a:cs typeface="Sora" pitchFamily="34" charset="-120"/>
               </a:rPr>
-              <a:t>Votre premier accès. Personne ne s’inscrit : on vous invite.</a:t>
+              <a:t>Votre premier accès. Personne ne s’inscrit : on vous invite.</a:t>
             </a:r>
             <a:endParaRPr lang="en-US" sz="2600" dirty="0"/>
           </a:p>
@@ -7189,134 +9220,185 @@
         </p:nvSpPr>
         <p:spPr>
           <a:xfrm>
-            <a:off x="731520" y="3474720"/>
-            <a:ext cx="4206240" cy="1280160"/>
-          </a:xfrm>
-          <a:prstGeom prst="rect">
-            <a:avLst/>
-          </a:prstGeom>
-          <a:noFill/>
-          <a:ln/>
-        </p:spPr>
-        <p:txBody>
-          <a:bodyPr wrap="square" lIns="0" tIns="0" rIns="0" bIns="0" rtlCol="0" anchor="t"/>
-          <a:lstStyle/>
-          <a:p>
-            <a:pPr algn="l" indent="0" marL="0">
+            <a:off x="731520" y="2011680"/>
+            <a:ext cx="3392424" cy="365760"/>
+          </a:xfrm>
+          <a:prstGeom prst="rect">
+            <a:avLst/>
+          </a:prstGeom>
+          <a:noFill/>
+          <a:ln/>
+        </p:spPr>
+        <p:txBody>
+          <a:bodyPr wrap="square" lIns="0" tIns="0" rIns="0" bIns="0" rtlCol="0" anchor="t"/>
+          <a:lstStyle/>
+          <a:p>
+            <a:pPr indent="0" marL="0">
               <a:lnSpc>
-                <a:spcPct val="118000"/>
+                <a:spcPct val="100000"/>
               </a:lnSpc>
               <a:buNone/>
             </a:pPr>
             <a:r>
-              <a:rPr lang="en-US" sz="1200" dirty="0">
-                <a:solidFill>
-                  <a:srgbClr val="3D4556"/>
-                </a:solidFill>
-                <a:latin typeface="Inter" pitchFamily="34" charset="0"/>
-                <a:ea typeface="Inter" pitchFamily="34" charset="-122"/>
-                <a:cs typeface="Inter" pitchFamily="34" charset="-120"/>
-              </a:rPr>
-              <a:t>Si vous n'avez pas reçu d'e-mail, regardez dans les indésirables, puis demandez à la personne qui vous a ajouté : elle voit sur son écran si l'invitation est partie.</a:t>
-            </a:r>
-            <a:endParaRPr lang="en-US" sz="1200" dirty="0"/>
-          </a:p>
-        </p:txBody>
-      </p:sp>
-      <p:sp>
-        <p:nvSpPr>
-          <p:cNvPr id="8" name="Text 5"/>
-          <p:cNvSpPr/>
-          <p:nvPr/>
-        </p:nvSpPr>
-        <p:spPr>
-          <a:xfrm>
-            <a:off x="5394960" y="1389888"/>
-            <a:ext cx="329184" cy="329184"/>
-          </a:xfrm>
-          <a:prstGeom prst="ellipse">
-            <a:avLst/>
-          </a:prstGeom>
-          <a:solidFill>
-            <a:srgbClr val="4636B0"/>
-          </a:solidFill>
-          <a:ln>
-            <a:solidFill>
-              <a:srgbClr val="4636B0"/>
-            </a:solidFill>
-          </a:ln>
-        </p:spPr>
-        <p:txBody>
-          <a:bodyPr wrap="square" lIns="0" tIns="0" rIns="0" bIns="0" rtlCol="0" anchor="ctr"/>
-          <a:lstStyle/>
-          <a:p>
-            <a:pPr algn="ctr" indent="0" marL="0">
-              <a:buNone/>
-            </a:pPr>
-            <a:r>
-              <a:rPr lang="en-US" sz="1000" b="1" dirty="0">
-                <a:solidFill>
-                  <a:srgbClr val="FFFFFF"/>
+              <a:rPr lang="en-US" sz="1350" b="1" dirty="0">
+                <a:solidFill>
+                  <a:srgbClr val="4636B0"/>
                 </a:solidFill>
                 <a:latin typeface="Sora" pitchFamily="34" charset="0"/>
                 <a:ea typeface="Sora" pitchFamily="34" charset="-122"/>
                 <a:cs typeface="Sora" pitchFamily="34" charset="-120"/>
               </a:rPr>
-              <a:t>1</a:t>
-            </a:r>
-            <a:endParaRPr lang="en-US" sz="1000" dirty="0"/>
-          </a:p>
-        </p:txBody>
-      </p:sp>
-      <p:sp>
-        <p:nvSpPr>
-          <p:cNvPr id="9" name="Text 6"/>
-          <p:cNvSpPr/>
-          <p:nvPr/>
-        </p:nvSpPr>
-        <p:spPr>
-          <a:xfrm>
-            <a:off x="5897880" y="1371600"/>
-            <a:ext cx="5559552" cy="292608"/>
-          </a:xfrm>
-          <a:prstGeom prst="rect">
-            <a:avLst/>
-          </a:prstGeom>
-          <a:noFill/>
-          <a:ln/>
-        </p:spPr>
-        <p:txBody>
-          <a:bodyPr wrap="square" lIns="0" tIns="0" rIns="0" bIns="0" rtlCol="0" anchor="t"/>
-          <a:lstStyle/>
-          <a:p>
-            <a:pPr indent="0" marL="0">
-              <a:buNone/>
-            </a:pPr>
-            <a:r>
-              <a:rPr lang="en-US" sz="1300" b="1" dirty="0">
-                <a:solidFill>
-                  <a:srgbClr val="0B0F19"/>
+              <a:t>1 — L’e-mail, puis « Bienvenue »</a:t>
+            </a:r>
+            <a:endParaRPr lang="en-US" sz="1350" dirty="0"/>
+          </a:p>
+        </p:txBody>
+      </p:sp>
+      <p:sp>
+        <p:nvSpPr>
+          <p:cNvPr id="8" name="Text 5"/>
+          <p:cNvSpPr/>
+          <p:nvPr/>
+        </p:nvSpPr>
+        <p:spPr>
+          <a:xfrm>
+            <a:off x="731520" y="2395728"/>
+            <a:ext cx="3392424" cy="585216"/>
+          </a:xfrm>
+          <a:prstGeom prst="rect">
+            <a:avLst/>
+          </a:prstGeom>
+          <a:noFill/>
+          <a:ln/>
+        </p:spPr>
+        <p:txBody>
+          <a:bodyPr wrap="square" lIns="0" tIns="0" rIns="0" bIns="0" rtlCol="0" anchor="t"/>
+          <a:lstStyle/>
+          <a:p>
+            <a:pPr indent="0" marL="0">
+              <a:lnSpc>
+                <a:spcPct val="115000"/>
+              </a:lnSpc>
+              <a:buNone/>
+            </a:pPr>
+            <a:r>
+              <a:rPr lang="en-US" sz="1100" dirty="0">
+                <a:solidFill>
+                  <a:srgbClr val="3D4556"/>
+                </a:solidFill>
+                <a:latin typeface="Inter" pitchFamily="34" charset="0"/>
+                <a:ea typeface="Inter" pitchFamily="34" charset="-122"/>
+                <a:cs typeface="Inter" pitchFamily="34" charset="-120"/>
+              </a:rPr>
+              <a:t>Le lien est personnel. Vous vérifiez votre nom, puis choisissez un mot de passe de douze caractères.</a:t>
+            </a:r>
+            <a:endParaRPr lang="en-US" sz="1100" dirty="0"/>
+          </a:p>
+        </p:txBody>
+      </p:sp>
+      <p:sp>
+        <p:nvSpPr>
+          <p:cNvPr id="9" name="Shape 6"/>
+          <p:cNvSpPr/>
+          <p:nvPr/>
+        </p:nvSpPr>
+        <p:spPr>
+          <a:xfrm>
+            <a:off x="731520" y="3017520"/>
+            <a:ext cx="3392424" cy="3182112"/>
+          </a:xfrm>
+          <a:prstGeom prst="roundRect">
+            <a:avLst>
+              <a:gd name="adj" fmla="val 4023"/>
+            </a:avLst>
+          </a:prstGeom>
+          <a:solidFill>
+            <a:srgbClr val="F4F5F9"/>
+          </a:solidFill>
+          <a:ln w="12700">
+            <a:solidFill>
+              <a:srgbClr val="F4F5F9"/>
+            </a:solidFill>
+            <a:prstDash val="solid"/>
+          </a:ln>
+        </p:spPr>
+      </p:sp>
+      <p:pic>
+        <p:nvPicPr>
+          <p:cNvPr id="10" name="Image 1" descr="preencoded.png">    </p:cNvPr>
+          <p:cNvPicPr>
+            <a:picLocks noChangeAspect="1"/>
+          </p:cNvPicPr>
+          <p:nvPr/>
+        </p:nvPicPr>
+        <p:blipFill>
+          <a:blip r:embed="rId2"/>
+          <a:stretch>
+            <a:fillRect/>
+          </a:stretch>
+        </p:blipFill>
+        <p:spPr>
+          <a:xfrm>
+            <a:off x="1042416" y="3015797"/>
+            <a:ext cx="2770632" cy="3183835"/>
+          </a:xfrm>
+          <a:prstGeom prst="rect">
+            <a:avLst/>
+          </a:prstGeom>
+        </p:spPr>
+      </p:pic>
+      <p:sp>
+        <p:nvSpPr>
+          <p:cNvPr id="11" name="Text 7"/>
+          <p:cNvSpPr/>
+          <p:nvPr/>
+        </p:nvSpPr>
+        <p:spPr>
+          <a:xfrm>
+            <a:off x="4398264" y="2011680"/>
+            <a:ext cx="3392424" cy="365760"/>
+          </a:xfrm>
+          <a:prstGeom prst="rect">
+            <a:avLst/>
+          </a:prstGeom>
+          <a:noFill/>
+          <a:ln/>
+        </p:spPr>
+        <p:txBody>
+          <a:bodyPr wrap="square" lIns="0" tIns="0" rIns="0" bIns="0" rtlCol="0" anchor="t"/>
+          <a:lstStyle/>
+          <a:p>
+            <a:pPr indent="0" marL="0">
+              <a:lnSpc>
+                <a:spcPct val="100000"/>
+              </a:lnSpc>
+              <a:buNone/>
+            </a:pPr>
+            <a:r>
+              <a:rPr lang="en-US" sz="1350" b="1" dirty="0">
+                <a:solidFill>
+                  <a:srgbClr val="4636B0"/>
                 </a:solidFill>
                 <a:latin typeface="Sora" pitchFamily="34" charset="0"/>
                 <a:ea typeface="Sora" pitchFamily="34" charset="-122"/>
                 <a:cs typeface="Sora" pitchFamily="34" charset="-120"/>
               </a:rPr>
-              <a:t>L'e-mail d'invitation</a:t>
-            </a:r>
-            <a:endParaRPr lang="en-US" sz="1300" dirty="0"/>
-          </a:p>
-        </p:txBody>
-      </p:sp>
-      <p:sp>
-        <p:nvSpPr>
-          <p:cNvPr id="10" name="Text 7"/>
-          <p:cNvSpPr/>
-          <p:nvPr/>
-        </p:nvSpPr>
-        <p:spPr>
-          <a:xfrm>
-            <a:off x="5897880" y="1700784"/>
-            <a:ext cx="5559552" cy="731520"/>
+              <a:t>2 — L’application se connecte</a:t>
+            </a:r>
+            <a:endParaRPr lang="en-US" sz="1350" dirty="0"/>
+          </a:p>
+        </p:txBody>
+      </p:sp>
+      <p:sp>
+        <p:nvSpPr>
+          <p:cNvPr id="12" name="Text 8"/>
+          <p:cNvSpPr/>
+          <p:nvPr/>
+        </p:nvSpPr>
+        <p:spPr>
+          <a:xfrm>
+            <a:off x="4398264" y="2395728"/>
+            <a:ext cx="3392424" cy="585216"/>
           </a:xfrm>
           <a:prstGeom prst="rect">
             <a:avLst/>
@@ -7335,7 +9417,7 @@
               <a:buNone/>
             </a:pPr>
             <a:r>
-              <a:rPr lang="en-US" sz="1150" dirty="0">
+              <a:rPr lang="en-US" sz="1100" dirty="0">
                 <a:solidFill>
                   <a:srgbClr val="3D4556"/>
                 </a:solidFill>
@@ -7343,106 +9425,115 @@
                 <a:ea typeface="Inter" pitchFamily="34" charset="-122"/>
                 <a:cs typeface="Inter" pitchFamily="34" charset="-120"/>
               </a:rPr>
-              <a:t>Il vient de Quantinvo et vous dit qui vous a ajouté. Le lien est personnel : ne le transférez pas.</a:t>
-            </a:r>
-            <a:endParaRPr lang="en-US" sz="1150" dirty="0"/>
-          </a:p>
-        </p:txBody>
-      </p:sp>
-      <p:sp>
-        <p:nvSpPr>
-          <p:cNvPr id="11" name="Text 8"/>
-          <p:cNvSpPr/>
-          <p:nvPr/>
-        </p:nvSpPr>
-        <p:spPr>
-          <a:xfrm>
-            <a:off x="5394960" y="2487168"/>
-            <a:ext cx="329184" cy="329184"/>
-          </a:xfrm>
-          <a:prstGeom prst="ellipse">
-            <a:avLst/>
+              <a:t>Elle arrive par le catalogue de votre entreprise. Adresse e-mail et mot de passe, rien d'autre.</a:t>
+            </a:r>
+            <a:endParaRPr lang="en-US" sz="1100" dirty="0"/>
+          </a:p>
+        </p:txBody>
+      </p:sp>
+      <p:sp>
+        <p:nvSpPr>
+          <p:cNvPr id="13" name="Shape 9"/>
+          <p:cNvSpPr/>
+          <p:nvPr/>
+        </p:nvSpPr>
+        <p:spPr>
+          <a:xfrm>
+            <a:off x="4398264" y="3017520"/>
+            <a:ext cx="3392424" cy="3182112"/>
+          </a:xfrm>
+          <a:prstGeom prst="roundRect">
+            <a:avLst>
+              <a:gd name="adj" fmla="val 4023"/>
+            </a:avLst>
           </a:prstGeom>
           <a:solidFill>
-            <a:srgbClr val="4636B0"/>
+            <a:srgbClr val="F4F5F9"/>
           </a:solidFill>
-          <a:ln>
+          <a:ln w="12700">
             <a:solidFill>
-              <a:srgbClr val="4636B0"/>
+              <a:srgbClr val="F4F5F9"/>
             </a:solidFill>
+            <a:prstDash val="solid"/>
           </a:ln>
         </p:spPr>
-        <p:txBody>
-          <a:bodyPr wrap="square" lIns="0" tIns="0" rIns="0" bIns="0" rtlCol="0" anchor="ctr"/>
-          <a:lstStyle/>
-          <a:p>
-            <a:pPr algn="ctr" indent="0" marL="0">
-              <a:buNone/>
-            </a:pPr>
-            <a:r>
-              <a:rPr lang="en-US" sz="1000" b="1" dirty="0">
-                <a:solidFill>
-                  <a:srgbClr val="FFFFFF"/>
+      </p:sp>
+      <p:pic>
+        <p:nvPicPr>
+          <p:cNvPr id="14" name="Image 2" descr="preencoded.png">    </p:cNvPr>
+          <p:cNvPicPr>
+            <a:picLocks noChangeAspect="1"/>
+          </p:cNvPicPr>
+          <p:nvPr/>
+        </p:nvPicPr>
+        <p:blipFill>
+          <a:blip r:embed="rId3"/>
+          <a:stretch>
+            <a:fillRect/>
+          </a:stretch>
+        </p:blipFill>
+        <p:spPr>
+          <a:xfrm>
+            <a:off x="4709160" y="3015797"/>
+            <a:ext cx="2770632" cy="3183835"/>
+          </a:xfrm>
+          <a:prstGeom prst="rect">
+            <a:avLst/>
+          </a:prstGeom>
+        </p:spPr>
+      </p:pic>
+      <p:sp>
+        <p:nvSpPr>
+          <p:cNvPr id="15" name="Text 10"/>
+          <p:cNvSpPr/>
+          <p:nvPr/>
+        </p:nvSpPr>
+        <p:spPr>
+          <a:xfrm>
+            <a:off x="8065008" y="2011680"/>
+            <a:ext cx="3392424" cy="365760"/>
+          </a:xfrm>
+          <a:prstGeom prst="rect">
+            <a:avLst/>
+          </a:prstGeom>
+          <a:noFill/>
+          <a:ln/>
+        </p:spPr>
+        <p:txBody>
+          <a:bodyPr wrap="square" lIns="0" tIns="0" rIns="0" bIns="0" rtlCol="0" anchor="t"/>
+          <a:lstStyle/>
+          <a:p>
+            <a:pPr indent="0" marL="0">
+              <a:lnSpc>
+                <a:spcPct val="100000"/>
+              </a:lnSpc>
+              <a:buNone/>
+            </a:pPr>
+            <a:r>
+              <a:rPr lang="en-US" sz="1350" b="1" dirty="0">
+                <a:solidFill>
+                  <a:srgbClr val="4636B0"/>
                 </a:solidFill>
                 <a:latin typeface="Sora" pitchFamily="34" charset="0"/>
                 <a:ea typeface="Sora" pitchFamily="34" charset="-122"/>
                 <a:cs typeface="Sora" pitchFamily="34" charset="-120"/>
               </a:rPr>
-              <a:t>2</a:t>
-            </a:r>
-            <a:endParaRPr lang="en-US" sz="1000" dirty="0"/>
-          </a:p>
-        </p:txBody>
-      </p:sp>
-      <p:sp>
-        <p:nvSpPr>
-          <p:cNvPr id="12" name="Text 9"/>
-          <p:cNvSpPr/>
-          <p:nvPr/>
-        </p:nvSpPr>
-        <p:spPr>
-          <a:xfrm>
-            <a:off x="5897880" y="2468880"/>
-            <a:ext cx="5559552" cy="292608"/>
-          </a:xfrm>
-          <a:prstGeom prst="rect">
-            <a:avLst/>
-          </a:prstGeom>
-          <a:noFill/>
-          <a:ln/>
-        </p:spPr>
-        <p:txBody>
-          <a:bodyPr wrap="square" lIns="0" tIns="0" rIns="0" bIns="0" rtlCol="0" anchor="t"/>
-          <a:lstStyle/>
-          <a:p>
-            <a:pPr indent="0" marL="0">
-              <a:buNone/>
-            </a:pPr>
-            <a:r>
-              <a:rPr lang="en-US" sz="1300" b="1" dirty="0">
-                <a:solidFill>
-                  <a:srgbClr val="0B0F19"/>
-                </a:solidFill>
-                <a:latin typeface="Sora" pitchFamily="34" charset="0"/>
-                <a:ea typeface="Sora" pitchFamily="34" charset="-122"/>
-                <a:cs typeface="Sora" pitchFamily="34" charset="-120"/>
-              </a:rPr>
-              <a:t>La page « Bienvenue »</a:t>
-            </a:r>
-            <a:endParaRPr lang="en-US" sz="1300" dirty="0"/>
-          </a:p>
-        </p:txBody>
-      </p:sp>
-      <p:sp>
-        <p:nvSpPr>
-          <p:cNvPr id="13" name="Text 10"/>
-          <p:cNvSpPr/>
-          <p:nvPr/>
-        </p:nvSpPr>
-        <p:spPr>
-          <a:xfrm>
-            <a:off x="5897880" y="2798064"/>
-            <a:ext cx="5559552" cy="731520"/>
+              <a:t>3 — Si vous le voulez, un second code</a:t>
+            </a:r>
+            <a:endParaRPr lang="en-US" sz="1350" dirty="0"/>
+          </a:p>
+        </p:txBody>
+      </p:sp>
+      <p:sp>
+        <p:nvSpPr>
+          <p:cNvPr id="16" name="Text 11"/>
+          <p:cNvSpPr/>
+          <p:nvPr/>
+        </p:nvSpPr>
+        <p:spPr>
+          <a:xfrm>
+            <a:off x="8065008" y="2395728"/>
+            <a:ext cx="3392424" cy="585216"/>
           </a:xfrm>
           <a:prstGeom prst="rect">
             <a:avLst/>
@@ -7461,7 +9552,7 @@
               <a:buNone/>
             </a:pPr>
             <a:r>
-              <a:rPr lang="en-US" sz="1150" dirty="0">
+              <a:rPr lang="en-US" sz="1100" dirty="0">
                 <a:solidFill>
                   <a:srgbClr val="3D4556"/>
                 </a:solidFill>
@@ -7469,267 +9560,66 @@
                 <a:ea typeface="Inter" pitchFamily="34" charset="-122"/>
                 <a:cs typeface="Inter" pitchFamily="34" charset="-120"/>
               </a:rPr>
-              <a:t>Vérifiez votre prénom et votre nom, puis choisissez un mot de passe : douze caractères au moins, avec une majuscule, une minuscule, un chiffre et un symbole. Un mot de passe connu des fuites publiques est refusé.</a:t>
-            </a:r>
-            <a:endParaRPr lang="en-US" sz="1150" dirty="0"/>
-          </a:p>
-        </p:txBody>
-      </p:sp>
-      <p:sp>
-        <p:nvSpPr>
-          <p:cNvPr id="14" name="Text 11"/>
-          <p:cNvSpPr/>
-          <p:nvPr/>
-        </p:nvSpPr>
-        <p:spPr>
-          <a:xfrm>
-            <a:off x="5394960" y="3584448"/>
-            <a:ext cx="329184" cy="329184"/>
-          </a:xfrm>
-          <a:prstGeom prst="ellipse">
-            <a:avLst/>
+              <a:t>« Mon compte » active la double authentification. Sans code de secours : voyez votre administrateur.</a:t>
+            </a:r>
+            <a:endParaRPr lang="en-US" sz="1100" dirty="0"/>
+          </a:p>
+        </p:txBody>
+      </p:sp>
+      <p:sp>
+        <p:nvSpPr>
+          <p:cNvPr id="17" name="Shape 12"/>
+          <p:cNvSpPr/>
+          <p:nvPr/>
+        </p:nvSpPr>
+        <p:spPr>
+          <a:xfrm>
+            <a:off x="8065008" y="3017520"/>
+            <a:ext cx="3392424" cy="3182112"/>
+          </a:xfrm>
+          <a:prstGeom prst="roundRect">
+            <a:avLst>
+              <a:gd name="adj" fmla="val 4023"/>
+            </a:avLst>
           </a:prstGeom>
           <a:solidFill>
-            <a:srgbClr val="4636B0"/>
+            <a:srgbClr val="F4F5F9"/>
           </a:solidFill>
-          <a:ln>
+          <a:ln w="12700">
             <a:solidFill>
-              <a:srgbClr val="4636B0"/>
+              <a:srgbClr val="F4F5F9"/>
             </a:solidFill>
+            <a:prstDash val="solid"/>
           </a:ln>
         </p:spPr>
-        <p:txBody>
-          <a:bodyPr wrap="square" lIns="0" tIns="0" rIns="0" bIns="0" rtlCol="0" anchor="ctr"/>
-          <a:lstStyle/>
-          <a:p>
-            <a:pPr algn="ctr" indent="0" marL="0">
-              <a:buNone/>
-            </a:pPr>
-            <a:r>
-              <a:rPr lang="en-US" sz="1000" b="1" dirty="0">
-                <a:solidFill>
-                  <a:srgbClr val="FFFFFF"/>
-                </a:solidFill>
-                <a:latin typeface="Sora" pitchFamily="34" charset="0"/>
-                <a:ea typeface="Sora" pitchFamily="34" charset="-122"/>
-                <a:cs typeface="Sora" pitchFamily="34" charset="-120"/>
-              </a:rPr>
-              <a:t>3</a:t>
-            </a:r>
-            <a:endParaRPr lang="en-US" sz="1000" dirty="0"/>
-          </a:p>
-        </p:txBody>
-      </p:sp>
-      <p:sp>
-        <p:nvSpPr>
-          <p:cNvPr id="15" name="Text 12"/>
-          <p:cNvSpPr/>
-          <p:nvPr/>
-        </p:nvSpPr>
-        <p:spPr>
-          <a:xfrm>
-            <a:off x="5897880" y="3566160"/>
-            <a:ext cx="5559552" cy="292608"/>
-          </a:xfrm>
-          <a:prstGeom prst="rect">
-            <a:avLst/>
-          </a:prstGeom>
-          <a:noFill/>
-          <a:ln/>
-        </p:spPr>
-        <p:txBody>
-          <a:bodyPr wrap="square" lIns="0" tIns="0" rIns="0" bIns="0" rtlCol="0" anchor="t"/>
-          <a:lstStyle/>
-          <a:p>
-            <a:pPr indent="0" marL="0">
-              <a:buNone/>
-            </a:pPr>
-            <a:r>
-              <a:rPr lang="en-US" sz="1300" b="1" dirty="0">
-                <a:solidFill>
-                  <a:srgbClr val="0B0F19"/>
-                </a:solidFill>
-                <a:latin typeface="Sora" pitchFamily="34" charset="0"/>
-                <a:ea typeface="Sora" pitchFamily="34" charset="-122"/>
-                <a:cs typeface="Sora" pitchFamily="34" charset="-120"/>
-              </a:rPr>
-              <a:t>L'application</a:t>
-            </a:r>
-            <a:endParaRPr lang="en-US" sz="1300" dirty="0"/>
-          </a:p>
-        </p:txBody>
-      </p:sp>
-      <p:sp>
-        <p:nvSpPr>
-          <p:cNvPr id="16" name="Text 13"/>
-          <p:cNvSpPr/>
-          <p:nvPr/>
-        </p:nvSpPr>
-        <p:spPr>
-          <a:xfrm>
-            <a:off x="5897880" y="3895344"/>
-            <a:ext cx="5559552" cy="731520"/>
-          </a:xfrm>
-          <a:prstGeom prst="rect">
-            <a:avLst/>
-          </a:prstGeom>
-          <a:noFill/>
-          <a:ln/>
-        </p:spPr>
-        <p:txBody>
-          <a:bodyPr wrap="square" lIns="0" tIns="0" rIns="0" bIns="0" rtlCol="0" anchor="t"/>
-          <a:lstStyle/>
-          <a:p>
-            <a:pPr indent="0" marL="0">
-              <a:lnSpc>
-                <a:spcPct val="115000"/>
-              </a:lnSpc>
-              <a:buNone/>
-            </a:pPr>
-            <a:r>
-              <a:rPr lang="en-US" sz="1150" dirty="0">
-                <a:solidFill>
-                  <a:srgbClr val="3D4556"/>
-                </a:solidFill>
-                <a:latin typeface="Inter" pitchFamily="34" charset="0"/>
-                <a:ea typeface="Inter" pitchFamily="34" charset="-122"/>
-                <a:cs typeface="Inter" pitchFamily="34" charset="-120"/>
-              </a:rPr>
-              <a:t>Elle arrive par le catalogue d'applications de votre entreprise, ou par l'App Store si votre entreprise n'en a pas. Connectez-vous avec votre adresse e-mail et votre mot de passe.</a:t>
-            </a:r>
-            <a:endParaRPr lang="en-US" sz="1150" dirty="0"/>
-          </a:p>
-        </p:txBody>
-      </p:sp>
-      <p:sp>
-        <p:nvSpPr>
-          <p:cNvPr id="17" name="Text 14"/>
-          <p:cNvSpPr/>
-          <p:nvPr/>
-        </p:nvSpPr>
-        <p:spPr>
-          <a:xfrm>
-            <a:off x="5394960" y="4681728"/>
-            <a:ext cx="329184" cy="329184"/>
-          </a:xfrm>
-          <a:prstGeom prst="ellipse">
-            <a:avLst/>
-          </a:prstGeom>
-          <a:solidFill>
-            <a:srgbClr val="4636B0"/>
-          </a:solidFill>
-          <a:ln>
-            <a:solidFill>
-              <a:srgbClr val="4636B0"/>
-            </a:solidFill>
-          </a:ln>
-        </p:spPr>
-        <p:txBody>
-          <a:bodyPr wrap="square" lIns="0" tIns="0" rIns="0" bIns="0" rtlCol="0" anchor="ctr"/>
-          <a:lstStyle/>
-          <a:p>
-            <a:pPr algn="ctr" indent="0" marL="0">
-              <a:buNone/>
-            </a:pPr>
-            <a:r>
-              <a:rPr lang="en-US" sz="1000" b="1" dirty="0">
-                <a:solidFill>
-                  <a:srgbClr val="FFFFFF"/>
-                </a:solidFill>
-                <a:latin typeface="Sora" pitchFamily="34" charset="0"/>
-                <a:ea typeface="Sora" pitchFamily="34" charset="-122"/>
-                <a:cs typeface="Sora" pitchFamily="34" charset="-120"/>
-              </a:rPr>
-              <a:t>4</a:t>
-            </a:r>
-            <a:endParaRPr lang="en-US" sz="1000" dirty="0"/>
-          </a:p>
-        </p:txBody>
-      </p:sp>
-      <p:sp>
-        <p:nvSpPr>
-          <p:cNvPr id="18" name="Text 15"/>
-          <p:cNvSpPr/>
-          <p:nvPr/>
-        </p:nvSpPr>
-        <p:spPr>
-          <a:xfrm>
-            <a:off x="5897880" y="4663440"/>
-            <a:ext cx="5559552" cy="292608"/>
-          </a:xfrm>
-          <a:prstGeom prst="rect">
-            <a:avLst/>
-          </a:prstGeom>
-          <a:noFill/>
-          <a:ln/>
-        </p:spPr>
-        <p:txBody>
-          <a:bodyPr wrap="square" lIns="0" tIns="0" rIns="0" bIns="0" rtlCol="0" anchor="t"/>
-          <a:lstStyle/>
-          <a:p>
-            <a:pPr indent="0" marL="0">
-              <a:buNone/>
-            </a:pPr>
-            <a:r>
-              <a:rPr lang="en-US" sz="1300" b="1" dirty="0">
-                <a:solidFill>
-                  <a:srgbClr val="0B0F19"/>
-                </a:solidFill>
-                <a:latin typeface="Sora" pitchFamily="34" charset="0"/>
-                <a:ea typeface="Sora" pitchFamily="34" charset="-122"/>
-                <a:cs typeface="Sora" pitchFamily="34" charset="-120"/>
-              </a:rPr>
-              <a:t>Si vous voulez, la double authentification</a:t>
-            </a:r>
-            <a:endParaRPr lang="en-US" sz="1300" dirty="0"/>
-          </a:p>
-        </p:txBody>
-      </p:sp>
-      <p:sp>
-        <p:nvSpPr>
-          <p:cNvPr id="19" name="Text 16"/>
-          <p:cNvSpPr/>
-          <p:nvPr/>
-        </p:nvSpPr>
-        <p:spPr>
-          <a:xfrm>
-            <a:off x="5897880" y="4992624"/>
-            <a:ext cx="5559552" cy="731520"/>
-          </a:xfrm>
-          <a:prstGeom prst="rect">
-            <a:avLst/>
-          </a:prstGeom>
-          <a:noFill/>
-          <a:ln/>
-        </p:spPr>
-        <p:txBody>
-          <a:bodyPr wrap="square" lIns="0" tIns="0" rIns="0" bIns="0" rtlCol="0" anchor="t"/>
-          <a:lstStyle/>
-          <a:p>
-            <a:pPr indent="0" marL="0">
-              <a:lnSpc>
-                <a:spcPct val="115000"/>
-              </a:lnSpc>
-              <a:buNone/>
-            </a:pPr>
-            <a:r>
-              <a:rPr lang="en-US" sz="1150" dirty="0">
-                <a:solidFill>
-                  <a:srgbClr val="3D4556"/>
-                </a:solidFill>
-                <a:latin typeface="Inter" pitchFamily="34" charset="0"/>
-                <a:ea typeface="Inter" pitchFamily="34" charset="-122"/>
-                <a:cs typeface="Inter" pitchFamily="34" charset="-120"/>
-              </a:rPr>
-              <a:t>Depuis « Mon compte », dans l'application ou sur le site. Un code à usage unique vous sera demandé à chaque connexion. Notez bien : il n'y a pas de code de secours, un téléphone perdu se dépanne auprès de votre administrateur.</a:t>
-            </a:r>
-            <a:endParaRPr lang="en-US" sz="1150" dirty="0"/>
-          </a:p>
-        </p:txBody>
-      </p:sp>
-      <p:sp>
-        <p:nvSpPr>
-          <p:cNvPr id="20" name="Text 17"/>
+      </p:sp>
+      <p:pic>
+        <p:nvPicPr>
+          <p:cNvPr id="18" name="Image 3" descr="preencoded.png">    </p:cNvPr>
+          <p:cNvPicPr>
+            <a:picLocks noChangeAspect="1"/>
+          </p:cNvPicPr>
+          <p:nvPr/>
+        </p:nvPicPr>
+        <p:blipFill>
+          <a:blip r:embed="rId4"/>
+          <a:stretch>
+            <a:fillRect/>
+          </a:stretch>
+        </p:blipFill>
+        <p:spPr>
+          <a:xfrm>
+            <a:off x="8375904" y="3015797"/>
+            <a:ext cx="2770632" cy="3183835"/>
+          </a:xfrm>
+          <a:prstGeom prst="rect">
+            <a:avLst/>
+          </a:prstGeom>
+        </p:spPr>
+      </p:pic>
+      <p:sp>
+        <p:nvSpPr>
+          <p:cNvPr id="19" name="Text 13"/>
           <p:cNvSpPr/>
           <p:nvPr/>
         </p:nvSpPr>
@@ -7768,7 +9658,7 @@
       </p:sp>
       <p:sp>
         <p:nvSpPr>
-          <p:cNvPr id="21" name="Text 18"/>
+          <p:cNvPr id="20" name="Text 14"/>
           <p:cNvSpPr/>
           <p:nvPr/>
         </p:nvSpPr>
@@ -7972,8 +9862,8 @@
         </p:nvSpPr>
         <p:spPr>
           <a:xfrm>
-            <a:off x="731520" y="2011680"/>
-            <a:ext cx="2743200" cy="1097280"/>
+            <a:off x="731520" y="1920240"/>
+            <a:ext cx="2743200" cy="1188720"/>
           </a:xfrm>
           <a:prstGeom prst="rect">
             <a:avLst/>
@@ -8011,8 +9901,8 @@
         </p:nvSpPr>
         <p:spPr>
           <a:xfrm>
-            <a:off x="731520" y="3063240"/>
-            <a:ext cx="8229600" cy="822960"/>
+            <a:off x="731520" y="3017520"/>
+            <a:ext cx="7863840" cy="822960"/>
           </a:xfrm>
           <a:prstGeom prst="rect">
             <a:avLst/>
@@ -8050,8 +9940,8 @@
         </p:nvSpPr>
         <p:spPr>
           <a:xfrm>
-            <a:off x="731520" y="3977640"/>
-            <a:ext cx="7772400" cy="1280160"/>
+            <a:off x="731520" y="3931920"/>
+            <a:ext cx="7498080" cy="1371600"/>
           </a:xfrm>
           <a:prstGeom prst="rect">
             <a:avLst/>
@@ -8078,7 +9968,7 @@
                 <a:ea typeface="Inter" pitchFamily="34" charset="-122"/>
                 <a:cs typeface="Inter" pitchFamily="34" charset="-120"/>
               </a:rPr>
-              <a:t>La partie du superviseur. Une fois pour toutes : les balises et l'équipe. Puis, à chaque inventaire : le créer, importer les fichiers, suivre, arbitrer, clôturer.</a:t>
+              <a:t>La partie du superviseur. Une fois pour toutes : les balises et l'équipe. Puis, à chaque inventaire : le créer, importer les fichiers, suivre, arbitrer, clôturer.</a:t>
             </a:r>
             <a:endParaRPr lang="en-US" sz="1400" dirty="0"/>
           </a:p>
@@ -8329,8 +10219,8 @@
         </p:nvSpPr>
         <p:spPr>
           <a:xfrm>
-            <a:off x="731520" y="1325880"/>
-            <a:ext cx="4206240" cy="2011680"/>
+            <a:off x="731520" y="1280160"/>
+            <a:ext cx="10725912" cy="822960"/>
           </a:xfrm>
           <a:prstGeom prst="rect">
             <a:avLst/>
@@ -8357,7 +10247,7 @@
                 <a:ea typeface="Sora" pitchFamily="34" charset="-122"/>
                 <a:cs typeface="Sora" pitchFamily="34" charset="-120"/>
               </a:rPr>
-              <a:t>Deux choses à faire une seule fois : les balises, l’équipe.</a:t>
+              <a:t>Deux choses à faire une seule fois : les balises, l’équipe.</a:t>
             </a:r>
             <a:endParaRPr lang="en-US" sz="2600" dirty="0"/>
           </a:p>
@@ -8371,27 +10261,69 @@
         </p:nvSpPr>
         <p:spPr>
           <a:xfrm>
-            <a:off x="731520" y="3474720"/>
-            <a:ext cx="4206240" cy="1645920"/>
-          </a:xfrm>
-          <a:prstGeom prst="rect">
-            <a:avLst/>
-          </a:prstGeom>
-          <a:noFill/>
-          <a:ln/>
-        </p:spPr>
-        <p:txBody>
-          <a:bodyPr wrap="square" lIns="0" tIns="0" rIns="0" bIns="0" rtlCol="0" anchor="t"/>
-          <a:lstStyle/>
-          <a:p>
-            <a:pPr algn="l" indent="0" marL="0">
+            <a:off x="731520" y="2011680"/>
+            <a:ext cx="3392424" cy="365760"/>
+          </a:xfrm>
+          <a:prstGeom prst="rect">
+            <a:avLst/>
+          </a:prstGeom>
+          <a:noFill/>
+          <a:ln/>
+        </p:spPr>
+        <p:txBody>
+          <a:bodyPr wrap="square" lIns="0" tIns="0" rIns="0" bIns="0" rtlCol="0" anchor="t"/>
+          <a:lstStyle/>
+          <a:p>
+            <a:pPr indent="0" marL="0">
               <a:lnSpc>
-                <a:spcPct val="118000"/>
+                <a:spcPct val="100000"/>
               </a:lnSpc>
               <a:buNone/>
             </a:pPr>
             <a:r>
-              <a:rPr lang="en-US" sz="1200" dirty="0">
+              <a:rPr lang="en-US" sz="1350" b="1" dirty="0">
+                <a:solidFill>
+                  <a:srgbClr val="4636B0"/>
+                </a:solidFill>
+                <a:latin typeface="Sora" pitchFamily="34" charset="0"/>
+                <a:ea typeface="Sora" pitchFamily="34" charset="-122"/>
+                <a:cs typeface="Sora" pitchFamily="34" charset="-120"/>
+              </a:rPr>
+              <a:t>La boîte à outils</a:t>
+            </a:r>
+            <a:endParaRPr lang="en-US" sz="1350" dirty="0"/>
+          </a:p>
+        </p:txBody>
+      </p:sp>
+      <p:sp>
+        <p:nvSpPr>
+          <p:cNvPr id="8" name="Text 5"/>
+          <p:cNvSpPr/>
+          <p:nvPr/>
+        </p:nvSpPr>
+        <p:spPr>
+          <a:xfrm>
+            <a:off x="731520" y="2395728"/>
+            <a:ext cx="3392424" cy="585216"/>
+          </a:xfrm>
+          <a:prstGeom prst="rect">
+            <a:avLst/>
+          </a:prstGeom>
+          <a:noFill/>
+          <a:ln/>
+        </p:spPr>
+        <p:txBody>
+          <a:bodyPr wrap="square" lIns="0" tIns="0" rIns="0" bIns="0" rtlCol="0" anchor="t"/>
+          <a:lstStyle/>
+          <a:p>
+            <a:pPr indent="0" marL="0">
+              <a:lnSpc>
+                <a:spcPct val="115000"/>
+              </a:lnSpc>
+              <a:buNone/>
+            </a:pPr>
+            <a:r>
+              <a:rPr lang="en-US" sz="1100" dirty="0">
                 <a:solidFill>
                   <a:srgbClr val="3D4556"/>
                 </a:solidFill>
@@ -8399,22 +10331,73 @@
                 <a:ea typeface="Inter" pitchFamily="34" charset="-122"/>
                 <a:cs typeface="Inter" pitchFamily="34" charset="-120"/>
               </a:rPr>
-              <a:t>Une balise, c'est une étiquette avec un code QR et un numéro, collée à l'entrée d'un rayon ou d'une travée. Le compteur la scanne pour dire « je compte ici ». Une fois collées, elles servent à tous les inventaires suivants.</a:t>
-            </a:r>
-            <a:endParaRPr lang="en-US" sz="1200" dirty="0"/>
-          </a:p>
-        </p:txBody>
-      </p:sp>
-      <p:sp>
-        <p:nvSpPr>
-          <p:cNvPr id="8" name="Text 5"/>
-          <p:cNvSpPr/>
-          <p:nvPr/>
-        </p:nvSpPr>
-        <p:spPr>
-          <a:xfrm>
-            <a:off x="5394960" y="1371600"/>
-            <a:ext cx="6062472" cy="4754880"/>
+              <a:t>Imprimez, collez, indiquez. C'est de là que part la planche d'étiquettes.</a:t>
+            </a:r>
+            <a:endParaRPr lang="en-US" sz="1100" dirty="0"/>
+          </a:p>
+        </p:txBody>
+      </p:sp>
+      <p:sp>
+        <p:nvSpPr>
+          <p:cNvPr id="9" name="Shape 6"/>
+          <p:cNvSpPr/>
+          <p:nvPr/>
+        </p:nvSpPr>
+        <p:spPr>
+          <a:xfrm>
+            <a:off x="731520" y="3017520"/>
+            <a:ext cx="3392424" cy="3182112"/>
+          </a:xfrm>
+          <a:prstGeom prst="roundRect">
+            <a:avLst>
+              <a:gd name="adj" fmla="val 4023"/>
+            </a:avLst>
+          </a:prstGeom>
+          <a:solidFill>
+            <a:srgbClr val="F4F5F9"/>
+          </a:solidFill>
+          <a:ln w="12700">
+            <a:solidFill>
+              <a:srgbClr val="F4F5F9"/>
+            </a:solidFill>
+            <a:prstDash val="solid"/>
+          </a:ln>
+        </p:spPr>
+      </p:sp>
+      <p:pic>
+        <p:nvPicPr>
+          <p:cNvPr id="10" name="Image 1" descr="preencoded.png">    </p:cNvPr>
+          <p:cNvPicPr>
+            <a:picLocks noChangeAspect="1"/>
+          </p:cNvPicPr>
+          <p:nvPr/>
+        </p:nvPicPr>
+        <p:blipFill>
+          <a:blip r:embed="rId2"/>
+          <a:stretch>
+            <a:fillRect/>
+          </a:stretch>
+        </p:blipFill>
+        <p:spPr>
+          <a:xfrm>
+            <a:off x="1042416" y="3015797"/>
+            <a:ext cx="2770632" cy="3183835"/>
+          </a:xfrm>
+          <a:prstGeom prst="rect">
+            <a:avLst/>
+          </a:prstGeom>
+        </p:spPr>
+      </p:pic>
+      <p:sp>
+        <p:nvSpPr>
+          <p:cNvPr id="11" name="Text 7"/>
+          <p:cNvSpPr/>
+          <p:nvPr/>
+        </p:nvSpPr>
+        <p:spPr>
+          <a:xfrm>
+            <a:off x="4398264" y="2011680"/>
+            <a:ext cx="3392424" cy="365760"/>
           </a:xfrm>
           <a:prstGeom prst="rect">
             <a:avLst/>
@@ -8428,35 +10411,54 @@
           <a:p>
             <a:pPr indent="0" marL="0">
               <a:lnSpc>
-                <a:spcPct val="118000"/>
+                <a:spcPct val="100000"/>
               </a:lnSpc>
-              <a:spcAft>
-                <a:spcPts val="1100"/>
-              </a:spcAft>
-              <a:buNone/>
-            </a:pPr>
-            <a:r>
-              <a:rPr lang="en-US" sz="1200" b="1" dirty="0">
-                <a:solidFill>
-                  <a:srgbClr val="0B0F19"/>
-                </a:solidFill>
-                <a:latin typeface="Inter" pitchFamily="34" charset="0"/>
-                <a:ea typeface="Inter" pitchFamily="34" charset="-122"/>
-                <a:cs typeface="Inter" pitchFamily="34" charset="-120"/>
-              </a:rPr>
-              <a:t>Imprimer les balises. </a:t>
-            </a:r>
+              <a:buNone/>
+            </a:pPr>
+            <a:r>
+              <a:rPr lang="en-US" sz="1350" b="1" dirty="0">
+                <a:solidFill>
+                  <a:srgbClr val="4636B0"/>
+                </a:solidFill>
+                <a:latin typeface="Sora" pitchFamily="34" charset="0"/>
+                <a:ea typeface="Sora" pitchFamily="34" charset="-122"/>
+                <a:cs typeface="Sora" pitchFamily="34" charset="-120"/>
+              </a:rPr>
+              <a:t>Choisir la série, imprimer</a:t>
+            </a:r>
+            <a:endParaRPr lang="en-US" sz="1350" dirty="0"/>
+          </a:p>
+        </p:txBody>
+      </p:sp>
+      <p:sp>
+        <p:nvSpPr>
+          <p:cNvPr id="12" name="Text 8"/>
+          <p:cNvSpPr/>
+          <p:nvPr/>
+        </p:nvSpPr>
+        <p:spPr>
+          <a:xfrm>
+            <a:off x="4398264" y="2395728"/>
+            <a:ext cx="3392424" cy="585216"/>
+          </a:xfrm>
+          <a:prstGeom prst="rect">
+            <a:avLst/>
+          </a:prstGeom>
+          <a:noFill/>
+          <a:ln/>
+        </p:spPr>
+        <p:txBody>
+          <a:bodyPr wrap="square" lIns="0" tIns="0" rIns="0" bIns="0" rtlCol="0" anchor="t"/>
+          <a:lstStyle/>
+          <a:p>
             <a:pPr indent="0" marL="0">
               <a:lnSpc>
-                <a:spcPct val="118000"/>
+                <a:spcPct val="115000"/>
               </a:lnSpc>
-              <a:spcAft>
-                <a:spcPts val="1100"/>
-              </a:spcAft>
-              <a:buNone/>
-            </a:pPr>
-            <a:r>
-              <a:rPr lang="en-US" sz="1200" dirty="0">
+              <a:buNone/>
+            </a:pPr>
+            <a:r>
+              <a:rPr lang="en-US" sz="1100" dirty="0">
                 <a:solidFill>
                   <a:srgbClr val="3D4556"/>
                 </a:solidFill>
@@ -8464,42 +10466,134 @@
                 <a:ea typeface="Inter" pitchFamily="34" charset="-122"/>
                 <a:cs typeface="Inter" pitchFamily="34" charset="-120"/>
               </a:rPr>
-              <a:t>Boîte à outils, « Créer et imprimer des balises ». Choisissez une numérotation (1, 2, 3… ou à quatre chiffres), un premier numéro, un nombre. Vous obtenez un PDF sur planche d'étiquettes standard (Avery L7160, 21 par page), à imprimer sur une imprimante ordinaire.</a:t>
-            </a:r>
-            <a:endParaRPr lang="en-US" sz="1200" dirty="0"/>
-          </a:p>
+              <a:t>Numérotation, premier numéro, nombre. Le PDF sort sur planche Avery L7160, 21 par page.</a:t>
+            </a:r>
+            <a:endParaRPr lang="en-US" sz="1100" dirty="0"/>
+          </a:p>
+        </p:txBody>
+      </p:sp>
+      <p:sp>
+        <p:nvSpPr>
+          <p:cNvPr id="13" name="Shape 9"/>
+          <p:cNvSpPr/>
+          <p:nvPr/>
+        </p:nvSpPr>
+        <p:spPr>
+          <a:xfrm>
+            <a:off x="4398264" y="3017520"/>
+            <a:ext cx="3392424" cy="3182112"/>
+          </a:xfrm>
+          <a:prstGeom prst="roundRect">
+            <a:avLst>
+              <a:gd name="adj" fmla="val 4023"/>
+            </a:avLst>
+          </a:prstGeom>
+          <a:solidFill>
+            <a:srgbClr val="F4F5F9"/>
+          </a:solidFill>
+          <a:ln w="12700">
+            <a:solidFill>
+              <a:srgbClr val="F4F5F9"/>
+            </a:solidFill>
+            <a:prstDash val="solid"/>
+          </a:ln>
+        </p:spPr>
+      </p:sp>
+      <p:pic>
+        <p:nvPicPr>
+          <p:cNvPr id="14" name="Image 2" descr="preencoded.png">    </p:cNvPr>
+          <p:cNvPicPr>
+            <a:picLocks noChangeAspect="1"/>
+          </p:cNvPicPr>
+          <p:nvPr/>
+        </p:nvPicPr>
+        <p:blipFill>
+          <a:blip r:embed="rId3"/>
+          <a:stretch>
+            <a:fillRect/>
+          </a:stretch>
+        </p:blipFill>
+        <p:spPr>
+          <a:xfrm>
+            <a:off x="4709160" y="3015797"/>
+            <a:ext cx="2770632" cy="3183835"/>
+          </a:xfrm>
+          <a:prstGeom prst="rect">
+            <a:avLst/>
+          </a:prstGeom>
+        </p:spPr>
+      </p:pic>
+      <p:sp>
+        <p:nvSpPr>
+          <p:cNvPr id="15" name="Text 10"/>
+          <p:cNvSpPr/>
+          <p:nvPr/>
+        </p:nvSpPr>
+        <p:spPr>
+          <a:xfrm>
+            <a:off x="8065008" y="2011680"/>
+            <a:ext cx="3392424" cy="365760"/>
+          </a:xfrm>
+          <a:prstGeom prst="rect">
+            <a:avLst/>
+          </a:prstGeom>
+          <a:noFill/>
+          <a:ln/>
+        </p:spPr>
+        <p:txBody>
+          <a:bodyPr wrap="square" lIns="0" tIns="0" rIns="0" bIns="0" rtlCol="0" anchor="t"/>
+          <a:lstStyle/>
           <a:p>
             <a:pPr indent="0" marL="0">
               <a:lnSpc>
-                <a:spcPct val="118000"/>
+                <a:spcPct val="100000"/>
               </a:lnSpc>
-              <a:spcAft>
-                <a:spcPts val="1100"/>
-              </a:spcAft>
-              <a:buNone/>
-            </a:pPr>
-            <a:r>
-              <a:rPr lang="en-US" sz="1200" b="1" dirty="0">
-                <a:solidFill>
-                  <a:srgbClr val="0B0F19"/>
-                </a:solidFill>
-                <a:latin typeface="Inter" pitchFamily="34" charset="0"/>
-                <a:ea typeface="Inter" pitchFamily="34" charset="-122"/>
-                <a:cs typeface="Inter" pitchFamily="34" charset="-120"/>
-              </a:rPr>
-              <a:t>Les coller. </a:t>
-            </a:r>
+              <a:buNone/>
+            </a:pPr>
+            <a:r>
+              <a:rPr lang="en-US" sz="1350" b="1" dirty="0">
+                <a:solidFill>
+                  <a:srgbClr val="4636B0"/>
+                </a:solidFill>
+                <a:latin typeface="Sora" pitchFamily="34" charset="0"/>
+                <a:ea typeface="Sora" pitchFamily="34" charset="-122"/>
+                <a:cs typeface="Sora" pitchFamily="34" charset="-120"/>
+              </a:rPr>
+              <a:t>Constituer son équipe</a:t>
+            </a:r>
+            <a:endParaRPr lang="en-US" sz="1350" dirty="0"/>
+          </a:p>
+        </p:txBody>
+      </p:sp>
+      <p:sp>
+        <p:nvSpPr>
+          <p:cNvPr id="16" name="Text 11"/>
+          <p:cNvSpPr/>
+          <p:nvPr/>
+        </p:nvSpPr>
+        <p:spPr>
+          <a:xfrm>
+            <a:off x="8065008" y="2395728"/>
+            <a:ext cx="3392424" cy="585216"/>
+          </a:xfrm>
+          <a:prstGeom prst="rect">
+            <a:avLst/>
+          </a:prstGeom>
+          <a:noFill/>
+          <a:ln/>
+        </p:spPr>
+        <p:txBody>
+          <a:bodyPr wrap="square" lIns="0" tIns="0" rIns="0" bIns="0" rtlCol="0" anchor="t"/>
+          <a:lstStyle/>
+          <a:p>
             <a:pPr indent="0" marL="0">
               <a:lnSpc>
-                <a:spcPct val="118000"/>
+                <a:spcPct val="115000"/>
               </a:lnSpc>
-              <a:spcAft>
-                <a:spcPts val="1100"/>
-              </a:spcAft>
-              <a:buNone/>
-            </a:pPr>
-            <a:r>
-              <a:rPr lang="en-US" sz="1200" dirty="0">
+              <a:buNone/>
+            </a:pPr>
+            <a:r>
+              <a:rPr lang="en-US" sz="1100" dirty="0">
                 <a:solidFill>
                   <a:srgbClr val="3D4556"/>
                 </a:solidFill>
@@ -8507,58 +10601,66 @@
                 <a:ea typeface="Inter" pitchFamily="34" charset="-122"/>
                 <a:cs typeface="Inter" pitchFamily="34" charset="-120"/>
               </a:rPr>
-              <a:t>Une par rayon, à hauteur d'yeux, au début du linéaire. Dans une réserve, une par travée ou par étagère. Trop de balises vaut mieux que pas assez : une zone trop grande se compte mal à deux.</a:t>
-            </a:r>
-            <a:endParaRPr lang="en-US" sz="1200" dirty="0"/>
-          </a:p>
-          <a:p>
-            <a:pPr indent="0" marL="0">
-              <a:lnSpc>
-                <a:spcPct val="118000"/>
-              </a:lnSpc>
-              <a:spcAft>
-                <a:spcPts val="1100"/>
-              </a:spcAft>
-              <a:buNone/>
-            </a:pPr>
-            <a:r>
-              <a:rPr lang="en-US" sz="1200" b="1" dirty="0">
-                <a:solidFill>
-                  <a:srgbClr val="0B0F19"/>
-                </a:solidFill>
-                <a:latin typeface="Inter" pitchFamily="34" charset="0"/>
-                <a:ea typeface="Inter" pitchFamily="34" charset="-122"/>
-                <a:cs typeface="Inter" pitchFamily="34" charset="-120"/>
-              </a:rPr>
-              <a:t>Constituer son équipe. </a:t>
-            </a:r>
-            <a:pPr indent="0" marL="0">
-              <a:lnSpc>
-                <a:spcPct val="118000"/>
-              </a:lnSpc>
-              <a:spcAft>
-                <a:spcPts val="1100"/>
-              </a:spcAft>
-              <a:buNone/>
-            </a:pPr>
-            <a:r>
-              <a:rPr lang="en-US" sz="1200" dirty="0">
-                <a:solidFill>
-                  <a:srgbClr val="3D4556"/>
-                </a:solidFill>
-                <a:latin typeface="Inter" pitchFamily="34" charset="0"/>
-                <a:ea typeface="Inter" pitchFamily="34" charset="-122"/>
-                <a:cs typeface="Inter" pitchFamily="34" charset="-120"/>
-              </a:rPr>
-              <a:t>Mon équipe, « Ajouter un compteur » : prénom, nom, adresse e-mail, et le ou les magasins. La personne reçoit son invitation tout de suite et apparaît dans la liste avec la mention « Mot de passe à créer » tant qu'elle n'a pas ouvert l'application.</a:t>
-            </a:r>
-            <a:endParaRPr lang="en-US" sz="1200" dirty="0"/>
-          </a:p>
-        </p:txBody>
-      </p:sp>
-      <p:sp>
-        <p:nvSpPr>
-          <p:cNvPr id="9" name="Text 6"/>
+              <a:t>Prénom, nom, adresse. L'invitation part tout de suite.</a:t>
+            </a:r>
+            <a:endParaRPr lang="en-US" sz="1100" dirty="0"/>
+          </a:p>
+        </p:txBody>
+      </p:sp>
+      <p:sp>
+        <p:nvSpPr>
+          <p:cNvPr id="17" name="Shape 12"/>
+          <p:cNvSpPr/>
+          <p:nvPr/>
+        </p:nvSpPr>
+        <p:spPr>
+          <a:xfrm>
+            <a:off x="8065008" y="3017520"/>
+            <a:ext cx="3392424" cy="3182112"/>
+          </a:xfrm>
+          <a:prstGeom prst="roundRect">
+            <a:avLst>
+              <a:gd name="adj" fmla="val 4023"/>
+            </a:avLst>
+          </a:prstGeom>
+          <a:solidFill>
+            <a:srgbClr val="F4F5F9"/>
+          </a:solidFill>
+          <a:ln w="12700">
+            <a:solidFill>
+              <a:srgbClr val="F4F5F9"/>
+            </a:solidFill>
+            <a:prstDash val="solid"/>
+          </a:ln>
+        </p:spPr>
+      </p:sp>
+      <p:pic>
+        <p:nvPicPr>
+          <p:cNvPr id="18" name="Image 3" descr="preencoded.png">    </p:cNvPr>
+          <p:cNvPicPr>
+            <a:picLocks noChangeAspect="1"/>
+          </p:cNvPicPr>
+          <p:nvPr/>
+        </p:nvPicPr>
+        <p:blipFill>
+          <a:blip r:embed="rId4"/>
+          <a:stretch>
+            <a:fillRect/>
+          </a:stretch>
+        </p:blipFill>
+        <p:spPr>
+          <a:xfrm>
+            <a:off x="8375904" y="3015797"/>
+            <a:ext cx="2770632" cy="3183835"/>
+          </a:xfrm>
+          <a:prstGeom prst="rect">
+            <a:avLst/>
+          </a:prstGeom>
+        </p:spPr>
+      </p:pic>
+      <p:sp>
+        <p:nvSpPr>
+          <p:cNvPr id="19" name="Text 13"/>
           <p:cNvSpPr/>
           <p:nvPr/>
         </p:nvSpPr>
@@ -8597,7 +10699,7 @@
       </p:sp>
       <p:sp>
         <p:nvSpPr>
-          <p:cNvPr id="10" name="Text 7"/>
+          <p:cNvPr id="20" name="Text 14"/>
           <p:cNvSpPr/>
           <p:nvPr/>
         </p:nvSpPr>
@@ -8762,7 +10864,7 @@
                 <a:ea typeface="Inter" pitchFamily="34" charset="-122"/>
                 <a:cs typeface="Inter" pitchFamily="34" charset="-120"/>
               </a:rPr>
-              <a:t>Superviseur · à chaque inventaire</a:t>
+              <a:t>Superviseur · une fois pour toutes</a:t>
             </a:r>
             <a:endParaRPr lang="en-US" sz="1000" dirty="0"/>
           </a:p>
@@ -8802,7 +10904,7 @@
         <p:spPr>
           <a:xfrm>
             <a:off x="731520" y="1325880"/>
-            <a:ext cx="4206240" cy="1371600"/>
+            <a:ext cx="4206240" cy="2011680"/>
           </a:xfrm>
           <a:prstGeom prst="rect">
             <a:avLst/>
@@ -8821,7 +10923,7 @@
               <a:buNone/>
             </a:pPr>
             <a:r>
-              <a:rPr lang="en-US" sz="2400" b="1" dirty="0">
+              <a:rPr lang="en-US" sz="2600" b="1" dirty="0">
                 <a:solidFill>
                   <a:srgbClr val="4636B0"/>
                 </a:solidFill>
@@ -8829,9 +10931,9 @@
                 <a:ea typeface="Sora" pitchFamily="34" charset="-122"/>
                 <a:cs typeface="Sora" pitchFamily="34" charset="-120"/>
               </a:rPr>
-              <a:t>Créer un inventaire prend une minute. Le préparer, dix.</a:t>
-            </a:r>
-            <a:endParaRPr lang="en-US" sz="2400" dirty="0"/>
+              <a:t>Où coller les balises, et combien.</a:t>
+            </a:r>
+            <a:endParaRPr lang="en-US" sz="2600" dirty="0"/>
           </a:p>
         </p:txBody>
       </p:sp>
@@ -8843,8 +10945,8 @@
         </p:nvSpPr>
         <p:spPr>
           <a:xfrm>
-            <a:off x="731520" y="2834640"/>
-            <a:ext cx="4206240" cy="3108960"/>
+            <a:off x="731520" y="2697480"/>
+            <a:ext cx="7223760" cy="3291840"/>
           </a:xfrm>
           <a:prstGeom prst="rect">
             <a:avLst/>
@@ -8861,12 +10963,12 @@
                 <a:spcPct val="118000"/>
               </a:lnSpc>
               <a:spcAft>
-                <a:spcPts val="800"/>
+                <a:spcPts val="1100"/>
               </a:spcAft>
               <a:buNone/>
             </a:pPr>
             <a:r>
-              <a:rPr lang="en-US" sz="1150" b="1" dirty="0">
+              <a:rPr lang="en-US" sz="1200" b="1" dirty="0">
                 <a:solidFill>
                   <a:srgbClr val="0B0F19"/>
                 </a:solidFill>
@@ -8874,19 +10976,19 @@
                 <a:ea typeface="Inter" pitchFamily="34" charset="-122"/>
                 <a:cs typeface="Inter" pitchFamily="34" charset="-120"/>
               </a:rPr>
-              <a:t>Un nom </a:t>
+              <a:t>Une par rayon, </a:t>
             </a:r>
             <a:pPr indent="0" marL="0">
               <a:lnSpc>
                 <a:spcPct val="118000"/>
               </a:lnSpc>
               <a:spcAft>
-                <a:spcPts val="800"/>
+                <a:spcPts val="1100"/>
               </a:spcAft>
               <a:buNone/>
             </a:pPr>
             <a:r>
-              <a:rPr lang="en-US" sz="1150" dirty="0">
+              <a:rPr lang="en-US" sz="1200" dirty="0">
                 <a:solidFill>
                   <a:srgbClr val="3D4556"/>
                 </a:solidFill>
@@ -8894,9 +10996,9 @@
                 <a:ea typeface="Inter" pitchFamily="34" charset="-122"/>
                 <a:cs typeface="Inter" pitchFamily="34" charset="-120"/>
               </a:rPr>
-              <a:t>pour le reconnaître dans la liste. Le numéro (INV-…) est généré tout seul.</a:t>
-            </a:r>
-            <a:endParaRPr lang="en-US" sz="1150" dirty="0"/>
+              <a:t>à hauteur d'yeux, au début du linéaire. Dans une réserve, une par travée ou par étagère.</a:t>
+            </a:r>
+            <a:endParaRPr lang="en-US" sz="1200" dirty="0"/>
           </a:p>
           <a:p>
             <a:pPr indent="0" marL="0">
@@ -8904,12 +11006,12 @@
                 <a:spcPct val="118000"/>
               </a:lnSpc>
               <a:spcAft>
-                <a:spcPts val="800"/>
+                <a:spcPts val="1100"/>
               </a:spcAft>
               <a:buNone/>
             </a:pPr>
             <a:r>
-              <a:rPr lang="en-US" sz="1150" b="1" dirty="0">
+              <a:rPr lang="en-US" sz="1200" b="1" dirty="0">
                 <a:solidFill>
                   <a:srgbClr val="0B0F19"/>
                 </a:solidFill>
@@ -8917,19 +11019,19 @@
                 <a:ea typeface="Inter" pitchFamily="34" charset="-122"/>
                 <a:cs typeface="Inter" pitchFamily="34" charset="-120"/>
               </a:rPr>
-              <a:t>Un magasin </a:t>
+              <a:t>Dans l’ordre des numéros. </a:t>
             </a:r>
             <a:pPr indent="0" marL="0">
               <a:lnSpc>
                 <a:spcPct val="118000"/>
               </a:lnSpc>
               <a:spcAft>
-                <a:spcPts val="800"/>
+                <a:spcPts val="1100"/>
               </a:spcAft>
               <a:buNone/>
             </a:pPr>
             <a:r>
-              <a:rPr lang="en-US" sz="1150" dirty="0">
+              <a:rPr lang="en-US" sz="1200" dirty="0">
                 <a:solidFill>
                   <a:srgbClr val="3D4556"/>
                 </a:solidFill>
@@ -8937,9 +11039,9 @@
                 <a:ea typeface="Inter" pitchFamily="34" charset="-122"/>
                 <a:cs typeface="Inter" pitchFamily="34" charset="-120"/>
               </a:rPr>
-              <a:t>parmi les vôtres.</a:t>
-            </a:r>
-            <a:endParaRPr lang="en-US" sz="1150" dirty="0"/>
+              <a:t>C'est ce qui rend les plages lisibles : « Textile femme, 1 à 12 », « Réserve, 25 à 36 ».</a:t>
+            </a:r>
+            <a:endParaRPr lang="en-US" sz="1200" dirty="0"/>
           </a:p>
           <a:p>
             <a:pPr indent="0" marL="0">
@@ -8947,12 +11049,12 @@
                 <a:spcPct val="118000"/>
               </a:lnSpc>
               <a:spcAft>
-                <a:spcPts val="800"/>
+                <a:spcPts val="1100"/>
               </a:spcAft>
               <a:buNone/>
             </a:pPr>
             <a:r>
-              <a:rPr lang="en-US" sz="1150" b="1" dirty="0">
+              <a:rPr lang="en-US" sz="1200" b="1" dirty="0">
                 <a:solidFill>
                   <a:srgbClr val="0B0F19"/>
                 </a:solidFill>
@@ -8960,19 +11062,19 @@
                 <a:ea typeface="Inter" pitchFamily="34" charset="-122"/>
                 <a:cs typeface="Inter" pitchFamily="34" charset="-120"/>
               </a:rPr>
-              <a:t>Un code d'accès </a:t>
+              <a:t>Trop plutôt que pas assez. </a:t>
             </a:r>
             <a:pPr indent="0" marL="0">
               <a:lnSpc>
                 <a:spcPct val="118000"/>
               </a:lnSpc>
               <a:spcAft>
-                <a:spcPts val="800"/>
+                <a:spcPts val="1100"/>
               </a:spcAft>
               <a:buNone/>
             </a:pPr>
             <a:r>
-              <a:rPr lang="en-US" sz="1150" dirty="0">
+              <a:rPr lang="en-US" sz="1200" dirty="0">
                 <a:solidFill>
                   <a:srgbClr val="3D4556"/>
                 </a:solidFill>
@@ -8980,9 +11082,9 @@
                 <a:ea typeface="Inter" pitchFamily="34" charset="-122"/>
                 <a:cs typeface="Inter" pitchFamily="34" charset="-120"/>
               </a:rPr>
-              <a:t>de quatre caractères au moins. Avec le numéro, il permet à un compteur de rejoindre l'inventaire sans avoir été invité nommément.</a:t>
-            </a:r>
-            <a:endParaRPr lang="en-US" sz="1150" dirty="0"/>
+              <a:t>Une zone trop grande se compte mal à deux, et l'audit devient un second inventaire complet. Une balise coûte une étiquette.</a:t>
+            </a:r>
+            <a:endParaRPr lang="en-US" sz="1200" dirty="0"/>
           </a:p>
           <a:p>
             <a:pPr indent="0" marL="0">
@@ -8990,12 +11092,12 @@
                 <a:spcPct val="118000"/>
               </a:lnSpc>
               <a:spcAft>
-                <a:spcPts val="800"/>
+                <a:spcPts val="1100"/>
               </a:spcAft>
               <a:buNone/>
             </a:pPr>
             <a:r>
-              <a:rPr lang="en-US" sz="1150" b="1" dirty="0">
+              <a:rPr lang="en-US" sz="1200" b="1" dirty="0">
                 <a:solidFill>
                   <a:srgbClr val="0B0F19"/>
                 </a:solidFill>
@@ -9003,19 +11105,19 @@
                 <a:ea typeface="Inter" pitchFamily="34" charset="-122"/>
                 <a:cs typeface="Inter" pitchFamily="34" charset="-120"/>
               </a:rPr>
-              <a:t>Zones et balises </a:t>
+              <a:t>Elles restent en place. </a:t>
             </a:r>
             <a:pPr indent="0" marL="0">
               <a:lnSpc>
                 <a:spcPct val="118000"/>
               </a:lnSpc>
               <a:spcAft>
-                <a:spcPts val="800"/>
+                <a:spcPts val="1100"/>
               </a:spcAft>
               <a:buNone/>
             </a:pPr>
             <a:r>
-              <a:rPr lang="en-US" sz="1150" dirty="0">
+              <a:rPr lang="en-US" sz="1200" dirty="0">
                 <a:solidFill>
                   <a:srgbClr val="3D4556"/>
                 </a:solidFill>
@@ -9023,9 +11125,9 @@
                 <a:ea typeface="Inter" pitchFamily="34" charset="-122"/>
                 <a:cs typeface="Inter" pitchFamily="34" charset="-120"/>
               </a:rPr>
-              <a:t>recommandé. Sans balises, tout le monde compte dans une seule zone et l'audit se compare article par article.</a:t>
-            </a:r>
-            <a:endParaRPr lang="en-US" sz="1150" dirty="0"/>
+              <a:t>Elles ne portent ni date ni inventaire : la même planche sert en janvier et en juin. On ne réimprime que pour agrandir la série.</a:t>
+            </a:r>
+            <a:endParaRPr lang="en-US" sz="1200" dirty="0"/>
           </a:p>
         </p:txBody>
       </p:sp>
@@ -9037,12 +11139,12 @@
         </p:nvSpPr>
         <p:spPr>
           <a:xfrm>
-            <a:off x="5888736" y="1316736"/>
-            <a:ext cx="5021533" cy="4590288"/>
+            <a:off x="4791456" y="1316736"/>
+            <a:ext cx="6720840" cy="2503036"/>
           </a:xfrm>
           <a:prstGeom prst="roundRect">
             <a:avLst>
-              <a:gd name="adj" fmla="val 1594"/>
+              <a:gd name="adj" fmla="val 2923"/>
             </a:avLst>
           </a:prstGeom>
           <a:solidFill>
@@ -9072,8 +11174,8 @@
         </p:blipFill>
         <p:spPr>
           <a:xfrm>
-            <a:off x="5943600" y="1371600"/>
-            <a:ext cx="4911805" cy="4480560"/>
+            <a:off x="4846320" y="1371600"/>
+            <a:ext cx="6611112" cy="2393308"/>
           </a:xfrm>
           <a:prstGeom prst="rect">
             <a:avLst/>
@@ -9088,8 +11190,8 @@
         </p:nvSpPr>
         <p:spPr>
           <a:xfrm>
-            <a:off x="5943600" y="5989320"/>
-            <a:ext cx="6062472" cy="365760"/>
+            <a:off x="4846320" y="3902068"/>
+            <a:ext cx="6611112" cy="365760"/>
           </a:xfrm>
           <a:prstGeom prst="rect">
             <a:avLst/>
@@ -9113,7 +11215,7 @@
                 <a:ea typeface="Inter" pitchFamily="34" charset="-122"/>
                 <a:cs typeface="Inter" pitchFamily="34" charset="-120"/>
               </a:rPr>
-              <a:t>Site, « Nouvel inventaire ». Le même formulaire existe dans l'application.</a:t>
+              <a:t>Une fois collées et affectées, les balises deviennent l'avancement que le superviseur suit sur le site.</a:t>
             </a:r>
             <a:endParaRPr lang="en-US" sz="1000" dirty="0"/>
           </a:p>
@@ -9364,8 +11466,8 @@
         </p:nvSpPr>
         <p:spPr>
           <a:xfrm>
-            <a:off x="731520" y="1325880"/>
-            <a:ext cx="4206240" cy="2011680"/>
+            <a:off x="731520" y="1280160"/>
+            <a:ext cx="10725912" cy="822960"/>
           </a:xfrm>
           <a:prstGeom prst="rect">
             <a:avLst/>
@@ -9392,7 +11494,7 @@
                 <a:ea typeface="Sora" pitchFamily="34" charset="-122"/>
                 <a:cs typeface="Sora" pitchFamily="34" charset="-120"/>
               </a:rPr>
-              <a:t>Set up : dire où on compte, et ce qu’on attend.</a:t>
+              <a:t>Créer un inventaire prend une minute. Le préparer, dix.</a:t>
             </a:r>
             <a:endParaRPr lang="en-US" sz="2600" dirty="0"/>
           </a:p>
@@ -9406,27 +11508,69 @@
         </p:nvSpPr>
         <p:spPr>
           <a:xfrm>
-            <a:off x="731520" y="3474720"/>
-            <a:ext cx="4206240" cy="1645920"/>
-          </a:xfrm>
-          <a:prstGeom prst="rect">
-            <a:avLst/>
-          </a:prstGeom>
-          <a:noFill/>
-          <a:ln/>
-        </p:spPr>
-        <p:txBody>
-          <a:bodyPr wrap="square" lIns="0" tIns="0" rIns="0" bIns="0" rtlCol="0" anchor="t"/>
-          <a:lstStyle/>
-          <a:p>
-            <a:pPr algn="l" indent="0" marL="0">
+            <a:off x="731520" y="2011680"/>
+            <a:ext cx="3392424" cy="365760"/>
+          </a:xfrm>
+          <a:prstGeom prst="rect">
+            <a:avLst/>
+          </a:prstGeom>
+          <a:noFill/>
+          <a:ln/>
+        </p:spPr>
+        <p:txBody>
+          <a:bodyPr wrap="square" lIns="0" tIns="0" rIns="0" bIns="0" rtlCol="0" anchor="t"/>
+          <a:lstStyle/>
+          <a:p>
+            <a:pPr indent="0" marL="0">
               <a:lnSpc>
-                <a:spcPct val="118000"/>
+                <a:spcPct val="100000"/>
               </a:lnSpc>
               <a:buNone/>
             </a:pPr>
             <a:r>
-              <a:rPr lang="en-US" sz="1200" dirty="0">
+              <a:rPr lang="en-US" sz="1350" b="1" dirty="0">
+                <a:solidFill>
+                  <a:srgbClr val="4636B0"/>
+                </a:solidFill>
+                <a:latin typeface="Sora" pitchFamily="34" charset="0"/>
+                <a:ea typeface="Sora" pitchFamily="34" charset="-122"/>
+                <a:cs typeface="Sora" pitchFamily="34" charset="-120"/>
+              </a:rPr>
+              <a:t>1 — L’inventaire</a:t>
+            </a:r>
+            <a:endParaRPr lang="en-US" sz="1350" dirty="0"/>
+          </a:p>
+        </p:txBody>
+      </p:sp>
+      <p:sp>
+        <p:nvSpPr>
+          <p:cNvPr id="8" name="Text 5"/>
+          <p:cNvSpPr/>
+          <p:nvPr/>
+        </p:nvSpPr>
+        <p:spPr>
+          <a:xfrm>
+            <a:off x="731520" y="2395728"/>
+            <a:ext cx="3392424" cy="585216"/>
+          </a:xfrm>
+          <a:prstGeom prst="rect">
+            <a:avLst/>
+          </a:prstGeom>
+          <a:noFill/>
+          <a:ln/>
+        </p:spPr>
+        <p:txBody>
+          <a:bodyPr wrap="square" lIns="0" tIns="0" rIns="0" bIns="0" rtlCol="0" anchor="t"/>
+          <a:lstStyle/>
+          <a:p>
+            <a:pPr indent="0" marL="0">
+              <a:lnSpc>
+                <a:spcPct val="115000"/>
+              </a:lnSpc>
+              <a:buNone/>
+            </a:pPr>
+            <a:r>
+              <a:rPr lang="en-US" sz="1100" dirty="0">
                 <a:solidFill>
                   <a:srgbClr val="3D4556"/>
                 </a:solidFill>
@@ -9434,160 +11578,9 @@
                 <a:ea typeface="Inter" pitchFamily="34" charset="-122"/>
                 <a:cs typeface="Inter" pitchFamily="34" charset="-120"/>
               </a:rPr>
-              <a:t>Les deux volets de l'onglet Set up. Leur en-tête dit où vous en êtes (« 3 emplacements · 40 balises affectées », « 135 références · aucun stock théorique ») : vous n'avez pas à les ouvrir pour le savoir.</a:t>
-            </a:r>
-            <a:endParaRPr lang="en-US" sz="1200" dirty="0"/>
-          </a:p>
-        </p:txBody>
-      </p:sp>
-      <p:sp>
-        <p:nvSpPr>
-          <p:cNvPr id="8" name="Text 5"/>
-          <p:cNvSpPr/>
-          <p:nvPr/>
-        </p:nvSpPr>
-        <p:spPr>
-          <a:xfrm>
-            <a:off x="5394960" y="1371600"/>
-            <a:ext cx="6062472" cy="3840480"/>
-          </a:xfrm>
-          <a:prstGeom prst="rect">
-            <a:avLst/>
-          </a:prstGeom>
-          <a:noFill/>
-          <a:ln/>
-        </p:spPr>
-        <p:txBody>
-          <a:bodyPr wrap="square" lIns="0" tIns="0" rIns="0" bIns="0" rtlCol="0" anchor="t"/>
-          <a:lstStyle/>
-          <a:p>
-            <a:pPr indent="0" marL="0">
-              <a:lnSpc>
-                <a:spcPct val="118000"/>
-              </a:lnSpc>
-              <a:spcAft>
-                <a:spcPts val="1100"/>
-              </a:spcAft>
-              <a:buNone/>
-            </a:pPr>
-            <a:r>
-              <a:rPr lang="en-US" sz="1200" b="1" dirty="0">
-                <a:solidFill>
-                  <a:srgbClr val="0B0F19"/>
-                </a:solidFill>
-                <a:latin typeface="Inter" pitchFamily="34" charset="0"/>
-                <a:ea typeface="Inter" pitchFamily="34" charset="-122"/>
-                <a:cs typeface="Inter" pitchFamily="34" charset="-120"/>
-              </a:rPr>
-              <a:t>Zone de comptage. </a:t>
-            </a:r>
-            <a:pPr indent="0" marL="0">
-              <a:lnSpc>
-                <a:spcPct val="118000"/>
-              </a:lnSpc>
-              <a:spcAft>
-                <a:spcPts val="1100"/>
-              </a:spcAft>
-              <a:buNone/>
-            </a:pPr>
-            <a:r>
-              <a:rPr lang="en-US" sz="1200" dirty="0">
-                <a:solidFill>
-                  <a:srgbClr val="3D4556"/>
-                </a:solidFill>
-                <a:latin typeface="Inter" pitchFamily="34" charset="0"/>
-                <a:ea typeface="Inter" pitchFamily="34" charset="-122"/>
-                <a:cs typeface="Inter" pitchFamily="34" charset="-120"/>
-              </a:rPr>
-              <a:t>Affectez une plage de balises à un emplacement : « Textile, balises 1 à 20 », « Réserve, 21 à 35 ». Une balise scannée qui n'est dans aucune plage sera proposée à l'ajout par le compteur ; vous la nommerez ensuite.</a:t>
-            </a:r>
-            <a:endParaRPr lang="en-US" sz="1200" dirty="0"/>
-          </a:p>
-          <a:p>
-            <a:pPr indent="0" marL="0">
-              <a:lnSpc>
-                <a:spcPct val="118000"/>
-              </a:lnSpc>
-              <a:spcAft>
-                <a:spcPts val="1100"/>
-              </a:spcAft>
-              <a:buNone/>
-            </a:pPr>
-            <a:r>
-              <a:rPr lang="en-US" sz="1200" b="1" dirty="0">
-                <a:solidFill>
-                  <a:srgbClr val="0B0F19"/>
-                </a:solidFill>
-                <a:latin typeface="Inter" pitchFamily="34" charset="0"/>
-                <a:ea typeface="Inter" pitchFamily="34" charset="-122"/>
-                <a:cs typeface="Inter" pitchFamily="34" charset="-120"/>
-              </a:rPr>
-              <a:t>Données d'inventaire. </a:t>
-            </a:r>
-            <a:pPr indent="0" marL="0">
-              <a:lnSpc>
-                <a:spcPct val="118000"/>
-              </a:lnSpc>
-              <a:spcAft>
-                <a:spcPts val="1100"/>
-              </a:spcAft>
-              <a:buNone/>
-            </a:pPr>
-            <a:r>
-              <a:rPr lang="en-US" sz="1200" dirty="0">
-                <a:solidFill>
-                  <a:srgbClr val="3D4556"/>
-                </a:solidFill>
-                <a:latin typeface="Inter" pitchFamily="34" charset="0"/>
-                <a:ea typeface="Inter" pitchFamily="34" charset="-122"/>
-                <a:cs typeface="Inter" pitchFamily="34" charset="-120"/>
-              </a:rPr>
-              <a:t>Deux fichiers, en CSV ou en Excel, tels qu'ils sortent de votre système. Le référentiel articles (code, libellé, prix d'achat) permet de reconnaître ce qu'on scanne. Le stock théorique (code, quantité attendue) permet de calculer les écarts.</a:t>
-            </a:r>
-            <a:endParaRPr lang="en-US" sz="1200" dirty="0"/>
-          </a:p>
-          <a:p>
-            <a:pPr indent="0" marL="0">
-              <a:lnSpc>
-                <a:spcPct val="118000"/>
-              </a:lnSpc>
-              <a:spcAft>
-                <a:spcPts val="1100"/>
-              </a:spcAft>
-              <a:buNone/>
-            </a:pPr>
-            <a:r>
-              <a:rPr lang="en-US" sz="1200" b="1" dirty="0">
-                <a:solidFill>
-                  <a:srgbClr val="0B0F19"/>
-                </a:solidFill>
-                <a:latin typeface="Inter" pitchFamily="34" charset="0"/>
-                <a:ea typeface="Inter" pitchFamily="34" charset="-122"/>
-                <a:cs typeface="Inter" pitchFamily="34" charset="-120"/>
-              </a:rPr>
-              <a:t>Ce que le stock théorique change. </a:t>
-            </a:r>
-            <a:pPr indent="0" marL="0">
-              <a:lnSpc>
-                <a:spcPct val="118000"/>
-              </a:lnSpc>
-              <a:spcAft>
-                <a:spcPts val="1100"/>
-              </a:spcAft>
-              <a:buNone/>
-            </a:pPr>
-            <a:r>
-              <a:rPr lang="en-US" sz="1200" dirty="0">
-                <a:solidFill>
-                  <a:srgbClr val="3D4556"/>
-                </a:solidFill>
-                <a:latin typeface="Inter" pitchFamily="34" charset="0"/>
-                <a:ea typeface="Inter" pitchFamily="34" charset="-122"/>
-                <a:cs typeface="Inter" pitchFamily="34" charset="-120"/>
-              </a:rPr>
-              <a:t>Avec lui, le rapport part de ce qui est attendu : un article jamais scanné apparaît « Non compté », avec son manque. Sans lui, le rapport ne montre que ce qui a été compté. Pour révéler la démarque, il le faut.</a:t>
-            </a:r>
-            <a:endParaRPr lang="en-US" sz="1200" dirty="0"/>
+              <a:t>Un nom, un magasin, un code d'accès. « Utiliser des zones » reste activé : c'est ce qui permet les balises.</a:t>
+            </a:r>
+            <a:endParaRPr lang="en-US" sz="1100" dirty="0"/>
           </a:p>
         </p:txBody>
       </p:sp>
@@ -9599,12 +11592,12 @@
         </p:nvSpPr>
         <p:spPr>
           <a:xfrm>
-            <a:off x="5394960" y="5074920"/>
-            <a:ext cx="6062472" cy="1051560"/>
+            <a:off x="731520" y="3017520"/>
+            <a:ext cx="3392424" cy="3182112"/>
           </a:xfrm>
           <a:prstGeom prst="roundRect">
             <a:avLst>
-              <a:gd name="adj" fmla="val 6957"/>
+              <a:gd name="adj" fmla="val 4023"/>
             </a:avLst>
           </a:prstGeom>
           <a:solidFill>
@@ -9618,55 +11611,82 @@
           </a:ln>
         </p:spPr>
       </p:sp>
-      <p:sp>
-        <p:nvSpPr>
-          <p:cNvPr id="10" name="Text 7"/>
-          <p:cNvSpPr/>
-          <p:nvPr/>
-        </p:nvSpPr>
-        <p:spPr>
-          <a:xfrm>
-            <a:off x="5669280" y="5239512"/>
-            <a:ext cx="5513832" cy="228600"/>
-          </a:xfrm>
-          <a:prstGeom prst="rect">
-            <a:avLst/>
-          </a:prstGeom>
-          <a:noFill/>
-          <a:ln/>
-        </p:spPr>
-        <p:txBody>
-          <a:bodyPr wrap="square" lIns="0" tIns="0" rIns="0" bIns="0" rtlCol="0" anchor="t"/>
-          <a:lstStyle/>
-          <a:p>
-            <a:pPr indent="0" marL="0">
-              <a:buNone/>
-            </a:pPr>
-            <a:r>
-              <a:rPr lang="en-US" sz="950" b="1" dirty="0">
-                <a:solidFill>
-                  <a:srgbClr val="5B6475"/>
-                </a:solidFill>
-                <a:latin typeface="Inter" pitchFamily="34" charset="0"/>
-                <a:ea typeface="Inter" pitchFamily="34" charset="-122"/>
-                <a:cs typeface="Inter" pitchFamily="34" charset="-120"/>
-              </a:rPr>
-              <a:t>Vos colonnes sont reconnues</a:t>
-            </a:r>
-            <a:endParaRPr lang="en-US" sz="950" dirty="0"/>
-          </a:p>
-        </p:txBody>
-      </p:sp>
-      <p:sp>
-        <p:nvSpPr>
-          <p:cNvPr id="11" name="Text 8"/>
-          <p:cNvSpPr/>
-          <p:nvPr/>
-        </p:nvSpPr>
-        <p:spPr>
-          <a:xfrm>
-            <a:off x="5669280" y="5495544"/>
-            <a:ext cx="5513832" cy="502920"/>
+      <p:pic>
+        <p:nvPicPr>
+          <p:cNvPr id="10" name="Image 1" descr="preencoded.png">    </p:cNvPr>
+          <p:cNvPicPr>
+            <a:picLocks noChangeAspect="1"/>
+          </p:cNvPicPr>
+          <p:nvPr/>
+        </p:nvPicPr>
+        <p:blipFill>
+          <a:blip r:embed="rId2"/>
+          <a:stretch>
+            <a:fillRect/>
+          </a:stretch>
+        </p:blipFill>
+        <p:spPr>
+          <a:xfrm>
+            <a:off x="1042416" y="3015797"/>
+            <a:ext cx="2770632" cy="3183835"/>
+          </a:xfrm>
+          <a:prstGeom prst="rect">
+            <a:avLst/>
+          </a:prstGeom>
+        </p:spPr>
+      </p:pic>
+      <p:sp>
+        <p:nvSpPr>
+          <p:cNvPr id="11" name="Text 7"/>
+          <p:cNvSpPr/>
+          <p:nvPr/>
+        </p:nvSpPr>
+        <p:spPr>
+          <a:xfrm>
+            <a:off x="4398264" y="2011680"/>
+            <a:ext cx="3392424" cy="365760"/>
+          </a:xfrm>
+          <a:prstGeom prst="rect">
+            <a:avLst/>
+          </a:prstGeom>
+          <a:noFill/>
+          <a:ln/>
+        </p:spPr>
+        <p:txBody>
+          <a:bodyPr wrap="square" lIns="0" tIns="0" rIns="0" bIns="0" rtlCol="0" anchor="t"/>
+          <a:lstStyle/>
+          <a:p>
+            <a:pPr indent="0" marL="0">
+              <a:lnSpc>
+                <a:spcPct val="100000"/>
+              </a:lnSpc>
+              <a:buNone/>
+            </a:pPr>
+            <a:r>
+              <a:rPr lang="en-US" sz="1350" b="1" dirty="0">
+                <a:solidFill>
+                  <a:srgbClr val="4636B0"/>
+                </a:solidFill>
+                <a:latin typeface="Sora" pitchFamily="34" charset="0"/>
+                <a:ea typeface="Sora" pitchFamily="34" charset="-122"/>
+                <a:cs typeface="Sora" pitchFamily="34" charset="-120"/>
+              </a:rPr>
+              <a:t>2 — Les zones</a:t>
+            </a:r>
+            <a:endParaRPr lang="en-US" sz="1350" dirty="0"/>
+          </a:p>
+        </p:txBody>
+      </p:sp>
+      <p:sp>
+        <p:nvSpPr>
+          <p:cNvPr id="12" name="Text 8"/>
+          <p:cNvSpPr/>
+          <p:nvPr/>
+        </p:nvSpPr>
+        <p:spPr>
+          <a:xfrm>
+            <a:off x="4398264" y="2395728"/>
+            <a:ext cx="3392424" cy="585216"/>
           </a:xfrm>
           <a:prstGeom prst="rect">
             <a:avLst/>
@@ -9685,7 +11705,7 @@
               <a:buNone/>
             </a:pPr>
             <a:r>
-              <a:rPr lang="en-US" sz="1150" i="1" dirty="0">
+              <a:rPr lang="en-US" sz="1100" dirty="0">
                 <a:solidFill>
                   <a:srgbClr val="3D4556"/>
                 </a:solidFill>
@@ -9693,15 +11713,201 @@
                 <a:ea typeface="Inter" pitchFamily="34" charset="-122"/>
                 <a:cs typeface="Inter" pitchFamily="34" charset="-120"/>
               </a:rPr>
-              <a:t>SKU, Code article, Référence · EAN, Code-barres, GTIN, Gencod · Quantité, Qté, Stock. Majuscules, accents et séparateurs n'ont pas d'importance. Si une colonne n'est pas trouvée, l'écran le dit avant d'importer.</a:t>
-            </a:r>
-            <a:endParaRPr lang="en-US" sz="1150" dirty="0"/>
-          </a:p>
-        </p:txBody>
-      </p:sp>
-      <p:sp>
-        <p:nvSpPr>
-          <p:cNvPr id="12" name="Text 9"/>
+              <a:t>Une plage par emplacement : « Textile femme, 1 à 12 ». Les compteurs verront ce nom en scannant.</a:t>
+            </a:r>
+            <a:endParaRPr lang="en-US" sz="1100" dirty="0"/>
+          </a:p>
+        </p:txBody>
+      </p:sp>
+      <p:sp>
+        <p:nvSpPr>
+          <p:cNvPr id="13" name="Shape 9"/>
+          <p:cNvSpPr/>
+          <p:nvPr/>
+        </p:nvSpPr>
+        <p:spPr>
+          <a:xfrm>
+            <a:off x="4398264" y="3017520"/>
+            <a:ext cx="3392424" cy="3182112"/>
+          </a:xfrm>
+          <a:prstGeom prst="roundRect">
+            <a:avLst>
+              <a:gd name="adj" fmla="val 4023"/>
+            </a:avLst>
+          </a:prstGeom>
+          <a:solidFill>
+            <a:srgbClr val="F4F5F9"/>
+          </a:solidFill>
+          <a:ln w="12700">
+            <a:solidFill>
+              <a:srgbClr val="F4F5F9"/>
+            </a:solidFill>
+            <a:prstDash val="solid"/>
+          </a:ln>
+        </p:spPr>
+      </p:sp>
+      <p:pic>
+        <p:nvPicPr>
+          <p:cNvPr id="14" name="Image 2" descr="preencoded.png">    </p:cNvPr>
+          <p:cNvPicPr>
+            <a:picLocks noChangeAspect="1"/>
+          </p:cNvPicPr>
+          <p:nvPr/>
+        </p:nvPicPr>
+        <p:blipFill>
+          <a:blip r:embed="rId3"/>
+          <a:stretch>
+            <a:fillRect/>
+          </a:stretch>
+        </p:blipFill>
+        <p:spPr>
+          <a:xfrm>
+            <a:off x="4709160" y="3015797"/>
+            <a:ext cx="2770632" cy="3183835"/>
+          </a:xfrm>
+          <a:prstGeom prst="rect">
+            <a:avLst/>
+          </a:prstGeom>
+        </p:spPr>
+      </p:pic>
+      <p:sp>
+        <p:nvSpPr>
+          <p:cNvPr id="15" name="Text 10"/>
+          <p:cNvSpPr/>
+          <p:nvPr/>
+        </p:nvSpPr>
+        <p:spPr>
+          <a:xfrm>
+            <a:off x="8065008" y="2011680"/>
+            <a:ext cx="3392424" cy="365760"/>
+          </a:xfrm>
+          <a:prstGeom prst="rect">
+            <a:avLst/>
+          </a:prstGeom>
+          <a:noFill/>
+          <a:ln/>
+        </p:spPr>
+        <p:txBody>
+          <a:bodyPr wrap="square" lIns="0" tIns="0" rIns="0" bIns="0" rtlCol="0" anchor="t"/>
+          <a:lstStyle/>
+          <a:p>
+            <a:pPr indent="0" marL="0">
+              <a:lnSpc>
+                <a:spcPct val="100000"/>
+              </a:lnSpc>
+              <a:buNone/>
+            </a:pPr>
+            <a:r>
+              <a:rPr lang="en-US" sz="1350" b="1" dirty="0">
+                <a:solidFill>
+                  <a:srgbClr val="4636B0"/>
+                </a:solidFill>
+                <a:latin typeface="Sora" pitchFamily="34" charset="0"/>
+                <a:ea typeface="Sora" pitchFamily="34" charset="-122"/>
+                <a:cs typeface="Sora" pitchFamily="34" charset="-120"/>
+              </a:rPr>
+              <a:t>3 — Les fichiers</a:t>
+            </a:r>
+            <a:endParaRPr lang="en-US" sz="1350" dirty="0"/>
+          </a:p>
+        </p:txBody>
+      </p:sp>
+      <p:sp>
+        <p:nvSpPr>
+          <p:cNvPr id="16" name="Text 11"/>
+          <p:cNvSpPr/>
+          <p:nvPr/>
+        </p:nvSpPr>
+        <p:spPr>
+          <a:xfrm>
+            <a:off x="8065008" y="2395728"/>
+            <a:ext cx="3392424" cy="585216"/>
+          </a:xfrm>
+          <a:prstGeom prst="rect">
+            <a:avLst/>
+          </a:prstGeom>
+          <a:noFill/>
+          <a:ln/>
+        </p:spPr>
+        <p:txBody>
+          <a:bodyPr wrap="square" lIns="0" tIns="0" rIns="0" bIns="0" rtlCol="0" anchor="t"/>
+          <a:lstStyle/>
+          <a:p>
+            <a:pPr indent="0" marL="0">
+              <a:lnSpc>
+                <a:spcPct val="115000"/>
+              </a:lnSpc>
+              <a:buNone/>
+            </a:pPr>
+            <a:r>
+              <a:rPr lang="en-US" sz="1100" dirty="0">
+                <a:solidFill>
+                  <a:srgbClr val="3D4556"/>
+                </a:solidFill>
+                <a:latin typeface="Inter" pitchFamily="34" charset="0"/>
+                <a:ea typeface="Inter" pitchFamily="34" charset="-122"/>
+                <a:cs typeface="Inter" pitchFamily="34" charset="-120"/>
+              </a:rPr>
+              <a:t>Référentiel et stock théorique, en CSV ou Excel, tels qu'ils sortent de votre système.</a:t>
+            </a:r>
+            <a:endParaRPr lang="en-US" sz="1100" dirty="0"/>
+          </a:p>
+        </p:txBody>
+      </p:sp>
+      <p:sp>
+        <p:nvSpPr>
+          <p:cNvPr id="17" name="Shape 12"/>
+          <p:cNvSpPr/>
+          <p:nvPr/>
+        </p:nvSpPr>
+        <p:spPr>
+          <a:xfrm>
+            <a:off x="8065008" y="3017520"/>
+            <a:ext cx="3392424" cy="3182112"/>
+          </a:xfrm>
+          <a:prstGeom prst="roundRect">
+            <a:avLst>
+              <a:gd name="adj" fmla="val 4023"/>
+            </a:avLst>
+          </a:prstGeom>
+          <a:solidFill>
+            <a:srgbClr val="F4F5F9"/>
+          </a:solidFill>
+          <a:ln w="12700">
+            <a:solidFill>
+              <a:srgbClr val="F4F5F9"/>
+            </a:solidFill>
+            <a:prstDash val="solid"/>
+          </a:ln>
+        </p:spPr>
+      </p:sp>
+      <p:pic>
+        <p:nvPicPr>
+          <p:cNvPr id="18" name="Image 3" descr="preencoded.png">    </p:cNvPr>
+          <p:cNvPicPr>
+            <a:picLocks noChangeAspect="1"/>
+          </p:cNvPicPr>
+          <p:nvPr/>
+        </p:nvPicPr>
+        <p:blipFill>
+          <a:blip r:embed="rId4"/>
+          <a:stretch>
+            <a:fillRect/>
+          </a:stretch>
+        </p:blipFill>
+        <p:spPr>
+          <a:xfrm>
+            <a:off x="8375904" y="3015797"/>
+            <a:ext cx="2770632" cy="3183835"/>
+          </a:xfrm>
+          <a:prstGeom prst="rect">
+            <a:avLst/>
+          </a:prstGeom>
+        </p:spPr>
+      </p:pic>
+      <p:sp>
+        <p:nvSpPr>
+          <p:cNvPr id="19" name="Text 13"/>
           <p:cNvSpPr/>
           <p:nvPr/>
         </p:nvSpPr>
@@ -9740,7 +11946,7 @@
       </p:sp>
       <p:sp>
         <p:nvSpPr>
-          <p:cNvPr id="13" name="Text 10"/>
+          <p:cNvPr id="20" name="Text 14"/>
           <p:cNvSpPr/>
           <p:nvPr/>
         </p:nvSpPr>
@@ -9905,7 +12111,7 @@
                 <a:ea typeface="Inter" pitchFamily="34" charset="-122"/>
                 <a:cs typeface="Inter" pitchFamily="34" charset="-120"/>
               </a:rPr>
-              <a:t>Superviseur · pendant</a:t>
+              <a:t>Superviseur · à chaque inventaire</a:t>
             </a:r>
             <a:endParaRPr lang="en-US" sz="1000" dirty="0"/>
           </a:p>
@@ -9944,8 +12150,8 @@
         </p:nvSpPr>
         <p:spPr>
           <a:xfrm>
-            <a:off x="731520" y="1280160"/>
-            <a:ext cx="10725912" cy="822960"/>
+            <a:off x="731520" y="1325880"/>
+            <a:ext cx="4206240" cy="2011680"/>
           </a:xfrm>
           <a:prstGeom prst="rect">
             <a:avLst/>
@@ -9972,7 +12178,7 @@
                 <a:ea typeface="Sora" pitchFamily="34" charset="-122"/>
                 <a:cs typeface="Sora" pitchFamily="34" charset="-120"/>
               </a:rPr>
-              <a:t>Pendant l’inventaire : l’onglet Suivi, et deux gestes à connaître.</a:t>
+              <a:t>Deux fichiers, et ce que chacun change.</a:t>
             </a:r>
             <a:endParaRPr lang="en-US" sz="2600" dirty="0"/>
           </a:p>
@@ -9986,27 +12192,50 @@
         </p:nvSpPr>
         <p:spPr>
           <a:xfrm>
-            <a:off x="731520" y="2103120"/>
-            <a:ext cx="10725912" cy="731520"/>
-          </a:xfrm>
-          <a:prstGeom prst="rect">
-            <a:avLst/>
-          </a:prstGeom>
-          <a:noFill/>
-          <a:ln/>
-        </p:spPr>
-        <p:txBody>
-          <a:bodyPr wrap="square" lIns="0" tIns="0" rIns="0" bIns="0" rtlCol="0" anchor="t"/>
-          <a:lstStyle/>
-          <a:p>
-            <a:pPr algn="l" indent="0" marL="0">
+            <a:off x="731520" y="2697480"/>
+            <a:ext cx="7223760" cy="2743200"/>
+          </a:xfrm>
+          <a:prstGeom prst="rect">
+            <a:avLst/>
+          </a:prstGeom>
+          <a:noFill/>
+          <a:ln/>
+        </p:spPr>
+        <p:txBody>
+          <a:bodyPr wrap="square" lIns="0" tIns="0" rIns="0" bIns="0" rtlCol="0" anchor="t"/>
+          <a:lstStyle/>
+          <a:p>
+            <a:pPr indent="0" marL="0">
               <a:lnSpc>
                 <a:spcPct val="118000"/>
               </a:lnSpc>
-              <a:buNone/>
-            </a:pPr>
-            <a:r>
-              <a:rPr lang="en-US" sz="1250" dirty="0">
+              <a:spcAft>
+                <a:spcPts val="1100"/>
+              </a:spcAft>
+              <a:buNone/>
+            </a:pPr>
+            <a:r>
+              <a:rPr lang="en-US" sz="1200" b="1" dirty="0">
+                <a:solidFill>
+                  <a:srgbClr val="0B0F19"/>
+                </a:solidFill>
+                <a:latin typeface="Inter" pitchFamily="34" charset="0"/>
+                <a:ea typeface="Inter" pitchFamily="34" charset="-122"/>
+                <a:cs typeface="Inter" pitchFamily="34" charset="-120"/>
+              </a:rPr>
+              <a:t>Le référentiel articles. </a:t>
+            </a:r>
+            <a:pPr indent="0" marL="0">
+              <a:lnSpc>
+                <a:spcPct val="118000"/>
+              </a:lnSpc>
+              <a:spcAft>
+                <a:spcPts val="1100"/>
+              </a:spcAft>
+              <a:buNone/>
+            </a:pPr>
+            <a:r>
+              <a:rPr lang="en-US" sz="1200" dirty="0">
                 <a:solidFill>
                   <a:srgbClr val="3D4556"/>
                 </a:solidFill>
@@ -10014,9 +12243,95 @@
                 <a:ea typeface="Inter" pitchFamily="34" charset="-122"/>
                 <a:cs typeface="Inter" pitchFamily="34" charset="-120"/>
               </a:rPr>
-              <a:t>Appareils connectés, en comptage, en audit ; avancement par zone ; derniers scans. La page se met à jour toute seule. Si un compteur est parti en laissant sa balise ouverte, Set up permet de la clôturer à sa place ; l'inverse aussi, pour la rouvrir.</a:t>
-            </a:r>
-            <a:endParaRPr lang="en-US" sz="1250" dirty="0"/>
+              <a:t>Code, libellé, prix d'achat. Il permet de reconnaître ce qu'on scanne : sans lui, chaque article scanné sort en « inconnu ».</a:t>
+            </a:r>
+            <a:endParaRPr lang="en-US" sz="1200" dirty="0"/>
+          </a:p>
+          <a:p>
+            <a:pPr indent="0" marL="0">
+              <a:lnSpc>
+                <a:spcPct val="118000"/>
+              </a:lnSpc>
+              <a:spcAft>
+                <a:spcPts val="1100"/>
+              </a:spcAft>
+              <a:buNone/>
+            </a:pPr>
+            <a:r>
+              <a:rPr lang="en-US" sz="1200" b="1" dirty="0">
+                <a:solidFill>
+                  <a:srgbClr val="0B0F19"/>
+                </a:solidFill>
+                <a:latin typeface="Inter" pitchFamily="34" charset="0"/>
+                <a:ea typeface="Inter" pitchFamily="34" charset="-122"/>
+                <a:cs typeface="Inter" pitchFamily="34" charset="-120"/>
+              </a:rPr>
+              <a:t>Le stock théorique. </a:t>
+            </a:r>
+            <a:pPr indent="0" marL="0">
+              <a:lnSpc>
+                <a:spcPct val="118000"/>
+              </a:lnSpc>
+              <a:spcAft>
+                <a:spcPts val="1100"/>
+              </a:spcAft>
+              <a:buNone/>
+            </a:pPr>
+            <a:r>
+              <a:rPr lang="en-US" sz="1200" dirty="0">
+                <a:solidFill>
+                  <a:srgbClr val="3D4556"/>
+                </a:solidFill>
+                <a:latin typeface="Inter" pitchFamily="34" charset="0"/>
+                <a:ea typeface="Inter" pitchFamily="34" charset="-122"/>
+                <a:cs typeface="Inter" pitchFamily="34" charset="-120"/>
+              </a:rPr>
+              <a:t>Code et quantité attendue. C'est lui qui permet de calculer les écarts — et de révéler la démarque.</a:t>
+            </a:r>
+            <a:endParaRPr lang="en-US" sz="1200" dirty="0"/>
+          </a:p>
+          <a:p>
+            <a:pPr indent="0" marL="0">
+              <a:lnSpc>
+                <a:spcPct val="118000"/>
+              </a:lnSpc>
+              <a:spcAft>
+                <a:spcPts val="1100"/>
+              </a:spcAft>
+              <a:buNone/>
+            </a:pPr>
+            <a:r>
+              <a:rPr lang="en-US" sz="1200" b="1" dirty="0">
+                <a:solidFill>
+                  <a:srgbClr val="0B0F19"/>
+                </a:solidFill>
+                <a:latin typeface="Inter" pitchFamily="34" charset="0"/>
+                <a:ea typeface="Inter" pitchFamily="34" charset="-122"/>
+                <a:cs typeface="Inter" pitchFamily="34" charset="-120"/>
+              </a:rPr>
+              <a:t>Ce que le second change. </a:t>
+            </a:r>
+            <a:pPr indent="0" marL="0">
+              <a:lnSpc>
+                <a:spcPct val="118000"/>
+              </a:lnSpc>
+              <a:spcAft>
+                <a:spcPts val="1100"/>
+              </a:spcAft>
+              <a:buNone/>
+            </a:pPr>
+            <a:r>
+              <a:rPr lang="en-US" sz="1200" dirty="0">
+                <a:solidFill>
+                  <a:srgbClr val="3D4556"/>
+                </a:solidFill>
+                <a:latin typeface="Inter" pitchFamily="34" charset="0"/>
+                <a:ea typeface="Inter" pitchFamily="34" charset="-122"/>
+                <a:cs typeface="Inter" pitchFamily="34" charset="-120"/>
+              </a:rPr>
+              <a:t>Avec lui, le rapport part de l'attendu : un article jamais scanné apparaît « Non compté », avec son manque. Sans lui, le rapport ne montre que ce qui a été compté.</a:t>
+            </a:r>
+            <a:endParaRPr lang="en-US" sz="1200" dirty="0"/>
           </a:p>
         </p:txBody>
       </p:sp>
@@ -10028,12 +12343,120 @@
         </p:nvSpPr>
         <p:spPr>
           <a:xfrm>
-            <a:off x="1556182" y="2825496"/>
-            <a:ext cx="9076589" cy="3355848"/>
+            <a:off x="731520" y="5532120"/>
+            <a:ext cx="4754880" cy="868680"/>
           </a:xfrm>
           <a:prstGeom prst="roundRect">
             <a:avLst>
-              <a:gd name="adj" fmla="val 2180"/>
+              <a:gd name="adj" fmla="val 8421"/>
+            </a:avLst>
+          </a:prstGeom>
+          <a:solidFill>
+            <a:srgbClr val="F4F5F9"/>
+          </a:solidFill>
+          <a:ln w="12700">
+            <a:solidFill>
+              <a:srgbClr val="F4F5F9"/>
+            </a:solidFill>
+            <a:prstDash val="solid"/>
+          </a:ln>
+        </p:spPr>
+      </p:sp>
+      <p:sp>
+        <p:nvSpPr>
+          <p:cNvPr id="9" name="Text 6"/>
+          <p:cNvSpPr/>
+          <p:nvPr/>
+        </p:nvSpPr>
+        <p:spPr>
+          <a:xfrm>
+            <a:off x="1005840" y="5696712"/>
+            <a:ext cx="4206240" cy="228600"/>
+          </a:xfrm>
+          <a:prstGeom prst="rect">
+            <a:avLst/>
+          </a:prstGeom>
+          <a:noFill/>
+          <a:ln/>
+        </p:spPr>
+        <p:txBody>
+          <a:bodyPr wrap="square" lIns="0" tIns="0" rIns="0" bIns="0" rtlCol="0" anchor="t"/>
+          <a:lstStyle/>
+          <a:p>
+            <a:pPr indent="0" marL="0">
+              <a:buNone/>
+            </a:pPr>
+            <a:r>
+              <a:rPr lang="en-US" sz="950" b="1" dirty="0">
+                <a:solidFill>
+                  <a:srgbClr val="5B6475"/>
+                </a:solidFill>
+                <a:latin typeface="Inter" pitchFamily="34" charset="0"/>
+                <a:ea typeface="Inter" pitchFamily="34" charset="-122"/>
+                <a:cs typeface="Inter" pitchFamily="34" charset="-120"/>
+              </a:rPr>
+              <a:t>Vos colonnes sont reconnues</a:t>
+            </a:r>
+            <a:endParaRPr lang="en-US" sz="950" dirty="0"/>
+          </a:p>
+        </p:txBody>
+      </p:sp>
+      <p:sp>
+        <p:nvSpPr>
+          <p:cNvPr id="10" name="Text 7"/>
+          <p:cNvSpPr/>
+          <p:nvPr/>
+        </p:nvSpPr>
+        <p:spPr>
+          <a:xfrm>
+            <a:off x="1005840" y="5952744"/>
+            <a:ext cx="4206240" cy="320040"/>
+          </a:xfrm>
+          <a:prstGeom prst="rect">
+            <a:avLst/>
+          </a:prstGeom>
+          <a:noFill/>
+          <a:ln/>
+        </p:spPr>
+        <p:txBody>
+          <a:bodyPr wrap="square" lIns="0" tIns="0" rIns="0" bIns="0" rtlCol="0" anchor="t"/>
+          <a:lstStyle/>
+          <a:p>
+            <a:pPr indent="0" marL="0">
+              <a:lnSpc>
+                <a:spcPct val="115000"/>
+              </a:lnSpc>
+              <a:buNone/>
+            </a:pPr>
+            <a:r>
+              <a:rPr lang="en-US" sz="1050" i="1" dirty="0">
+                <a:solidFill>
+                  <a:srgbClr val="3D4556"/>
+                </a:solidFill>
+                <a:latin typeface="Inter" pitchFamily="34" charset="0"/>
+                <a:ea typeface="Inter" pitchFamily="34" charset="-122"/>
+                <a:cs typeface="Inter" pitchFamily="34" charset="-120"/>
+              </a:rPr>
+              <a:t>SKU, Code article, Référence · EAN, Code-barres, GTIN, Gencod · Quantité, Qté, Stock. Majuscules, accents et séparateurs n'ont pas d'importance. Si une colonne manque, l'écran le dit avant d'importer.</a:t>
+            </a:r>
+            <a:endParaRPr lang="en-US" sz="1050" dirty="0"/>
+          </a:p>
+        </p:txBody>
+      </p:sp>
+      <p:sp>
+        <p:nvSpPr>
+          <p:cNvPr id="11" name="Shape 8"/>
+          <p:cNvSpPr/>
+          <p:nvPr/>
+        </p:nvSpPr>
+        <p:spPr>
+          <a:xfrm>
+            <a:off x="5340096" y="1316736"/>
+            <a:ext cx="6172200" cy="4187624"/>
+          </a:xfrm>
+          <a:prstGeom prst="roundRect">
+            <a:avLst>
+              <a:gd name="adj" fmla="val 1747"/>
             </a:avLst>
           </a:prstGeom>
           <a:solidFill>
@@ -10049,7 +12472,7 @@
       </p:sp>
       <p:pic>
         <p:nvPicPr>
-          <p:cNvPr id="9" name="Image 1" descr="preencoded.png">    </p:cNvPr>
+          <p:cNvPr id="12" name="Image 1" descr="preencoded.png">    </p:cNvPr>
           <p:cNvPicPr>
             <a:picLocks noChangeAspect="1"/>
           </p:cNvPicPr>
@@ -10063,8 +12486,8 @@
         </p:blipFill>
         <p:spPr>
           <a:xfrm>
-            <a:off x="1611046" y="2880360"/>
-            <a:ext cx="8966861" cy="3246120"/>
+            <a:off x="5394960" y="1371600"/>
+            <a:ext cx="6062472" cy="4077896"/>
           </a:xfrm>
           <a:prstGeom prst="rect">
             <a:avLst/>
@@ -10073,14 +12496,14 @@
       </p:pic>
       <p:sp>
         <p:nvSpPr>
-          <p:cNvPr id="10" name="Text 6"/>
-          <p:cNvSpPr/>
-          <p:nvPr/>
-        </p:nvSpPr>
-        <p:spPr>
-          <a:xfrm>
-            <a:off x="1611046" y="6263640"/>
-            <a:ext cx="7891272" cy="365760"/>
+          <p:cNvPr id="13" name="Text 9"/>
+          <p:cNvSpPr/>
+          <p:nvPr/>
+        </p:nvSpPr>
+        <p:spPr>
+          <a:xfrm>
+            <a:off x="5394960" y="5586656"/>
+            <a:ext cx="6062472" cy="365760"/>
           </a:xfrm>
           <a:prstGeom prst="rect">
             <a:avLst/>
@@ -10104,7 +12527,7 @@
                 <a:ea typeface="Inter" pitchFamily="34" charset="-122"/>
                 <a:cs typeface="Inter" pitchFamily="34" charset="-120"/>
               </a:rPr>
-              <a:t>Onglet Suivi, données d'essai. Les compteurs d'appareils ne disent jamais qui : seulement combien.</a:t>
+              <a:t>Le rapport, sur le site : la ligne « Non compté » n'existe que si le stock théorique a été importé.</a:t>
             </a:r>
             <a:endParaRPr lang="en-US" sz="1000" dirty="0"/>
           </a:p>
@@ -10112,7 +12535,7 @@
       </p:sp>
       <p:sp>
         <p:nvSpPr>
-          <p:cNvPr id="11" name="Text 7"/>
+          <p:cNvPr id="14" name="Text 10"/>
           <p:cNvSpPr/>
           <p:nvPr/>
         </p:nvSpPr>
@@ -10151,7 +12574,7 @@
       </p:sp>
       <p:sp>
         <p:nvSpPr>
-          <p:cNvPr id="12" name="Text 8"/>
+          <p:cNvPr id="15" name="Text 11"/>
           <p:cNvSpPr/>
           <p:nvPr/>
         </p:nvSpPr>
@@ -10316,7 +12739,7 @@
                 <a:ea typeface="Inter" pitchFamily="34" charset="-122"/>
                 <a:cs typeface="Inter" pitchFamily="34" charset="-120"/>
               </a:rPr>
-              <a:t>Superviseur · pendant et après</a:t>
+              <a:t>Superviseur · pendant</a:t>
             </a:r>
             <a:endParaRPr lang="en-US" sz="1000" dirty="0"/>
           </a:p>
@@ -10383,7 +12806,7 @@
                 <a:ea typeface="Sora" pitchFamily="34" charset="-122"/>
                 <a:cs typeface="Sora" pitchFamily="34" charset="-120"/>
               </a:rPr>
-              <a:t>Auditer, puis arbitrer. L'écart se lit du point de vue de l'auditeur.</a:t>
+              <a:t>Pendant l’inventaire, deux écrans et un geste.</a:t>
             </a:r>
             <a:endParaRPr lang="en-US" sz="2600" dirty="0"/>
           </a:p>
@@ -10397,27 +12820,69 @@
         </p:nvSpPr>
         <p:spPr>
           <a:xfrm>
-            <a:off x="731520" y="2103120"/>
-            <a:ext cx="10725912" cy="777240"/>
-          </a:xfrm>
-          <a:prstGeom prst="rect">
-            <a:avLst/>
-          </a:prstGeom>
-          <a:noFill/>
-          <a:ln/>
-        </p:spPr>
-        <p:txBody>
-          <a:bodyPr wrap="square" lIns="0" tIns="0" rIns="0" bIns="0" rtlCol="0" anchor="t"/>
-          <a:lstStyle/>
-          <a:p>
-            <a:pPr algn="l" indent="0" marL="0">
+            <a:off x="731520" y="2011680"/>
+            <a:ext cx="3392424" cy="365760"/>
+          </a:xfrm>
+          <a:prstGeom prst="rect">
+            <a:avLst/>
+          </a:prstGeom>
+          <a:noFill/>
+          <a:ln/>
+        </p:spPr>
+        <p:txBody>
+          <a:bodyPr wrap="square" lIns="0" tIns="0" rIns="0" bIns="0" rtlCol="0" anchor="t"/>
+          <a:lstStyle/>
+          <a:p>
+            <a:pPr indent="0" marL="0">
               <a:lnSpc>
-                <a:spcPct val="118000"/>
+                <a:spcPct val="100000"/>
               </a:lnSpc>
               <a:buNone/>
             </a:pPr>
             <a:r>
-              <a:rPr lang="en-US" sz="1250" dirty="0">
+              <a:rPr lang="en-US" sz="1350" b="1" dirty="0">
+                <a:solidFill>
+                  <a:srgbClr val="4636B0"/>
+                </a:solidFill>
+                <a:latin typeface="Sora" pitchFamily="34" charset="0"/>
+                <a:ea typeface="Sora" pitchFamily="34" charset="-122"/>
+                <a:cs typeface="Sora" pitchFamily="34" charset="-120"/>
+              </a:rPr>
+              <a:t>La progression, en un chiffre</a:t>
+            </a:r>
+            <a:endParaRPr lang="en-US" sz="1350" dirty="0"/>
+          </a:p>
+        </p:txBody>
+      </p:sp>
+      <p:sp>
+        <p:nvSpPr>
+          <p:cNvPr id="8" name="Text 5"/>
+          <p:cNvSpPr/>
+          <p:nvPr/>
+        </p:nvSpPr>
+        <p:spPr>
+          <a:xfrm>
+            <a:off x="731520" y="2395728"/>
+            <a:ext cx="3392424" cy="585216"/>
+          </a:xfrm>
+          <a:prstGeom prst="rect">
+            <a:avLst/>
+          </a:prstGeom>
+          <a:noFill/>
+          <a:ln/>
+        </p:spPr>
+        <p:txBody>
+          <a:bodyPr wrap="square" lIns="0" tIns="0" rIns="0" bIns="0" rtlCol="0" anchor="t"/>
+          <a:lstStyle/>
+          <a:p>
+            <a:pPr indent="0" marL="0">
+              <a:lnSpc>
+                <a:spcPct val="115000"/>
+              </a:lnSpc>
+              <a:buNone/>
+            </a:pPr>
+            <a:r>
+              <a:rPr lang="en-US" sz="1100" dirty="0">
                 <a:solidFill>
                   <a:srgbClr val="3D4556"/>
                 </a:solidFill>
@@ -10425,34 +12890,34 @@
                 <a:ea typeface="Inter" pitchFamily="34" charset="-122"/>
                 <a:cs typeface="Inter" pitchFamily="34" charset="-120"/>
               </a:rPr>
-              <a:t>L'audit est un second comptage d'une zone déjà comptée, par une autre personne, en mode « Auditer ». Quand la balise auditée est terminée, chaque article dont les deux quantités diffèrent apparaît ici. Vous retenez la quantité du compteur, celle de l'auditeur, ou une autre que vous avez vérifiée vous-même.</a:t>
-            </a:r>
-            <a:endParaRPr lang="en-US" sz="1250" dirty="0"/>
-          </a:p>
-        </p:txBody>
-      </p:sp>
-      <p:sp>
-        <p:nvSpPr>
-          <p:cNvPr id="8" name="Shape 5"/>
-          <p:cNvSpPr/>
-          <p:nvPr/>
-        </p:nvSpPr>
-        <p:spPr>
-          <a:xfrm>
-            <a:off x="2139696" y="2916936"/>
-            <a:ext cx="7909560" cy="3082758"/>
+              <a:t>Comptées, auditées, et ce qui reste. Le bandeau ambre mène aux emplacements concernés.</a:t>
+            </a:r>
+            <a:endParaRPr lang="en-US" sz="1100" dirty="0"/>
+          </a:p>
+        </p:txBody>
+      </p:sp>
+      <p:sp>
+        <p:nvSpPr>
+          <p:cNvPr id="9" name="Shape 6"/>
+          <p:cNvSpPr/>
+          <p:nvPr/>
+        </p:nvSpPr>
+        <p:spPr>
+          <a:xfrm>
+            <a:off x="731520" y="3017520"/>
+            <a:ext cx="3392424" cy="3182112"/>
           </a:xfrm>
           <a:prstGeom prst="roundRect">
             <a:avLst>
-              <a:gd name="adj" fmla="val 2373"/>
+              <a:gd name="adj" fmla="val 4023"/>
             </a:avLst>
           </a:prstGeom>
           <a:solidFill>
-            <a:srgbClr val="FFFFFF"/>
+            <a:srgbClr val="F4F5F9"/>
           </a:solidFill>
           <a:ln w="12700">
             <a:solidFill>
-              <a:srgbClr val="E3E6EE"/>
+              <a:srgbClr val="F4F5F9"/>
             </a:solidFill>
             <a:prstDash val="solid"/>
           </a:ln>
@@ -10460,7 +12925,7 @@
       </p:sp>
       <p:pic>
         <p:nvPicPr>
-          <p:cNvPr id="9" name="Image 1" descr="preencoded.png">    </p:cNvPr>
+          <p:cNvPr id="10" name="Image 1" descr="preencoded.png">    </p:cNvPr>
           <p:cNvPicPr>
             <a:picLocks noChangeAspect="1"/>
           </p:cNvPicPr>
@@ -10474,8 +12939,8 @@
         </p:blipFill>
         <p:spPr>
           <a:xfrm>
-            <a:off x="2194560" y="2971800"/>
-            <a:ext cx="7799832" cy="2973030"/>
+            <a:off x="1042416" y="3015797"/>
+            <a:ext cx="2770632" cy="3183835"/>
           </a:xfrm>
           <a:prstGeom prst="rect">
             <a:avLst/>
@@ -10484,46 +12949,277 @@
       </p:pic>
       <p:sp>
         <p:nvSpPr>
-          <p:cNvPr id="10" name="Text 6"/>
-          <p:cNvSpPr/>
-          <p:nvPr/>
-        </p:nvSpPr>
-        <p:spPr>
-          <a:xfrm>
-            <a:off x="2194560" y="6081990"/>
-            <a:ext cx="7891272" cy="365760"/>
-          </a:xfrm>
-          <a:prstGeom prst="rect">
-            <a:avLst/>
-          </a:prstGeom>
-          <a:noFill/>
-          <a:ln/>
-        </p:spPr>
-        <p:txBody>
-          <a:bodyPr wrap="square" lIns="0" tIns="0" rIns="0" bIns="0" rtlCol="0" anchor="t"/>
-          <a:lstStyle/>
-          <a:p>
-            <a:pPr indent="0" marL="0">
-              <a:buNone/>
-            </a:pPr>
-            <a:r>
-              <a:rPr lang="en-US" sz="1000" i="1" dirty="0">
-                <a:solidFill>
-                  <a:srgbClr val="5B6475"/>
-                </a:solidFill>
-                <a:latin typeface="Inter" pitchFamily="34" charset="0"/>
-                <a:ea typeface="Inter" pitchFamily="34" charset="-122"/>
-                <a:cs typeface="Inter" pitchFamily="34" charset="-120"/>
-              </a:rPr>
-              <a:t>Onglet Écarts d'audit, données d'essai. Un article trouvé à l'audit mais jamais compté est signalé à part.</a:t>
-            </a:r>
-            <a:endParaRPr lang="en-US" sz="1000" dirty="0"/>
-          </a:p>
-        </p:txBody>
-      </p:sp>
-      <p:sp>
-        <p:nvSpPr>
           <p:cNvPr id="11" name="Text 7"/>
+          <p:cNvSpPr/>
+          <p:nvPr/>
+        </p:nvSpPr>
+        <p:spPr>
+          <a:xfrm>
+            <a:off x="4398264" y="2011680"/>
+            <a:ext cx="3392424" cy="365760"/>
+          </a:xfrm>
+          <a:prstGeom prst="rect">
+            <a:avLst/>
+          </a:prstGeom>
+          <a:noFill/>
+          <a:ln/>
+        </p:spPr>
+        <p:txBody>
+          <a:bodyPr wrap="square" lIns="0" tIns="0" rIns="0" bIns="0" rtlCol="0" anchor="t"/>
+          <a:lstStyle/>
+          <a:p>
+            <a:pPr indent="0" marL="0">
+              <a:lnSpc>
+                <a:spcPct val="100000"/>
+              </a:lnSpc>
+              <a:buNone/>
+            </a:pPr>
+            <a:r>
+              <a:rPr lang="en-US" sz="1350" b="1" dirty="0">
+                <a:solidFill>
+                  <a:srgbClr val="4636B0"/>
+                </a:solidFill>
+                <a:latin typeface="Sora" pitchFamily="34" charset="0"/>
+                <a:ea typeface="Sora" pitchFamily="34" charset="-122"/>
+                <a:cs typeface="Sora" pitchFamily="34" charset="-120"/>
+              </a:rPr>
+              <a:t>La fiche de l’inventaire</a:t>
+            </a:r>
+            <a:endParaRPr lang="en-US" sz="1350" dirty="0"/>
+          </a:p>
+        </p:txBody>
+      </p:sp>
+      <p:sp>
+        <p:nvSpPr>
+          <p:cNvPr id="12" name="Text 8"/>
+          <p:cNvSpPr/>
+          <p:nvPr/>
+        </p:nvSpPr>
+        <p:spPr>
+          <a:xfrm>
+            <a:off x="4398264" y="2395728"/>
+            <a:ext cx="3392424" cy="585216"/>
+          </a:xfrm>
+          <a:prstGeom prst="rect">
+            <a:avLst/>
+          </a:prstGeom>
+          <a:noFill/>
+          <a:ln/>
+        </p:spPr>
+        <p:txBody>
+          <a:bodyPr wrap="square" lIns="0" tIns="0" rIns="0" bIns="0" rtlCol="0" anchor="t"/>
+          <a:lstStyle/>
+          <a:p>
+            <a:pPr indent="0" marL="0">
+              <a:lnSpc>
+                <a:spcPct val="115000"/>
+              </a:lnSpc>
+              <a:buNone/>
+            </a:pPr>
+            <a:r>
+              <a:rPr lang="en-US" sz="1100" dirty="0">
+                <a:solidFill>
+                  <a:srgbClr val="3D4556"/>
+                </a:solidFill>
+                <a:latin typeface="Inter" pitchFamily="34" charset="0"/>
+                <a:ea typeface="Inter" pitchFamily="34" charset="-122"/>
+                <a:cs typeface="Inter" pitchFamily="34" charset="-120"/>
+              </a:rPr>
+              <a:t>Numéro, code d'accès et partage, membres. Le bouton « i » l'ouvre de n'importe où.</a:t>
+            </a:r>
+            <a:endParaRPr lang="en-US" sz="1100" dirty="0"/>
+          </a:p>
+        </p:txBody>
+      </p:sp>
+      <p:sp>
+        <p:nvSpPr>
+          <p:cNvPr id="13" name="Shape 9"/>
+          <p:cNvSpPr/>
+          <p:nvPr/>
+        </p:nvSpPr>
+        <p:spPr>
+          <a:xfrm>
+            <a:off x="4398264" y="3017520"/>
+            <a:ext cx="3392424" cy="3182112"/>
+          </a:xfrm>
+          <a:prstGeom prst="roundRect">
+            <a:avLst>
+              <a:gd name="adj" fmla="val 4023"/>
+            </a:avLst>
+          </a:prstGeom>
+          <a:solidFill>
+            <a:srgbClr val="F4F5F9"/>
+          </a:solidFill>
+          <a:ln w="12700">
+            <a:solidFill>
+              <a:srgbClr val="F4F5F9"/>
+            </a:solidFill>
+            <a:prstDash val="solid"/>
+          </a:ln>
+        </p:spPr>
+      </p:sp>
+      <p:pic>
+        <p:nvPicPr>
+          <p:cNvPr id="14" name="Image 2" descr="preencoded.png">    </p:cNvPr>
+          <p:cNvPicPr>
+            <a:picLocks noChangeAspect="1"/>
+          </p:cNvPicPr>
+          <p:nvPr/>
+        </p:nvPicPr>
+        <p:blipFill>
+          <a:blip r:embed="rId3"/>
+          <a:stretch>
+            <a:fillRect/>
+          </a:stretch>
+        </p:blipFill>
+        <p:spPr>
+          <a:xfrm>
+            <a:off x="4709160" y="3015797"/>
+            <a:ext cx="2770632" cy="3183835"/>
+          </a:xfrm>
+          <a:prstGeom prst="rect">
+            <a:avLst/>
+          </a:prstGeom>
+        </p:spPr>
+      </p:pic>
+      <p:sp>
+        <p:nvSpPr>
+          <p:cNvPr id="15" name="Text 10"/>
+          <p:cNvSpPr/>
+          <p:nvPr/>
+        </p:nvSpPr>
+        <p:spPr>
+          <a:xfrm>
+            <a:off x="8065008" y="2011680"/>
+            <a:ext cx="3392424" cy="365760"/>
+          </a:xfrm>
+          <a:prstGeom prst="rect">
+            <a:avLst/>
+          </a:prstGeom>
+          <a:noFill/>
+          <a:ln/>
+        </p:spPr>
+        <p:txBody>
+          <a:bodyPr wrap="square" lIns="0" tIns="0" rIns="0" bIns="0" rtlCol="0" anchor="t"/>
+          <a:lstStyle/>
+          <a:p>
+            <a:pPr indent="0" marL="0">
+              <a:lnSpc>
+                <a:spcPct val="100000"/>
+              </a:lnSpc>
+              <a:buNone/>
+            </a:pPr>
+            <a:r>
+              <a:rPr lang="en-US" sz="1350" b="1" dirty="0">
+                <a:solidFill>
+                  <a:srgbClr val="4636B0"/>
+                </a:solidFill>
+                <a:latin typeface="Sora" pitchFamily="34" charset="0"/>
+                <a:ea typeface="Sora" pitchFamily="34" charset="-122"/>
+                <a:cs typeface="Sora" pitchFamily="34" charset="-120"/>
+              </a:rPr>
+              <a:t>Qui est dans l’équipe</a:t>
+            </a:r>
+            <a:endParaRPr lang="en-US" sz="1350" dirty="0"/>
+          </a:p>
+        </p:txBody>
+      </p:sp>
+      <p:sp>
+        <p:nvSpPr>
+          <p:cNvPr id="16" name="Text 11"/>
+          <p:cNvSpPr/>
+          <p:nvPr/>
+        </p:nvSpPr>
+        <p:spPr>
+          <a:xfrm>
+            <a:off x="8065008" y="2395728"/>
+            <a:ext cx="3392424" cy="585216"/>
+          </a:xfrm>
+          <a:prstGeom prst="rect">
+            <a:avLst/>
+          </a:prstGeom>
+          <a:noFill/>
+          <a:ln/>
+        </p:spPr>
+        <p:txBody>
+          <a:bodyPr wrap="square" lIns="0" tIns="0" rIns="0" bIns="0" rtlCol="0" anchor="t"/>
+          <a:lstStyle/>
+          <a:p>
+            <a:pPr indent="0" marL="0">
+              <a:lnSpc>
+                <a:spcPct val="115000"/>
+              </a:lnSpc>
+              <a:buNone/>
+            </a:pPr>
+            <a:r>
+              <a:rPr lang="en-US" sz="1100" dirty="0">
+                <a:solidFill>
+                  <a:srgbClr val="3D4556"/>
+                </a:solidFill>
+                <a:latin typeface="Inter" pitchFamily="34" charset="0"/>
+                <a:ea typeface="Inter" pitchFamily="34" charset="-122"/>
+                <a:cs typeface="Inter" pitchFamily="34" charset="-120"/>
+              </a:rPr>
+              <a:t>« Mot de passe à créer » veut dire : invitée, pas encore connectée. C'est un état, pas une erreur.</a:t>
+            </a:r>
+            <a:endParaRPr lang="en-US" sz="1100" dirty="0"/>
+          </a:p>
+        </p:txBody>
+      </p:sp>
+      <p:sp>
+        <p:nvSpPr>
+          <p:cNvPr id="17" name="Shape 12"/>
+          <p:cNvSpPr/>
+          <p:nvPr/>
+        </p:nvSpPr>
+        <p:spPr>
+          <a:xfrm>
+            <a:off x="8065008" y="3017520"/>
+            <a:ext cx="3392424" cy="3182112"/>
+          </a:xfrm>
+          <a:prstGeom prst="roundRect">
+            <a:avLst>
+              <a:gd name="adj" fmla="val 4023"/>
+            </a:avLst>
+          </a:prstGeom>
+          <a:solidFill>
+            <a:srgbClr val="F4F5F9"/>
+          </a:solidFill>
+          <a:ln w="12700">
+            <a:solidFill>
+              <a:srgbClr val="F4F5F9"/>
+            </a:solidFill>
+            <a:prstDash val="solid"/>
+          </a:ln>
+        </p:spPr>
+      </p:sp>
+      <p:pic>
+        <p:nvPicPr>
+          <p:cNvPr id="18" name="Image 3" descr="preencoded.png">    </p:cNvPr>
+          <p:cNvPicPr>
+            <a:picLocks noChangeAspect="1"/>
+          </p:cNvPicPr>
+          <p:nvPr/>
+        </p:nvPicPr>
+        <p:blipFill>
+          <a:blip r:embed="rId4"/>
+          <a:stretch>
+            <a:fillRect/>
+          </a:stretch>
+        </p:blipFill>
+        <p:spPr>
+          <a:xfrm>
+            <a:off x="8375904" y="3015797"/>
+            <a:ext cx="2770632" cy="3183835"/>
+          </a:xfrm>
+          <a:prstGeom prst="rect">
+            <a:avLst/>
+          </a:prstGeom>
+        </p:spPr>
+      </p:pic>
+      <p:sp>
+        <p:nvSpPr>
+          <p:cNvPr id="19" name="Text 13"/>
           <p:cNvSpPr/>
           <p:nvPr/>
         </p:nvSpPr>
@@ -10562,7 +13258,7 @@
       </p:sp>
       <p:sp>
         <p:nvSpPr>
-          <p:cNvPr id="12" name="Text 8"/>
+          <p:cNvPr id="20" name="Text 14"/>
           <p:cNvSpPr/>
           <p:nvPr/>
         </p:nvSpPr>

--- a/docs/entreprise/deck/Quantinvo-prise-en-main-marque.pptx
+++ b/docs/entreprise/deck/Quantinvo-prise-en-main-marque.pptx
@@ -2979,11 +2979,11 @@
         <p:spPr>
           <a:xfrm>
             <a:off x="2139696" y="2916936"/>
-            <a:ext cx="7909560" cy="3082758"/>
+            <a:ext cx="7909560" cy="3103439"/>
           </a:xfrm>
           <a:prstGeom prst="roundRect">
             <a:avLst>
-              <a:gd name="adj" fmla="val 2373"/>
+              <a:gd name="adj" fmla="val 2357"/>
             </a:avLst>
           </a:prstGeom>
           <a:solidFill>
@@ -3014,7 +3014,7 @@
         <p:spPr>
           <a:xfrm>
             <a:off x="2194560" y="2971800"/>
-            <a:ext cx="7799832" cy="2973030"/>
+            <a:ext cx="7799832" cy="2993711"/>
           </a:xfrm>
           <a:prstGeom prst="rect">
             <a:avLst/>
@@ -3029,7 +3029,7 @@
         </p:nvSpPr>
         <p:spPr>
           <a:xfrm>
-            <a:off x="2194560" y="6081990"/>
+            <a:off x="2194560" y="6102671"/>
             <a:ext cx="7891272" cy="365760"/>
           </a:xfrm>
           <a:prstGeom prst="rect">
@@ -11140,11 +11140,11 @@
         <p:spPr>
           <a:xfrm>
             <a:off x="4791456" y="1316736"/>
-            <a:ext cx="6720840" cy="2503036"/>
+            <a:ext cx="6720840" cy="2619962"/>
           </a:xfrm>
           <a:prstGeom prst="roundRect">
             <a:avLst>
-              <a:gd name="adj" fmla="val 2923"/>
+              <a:gd name="adj" fmla="val 2792"/>
             </a:avLst>
           </a:prstGeom>
           <a:solidFill>
@@ -11175,7 +11175,7 @@
         <p:spPr>
           <a:xfrm>
             <a:off x="4846320" y="1371600"/>
-            <a:ext cx="6611112" cy="2393308"/>
+            <a:ext cx="6611112" cy="2510234"/>
           </a:xfrm>
           <a:prstGeom prst="rect">
             <a:avLst/>
@@ -11190,7 +11190,7 @@
         </p:nvSpPr>
         <p:spPr>
           <a:xfrm>
-            <a:off x="4846320" y="3902068"/>
+            <a:off x="4846320" y="4018994"/>
             <a:ext cx="6611112" cy="365760"/>
           </a:xfrm>
           <a:prstGeom prst="rect">
@@ -12452,11 +12452,11 @@
         <p:spPr>
           <a:xfrm>
             <a:off x="5340096" y="1316736"/>
-            <a:ext cx="6172200" cy="4187624"/>
+            <a:ext cx="6172200" cy="4260383"/>
           </a:xfrm>
           <a:prstGeom prst="roundRect">
             <a:avLst>
-              <a:gd name="adj" fmla="val 1747"/>
+              <a:gd name="adj" fmla="val 1717"/>
             </a:avLst>
           </a:prstGeom>
           <a:solidFill>
@@ -12487,7 +12487,7 @@
         <p:spPr>
           <a:xfrm>
             <a:off x="5394960" y="1371600"/>
-            <a:ext cx="6062472" cy="4077896"/>
+            <a:ext cx="6062472" cy="4150655"/>
           </a:xfrm>
           <a:prstGeom prst="rect">
             <a:avLst/>
@@ -12502,7 +12502,7 @@
         </p:nvSpPr>
         <p:spPr>
           <a:xfrm>
-            <a:off x="5394960" y="5586656"/>
+            <a:off x="5394960" y="5659415"/>
             <a:ext cx="6062472" cy="365760"/>
           </a:xfrm>
           <a:prstGeom prst="rect">

--- a/docs/entreprise/deck/Quantinvo-prise-en-main-marque.pptx
+++ b/docs/entreprise/deck/Quantinvo-prise-en-main-marque.pptx
@@ -2528,11 +2528,11 @@
             <a:r>
               <a:rPr lang="en-US" sz="2400" b="1" dirty="0">
                 <a:solidFill>
-                  <a:srgbClr val="0B0F19"/>
-                </a:solidFill>
-                <a:latin typeface="Sora" pitchFamily="34" charset="0"/>
-                <a:ea typeface="Sora" pitchFamily="34" charset="-122"/>
-                <a:cs typeface="Sora" pitchFamily="34" charset="-120"/>
+                  <a:srgbClr val="14181A"/>
+                </a:solidFill>
+                <a:latin typeface="Archivo" pitchFamily="34" charset="0"/>
+                <a:ea typeface="Archivo" pitchFamily="34" charset="-122"/>
+                <a:cs typeface="Archivo" pitchFamily="34" charset="-120"/>
               </a:rPr>
               <a:t>Quantinvo</a:t>
             </a:r>
@@ -2549,17 +2549,17 @@
         <p:spPr>
           <a:xfrm>
             <a:off x="731520" y="1481328"/>
-            <a:ext cx="2377440" cy="25603"/>
+            <a:ext cx="2011680" cy="20117"/>
           </a:xfrm>
           <a:prstGeom prst="rect">
             <a:avLst/>
           </a:prstGeom>
           <a:solidFill>
-            <a:srgbClr val="38C9FF"/>
+            <a:srgbClr val="14181A"/>
           </a:solidFill>
           <a:ln w="12700">
             <a:solidFill>
-              <a:srgbClr val="38C9FF"/>
+              <a:srgbClr val="14181A"/>
             </a:solidFill>
             <a:prstDash val="solid"/>
           </a:ln>
@@ -2592,11 +2592,11 @@
             <a:r>
               <a:rPr lang="en-US" sz="1300" dirty="0">
                 <a:solidFill>
-                  <a:srgbClr val="5B6475"/>
-                </a:solidFill>
-                <a:latin typeface="Inter" pitchFamily="34" charset="0"/>
-                <a:ea typeface="Inter" pitchFamily="34" charset="-122"/>
-                <a:cs typeface="Inter" pitchFamily="34" charset="-120"/>
+                  <a:srgbClr val="575F5C"/>
+                </a:solidFill>
+                <a:latin typeface="Public Sans" pitchFamily="34" charset="0"/>
+                <a:ea typeface="Public Sans" pitchFamily="34" charset="-122"/>
+                <a:cs typeface="Public Sans" pitchFamily="34" charset="-120"/>
               </a:rPr>
               <a:t>Guide de prise en main</a:t>
             </a:r>
@@ -2634,11 +2634,11 @@
             <a:r>
               <a:rPr lang="en-US" sz="4000" b="1" dirty="0">
                 <a:solidFill>
-                  <a:srgbClr val="4636B0"/>
-                </a:solidFill>
-                <a:latin typeface="Sora" pitchFamily="34" charset="0"/>
-                <a:ea typeface="Sora" pitchFamily="34" charset="-122"/>
-                <a:cs typeface="Sora" pitchFamily="34" charset="-120"/>
+                  <a:srgbClr val="14181A"/>
+                </a:solidFill>
+                <a:latin typeface="Archivo" pitchFamily="34" charset="0"/>
+                <a:ea typeface="Archivo" pitchFamily="34" charset="-122"/>
+                <a:cs typeface="Archivo" pitchFamily="34" charset="-120"/>
               </a:rPr>
               <a:t>Compter avec Quantinvo. Une demi-heure de lecture, puis on y va.</a:t>
             </a:r>
@@ -2676,11 +2676,11 @@
             <a:r>
               <a:rPr lang="en-US" sz="1500" dirty="0">
                 <a:solidFill>
-                  <a:srgbClr val="3D4556"/>
-                </a:solidFill>
-                <a:latin typeface="Inter" pitchFamily="34" charset="0"/>
-                <a:ea typeface="Inter" pitchFamily="34" charset="-122"/>
-                <a:cs typeface="Inter" pitchFamily="34" charset="-120"/>
+                  <a:srgbClr val="3A423F"/>
+                </a:solidFill>
+                <a:latin typeface="Public Sans" pitchFamily="34" charset="0"/>
+                <a:ea typeface="Public Sans" pitchFamily="34" charset="-122"/>
+                <a:cs typeface="Public Sans" pitchFamily="34" charset="-120"/>
               </a:rPr>
               <a:t>Pour les superviseurs, qui préparent et pilotent. Pour les compteurs, qui scannent. Les écrans de ce guide sont ceux de l'application, tels quels.</a:t>
             </a:r>
@@ -2715,11 +2715,11 @@
             <a:r>
               <a:rPr lang="en-US" sz="1050" dirty="0">
                 <a:solidFill>
-                  <a:srgbClr val="5B6475"/>
-                </a:solidFill>
-                <a:latin typeface="Inter" pitchFamily="34" charset="0"/>
-                <a:ea typeface="Inter" pitchFamily="34" charset="-122"/>
-                <a:cs typeface="Inter" pitchFamily="34" charset="-120"/>
+                  <a:srgbClr val="575F5C"/>
+                </a:solidFill>
+                <a:latin typeface="Public Sans" pitchFamily="34" charset="0"/>
+                <a:ea typeface="Public Sans" pitchFamily="34" charset="-122"/>
+                <a:cs typeface="Public Sans" pitchFamily="34" charset="-120"/>
               </a:rPr>
               <a:t>Devkaylab  ·  août 2026  ·  contact@quantinvo.com</a:t>
             </a:r>
@@ -2810,11 +2810,11 @@
             <a:r>
               <a:rPr lang="en-US" sz="1600" b="1" dirty="0">
                 <a:solidFill>
-                  <a:srgbClr val="0B0F19"/>
-                </a:solidFill>
-                <a:latin typeface="Sora" pitchFamily="34" charset="0"/>
-                <a:ea typeface="Sora" pitchFamily="34" charset="-122"/>
-                <a:cs typeface="Sora" pitchFamily="34" charset="-120"/>
+                  <a:srgbClr val="14181A"/>
+                </a:solidFill>
+                <a:latin typeface="Archivo" pitchFamily="34" charset="0"/>
+                <a:ea typeface="Archivo" pitchFamily="34" charset="-122"/>
+                <a:cs typeface="Archivo" pitchFamily="34" charset="-120"/>
               </a:rPr>
               <a:t>Quantinvo</a:t>
             </a:r>
@@ -2849,11 +2849,11 @@
             <a:r>
               <a:rPr lang="en-US" sz="1000" dirty="0">
                 <a:solidFill>
-                  <a:srgbClr val="5B6475"/>
-                </a:solidFill>
-                <a:latin typeface="Inter" pitchFamily="34" charset="0"/>
-                <a:ea typeface="Inter" pitchFamily="34" charset="-122"/>
-                <a:cs typeface="Inter" pitchFamily="34" charset="-120"/>
+                  <a:srgbClr val="575F5C"/>
+                </a:solidFill>
+                <a:latin typeface="Public Sans" pitchFamily="34" charset="0"/>
+                <a:ea typeface="Public Sans" pitchFamily="34" charset="-122"/>
+                <a:cs typeface="Public Sans" pitchFamily="34" charset="-120"/>
               </a:rPr>
               <a:t>Superviseur · pendant et après</a:t>
             </a:r>
@@ -2870,17 +2870,17 @@
         <p:spPr>
           <a:xfrm>
             <a:off x="731520" y="877824"/>
-            <a:ext cx="10725912" cy="25603"/>
+            <a:ext cx="10725912" cy="10973"/>
           </a:xfrm>
           <a:prstGeom prst="rect">
             <a:avLst/>
           </a:prstGeom>
           <a:solidFill>
-            <a:srgbClr val="38C9FF"/>
+            <a:srgbClr val="E2E5E1"/>
           </a:solidFill>
           <a:ln w="12700">
             <a:solidFill>
-              <a:srgbClr val="38C9FF"/>
+              <a:srgbClr val="E2E5E1"/>
             </a:solidFill>
             <a:prstDash val="solid"/>
           </a:ln>
@@ -2916,11 +2916,11 @@
             <a:r>
               <a:rPr lang="en-US" sz="2600" b="1" dirty="0">
                 <a:solidFill>
-                  <a:srgbClr val="4636B0"/>
-                </a:solidFill>
-                <a:latin typeface="Sora" pitchFamily="34" charset="0"/>
-                <a:ea typeface="Sora" pitchFamily="34" charset="-122"/>
-                <a:cs typeface="Sora" pitchFamily="34" charset="-120"/>
+                  <a:srgbClr val="14181A"/>
+                </a:solidFill>
+                <a:latin typeface="Archivo" pitchFamily="34" charset="0"/>
+                <a:ea typeface="Archivo" pitchFamily="34" charset="-122"/>
+                <a:cs typeface="Archivo" pitchFamily="34" charset="-120"/>
               </a:rPr>
               <a:t>Auditer, puis arbitrer. L'écart se règle à chaud.</a:t>
             </a:r>
@@ -2958,11 +2958,11 @@
             <a:r>
               <a:rPr lang="en-US" sz="1250" dirty="0">
                 <a:solidFill>
-                  <a:srgbClr val="3D4556"/>
-                </a:solidFill>
-                <a:latin typeface="Inter" pitchFamily="34" charset="0"/>
-                <a:ea typeface="Inter" pitchFamily="34" charset="-122"/>
-                <a:cs typeface="Inter" pitchFamily="34" charset="-120"/>
+                  <a:srgbClr val="3A423F"/>
+                </a:solidFill>
+                <a:latin typeface="Public Sans" pitchFamily="34" charset="0"/>
+                <a:ea typeface="Public Sans" pitchFamily="34" charset="-122"/>
+                <a:cs typeface="Public Sans" pitchFamily="34" charset="-120"/>
               </a:rPr>
               <a:t>L'audit est un second comptage d'une zone déjà comptée, par une autre personne. Quand la balise auditée est clôturée, chaque article dont les deux quantités diffèrent apparaît ici. Vous retenez la quantité du compteur, celle de l'auditeur, ou une troisième que vous avez vérifiée vous-même.</a:t>
             </a:r>
@@ -2983,7 +2983,7 @@
           </a:xfrm>
           <a:prstGeom prst="roundRect">
             <a:avLst>
-              <a:gd name="adj" fmla="val 2357"/>
+              <a:gd name="adj" fmla="val 1179"/>
             </a:avLst>
           </a:prstGeom>
           <a:solidFill>
@@ -2991,7 +2991,7 @@
           </a:solidFill>
           <a:ln w="12700">
             <a:solidFill>
-              <a:srgbClr val="E3E6EE"/>
+              <a:srgbClr val="E2E5E1"/>
             </a:solidFill>
             <a:prstDash val="solid"/>
           </a:ln>
@@ -3048,11 +3048,11 @@
             <a:r>
               <a:rPr lang="en-US" sz="1000" i="1" dirty="0">
                 <a:solidFill>
-                  <a:srgbClr val="5B6475"/>
-                </a:solidFill>
-                <a:latin typeface="Inter" pitchFamily="34" charset="0"/>
-                <a:ea typeface="Inter" pitchFamily="34" charset="-122"/>
-                <a:cs typeface="Inter" pitchFamily="34" charset="-120"/>
+                  <a:srgbClr val="575F5C"/>
+                </a:solidFill>
+                <a:latin typeface="Public Sans" pitchFamily="34" charset="0"/>
+                <a:ea typeface="Public Sans" pitchFamily="34" charset="-122"/>
+                <a:cs typeface="Public Sans" pitchFamily="34" charset="-120"/>
               </a:rPr>
               <a:t>Onglet Écarts d'audit. Tant qu'un écart n'est pas arbitré, c'est la quantité de l'auditeur qui part au rapport.</a:t>
             </a:r>
@@ -3087,11 +3087,11 @@
             <a:r>
               <a:rPr lang="en-US" sz="900" dirty="0">
                 <a:solidFill>
-                  <a:srgbClr val="5B6475"/>
-                </a:solidFill>
-                <a:latin typeface="Inter" pitchFamily="34" charset="0"/>
-                <a:ea typeface="Inter" pitchFamily="34" charset="-122"/>
-                <a:cs typeface="Inter" pitchFamily="34" charset="-120"/>
+                  <a:srgbClr val="575F5C"/>
+                </a:solidFill>
+                <a:latin typeface="Public Sans" pitchFamily="34" charset="0"/>
+                <a:ea typeface="Public Sans" pitchFamily="34" charset="-122"/>
+                <a:cs typeface="Public Sans" pitchFamily="34" charset="-120"/>
               </a:rPr>
               <a:t>Quantinvo · prise en main · août 2026</a:t>
             </a:r>
@@ -3126,11 +3126,11 @@
             <a:r>
               <a:rPr lang="en-US" sz="900" dirty="0">
                 <a:solidFill>
-                  <a:srgbClr val="5B6475"/>
-                </a:solidFill>
-                <a:latin typeface="Inter" pitchFamily="34" charset="0"/>
-                <a:ea typeface="Inter" pitchFamily="34" charset="-122"/>
-                <a:cs typeface="Inter" pitchFamily="34" charset="-120"/>
+                  <a:srgbClr val="575F5C"/>
+                </a:solidFill>
+                <a:latin typeface="Public Sans" pitchFamily="34" charset="0"/>
+                <a:ea typeface="Public Sans" pitchFamily="34" charset="-122"/>
+                <a:cs typeface="Public Sans" pitchFamily="34" charset="-120"/>
               </a:rPr>
               <a:t>10</a:t>
             </a:r>
@@ -3221,11 +3221,11 @@
             <a:r>
               <a:rPr lang="en-US" sz="1600" b="1" dirty="0">
                 <a:solidFill>
-                  <a:srgbClr val="0B0F19"/>
-                </a:solidFill>
-                <a:latin typeface="Sora" pitchFamily="34" charset="0"/>
-                <a:ea typeface="Sora" pitchFamily="34" charset="-122"/>
-                <a:cs typeface="Sora" pitchFamily="34" charset="-120"/>
+                  <a:srgbClr val="14181A"/>
+                </a:solidFill>
+                <a:latin typeface="Archivo" pitchFamily="34" charset="0"/>
+                <a:ea typeface="Archivo" pitchFamily="34" charset="-122"/>
+                <a:cs typeface="Archivo" pitchFamily="34" charset="-120"/>
               </a:rPr>
               <a:t>Quantinvo</a:t>
             </a:r>
@@ -3260,11 +3260,11 @@
             <a:r>
               <a:rPr lang="en-US" sz="1000" dirty="0">
                 <a:solidFill>
-                  <a:srgbClr val="5B6475"/>
-                </a:solidFill>
-                <a:latin typeface="Inter" pitchFamily="34" charset="0"/>
-                <a:ea typeface="Inter" pitchFamily="34" charset="-122"/>
-                <a:cs typeface="Inter" pitchFamily="34" charset="-120"/>
+                  <a:srgbClr val="575F5C"/>
+                </a:solidFill>
+                <a:latin typeface="Public Sans" pitchFamily="34" charset="0"/>
+                <a:ea typeface="Public Sans" pitchFamily="34" charset="-122"/>
+                <a:cs typeface="Public Sans" pitchFamily="34" charset="-120"/>
               </a:rPr>
               <a:t>Superviseur · après</a:t>
             </a:r>
@@ -3281,17 +3281,17 @@
         <p:spPr>
           <a:xfrm>
             <a:off x="731520" y="877824"/>
-            <a:ext cx="10725912" cy="25603"/>
+            <a:ext cx="10725912" cy="10973"/>
           </a:xfrm>
           <a:prstGeom prst="rect">
             <a:avLst/>
           </a:prstGeom>
           <a:solidFill>
-            <a:srgbClr val="38C9FF"/>
+            <a:srgbClr val="E2E5E1"/>
           </a:solidFill>
           <a:ln w="12700">
             <a:solidFill>
-              <a:srgbClr val="38C9FF"/>
+              <a:srgbClr val="E2E5E1"/>
             </a:solidFill>
             <a:prstDash val="solid"/>
           </a:ln>
@@ -3327,11 +3327,11 @@
             <a:r>
               <a:rPr lang="en-US" sz="2600" b="1" dirty="0">
                 <a:solidFill>
-                  <a:srgbClr val="4636B0"/>
-                </a:solidFill>
-                <a:latin typeface="Sora" pitchFamily="34" charset="0"/>
-                <a:ea typeface="Sora" pitchFamily="34" charset="-122"/>
-                <a:cs typeface="Sora" pitchFamily="34" charset="-120"/>
+                  <a:srgbClr val="14181A"/>
+                </a:solidFill>
+                <a:latin typeface="Archivo" pitchFamily="34" charset="0"/>
+                <a:ea typeface="Archivo" pitchFamily="34" charset="-122"/>
+                <a:cs typeface="Archivo" pitchFamily="34" charset="-120"/>
               </a:rPr>
               <a:t>Le rapport, puis la clôture.</a:t>
             </a:r>
@@ -3372,11 +3372,11 @@
             <a:r>
               <a:rPr lang="en-US" sz="1200" b="1" dirty="0">
                 <a:solidFill>
-                  <a:srgbClr val="0B0F19"/>
-                </a:solidFill>
-                <a:latin typeface="Inter" pitchFamily="34" charset="0"/>
-                <a:ea typeface="Inter" pitchFamily="34" charset="-122"/>
-                <a:cs typeface="Inter" pitchFamily="34" charset="-120"/>
+                  <a:srgbClr val="14181A"/>
+                </a:solidFill>
+                <a:latin typeface="Public Sans" pitchFamily="34" charset="0"/>
+                <a:ea typeface="Public Sans" pitchFamily="34" charset="-122"/>
+                <a:cs typeface="Public Sans" pitchFamily="34" charset="-120"/>
               </a:rPr>
               <a:t>Télécharger. </a:t>
             </a:r>
@@ -3392,11 +3392,11 @@
             <a:r>
               <a:rPr lang="en-US" sz="1200" dirty="0">
                 <a:solidFill>
-                  <a:srgbClr val="3D4556"/>
-                </a:solidFill>
-                <a:latin typeface="Inter" pitchFamily="34" charset="0"/>
-                <a:ea typeface="Inter" pitchFamily="34" charset="-122"/>
-                <a:cs typeface="Inter" pitchFamily="34" charset="-120"/>
+                  <a:srgbClr val="3A423F"/>
+                </a:solidFill>
+                <a:latin typeface="Public Sans" pitchFamily="34" charset="0"/>
+                <a:ea typeface="Public Sans" pitchFamily="34" charset="-122"/>
+                <a:cs typeface="Public Sans" pitchFamily="34" charset="-120"/>
               </a:rPr>
               <a:t>Un fichier Excel : résultats par article, écarts en pièces et en valeur d'achat, détail par zone. La quantité retenue suit une règle simple — l'arbitrage, sinon l'auditeur, sinon le compteur.</a:t>
             </a:r>
@@ -3415,11 +3415,11 @@
             <a:r>
               <a:rPr lang="en-US" sz="1200" b="1" dirty="0">
                 <a:solidFill>
-                  <a:srgbClr val="0B0F19"/>
-                </a:solidFill>
-                <a:latin typeface="Inter" pitchFamily="34" charset="0"/>
-                <a:ea typeface="Inter" pitchFamily="34" charset="-122"/>
-                <a:cs typeface="Inter" pitchFamily="34" charset="-120"/>
+                  <a:srgbClr val="14181A"/>
+                </a:solidFill>
+                <a:latin typeface="Public Sans" pitchFamily="34" charset="0"/>
+                <a:ea typeface="Public Sans" pitchFamily="34" charset="-122"/>
+                <a:cs typeface="Public Sans" pitchFamily="34" charset="-120"/>
               </a:rPr>
               <a:t>Regarder « Non compté » d’abord. </a:t>
             </a:r>
@@ -3435,11 +3435,11 @@
             <a:r>
               <a:rPr lang="en-US" sz="1200" dirty="0">
                 <a:solidFill>
-                  <a:srgbClr val="3D4556"/>
-                </a:solidFill>
-                <a:latin typeface="Inter" pitchFamily="34" charset="0"/>
-                <a:ea typeface="Inter" pitchFamily="34" charset="-122"/>
-                <a:cs typeface="Inter" pitchFamily="34" charset="-120"/>
+                  <a:srgbClr val="3A423F"/>
+                </a:solidFill>
+                <a:latin typeface="Public Sans" pitchFamily="34" charset="0"/>
+                <a:ea typeface="Public Sans" pitchFamily="34" charset="-122"/>
+                <a:cs typeface="Public Sans" pitchFamily="34" charset="-120"/>
               </a:rPr>
               <a:t>Ce sont les articles attendus que personne n'a scannés. C'est là que se lit la démarque.</a:t>
             </a:r>
@@ -3458,11 +3458,11 @@
             <a:r>
               <a:rPr lang="en-US" sz="1200" b="1" dirty="0">
                 <a:solidFill>
-                  <a:srgbClr val="0B0F19"/>
-                </a:solidFill>
-                <a:latin typeface="Inter" pitchFamily="34" charset="0"/>
-                <a:ea typeface="Inter" pitchFamily="34" charset="-122"/>
-                <a:cs typeface="Inter" pitchFamily="34" charset="-120"/>
+                  <a:srgbClr val="14181A"/>
+                </a:solidFill>
+                <a:latin typeface="Public Sans" pitchFamily="34" charset="0"/>
+                <a:ea typeface="Public Sans" pitchFamily="34" charset="-122"/>
+                <a:cs typeface="Public Sans" pitchFamily="34" charset="-120"/>
               </a:rPr>
               <a:t>Clôturer. </a:t>
             </a:r>
@@ -3478,11 +3478,11 @@
             <a:r>
               <a:rPr lang="en-US" sz="1200" dirty="0">
                 <a:solidFill>
-                  <a:srgbClr val="3D4556"/>
-                </a:solidFill>
-                <a:latin typeface="Inter" pitchFamily="34" charset="0"/>
-                <a:ea typeface="Inter" pitchFamily="34" charset="-122"/>
-                <a:cs typeface="Inter" pitchFamily="34" charset="-120"/>
+                  <a:srgbClr val="3A423F"/>
+                </a:solidFill>
+                <a:latin typeface="Public Sans" pitchFamily="34" charset="0"/>
+                <a:ea typeface="Public Sans" pitchFamily="34" charset="-122"/>
+                <a:cs typeface="Public Sans" pitchFamily="34" charset="-120"/>
               </a:rPr>
               <a:t>Plus aucun scan n'est accepté, le rapport ne bouge plus. Tout superviseur de l'inventaire peut clôturer ; seul son créateur, ou l'administrateur d'entreprise, peut le rouvrir ou le supprimer.</a:t>
             </a:r>
@@ -3501,11 +3501,11 @@
             <a:r>
               <a:rPr lang="en-US" sz="1200" b="1" dirty="0">
                 <a:solidFill>
-                  <a:srgbClr val="0B0F19"/>
-                </a:solidFill>
-                <a:latin typeface="Inter" pitchFamily="34" charset="0"/>
-                <a:ea typeface="Inter" pitchFamily="34" charset="-122"/>
-                <a:cs typeface="Inter" pitchFamily="34" charset="-120"/>
+                  <a:srgbClr val="14181A"/>
+                </a:solidFill>
+                <a:latin typeface="Public Sans" pitchFamily="34" charset="0"/>
+                <a:ea typeface="Public Sans" pitchFamily="34" charset="-122"/>
+                <a:cs typeface="Public Sans" pitchFamily="34" charset="-120"/>
               </a:rPr>
               <a:t>Supprimer. </a:t>
             </a:r>
@@ -3521,11 +3521,11 @@
             <a:r>
               <a:rPr lang="en-US" sz="1200" dirty="0">
                 <a:solidFill>
-                  <a:srgbClr val="3D4556"/>
-                </a:solidFill>
-                <a:latin typeface="Inter" pitchFamily="34" charset="0"/>
-                <a:ea typeface="Inter" pitchFamily="34" charset="-122"/>
-                <a:cs typeface="Inter" pitchFamily="34" charset="-120"/>
+                  <a:srgbClr val="3A423F"/>
+                </a:solidFill>
+                <a:latin typeface="Public Sans" pitchFamily="34" charset="0"/>
+                <a:ea typeface="Public Sans" pitchFamily="34" charset="-122"/>
+                <a:cs typeface="Public Sans" pitchFamily="34" charset="-120"/>
               </a:rPr>
               <a:t>Efface comptages, fichiers, audits et membres. La confirmation nomme l'inventaire ; lisez-la.</a:t>
             </a:r>
@@ -3563,11 +3563,11 @@
             <a:r>
               <a:rPr lang="en-US" sz="1350" b="1" dirty="0">
                 <a:solidFill>
-                  <a:srgbClr val="4636B0"/>
-                </a:solidFill>
-                <a:latin typeface="Sora" pitchFamily="34" charset="0"/>
-                <a:ea typeface="Sora" pitchFamily="34" charset="-122"/>
-                <a:cs typeface="Sora" pitchFamily="34" charset="-120"/>
+                  <a:srgbClr val="14181A"/>
+                </a:solidFill>
+                <a:latin typeface="Archivo" pitchFamily="34" charset="0"/>
+                <a:ea typeface="Archivo" pitchFamily="34" charset="-122"/>
+                <a:cs typeface="Archivo" pitchFamily="34" charset="-120"/>
               </a:rPr>
               <a:t>Les gestes de fin</a:t>
             </a:r>
@@ -3605,11 +3605,11 @@
             <a:r>
               <a:rPr lang="en-US" sz="1100" dirty="0">
                 <a:solidFill>
-                  <a:srgbClr val="3D4556"/>
-                </a:solidFill>
-                <a:latin typeface="Inter" pitchFamily="34" charset="0"/>
-                <a:ea typeface="Inter" pitchFamily="34" charset="-122"/>
-                <a:cs typeface="Inter" pitchFamily="34" charset="-120"/>
+                  <a:srgbClr val="3A423F"/>
+                </a:solidFill>
+                <a:latin typeface="Public Sans" pitchFamily="34" charset="0"/>
+                <a:ea typeface="Public Sans" pitchFamily="34" charset="-122"/>
+                <a:cs typeface="Public Sans" pitchFamily="34" charset="-120"/>
               </a:rPr>
               <a:t>Écarts, rapport, clôture, suppression : tous sur la même page, dans cet ordre.</a:t>
             </a:r>
@@ -3630,15 +3630,15 @@
           </a:xfrm>
           <a:prstGeom prst="roundRect">
             <a:avLst>
-              <a:gd name="adj" fmla="val 4000"/>
+              <a:gd name="adj" fmla="val 1143"/>
             </a:avLst>
           </a:prstGeom>
           <a:solidFill>
-            <a:srgbClr val="F4F5F9"/>
+            <a:srgbClr val="F2F3F1"/>
           </a:solidFill>
           <a:ln w="12700">
             <a:solidFill>
-              <a:srgbClr val="F4F5F9"/>
+              <a:srgbClr val="F2F3F1"/>
             </a:solidFill>
             <a:prstDash val="solid"/>
           </a:ln>
@@ -3695,11 +3695,11 @@
             <a:r>
               <a:rPr lang="en-US" sz="900" dirty="0">
                 <a:solidFill>
-                  <a:srgbClr val="5B6475"/>
-                </a:solidFill>
-                <a:latin typeface="Inter" pitchFamily="34" charset="0"/>
-                <a:ea typeface="Inter" pitchFamily="34" charset="-122"/>
-                <a:cs typeface="Inter" pitchFamily="34" charset="-120"/>
+                  <a:srgbClr val="575F5C"/>
+                </a:solidFill>
+                <a:latin typeface="Public Sans" pitchFamily="34" charset="0"/>
+                <a:ea typeface="Public Sans" pitchFamily="34" charset="-122"/>
+                <a:cs typeface="Public Sans" pitchFamily="34" charset="-120"/>
               </a:rPr>
               <a:t>Quantinvo · prise en main · août 2026</a:t>
             </a:r>
@@ -3734,11 +3734,11 @@
             <a:r>
               <a:rPr lang="en-US" sz="900" dirty="0">
                 <a:solidFill>
-                  <a:srgbClr val="5B6475"/>
-                </a:solidFill>
-                <a:latin typeface="Inter" pitchFamily="34" charset="0"/>
-                <a:ea typeface="Inter" pitchFamily="34" charset="-122"/>
-                <a:cs typeface="Inter" pitchFamily="34" charset="-120"/>
+                  <a:srgbClr val="575F5C"/>
+                </a:solidFill>
+                <a:latin typeface="Public Sans" pitchFamily="34" charset="0"/>
+                <a:ea typeface="Public Sans" pitchFamily="34" charset="-122"/>
+                <a:cs typeface="Public Sans" pitchFamily="34" charset="-120"/>
               </a:rPr>
               <a:t>11</a:t>
             </a:r>
@@ -3829,11 +3829,11 @@
             <a:r>
               <a:rPr lang="en-US" sz="1600" b="1" dirty="0">
                 <a:solidFill>
-                  <a:srgbClr val="0B0F19"/>
-                </a:solidFill>
-                <a:latin typeface="Sora" pitchFamily="34" charset="0"/>
-                <a:ea typeface="Sora" pitchFamily="34" charset="-122"/>
-                <a:cs typeface="Sora" pitchFamily="34" charset="-120"/>
+                  <a:srgbClr val="14181A"/>
+                </a:solidFill>
+                <a:latin typeface="Archivo" pitchFamily="34" charset="0"/>
+                <a:ea typeface="Archivo" pitchFamily="34" charset="-122"/>
+                <a:cs typeface="Archivo" pitchFamily="34" charset="-120"/>
               </a:rPr>
               <a:t>Quantinvo</a:t>
             </a:r>
@@ -3868,11 +3868,11 @@
             <a:r>
               <a:rPr lang="en-US" sz="1000" dirty="0">
                 <a:solidFill>
-                  <a:srgbClr val="5B6475"/>
-                </a:solidFill>
-                <a:latin typeface="Inter" pitchFamily="34" charset="0"/>
-                <a:ea typeface="Inter" pitchFamily="34" charset="-122"/>
-                <a:cs typeface="Inter" pitchFamily="34" charset="-120"/>
+                  <a:srgbClr val="575F5C"/>
+                </a:solidFill>
+                <a:latin typeface="Public Sans" pitchFamily="34" charset="0"/>
+                <a:ea typeface="Public Sans" pitchFamily="34" charset="-122"/>
+                <a:cs typeface="Public Sans" pitchFamily="34" charset="-120"/>
               </a:rPr>
               <a:t>Compteur</a:t>
             </a:r>
@@ -3889,17 +3889,17 @@
         <p:spPr>
           <a:xfrm>
             <a:off x="731520" y="877824"/>
-            <a:ext cx="10725912" cy="25603"/>
+            <a:ext cx="10725912" cy="10973"/>
           </a:xfrm>
           <a:prstGeom prst="rect">
             <a:avLst/>
           </a:prstGeom>
           <a:solidFill>
-            <a:srgbClr val="38C9FF"/>
+            <a:srgbClr val="E2E5E1"/>
           </a:solidFill>
           <a:ln w="12700">
             <a:solidFill>
-              <a:srgbClr val="38C9FF"/>
+              <a:srgbClr val="E2E5E1"/>
             </a:solidFill>
             <a:prstDash val="solid"/>
           </a:ln>
@@ -3932,11 +3932,11 @@
             <a:r>
               <a:rPr lang="en-US" sz="7200" b="1" dirty="0">
                 <a:solidFill>
-                  <a:srgbClr val="EEEEFC"/>
-                </a:solidFill>
-                <a:latin typeface="Sora" pitchFamily="34" charset="0"/>
-                <a:ea typeface="Sora" pitchFamily="34" charset="-122"/>
-                <a:cs typeface="Sora" pitchFamily="34" charset="-120"/>
+                  <a:srgbClr val="E7EDE9"/>
+                </a:solidFill>
+                <a:latin typeface="Archivo" pitchFamily="34" charset="0"/>
+                <a:ea typeface="Archivo" pitchFamily="34" charset="-122"/>
+                <a:cs typeface="Archivo" pitchFamily="34" charset="-120"/>
               </a:rPr>
               <a:t>2</a:t>
             </a:r>
@@ -3971,11 +3971,11 @@
             <a:r>
               <a:rPr lang="en-US" sz="3400" b="1" dirty="0">
                 <a:solidFill>
-                  <a:srgbClr val="4636B0"/>
-                </a:solidFill>
-                <a:latin typeface="Sora" pitchFamily="34" charset="0"/>
-                <a:ea typeface="Sora" pitchFamily="34" charset="-122"/>
-                <a:cs typeface="Sora" pitchFamily="34" charset="-120"/>
+                  <a:srgbClr val="14181A"/>
+                </a:solidFill>
+                <a:latin typeface="Archivo" pitchFamily="34" charset="0"/>
+                <a:ea typeface="Archivo" pitchFamily="34" charset="-122"/>
+                <a:cs typeface="Archivo" pitchFamily="34" charset="-120"/>
               </a:rPr>
               <a:t>Compter</a:t>
             </a:r>
@@ -4013,11 +4013,11 @@
             <a:r>
               <a:rPr lang="en-US" sz="1400" dirty="0">
                 <a:solidFill>
-                  <a:srgbClr val="3D4556"/>
-                </a:solidFill>
-                <a:latin typeface="Inter" pitchFamily="34" charset="0"/>
-                <a:ea typeface="Inter" pitchFamily="34" charset="-122"/>
-                <a:cs typeface="Inter" pitchFamily="34" charset="-120"/>
+                  <a:srgbClr val="3A423F"/>
+                </a:solidFill>
+                <a:latin typeface="Public Sans" pitchFamily="34" charset="0"/>
+                <a:ea typeface="Public Sans" pitchFamily="34" charset="-122"/>
+                <a:cs typeface="Public Sans" pitchFamily="34" charset="-120"/>
               </a:rPr>
               <a:t>La partie du compteur. Cinq pages, à imprimer seules si on veut : rejoindre, les trois gestes, l'audit, et quoi faire quand quelque chose ne se passe pas comme prévu.</a:t>
             </a:r>
@@ -4052,11 +4052,11 @@
             <a:r>
               <a:rPr lang="en-US" sz="900" dirty="0">
                 <a:solidFill>
-                  <a:srgbClr val="5B6475"/>
-                </a:solidFill>
-                <a:latin typeface="Inter" pitchFamily="34" charset="0"/>
-                <a:ea typeface="Inter" pitchFamily="34" charset="-122"/>
-                <a:cs typeface="Inter" pitchFamily="34" charset="-120"/>
+                  <a:srgbClr val="575F5C"/>
+                </a:solidFill>
+                <a:latin typeface="Public Sans" pitchFamily="34" charset="0"/>
+                <a:ea typeface="Public Sans" pitchFamily="34" charset="-122"/>
+                <a:cs typeface="Public Sans" pitchFamily="34" charset="-120"/>
               </a:rPr>
               <a:t>Quantinvo · prise en main · août 2026</a:t>
             </a:r>
@@ -4091,11 +4091,11 @@
             <a:r>
               <a:rPr lang="en-US" sz="900" dirty="0">
                 <a:solidFill>
-                  <a:srgbClr val="5B6475"/>
-                </a:solidFill>
-                <a:latin typeface="Inter" pitchFamily="34" charset="0"/>
-                <a:ea typeface="Inter" pitchFamily="34" charset="-122"/>
-                <a:cs typeface="Inter" pitchFamily="34" charset="-120"/>
+                  <a:srgbClr val="575F5C"/>
+                </a:solidFill>
+                <a:latin typeface="Public Sans" pitchFamily="34" charset="0"/>
+                <a:ea typeface="Public Sans" pitchFamily="34" charset="-122"/>
+                <a:cs typeface="Public Sans" pitchFamily="34" charset="-120"/>
               </a:rPr>
               <a:t>12</a:t>
             </a:r>
@@ -4186,11 +4186,11 @@
             <a:r>
               <a:rPr lang="en-US" sz="1600" b="1" dirty="0">
                 <a:solidFill>
-                  <a:srgbClr val="0B0F19"/>
-                </a:solidFill>
-                <a:latin typeface="Sora" pitchFamily="34" charset="0"/>
-                <a:ea typeface="Sora" pitchFamily="34" charset="-122"/>
-                <a:cs typeface="Sora" pitchFamily="34" charset="-120"/>
+                  <a:srgbClr val="14181A"/>
+                </a:solidFill>
+                <a:latin typeface="Archivo" pitchFamily="34" charset="0"/>
+                <a:ea typeface="Archivo" pitchFamily="34" charset="-122"/>
+                <a:cs typeface="Archivo" pitchFamily="34" charset="-120"/>
               </a:rPr>
               <a:t>Quantinvo</a:t>
             </a:r>
@@ -4225,11 +4225,11 @@
             <a:r>
               <a:rPr lang="en-US" sz="1000" dirty="0">
                 <a:solidFill>
-                  <a:srgbClr val="5B6475"/>
-                </a:solidFill>
-                <a:latin typeface="Inter" pitchFamily="34" charset="0"/>
-                <a:ea typeface="Inter" pitchFamily="34" charset="-122"/>
-                <a:cs typeface="Inter" pitchFamily="34" charset="-120"/>
+                  <a:srgbClr val="575F5C"/>
+                </a:solidFill>
+                <a:latin typeface="Public Sans" pitchFamily="34" charset="0"/>
+                <a:ea typeface="Public Sans" pitchFamily="34" charset="-122"/>
+                <a:cs typeface="Public Sans" pitchFamily="34" charset="-120"/>
               </a:rPr>
               <a:t>Compteur</a:t>
             </a:r>
@@ -4246,17 +4246,17 @@
         <p:spPr>
           <a:xfrm>
             <a:off x="731520" y="877824"/>
-            <a:ext cx="10725912" cy="25603"/>
+            <a:ext cx="10725912" cy="10973"/>
           </a:xfrm>
           <a:prstGeom prst="rect">
             <a:avLst/>
           </a:prstGeom>
           <a:solidFill>
-            <a:srgbClr val="38C9FF"/>
+            <a:srgbClr val="E2E5E1"/>
           </a:solidFill>
           <a:ln w="12700">
             <a:solidFill>
-              <a:srgbClr val="38C9FF"/>
+              <a:srgbClr val="E2E5E1"/>
             </a:solidFill>
             <a:prstDash val="solid"/>
           </a:ln>
@@ -4292,11 +4292,11 @@
             <a:r>
               <a:rPr lang="en-US" sz="2600" b="1" dirty="0">
                 <a:solidFill>
-                  <a:srgbClr val="4636B0"/>
-                </a:solidFill>
-                <a:latin typeface="Sora" pitchFamily="34" charset="0"/>
-                <a:ea typeface="Sora" pitchFamily="34" charset="-122"/>
-                <a:cs typeface="Sora" pitchFamily="34" charset="-120"/>
+                  <a:srgbClr val="14181A"/>
+                </a:solidFill>
+                <a:latin typeface="Archivo" pitchFamily="34" charset="0"/>
+                <a:ea typeface="Archivo" pitchFamily="34" charset="-122"/>
+                <a:cs typeface="Archivo" pitchFamily="34" charset="-120"/>
               </a:rPr>
               <a:t>Rejoindre un inventaire. La première façon suffit presque toujours.</a:t>
             </a:r>
@@ -4337,11 +4337,11 @@
             <a:r>
               <a:rPr lang="en-US" sz="1200" b="1" dirty="0">
                 <a:solidFill>
-                  <a:srgbClr val="0B0F19"/>
-                </a:solidFill>
-                <a:latin typeface="Inter" pitchFamily="34" charset="0"/>
-                <a:ea typeface="Inter" pitchFamily="34" charset="-122"/>
-                <a:cs typeface="Inter" pitchFamily="34" charset="-120"/>
+                  <a:srgbClr val="14181A"/>
+                </a:solidFill>
+                <a:latin typeface="Public Sans" pitchFamily="34" charset="0"/>
+                <a:ea typeface="Public Sans" pitchFamily="34" charset="-122"/>
+                <a:cs typeface="Public Sans" pitchFamily="34" charset="-120"/>
               </a:rPr>
               <a:t>On vous a ajouté. </a:t>
             </a:r>
@@ -4357,11 +4357,11 @@
             <a:r>
               <a:rPr lang="en-US" sz="1200" dirty="0">
                 <a:solidFill>
-                  <a:srgbClr val="3D4556"/>
-                </a:solidFill>
-                <a:latin typeface="Inter" pitchFamily="34" charset="0"/>
-                <a:ea typeface="Inter" pitchFamily="34" charset="-122"/>
-                <a:cs typeface="Inter" pitchFamily="34" charset="-120"/>
+                  <a:srgbClr val="3A423F"/>
+                </a:solidFill>
+                <a:latin typeface="Public Sans" pitchFamily="34" charset="0"/>
+                <a:ea typeface="Public Sans" pitchFamily="34" charset="-122"/>
+                <a:cs typeface="Public Sans" pitchFamily="34" charset="-120"/>
               </a:rPr>
               <a:t>L'inventaire est dans « Mes inventaires » dès l'ouverture de l'application, et vous avez reçu une notification. Touchez-le.</a:t>
             </a:r>
@@ -4380,11 +4380,11 @@
             <a:r>
               <a:rPr lang="en-US" sz="1200" b="1" dirty="0">
                 <a:solidFill>
-                  <a:srgbClr val="0B0F19"/>
-                </a:solidFill>
-                <a:latin typeface="Inter" pitchFamily="34" charset="0"/>
-                <a:ea typeface="Inter" pitchFamily="34" charset="-122"/>
-                <a:cs typeface="Inter" pitchFamily="34" charset="-120"/>
+                  <a:srgbClr val="14181A"/>
+                </a:solidFill>
+                <a:latin typeface="Public Sans" pitchFamily="34" charset="0"/>
+                <a:ea typeface="Public Sans" pitchFamily="34" charset="-122"/>
+                <a:cs typeface="Public Sans" pitchFamily="34" charset="-120"/>
               </a:rPr>
               <a:t>On vous a donné un numéro et un code. </a:t>
             </a:r>
@@ -4400,11 +4400,11 @@
             <a:r>
               <a:rPr lang="en-US" sz="1200" dirty="0">
                 <a:solidFill>
-                  <a:srgbClr val="3D4556"/>
-                </a:solidFill>
-                <a:latin typeface="Inter" pitchFamily="34" charset="0"/>
-                <a:ea typeface="Inter" pitchFamily="34" charset="-122"/>
-                <a:cs typeface="Inter" pitchFamily="34" charset="-120"/>
+                  <a:srgbClr val="3A423F"/>
+                </a:solidFill>
+                <a:latin typeface="Public Sans" pitchFamily="34" charset="0"/>
+                <a:ea typeface="Public Sans" pitchFamily="34" charset="-122"/>
+                <a:cs typeface="Public Sans" pitchFamily="34" charset="-120"/>
               </a:rPr>
               <a:t>Le formulaire du bas : le numéro (INV-…), le code. C'est le cas d'un renfort de dernière minute.</a:t>
             </a:r>
@@ -4423,11 +4423,11 @@
             <a:r>
               <a:rPr lang="en-US" sz="1200" b="1" dirty="0">
                 <a:solidFill>
-                  <a:srgbClr val="0B0F19"/>
-                </a:solidFill>
-                <a:latin typeface="Inter" pitchFamily="34" charset="0"/>
-                <a:ea typeface="Inter" pitchFamily="34" charset="-122"/>
-                <a:cs typeface="Inter" pitchFamily="34" charset="-120"/>
+                  <a:srgbClr val="14181A"/>
+                </a:solidFill>
+                <a:latin typeface="Public Sans" pitchFamily="34" charset="0"/>
+                <a:ea typeface="Public Sans" pitchFamily="34" charset="-122"/>
+                <a:cs typeface="Public Sans" pitchFamily="34" charset="-120"/>
               </a:rPr>
               <a:t>Ensuite. </a:t>
             </a:r>
@@ -4443,11 +4443,11 @@
             <a:r>
               <a:rPr lang="en-US" sz="1200" dirty="0">
                 <a:solidFill>
-                  <a:srgbClr val="3D4556"/>
-                </a:solidFill>
-                <a:latin typeface="Inter" pitchFamily="34" charset="0"/>
-                <a:ea typeface="Inter" pitchFamily="34" charset="-122"/>
-                <a:cs typeface="Inter" pitchFamily="34" charset="-120"/>
+                  <a:srgbClr val="3A423F"/>
+                </a:solidFill>
+                <a:latin typeface="Public Sans" pitchFamily="34" charset="0"/>
+                <a:ea typeface="Public Sans" pitchFamily="34" charset="-122"/>
+                <a:cs typeface="Public Sans" pitchFamily="34" charset="-120"/>
               </a:rPr>
               <a:t>L'écran de l'inventaire propose « Compter des articles », « Auditer des articles », et « Quitter l'inventaire ». Quitter ne supprime rien de ce que vous avez compté.</a:t>
             </a:r>
@@ -4485,11 +4485,11 @@
             <a:r>
               <a:rPr lang="en-US" sz="1350" b="1" dirty="0">
                 <a:solidFill>
-                  <a:srgbClr val="4636B0"/>
-                </a:solidFill>
-                <a:latin typeface="Sora" pitchFamily="34" charset="0"/>
-                <a:ea typeface="Sora" pitchFamily="34" charset="-122"/>
-                <a:cs typeface="Sora" pitchFamily="34" charset="-120"/>
+                  <a:srgbClr val="14181A"/>
+                </a:solidFill>
+                <a:latin typeface="Archivo" pitchFamily="34" charset="0"/>
+                <a:ea typeface="Archivo" pitchFamily="34" charset="-122"/>
+                <a:cs typeface="Archivo" pitchFamily="34" charset="-120"/>
               </a:rPr>
               <a:t>Votre accueil</a:t>
             </a:r>
@@ -4527,11 +4527,11 @@
             <a:r>
               <a:rPr lang="en-US" sz="1100" dirty="0">
                 <a:solidFill>
-                  <a:srgbClr val="3D4556"/>
-                </a:solidFill>
-                <a:latin typeface="Inter" pitchFamily="34" charset="0"/>
-                <a:ea typeface="Inter" pitchFamily="34" charset="-122"/>
-                <a:cs typeface="Inter" pitchFamily="34" charset="-120"/>
+                  <a:srgbClr val="3A423F"/>
+                </a:solidFill>
+                <a:latin typeface="Public Sans" pitchFamily="34" charset="0"/>
+                <a:ea typeface="Public Sans" pitchFamily="34" charset="-122"/>
+                <a:cs typeface="Public Sans" pitchFamily="34" charset="-120"/>
               </a:rPr>
               <a:t>Les inventaires où vous êtes attendu, et la porte d'entrée pour les autres.</a:t>
             </a:r>
@@ -4552,15 +4552,15 @@
           </a:xfrm>
           <a:prstGeom prst="roundRect">
             <a:avLst>
-              <a:gd name="adj" fmla="val 4000"/>
+              <a:gd name="adj" fmla="val 1143"/>
             </a:avLst>
           </a:prstGeom>
           <a:solidFill>
-            <a:srgbClr val="F4F5F9"/>
+            <a:srgbClr val="F2F3F1"/>
           </a:solidFill>
           <a:ln w="12700">
             <a:solidFill>
-              <a:srgbClr val="F4F5F9"/>
+              <a:srgbClr val="F2F3F1"/>
             </a:solidFill>
             <a:prstDash val="solid"/>
           </a:ln>
@@ -4617,11 +4617,11 @@
             <a:r>
               <a:rPr lang="en-US" sz="900" dirty="0">
                 <a:solidFill>
-                  <a:srgbClr val="5B6475"/>
-                </a:solidFill>
-                <a:latin typeface="Inter" pitchFamily="34" charset="0"/>
-                <a:ea typeface="Inter" pitchFamily="34" charset="-122"/>
-                <a:cs typeface="Inter" pitchFamily="34" charset="-120"/>
+                  <a:srgbClr val="575F5C"/>
+                </a:solidFill>
+                <a:latin typeface="Public Sans" pitchFamily="34" charset="0"/>
+                <a:ea typeface="Public Sans" pitchFamily="34" charset="-122"/>
+                <a:cs typeface="Public Sans" pitchFamily="34" charset="-120"/>
               </a:rPr>
               <a:t>Quantinvo · prise en main · août 2026</a:t>
             </a:r>
@@ -4656,11 +4656,11 @@
             <a:r>
               <a:rPr lang="en-US" sz="900" dirty="0">
                 <a:solidFill>
-                  <a:srgbClr val="5B6475"/>
-                </a:solidFill>
-                <a:latin typeface="Inter" pitchFamily="34" charset="0"/>
-                <a:ea typeface="Inter" pitchFamily="34" charset="-122"/>
-                <a:cs typeface="Inter" pitchFamily="34" charset="-120"/>
+                  <a:srgbClr val="575F5C"/>
+                </a:solidFill>
+                <a:latin typeface="Public Sans" pitchFamily="34" charset="0"/>
+                <a:ea typeface="Public Sans" pitchFamily="34" charset="-122"/>
+                <a:cs typeface="Public Sans" pitchFamily="34" charset="-120"/>
               </a:rPr>
               <a:t>13</a:t>
             </a:r>
@@ -4751,11 +4751,11 @@
             <a:r>
               <a:rPr lang="en-US" sz="1600" b="1" dirty="0">
                 <a:solidFill>
-                  <a:srgbClr val="0B0F19"/>
-                </a:solidFill>
-                <a:latin typeface="Sora" pitchFamily="34" charset="0"/>
-                <a:ea typeface="Sora" pitchFamily="34" charset="-122"/>
-                <a:cs typeface="Sora" pitchFamily="34" charset="-120"/>
+                  <a:srgbClr val="14181A"/>
+                </a:solidFill>
+                <a:latin typeface="Archivo" pitchFamily="34" charset="0"/>
+                <a:ea typeface="Archivo" pitchFamily="34" charset="-122"/>
+                <a:cs typeface="Archivo" pitchFamily="34" charset="-120"/>
               </a:rPr>
               <a:t>Quantinvo</a:t>
             </a:r>
@@ -4790,11 +4790,11 @@
             <a:r>
               <a:rPr lang="en-US" sz="1000" dirty="0">
                 <a:solidFill>
-                  <a:srgbClr val="5B6475"/>
-                </a:solidFill>
-                <a:latin typeface="Inter" pitchFamily="34" charset="0"/>
-                <a:ea typeface="Inter" pitchFamily="34" charset="-122"/>
-                <a:cs typeface="Inter" pitchFamily="34" charset="-120"/>
+                  <a:srgbClr val="575F5C"/>
+                </a:solidFill>
+                <a:latin typeface="Public Sans" pitchFamily="34" charset="0"/>
+                <a:ea typeface="Public Sans" pitchFamily="34" charset="-122"/>
+                <a:cs typeface="Public Sans" pitchFamily="34" charset="-120"/>
               </a:rPr>
               <a:t>Compteur</a:t>
             </a:r>
@@ -4811,17 +4811,17 @@
         <p:spPr>
           <a:xfrm>
             <a:off x="731520" y="877824"/>
-            <a:ext cx="10725912" cy="25603"/>
+            <a:ext cx="10725912" cy="10973"/>
           </a:xfrm>
           <a:prstGeom prst="rect">
             <a:avLst/>
           </a:prstGeom>
           <a:solidFill>
-            <a:srgbClr val="38C9FF"/>
+            <a:srgbClr val="E2E5E1"/>
           </a:solidFill>
           <a:ln w="12700">
             <a:solidFill>
-              <a:srgbClr val="38C9FF"/>
+              <a:srgbClr val="E2E5E1"/>
             </a:solidFill>
             <a:prstDash val="solid"/>
           </a:ln>
@@ -4857,11 +4857,11 @@
             <a:r>
               <a:rPr lang="en-US" sz="2600" b="1" dirty="0">
                 <a:solidFill>
-                  <a:srgbClr val="4636B0"/>
-                </a:solidFill>
-                <a:latin typeface="Sora" pitchFamily="34" charset="0"/>
-                <a:ea typeface="Sora" pitchFamily="34" charset="-122"/>
-                <a:cs typeface="Sora" pitchFamily="34" charset="-120"/>
+                  <a:srgbClr val="14181A"/>
+                </a:solidFill>
+                <a:latin typeface="Archivo" pitchFamily="34" charset="0"/>
+                <a:ea typeface="Archivo" pitchFamily="34" charset="-122"/>
+                <a:cs typeface="Archivo" pitchFamily="34" charset="-120"/>
               </a:rPr>
               <a:t>Compter, en trois gestes. Puis la balise suivante.</a:t>
             </a:r>
@@ -4884,11 +4884,11 @@
             <a:avLst/>
           </a:prstGeom>
           <a:solidFill>
-            <a:srgbClr val="4636B0"/>
+            <a:srgbClr val="1E4D3B"/>
           </a:solidFill>
           <a:ln>
             <a:solidFill>
-              <a:srgbClr val="4636B0"/>
+              <a:srgbClr val="1E4D3B"/>
             </a:solidFill>
           </a:ln>
         </p:spPr>
@@ -4904,9 +4904,9 @@
                 <a:solidFill>
                   <a:srgbClr val="FFFFFF"/>
                 </a:solidFill>
-                <a:latin typeface="Sora" pitchFamily="34" charset="0"/>
-                <a:ea typeface="Sora" pitchFamily="34" charset="-122"/>
-                <a:cs typeface="Sora" pitchFamily="34" charset="-120"/>
+                <a:latin typeface="Archivo" pitchFamily="34" charset="0"/>
+                <a:ea typeface="Archivo" pitchFamily="34" charset="-122"/>
+                <a:cs typeface="Archivo" pitchFamily="34" charset="-120"/>
               </a:rPr>
               <a:t>1</a:t>
             </a:r>
@@ -4941,11 +4941,11 @@
             <a:r>
               <a:rPr lang="en-US" sz="1500" b="1" dirty="0">
                 <a:solidFill>
-                  <a:srgbClr val="4636B0"/>
-                </a:solidFill>
-                <a:latin typeface="Sora" pitchFamily="34" charset="0"/>
-                <a:ea typeface="Sora" pitchFamily="34" charset="-122"/>
-                <a:cs typeface="Sora" pitchFamily="34" charset="-120"/>
+                  <a:srgbClr val="14181A"/>
+                </a:solidFill>
+                <a:latin typeface="Archivo" pitchFamily="34" charset="0"/>
+                <a:ea typeface="Archivo" pitchFamily="34" charset="-122"/>
+                <a:cs typeface="Archivo" pitchFamily="34" charset="-120"/>
               </a:rPr>
               <a:t>Scannez la balise du rayon</a:t>
             </a:r>
@@ -4983,11 +4983,11 @@
             <a:r>
               <a:rPr lang="en-US" sz="1150" dirty="0">
                 <a:solidFill>
-                  <a:srgbClr val="3D4556"/>
-                </a:solidFill>
-                <a:latin typeface="Inter" pitchFamily="34" charset="0"/>
-                <a:ea typeface="Inter" pitchFamily="34" charset="-122"/>
-                <a:cs typeface="Inter" pitchFamily="34" charset="-120"/>
+                  <a:srgbClr val="3A423F"/>
+                </a:solidFill>
+                <a:latin typeface="Public Sans" pitchFamily="34" charset="0"/>
+                <a:ea typeface="Public Sans" pitchFamily="34" charset="-122"/>
+                <a:cs typeface="Public Sans" pitchFamily="34" charset="-120"/>
               </a:rPr>
               <a:t>Elle ouvre la zone. Tant qu'elle est ouverte, tout ce que vous scannez compte ici. Vous pouvez aussi saisir son numéro au clavier.</a:t>
             </a:r>
@@ -5010,11 +5010,11 @@
             <a:avLst/>
           </a:prstGeom>
           <a:solidFill>
-            <a:srgbClr val="4636B0"/>
+            <a:srgbClr val="1E4D3B"/>
           </a:solidFill>
           <a:ln>
             <a:solidFill>
-              <a:srgbClr val="4636B0"/>
+              <a:srgbClr val="1E4D3B"/>
             </a:solidFill>
           </a:ln>
         </p:spPr>
@@ -5030,9 +5030,9 @@
                 <a:solidFill>
                   <a:srgbClr val="FFFFFF"/>
                 </a:solidFill>
-                <a:latin typeface="Sora" pitchFamily="34" charset="0"/>
-                <a:ea typeface="Sora" pitchFamily="34" charset="-122"/>
-                <a:cs typeface="Sora" pitchFamily="34" charset="-120"/>
+                <a:latin typeface="Archivo" pitchFamily="34" charset="0"/>
+                <a:ea typeface="Archivo" pitchFamily="34" charset="-122"/>
+                <a:cs typeface="Archivo" pitchFamily="34" charset="-120"/>
               </a:rPr>
               <a:t>2</a:t>
             </a:r>
@@ -5067,11 +5067,11 @@
             <a:r>
               <a:rPr lang="en-US" sz="1500" b="1" dirty="0">
                 <a:solidFill>
-                  <a:srgbClr val="4636B0"/>
-                </a:solidFill>
-                <a:latin typeface="Sora" pitchFamily="34" charset="0"/>
-                <a:ea typeface="Sora" pitchFamily="34" charset="-122"/>
-                <a:cs typeface="Sora" pitchFamily="34" charset="-120"/>
+                  <a:srgbClr val="14181A"/>
+                </a:solidFill>
+                <a:latin typeface="Archivo" pitchFamily="34" charset="0"/>
+                <a:ea typeface="Archivo" pitchFamily="34" charset="-122"/>
+                <a:cs typeface="Archivo" pitchFamily="34" charset="-120"/>
               </a:rPr>
               <a:t>Scannez les articles</a:t>
             </a:r>
@@ -5109,11 +5109,11 @@
             <a:r>
               <a:rPr lang="en-US" sz="1150" dirty="0">
                 <a:solidFill>
-                  <a:srgbClr val="3D4556"/>
-                </a:solidFill>
-                <a:latin typeface="Inter" pitchFamily="34" charset="0"/>
-                <a:ea typeface="Inter" pitchFamily="34" charset="-122"/>
-                <a:cs typeface="Inter" pitchFamily="34" charset="-120"/>
+                  <a:srgbClr val="3A423F"/>
+                </a:solidFill>
+                <a:latin typeface="Public Sans" pitchFamily="34" charset="0"/>
+                <a:ea typeface="Public Sans" pitchFamily="34" charset="-122"/>
+                <a:cs typeface="Public Sans" pitchFamily="34" charset="-120"/>
               </a:rPr>
               <a:t>Le scan est automatique. Un article scanné trois fois compte trois ; pour une pile, scannez une fois et ajustez avec + et −. Pas de code lisible ? L'onglet « Manuel ».</a:t>
             </a:r>
@@ -5136,11 +5136,11 @@
             <a:avLst/>
           </a:prstGeom>
           <a:solidFill>
-            <a:srgbClr val="4636B0"/>
+            <a:srgbClr val="1E4D3B"/>
           </a:solidFill>
           <a:ln>
             <a:solidFill>
-              <a:srgbClr val="4636B0"/>
+              <a:srgbClr val="1E4D3B"/>
             </a:solidFill>
           </a:ln>
         </p:spPr>
@@ -5156,9 +5156,9 @@
                 <a:solidFill>
                   <a:srgbClr val="FFFFFF"/>
                 </a:solidFill>
-                <a:latin typeface="Sora" pitchFamily="34" charset="0"/>
-                <a:ea typeface="Sora" pitchFamily="34" charset="-122"/>
-                <a:cs typeface="Sora" pitchFamily="34" charset="-120"/>
+                <a:latin typeface="Archivo" pitchFamily="34" charset="0"/>
+                <a:ea typeface="Archivo" pitchFamily="34" charset="-122"/>
+                <a:cs typeface="Archivo" pitchFamily="34" charset="-120"/>
               </a:rPr>
               <a:t>3</a:t>
             </a:r>
@@ -5193,11 +5193,11 @@
             <a:r>
               <a:rPr lang="en-US" sz="1500" b="1" dirty="0">
                 <a:solidFill>
-                  <a:srgbClr val="4636B0"/>
-                </a:solidFill>
-                <a:latin typeface="Sora" pitchFamily="34" charset="0"/>
-                <a:ea typeface="Sora" pitchFamily="34" charset="-122"/>
-                <a:cs typeface="Sora" pitchFamily="34" charset="-120"/>
+                  <a:srgbClr val="14181A"/>
+                </a:solidFill>
+                <a:latin typeface="Archivo" pitchFamily="34" charset="0"/>
+                <a:ea typeface="Archivo" pitchFamily="34" charset="-122"/>
+                <a:cs typeface="Archivo" pitchFamily="34" charset="-120"/>
               </a:rPr>
               <a:t>Clôturez la balise</a:t>
             </a:r>
@@ -5235,55 +5235,21 @@
             <a:r>
               <a:rPr lang="en-US" sz="1150" dirty="0">
                 <a:solidFill>
-                  <a:srgbClr val="3D4556"/>
-                </a:solidFill>
-                <a:latin typeface="Inter" pitchFamily="34" charset="0"/>
-                <a:ea typeface="Inter" pitchFamily="34" charset="-122"/>
-                <a:cs typeface="Inter" pitchFamily="34" charset="-120"/>
+                  <a:srgbClr val="3A423F"/>
+                </a:solidFill>
+                <a:latin typeface="Public Sans" pitchFamily="34" charset="0"/>
+                <a:ea typeface="Public Sans" pitchFamily="34" charset="-122"/>
+                <a:cs typeface="Public Sans" pitchFamily="34" charset="-120"/>
               </a:rPr>
               <a:t>Le bouton rouge, en haut de l'écran ou en bas de la liste. Il dit « j'ai fini ici » : la zone passe en comptée chez le superviseur, et vous passez au rayon suivant.</a:t>
             </a:r>
             <a:endParaRPr lang="en-US" sz="1150" dirty="0"/>
           </a:p>
         </p:txBody>
-      </p:sp>
-      <p:sp>
-        <p:nvSpPr>
-          <p:cNvPr id="16" name="Shape 13"/>
-          <p:cNvSpPr/>
-          <p:nvPr/>
-        </p:nvSpPr>
-        <p:spPr>
-          <a:xfrm>
-            <a:off x="9262872" y="1325880"/>
-            <a:ext cx="2122020" cy="4480560"/>
-          </a:xfrm>
-          <a:prstGeom prst="roundRect">
-            <a:avLst>
-              <a:gd name="adj" fmla="val 12927"/>
-            </a:avLst>
-          </a:prstGeom>
-          <a:solidFill>
-            <a:srgbClr val="FFFFFF"/>
-          </a:solidFill>
-          <a:ln w="12700">
-            <a:solidFill>
-              <a:srgbClr val="FFFFFF"/>
-            </a:solidFill>
-            <a:prstDash val="solid"/>
-          </a:ln>
-          <a:effectLst>
-            <a:outerShdw sx="100000" sy="100000" kx="0" ky="0" algn="bl" rotWithShape="0" blurRad="177800" dist="38100" dir="5400000">
-              <a:srgbClr val="0B0F19">
-                <a:alpha val="18000"/>
-              </a:srgbClr>
-            </a:outerShdw>
-          </a:effectLst>
-        </p:spPr>
       </p:sp>
       <p:pic>
         <p:nvPicPr>
-          <p:cNvPr id="17" name="Image 1" descr="preencoded.png">    </p:cNvPr>
+          <p:cNvPr id="16" name="Image 1" descr="preencoded.png">    </p:cNvPr>
           <p:cNvPicPr>
             <a:picLocks noChangeAspect="1"/>
           </p:cNvPicPr>
@@ -5307,7 +5273,7 @@
       </p:pic>
       <p:sp>
         <p:nvSpPr>
-          <p:cNvPr id="18" name="Text 14"/>
+          <p:cNvPr id="17" name="Text 13"/>
           <p:cNvSpPr/>
           <p:nvPr/>
         </p:nvSpPr>
@@ -5332,11 +5298,11 @@
             <a:r>
               <a:rPr lang="en-US" sz="1000" i="1" dirty="0">
                 <a:solidFill>
-                  <a:srgbClr val="5B6475"/>
-                </a:solidFill>
-                <a:latin typeface="Inter" pitchFamily="34" charset="0"/>
-                <a:ea typeface="Inter" pitchFamily="34" charset="-122"/>
-                <a:cs typeface="Inter" pitchFamily="34" charset="-120"/>
+                  <a:srgbClr val="575F5C"/>
+                </a:solidFill>
+                <a:latin typeface="Public Sans" pitchFamily="34" charset="0"/>
+                <a:ea typeface="Public Sans" pitchFamily="34" charset="-122"/>
+                <a:cs typeface="Public Sans" pitchFamily="34" charset="-120"/>
               </a:rPr>
               <a:t>L'écran de comptage, balise 6 ouverte.</a:t>
             </a:r>
@@ -5346,7 +5312,7 @@
       </p:sp>
       <p:sp>
         <p:nvSpPr>
-          <p:cNvPr id="19" name="Text 15"/>
+          <p:cNvPr id="18" name="Text 14"/>
           <p:cNvSpPr/>
           <p:nvPr/>
         </p:nvSpPr>
@@ -5371,11 +5337,11 @@
             <a:r>
               <a:rPr lang="en-US" sz="900" dirty="0">
                 <a:solidFill>
-                  <a:srgbClr val="5B6475"/>
-                </a:solidFill>
-                <a:latin typeface="Inter" pitchFamily="34" charset="0"/>
-                <a:ea typeface="Inter" pitchFamily="34" charset="-122"/>
-                <a:cs typeface="Inter" pitchFamily="34" charset="-120"/>
+                  <a:srgbClr val="575F5C"/>
+                </a:solidFill>
+                <a:latin typeface="Public Sans" pitchFamily="34" charset="0"/>
+                <a:ea typeface="Public Sans" pitchFamily="34" charset="-122"/>
+                <a:cs typeface="Public Sans" pitchFamily="34" charset="-120"/>
               </a:rPr>
               <a:t>Quantinvo · prise en main · août 2026</a:t>
             </a:r>
@@ -5385,7 +5351,7 @@
       </p:sp>
       <p:sp>
         <p:nvSpPr>
-          <p:cNvPr id="20" name="Text 16"/>
+          <p:cNvPr id="19" name="Text 15"/>
           <p:cNvSpPr/>
           <p:nvPr/>
         </p:nvSpPr>
@@ -5410,11 +5376,11 @@
             <a:r>
               <a:rPr lang="en-US" sz="900" dirty="0">
                 <a:solidFill>
-                  <a:srgbClr val="5B6475"/>
-                </a:solidFill>
-                <a:latin typeface="Inter" pitchFamily="34" charset="0"/>
-                <a:ea typeface="Inter" pitchFamily="34" charset="-122"/>
-                <a:cs typeface="Inter" pitchFamily="34" charset="-120"/>
+                  <a:srgbClr val="575F5C"/>
+                </a:solidFill>
+                <a:latin typeface="Public Sans" pitchFamily="34" charset="0"/>
+                <a:ea typeface="Public Sans" pitchFamily="34" charset="-122"/>
+                <a:cs typeface="Public Sans" pitchFamily="34" charset="-120"/>
               </a:rPr>
               <a:t>14</a:t>
             </a:r>
@@ -5505,11 +5471,11 @@
             <a:r>
               <a:rPr lang="en-US" sz="1600" b="1" dirty="0">
                 <a:solidFill>
-                  <a:srgbClr val="0B0F19"/>
-                </a:solidFill>
-                <a:latin typeface="Sora" pitchFamily="34" charset="0"/>
-                <a:ea typeface="Sora" pitchFamily="34" charset="-122"/>
-                <a:cs typeface="Sora" pitchFamily="34" charset="-120"/>
+                  <a:srgbClr val="14181A"/>
+                </a:solidFill>
+                <a:latin typeface="Archivo" pitchFamily="34" charset="0"/>
+                <a:ea typeface="Archivo" pitchFamily="34" charset="-122"/>
+                <a:cs typeface="Archivo" pitchFamily="34" charset="-120"/>
               </a:rPr>
               <a:t>Quantinvo</a:t>
             </a:r>
@@ -5544,11 +5510,11 @@
             <a:r>
               <a:rPr lang="en-US" sz="1000" dirty="0">
                 <a:solidFill>
-                  <a:srgbClr val="5B6475"/>
-                </a:solidFill>
-                <a:latin typeface="Inter" pitchFamily="34" charset="0"/>
-                <a:ea typeface="Inter" pitchFamily="34" charset="-122"/>
-                <a:cs typeface="Inter" pitchFamily="34" charset="-120"/>
+                  <a:srgbClr val="575F5C"/>
+                </a:solidFill>
+                <a:latin typeface="Public Sans" pitchFamily="34" charset="0"/>
+                <a:ea typeface="Public Sans" pitchFamily="34" charset="-122"/>
+                <a:cs typeface="Public Sans" pitchFamily="34" charset="-120"/>
               </a:rPr>
               <a:t>Compteur</a:t>
             </a:r>
@@ -5565,17 +5531,17 @@
         <p:spPr>
           <a:xfrm>
             <a:off x="731520" y="877824"/>
-            <a:ext cx="10725912" cy="25603"/>
+            <a:ext cx="10725912" cy="10973"/>
           </a:xfrm>
           <a:prstGeom prst="rect">
             <a:avLst/>
           </a:prstGeom>
           <a:solidFill>
-            <a:srgbClr val="38C9FF"/>
+            <a:srgbClr val="E2E5E1"/>
           </a:solidFill>
           <a:ln w="12700">
             <a:solidFill>
-              <a:srgbClr val="38C9FF"/>
+              <a:srgbClr val="E2E5E1"/>
             </a:solidFill>
             <a:prstDash val="solid"/>
           </a:ln>
@@ -5611,11 +5577,11 @@
             <a:r>
               <a:rPr lang="en-US" sz="2600" b="1" dirty="0">
                 <a:solidFill>
-                  <a:srgbClr val="4636B0"/>
-                </a:solidFill>
-                <a:latin typeface="Sora" pitchFamily="34" charset="0"/>
-                <a:ea typeface="Sora" pitchFamily="34" charset="-122"/>
-                <a:cs typeface="Sora" pitchFamily="34" charset="-120"/>
+                  <a:srgbClr val="14181A"/>
+                </a:solidFill>
+                <a:latin typeface="Archivo" pitchFamily="34" charset="0"/>
+                <a:ea typeface="Archivo" pitchFamily="34" charset="-122"/>
+                <a:cs typeface="Archivo" pitchFamily="34" charset="-120"/>
               </a:rPr>
               <a:t>Ce que vous voyez quand une balise est finie.</a:t>
             </a:r>
@@ -5656,11 +5622,11 @@
             <a:r>
               <a:rPr lang="en-US" sz="1200" b="1" dirty="0">
                 <a:solidFill>
-                  <a:srgbClr val="0B0F19"/>
-                </a:solidFill>
-                <a:latin typeface="Inter" pitchFamily="34" charset="0"/>
-                <a:ea typeface="Inter" pitchFamily="34" charset="-122"/>
-                <a:cs typeface="Inter" pitchFamily="34" charset="-120"/>
+                  <a:srgbClr val="14181A"/>
+                </a:solidFill>
+                <a:latin typeface="Public Sans" pitchFamily="34" charset="0"/>
+                <a:ea typeface="Public Sans" pitchFamily="34" charset="-122"/>
+                <a:cs typeface="Public Sans" pitchFamily="34" charset="-120"/>
               </a:rPr>
               <a:t>Les chiffres, tout de suite. </a:t>
             </a:r>
@@ -5676,11 +5642,11 @@
             <a:r>
               <a:rPr lang="en-US" sz="1200" dirty="0">
                 <a:solidFill>
-                  <a:srgbClr val="3D4556"/>
-                </a:solidFill>
-                <a:latin typeface="Inter" pitchFamily="34" charset="0"/>
-                <a:ea typeface="Inter" pitchFamily="34" charset="-122"/>
-                <a:cs typeface="Inter" pitchFamily="34" charset="-120"/>
+                  <a:srgbClr val="3A423F"/>
+                </a:solidFill>
+                <a:latin typeface="Public Sans" pitchFamily="34" charset="0"/>
+                <a:ea typeface="Public Sans" pitchFamily="34" charset="-122"/>
+                <a:cs typeface="Public Sans" pitchFamily="34" charset="-120"/>
               </a:rPr>
               <a:t>Pièces et références de la balise que vous venez de fermer. C'est la vérification la plus simple : si le compte vous surprend, vous rouvrez la balise et vous revoyez le rayon.</a:t>
             </a:r>
@@ -5699,11 +5665,11 @@
             <a:r>
               <a:rPr lang="en-US" sz="1200" b="1" dirty="0">
                 <a:solidFill>
-                  <a:srgbClr val="0B0F19"/>
-                </a:solidFill>
-                <a:latin typeface="Inter" pitchFamily="34" charset="0"/>
-                <a:ea typeface="Inter" pitchFamily="34" charset="-122"/>
-                <a:cs typeface="Inter" pitchFamily="34" charset="-120"/>
+                  <a:srgbClr val="14181A"/>
+                </a:solidFill>
+                <a:latin typeface="Public Sans" pitchFamily="34" charset="0"/>
+                <a:ea typeface="Public Sans" pitchFamily="34" charset="-122"/>
+                <a:cs typeface="Public Sans" pitchFamily="34" charset="-120"/>
               </a:rPr>
               <a:t>« déjà sur le tableau de bord ». </a:t>
             </a:r>
@@ -5719,11 +5685,11 @@
             <a:r>
               <a:rPr lang="en-US" sz="1200" dirty="0">
                 <a:solidFill>
-                  <a:srgbClr val="3D4556"/>
-                </a:solidFill>
-                <a:latin typeface="Inter" pitchFamily="34" charset="0"/>
-                <a:ea typeface="Inter" pitchFamily="34" charset="-122"/>
-                <a:cs typeface="Inter" pitchFamily="34" charset="-120"/>
+                  <a:srgbClr val="3A423F"/>
+                </a:solidFill>
+                <a:latin typeface="Public Sans" pitchFamily="34" charset="0"/>
+                <a:ea typeface="Public Sans" pitchFamily="34" charset="-122"/>
+                <a:cs typeface="Public Sans" pitchFamily="34" charset="-120"/>
               </a:rPr>
               <a:t>La phrase est là pour ça : ce que vous venez de compter est parti. Le superviseur n'a rien à demander.</a:t>
             </a:r>
@@ -5742,11 +5708,11 @@
             <a:r>
               <a:rPr lang="en-US" sz="1200" b="1" dirty="0">
                 <a:solidFill>
-                  <a:srgbClr val="0B0F19"/>
-                </a:solidFill>
-                <a:latin typeface="Inter" pitchFamily="34" charset="0"/>
-                <a:ea typeface="Inter" pitchFamily="34" charset="-122"/>
-                <a:cs typeface="Inter" pitchFamily="34" charset="-120"/>
+                  <a:srgbClr val="14181A"/>
+                </a:solidFill>
+                <a:latin typeface="Public Sans" pitchFamily="34" charset="0"/>
+                <a:ea typeface="Public Sans" pitchFamily="34" charset="-122"/>
+                <a:cs typeface="Public Sans" pitchFamily="34" charset="-120"/>
               </a:rPr>
               <a:t>Puis la suivante. </a:t>
             </a:r>
@@ -5762,55 +5728,21 @@
             <a:r>
               <a:rPr lang="en-US" sz="1200" dirty="0">
                 <a:solidFill>
-                  <a:srgbClr val="3D4556"/>
-                </a:solidFill>
-                <a:latin typeface="Inter" pitchFamily="34" charset="0"/>
-                <a:ea typeface="Inter" pitchFamily="34" charset="-122"/>
-                <a:cs typeface="Inter" pitchFamily="34" charset="-120"/>
+                  <a:srgbClr val="3A423F"/>
+                </a:solidFill>
+                <a:latin typeface="Public Sans" pitchFamily="34" charset="0"/>
+                <a:ea typeface="Public Sans" pitchFamily="34" charset="-122"/>
+                <a:cs typeface="Public Sans" pitchFamily="34" charset="-120"/>
               </a:rPr>
               <a:t>L'écran revient de lui-même sur la lecture de balise. Vous marchez jusqu'au rayon d'après et vous scannez.</a:t>
             </a:r>
             <a:endParaRPr lang="en-US" sz="1200" dirty="0"/>
           </a:p>
         </p:txBody>
-      </p:sp>
-      <p:sp>
-        <p:nvSpPr>
-          <p:cNvPr id="8" name="Shape 5"/>
-          <p:cNvSpPr/>
-          <p:nvPr/>
-        </p:nvSpPr>
-        <p:spPr>
-          <a:xfrm>
-            <a:off x="9262872" y="1325880"/>
-            <a:ext cx="2122020" cy="4480560"/>
-          </a:xfrm>
-          <a:prstGeom prst="roundRect">
-            <a:avLst>
-              <a:gd name="adj" fmla="val 12927"/>
-            </a:avLst>
-          </a:prstGeom>
-          <a:solidFill>
-            <a:srgbClr val="FFFFFF"/>
-          </a:solidFill>
-          <a:ln w="12700">
-            <a:solidFill>
-              <a:srgbClr val="FFFFFF"/>
-            </a:solidFill>
-            <a:prstDash val="solid"/>
-          </a:ln>
-          <a:effectLst>
-            <a:outerShdw sx="100000" sy="100000" kx="0" ky="0" algn="bl" rotWithShape="0" blurRad="177800" dist="38100" dir="5400000">
-              <a:srgbClr val="0B0F19">
-                <a:alpha val="18000"/>
-              </a:srgbClr>
-            </a:outerShdw>
-          </a:effectLst>
-        </p:spPr>
       </p:sp>
       <p:pic>
         <p:nvPicPr>
-          <p:cNvPr id="9" name="Image 1" descr="preencoded.png">    </p:cNvPr>
+          <p:cNvPr id="8" name="Image 1" descr="preencoded.png">    </p:cNvPr>
           <p:cNvPicPr>
             <a:picLocks noChangeAspect="1"/>
           </p:cNvPicPr>
@@ -5834,7 +5766,7 @@
       </p:pic>
       <p:sp>
         <p:nvSpPr>
-          <p:cNvPr id="10" name="Text 6"/>
+          <p:cNvPr id="9" name="Text 5"/>
           <p:cNvSpPr/>
           <p:nvPr/>
         </p:nvSpPr>
@@ -5859,11 +5791,11 @@
             <a:r>
               <a:rPr lang="en-US" sz="1000" i="1" dirty="0">
                 <a:solidFill>
-                  <a:srgbClr val="5B6475"/>
-                </a:solidFill>
-                <a:latin typeface="Inter" pitchFamily="34" charset="0"/>
-                <a:ea typeface="Inter" pitchFamily="34" charset="-122"/>
-                <a:cs typeface="Inter" pitchFamily="34" charset="-120"/>
+                  <a:srgbClr val="575F5C"/>
+                </a:solidFill>
+                <a:latin typeface="Public Sans" pitchFamily="34" charset="0"/>
+                <a:ea typeface="Public Sans" pitchFamily="34" charset="-122"/>
+                <a:cs typeface="Public Sans" pitchFamily="34" charset="-120"/>
               </a:rPr>
               <a:t>La feuille de fin de balise.</a:t>
             </a:r>
@@ -5873,7 +5805,7 @@
       </p:sp>
       <p:sp>
         <p:nvSpPr>
-          <p:cNvPr id="11" name="Text 7"/>
+          <p:cNvPr id="10" name="Text 6"/>
           <p:cNvSpPr/>
           <p:nvPr/>
         </p:nvSpPr>
@@ -5898,11 +5830,11 @@
             <a:r>
               <a:rPr lang="en-US" sz="900" dirty="0">
                 <a:solidFill>
-                  <a:srgbClr val="5B6475"/>
-                </a:solidFill>
-                <a:latin typeface="Inter" pitchFamily="34" charset="0"/>
-                <a:ea typeface="Inter" pitchFamily="34" charset="-122"/>
-                <a:cs typeface="Inter" pitchFamily="34" charset="-120"/>
+                  <a:srgbClr val="575F5C"/>
+                </a:solidFill>
+                <a:latin typeface="Public Sans" pitchFamily="34" charset="0"/>
+                <a:ea typeface="Public Sans" pitchFamily="34" charset="-122"/>
+                <a:cs typeface="Public Sans" pitchFamily="34" charset="-120"/>
               </a:rPr>
               <a:t>Quantinvo · prise en main · août 2026</a:t>
             </a:r>
@@ -5912,7 +5844,7 @@
       </p:sp>
       <p:sp>
         <p:nvSpPr>
-          <p:cNvPr id="12" name="Text 8"/>
+          <p:cNvPr id="11" name="Text 7"/>
           <p:cNvSpPr/>
           <p:nvPr/>
         </p:nvSpPr>
@@ -5937,11 +5869,11 @@
             <a:r>
               <a:rPr lang="en-US" sz="900" dirty="0">
                 <a:solidFill>
-                  <a:srgbClr val="5B6475"/>
-                </a:solidFill>
-                <a:latin typeface="Inter" pitchFamily="34" charset="0"/>
-                <a:ea typeface="Inter" pitchFamily="34" charset="-122"/>
-                <a:cs typeface="Inter" pitchFamily="34" charset="-120"/>
+                  <a:srgbClr val="575F5C"/>
+                </a:solidFill>
+                <a:latin typeface="Public Sans" pitchFamily="34" charset="0"/>
+                <a:ea typeface="Public Sans" pitchFamily="34" charset="-122"/>
+                <a:cs typeface="Public Sans" pitchFamily="34" charset="-120"/>
               </a:rPr>
               <a:t>15</a:t>
             </a:r>
@@ -6032,11 +5964,11 @@
             <a:r>
               <a:rPr lang="en-US" sz="1600" b="1" dirty="0">
                 <a:solidFill>
-                  <a:srgbClr val="0B0F19"/>
-                </a:solidFill>
-                <a:latin typeface="Sora" pitchFamily="34" charset="0"/>
-                <a:ea typeface="Sora" pitchFamily="34" charset="-122"/>
-                <a:cs typeface="Sora" pitchFamily="34" charset="-120"/>
+                  <a:srgbClr val="14181A"/>
+                </a:solidFill>
+                <a:latin typeface="Archivo" pitchFamily="34" charset="0"/>
+                <a:ea typeface="Archivo" pitchFamily="34" charset="-122"/>
+                <a:cs typeface="Archivo" pitchFamily="34" charset="-120"/>
               </a:rPr>
               <a:t>Quantinvo</a:t>
             </a:r>
@@ -6071,11 +6003,11 @@
             <a:r>
               <a:rPr lang="en-US" sz="1000" dirty="0">
                 <a:solidFill>
-                  <a:srgbClr val="5B6475"/>
-                </a:solidFill>
-                <a:latin typeface="Inter" pitchFamily="34" charset="0"/>
-                <a:ea typeface="Inter" pitchFamily="34" charset="-122"/>
-                <a:cs typeface="Inter" pitchFamily="34" charset="-120"/>
+                  <a:srgbClr val="575F5C"/>
+                </a:solidFill>
+                <a:latin typeface="Public Sans" pitchFamily="34" charset="0"/>
+                <a:ea typeface="Public Sans" pitchFamily="34" charset="-122"/>
+                <a:cs typeface="Public Sans" pitchFamily="34" charset="-120"/>
               </a:rPr>
               <a:t>Compteur</a:t>
             </a:r>
@@ -6092,17 +6024,17 @@
         <p:spPr>
           <a:xfrm>
             <a:off x="731520" y="877824"/>
-            <a:ext cx="10725912" cy="25603"/>
+            <a:ext cx="10725912" cy="10973"/>
           </a:xfrm>
           <a:prstGeom prst="rect">
             <a:avLst/>
           </a:prstGeom>
           <a:solidFill>
-            <a:srgbClr val="38C9FF"/>
+            <a:srgbClr val="E2E5E1"/>
           </a:solidFill>
           <a:ln w="12700">
             <a:solidFill>
-              <a:srgbClr val="38C9FF"/>
+              <a:srgbClr val="E2E5E1"/>
             </a:solidFill>
             <a:prstDash val="solid"/>
           </a:ln>
@@ -6138,11 +6070,11 @@
             <a:r>
               <a:rPr lang="en-US" sz="2600" b="1" dirty="0">
                 <a:solidFill>
-                  <a:srgbClr val="4636B0"/>
-                </a:solidFill>
-                <a:latin typeface="Sora" pitchFamily="34" charset="0"/>
-                <a:ea typeface="Sora" pitchFamily="34" charset="-122"/>
-                <a:cs typeface="Sora" pitchFamily="34" charset="-120"/>
+                  <a:srgbClr val="14181A"/>
+                </a:solidFill>
+                <a:latin typeface="Archivo" pitchFamily="34" charset="0"/>
+                <a:ea typeface="Archivo" pitchFamily="34" charset="-122"/>
+                <a:cs typeface="Archivo" pitchFamily="34" charset="-120"/>
               </a:rPr>
               <a:t>Auditer : les mêmes gestes, en ambre.</a:t>
             </a:r>
@@ -6183,11 +6115,11 @@
             <a:r>
               <a:rPr lang="en-US" sz="1200" b="1" dirty="0">
                 <a:solidFill>
-                  <a:srgbClr val="0B0F19"/>
-                </a:solidFill>
-                <a:latin typeface="Inter" pitchFamily="34" charset="0"/>
-                <a:ea typeface="Inter" pitchFamily="34" charset="-122"/>
-                <a:cs typeface="Inter" pitchFamily="34" charset="-120"/>
+                  <a:srgbClr val="14181A"/>
+                </a:solidFill>
+                <a:latin typeface="Public Sans" pitchFamily="34" charset="0"/>
+                <a:ea typeface="Public Sans" pitchFamily="34" charset="-122"/>
+                <a:cs typeface="Public Sans" pitchFamily="34" charset="-120"/>
               </a:rPr>
               <a:t>C'est un second passage. </a:t>
             </a:r>
@@ -6203,11 +6135,11 @@
             <a:r>
               <a:rPr lang="en-US" sz="1200" dirty="0">
                 <a:solidFill>
-                  <a:srgbClr val="3D4556"/>
-                </a:solidFill>
-                <a:latin typeface="Inter" pitchFamily="34" charset="0"/>
-                <a:ea typeface="Inter" pitchFamily="34" charset="-122"/>
-                <a:cs typeface="Inter" pitchFamily="34" charset="-120"/>
+                  <a:srgbClr val="3A423F"/>
+                </a:solidFill>
+                <a:latin typeface="Public Sans" pitchFamily="34" charset="0"/>
+                <a:ea typeface="Public Sans" pitchFamily="34" charset="-122"/>
+                <a:cs typeface="Public Sans" pitchFamily="34" charset="-120"/>
               </a:rPr>
               <a:t>Vous recomptez une zone que quelqu'un d'autre a déjà comptée. Le superviseur vous dit laquelle et quand.</a:t>
             </a:r>
@@ -6226,11 +6158,11 @@
             <a:r>
               <a:rPr lang="en-US" sz="1200" b="1" dirty="0">
                 <a:solidFill>
-                  <a:srgbClr val="0B0F19"/>
-                </a:solidFill>
-                <a:latin typeface="Inter" pitchFamily="34" charset="0"/>
-                <a:ea typeface="Inter" pitchFamily="34" charset="-122"/>
-                <a:cs typeface="Inter" pitchFamily="34" charset="-120"/>
+                  <a:srgbClr val="14181A"/>
+                </a:solidFill>
+                <a:latin typeface="Public Sans" pitchFamily="34" charset="0"/>
+                <a:ea typeface="Public Sans" pitchFamily="34" charset="-122"/>
+                <a:cs typeface="Public Sans" pitchFamily="34" charset="-120"/>
               </a:rPr>
               <a:t>L'écran change de couleur. </a:t>
             </a:r>
@@ -6246,11 +6178,11 @@
             <a:r>
               <a:rPr lang="en-US" sz="1200" dirty="0">
                 <a:solidFill>
-                  <a:srgbClr val="3D4556"/>
-                </a:solidFill>
-                <a:latin typeface="Inter" pitchFamily="34" charset="0"/>
-                <a:ea typeface="Inter" pitchFamily="34" charset="-122"/>
-                <a:cs typeface="Inter" pitchFamily="34" charset="-120"/>
+                  <a:srgbClr val="3A423F"/>
+                </a:solidFill>
+                <a:latin typeface="Public Sans" pitchFamily="34" charset="0"/>
+                <a:ea typeface="Public Sans" pitchFamily="34" charset="-122"/>
+                <a:cs typeface="Public Sans" pitchFamily="34" charset="-120"/>
               </a:rPr>
               <a:t>Ambre au lieu de violet, du bandeau au bouton. C'est le seul repère dont on a besoin pour savoir dans quel passage on est.</a:t>
             </a:r>
@@ -6269,11 +6201,11 @@
             <a:r>
               <a:rPr lang="en-US" sz="1200" b="1" dirty="0">
                 <a:solidFill>
-                  <a:srgbClr val="0B0F19"/>
-                </a:solidFill>
-                <a:latin typeface="Inter" pitchFamily="34" charset="0"/>
-                <a:ea typeface="Inter" pitchFamily="34" charset="-122"/>
-                <a:cs typeface="Inter" pitchFamily="34" charset="-120"/>
+                  <a:srgbClr val="14181A"/>
+                </a:solidFill>
+                <a:latin typeface="Public Sans" pitchFamily="34" charset="0"/>
+                <a:ea typeface="Public Sans" pitchFamily="34" charset="-122"/>
+                <a:cs typeface="Public Sans" pitchFamily="34" charset="-120"/>
               </a:rPr>
               <a:t>Vous ne voyez pas le premier comptage. </a:t>
             </a:r>
@@ -6289,11 +6221,11 @@
             <a:r>
               <a:rPr lang="en-US" sz="1200" dirty="0">
                 <a:solidFill>
-                  <a:srgbClr val="3D4556"/>
-                </a:solidFill>
-                <a:latin typeface="Inter" pitchFamily="34" charset="0"/>
-                <a:ea typeface="Inter" pitchFamily="34" charset="-122"/>
-                <a:cs typeface="Inter" pitchFamily="34" charset="-120"/>
+                  <a:srgbClr val="3A423F"/>
+                </a:solidFill>
+                <a:latin typeface="Public Sans" pitchFamily="34" charset="0"/>
+                <a:ea typeface="Public Sans" pitchFamily="34" charset="-122"/>
+                <a:cs typeface="Public Sans" pitchFamily="34" charset="-120"/>
               </a:rPr>
               <a:t>Et c'est voulu : un second comptage influencé ne vérifie rien. L'écart se calcule après, sur le tableau de bord.</a:t>
             </a:r>
@@ -6312,11 +6244,11 @@
             <a:r>
               <a:rPr lang="en-US" sz="1200" b="1" dirty="0">
                 <a:solidFill>
-                  <a:srgbClr val="0B0F19"/>
-                </a:solidFill>
-                <a:latin typeface="Inter" pitchFamily="34" charset="0"/>
-                <a:ea typeface="Inter" pitchFamily="34" charset="-122"/>
-                <a:cs typeface="Inter" pitchFamily="34" charset="-120"/>
+                  <a:srgbClr val="14181A"/>
+                </a:solidFill>
+                <a:latin typeface="Public Sans" pitchFamily="34" charset="0"/>
+                <a:ea typeface="Public Sans" pitchFamily="34" charset="-122"/>
+                <a:cs typeface="Public Sans" pitchFamily="34" charset="-120"/>
               </a:rPr>
               <a:t>Vous clôturez pareil. </a:t>
             </a:r>
@@ -6332,11 +6264,11 @@
             <a:r>
               <a:rPr lang="en-US" sz="1200" dirty="0">
                 <a:solidFill>
-                  <a:srgbClr val="3D4556"/>
-                </a:solidFill>
-                <a:latin typeface="Inter" pitchFamily="34" charset="0"/>
-                <a:ea typeface="Inter" pitchFamily="34" charset="-122"/>
-                <a:cs typeface="Inter" pitchFamily="34" charset="-120"/>
+                  <a:srgbClr val="3A423F"/>
+                </a:solidFill>
+                <a:latin typeface="Public Sans" pitchFamily="34" charset="0"/>
+                <a:ea typeface="Public Sans" pitchFamily="34" charset="-122"/>
+                <a:cs typeface="Public Sans" pitchFamily="34" charset="-120"/>
               </a:rPr>
               <a:t>La balise passe en auditée, et les articles dont les deux comptages diffèrent remontent au superviseur.</a:t>
             </a:r>
@@ -6374,11 +6306,11 @@
             <a:r>
               <a:rPr lang="en-US" sz="1350" b="1" dirty="0">
                 <a:solidFill>
-                  <a:srgbClr val="4636B0"/>
-                </a:solidFill>
-                <a:latin typeface="Sora" pitchFamily="34" charset="0"/>
-                <a:ea typeface="Sora" pitchFamily="34" charset="-122"/>
-                <a:cs typeface="Sora" pitchFamily="34" charset="-120"/>
+                  <a:srgbClr val="14181A"/>
+                </a:solidFill>
+                <a:latin typeface="Archivo" pitchFamily="34" charset="0"/>
+                <a:ea typeface="Archivo" pitchFamily="34" charset="-122"/>
+                <a:cs typeface="Archivo" pitchFamily="34" charset="-120"/>
               </a:rPr>
               <a:t>L'écran d'audit</a:t>
             </a:r>
@@ -6416,11 +6348,11 @@
             <a:r>
               <a:rPr lang="en-US" sz="1100" dirty="0">
                 <a:solidFill>
-                  <a:srgbClr val="3D4556"/>
-                </a:solidFill>
-                <a:latin typeface="Inter" pitchFamily="34" charset="0"/>
-                <a:ea typeface="Inter" pitchFamily="34" charset="-122"/>
-                <a:cs typeface="Inter" pitchFamily="34" charset="-120"/>
+                  <a:srgbClr val="3A423F"/>
+                </a:solidFill>
+                <a:latin typeface="Public Sans" pitchFamily="34" charset="0"/>
+                <a:ea typeface="Public Sans" pitchFamily="34" charset="-122"/>
+                <a:cs typeface="Public Sans" pitchFamily="34" charset="-120"/>
               </a:rPr>
               <a:t>Même disposition, même bouton de clôture — seule la couleur dit le passage.</a:t>
             </a:r>
@@ -6441,7 +6373,7 @@
           </a:xfrm>
           <a:prstGeom prst="roundRect">
             <a:avLst>
-              <a:gd name="adj" fmla="val 4000"/>
+              <a:gd name="adj" fmla="val 1143"/>
             </a:avLst>
           </a:prstGeom>
           <a:solidFill>
@@ -6506,11 +6438,11 @@
             <a:r>
               <a:rPr lang="en-US" sz="900" dirty="0">
                 <a:solidFill>
-                  <a:srgbClr val="5B6475"/>
-                </a:solidFill>
-                <a:latin typeface="Inter" pitchFamily="34" charset="0"/>
-                <a:ea typeface="Inter" pitchFamily="34" charset="-122"/>
-                <a:cs typeface="Inter" pitchFamily="34" charset="-120"/>
+                  <a:srgbClr val="575F5C"/>
+                </a:solidFill>
+                <a:latin typeface="Public Sans" pitchFamily="34" charset="0"/>
+                <a:ea typeface="Public Sans" pitchFamily="34" charset="-122"/>
+                <a:cs typeface="Public Sans" pitchFamily="34" charset="-120"/>
               </a:rPr>
               <a:t>Quantinvo · prise en main · août 2026</a:t>
             </a:r>
@@ -6545,11 +6477,11 @@
             <a:r>
               <a:rPr lang="en-US" sz="900" dirty="0">
                 <a:solidFill>
-                  <a:srgbClr val="5B6475"/>
-                </a:solidFill>
-                <a:latin typeface="Inter" pitchFamily="34" charset="0"/>
-                <a:ea typeface="Inter" pitchFamily="34" charset="-122"/>
-                <a:cs typeface="Inter" pitchFamily="34" charset="-120"/>
+                  <a:srgbClr val="575F5C"/>
+                </a:solidFill>
+                <a:latin typeface="Public Sans" pitchFamily="34" charset="0"/>
+                <a:ea typeface="Public Sans" pitchFamily="34" charset="-122"/>
+                <a:cs typeface="Public Sans" pitchFamily="34" charset="-120"/>
               </a:rPr>
               <a:t>16</a:t>
             </a:r>
@@ -6640,11 +6572,11 @@
             <a:r>
               <a:rPr lang="en-US" sz="1600" b="1" dirty="0">
                 <a:solidFill>
-                  <a:srgbClr val="0B0F19"/>
-                </a:solidFill>
-                <a:latin typeface="Sora" pitchFamily="34" charset="0"/>
-                <a:ea typeface="Sora" pitchFamily="34" charset="-122"/>
-                <a:cs typeface="Sora" pitchFamily="34" charset="-120"/>
+                  <a:srgbClr val="14181A"/>
+                </a:solidFill>
+                <a:latin typeface="Archivo" pitchFamily="34" charset="0"/>
+                <a:ea typeface="Archivo" pitchFamily="34" charset="-122"/>
+                <a:cs typeface="Archivo" pitchFamily="34" charset="-120"/>
               </a:rPr>
               <a:t>Quantinvo</a:t>
             </a:r>
@@ -6679,11 +6611,11 @@
             <a:r>
               <a:rPr lang="en-US" sz="1000" dirty="0">
                 <a:solidFill>
-                  <a:srgbClr val="5B6475"/>
-                </a:solidFill>
-                <a:latin typeface="Inter" pitchFamily="34" charset="0"/>
-                <a:ea typeface="Inter" pitchFamily="34" charset="-122"/>
-                <a:cs typeface="Inter" pitchFamily="34" charset="-120"/>
+                  <a:srgbClr val="575F5C"/>
+                </a:solidFill>
+                <a:latin typeface="Public Sans" pitchFamily="34" charset="0"/>
+                <a:ea typeface="Public Sans" pitchFamily="34" charset="-122"/>
+                <a:cs typeface="Public Sans" pitchFamily="34" charset="-120"/>
               </a:rPr>
               <a:t>Compteur</a:t>
             </a:r>
@@ -6700,17 +6632,17 @@
         <p:spPr>
           <a:xfrm>
             <a:off x="731520" y="877824"/>
-            <a:ext cx="10725912" cy="25603"/>
+            <a:ext cx="10725912" cy="10973"/>
           </a:xfrm>
           <a:prstGeom prst="rect">
             <a:avLst/>
           </a:prstGeom>
           <a:solidFill>
-            <a:srgbClr val="38C9FF"/>
+            <a:srgbClr val="E2E5E1"/>
           </a:solidFill>
           <a:ln w="12700">
             <a:solidFill>
-              <a:srgbClr val="38C9FF"/>
+              <a:srgbClr val="E2E5E1"/>
             </a:solidFill>
             <a:prstDash val="solid"/>
           </a:ln>
@@ -6746,11 +6678,11 @@
             <a:r>
               <a:rPr lang="en-US" sz="2600" b="1" dirty="0">
                 <a:solidFill>
-                  <a:srgbClr val="4636B0"/>
-                </a:solidFill>
-                <a:latin typeface="Sora" pitchFamily="34" charset="0"/>
-                <a:ea typeface="Sora" pitchFamily="34" charset="-122"/>
-                <a:cs typeface="Sora" pitchFamily="34" charset="-120"/>
+                  <a:srgbClr val="14181A"/>
+                </a:solidFill>
+                <a:latin typeface="Archivo" pitchFamily="34" charset="0"/>
+                <a:ea typeface="Archivo" pitchFamily="34" charset="-122"/>
+                <a:cs typeface="Archivo" pitchFamily="34" charset="-120"/>
               </a:rPr>
               <a:t>Vérifier que tout est bien parti.</a:t>
             </a:r>
@@ -6788,11 +6720,11 @@
             <a:r>
               <a:rPr lang="en-US" sz="1350" b="1" dirty="0">
                 <a:solidFill>
-                  <a:srgbClr val="4636B0"/>
-                </a:solidFill>
-                <a:latin typeface="Sora" pitchFamily="34" charset="0"/>
-                <a:ea typeface="Sora" pitchFamily="34" charset="-122"/>
-                <a:cs typeface="Sora" pitchFamily="34" charset="-120"/>
+                  <a:srgbClr val="14181A"/>
+                </a:solidFill>
+                <a:latin typeface="Archivo" pitchFamily="34" charset="0"/>
+                <a:ea typeface="Archivo" pitchFamily="34" charset="-122"/>
+                <a:cs typeface="Archivo" pitchFamily="34" charset="-120"/>
               </a:rPr>
               <a:t>Vos totaux, en haut</a:t>
             </a:r>
@@ -6830,11 +6762,11 @@
             <a:r>
               <a:rPr lang="en-US" sz="1100" dirty="0">
                 <a:solidFill>
-                  <a:srgbClr val="3D4556"/>
-                </a:solidFill>
-                <a:latin typeface="Inter" pitchFamily="34" charset="0"/>
-                <a:ea typeface="Inter" pitchFamily="34" charset="-122"/>
-                <a:cs typeface="Inter" pitchFamily="34" charset="-120"/>
+                  <a:srgbClr val="3A423F"/>
+                </a:solidFill>
+                <a:latin typeface="Public Sans" pitchFamily="34" charset="0"/>
+                <a:ea typeface="Public Sans" pitchFamily="34" charset="-122"/>
+                <a:cs typeface="Public Sans" pitchFamily="34" charset="-120"/>
               </a:rPr>
               <a:t>Pièces comptées et auditées, à jour à chaque retour du scanner. Si le chiffre bouge, c'est arrivé.</a:t>
             </a:r>
@@ -6855,15 +6787,15 @@
           </a:xfrm>
           <a:prstGeom prst="roundRect">
             <a:avLst>
-              <a:gd name="adj" fmla="val 4023"/>
+              <a:gd name="adj" fmla="val 1149"/>
             </a:avLst>
           </a:prstGeom>
           <a:solidFill>
-            <a:srgbClr val="F4F5F9"/>
+            <a:srgbClr val="F2F3F1"/>
           </a:solidFill>
           <a:ln w="12700">
             <a:solidFill>
-              <a:srgbClr val="F4F5F9"/>
+              <a:srgbClr val="F2F3F1"/>
             </a:solidFill>
             <a:prstDash val="solid"/>
           </a:ln>
@@ -6923,11 +6855,11 @@
             <a:r>
               <a:rPr lang="en-US" sz="1350" b="1" dirty="0">
                 <a:solidFill>
-                  <a:srgbClr val="4636B0"/>
-                </a:solidFill>
-                <a:latin typeface="Sora" pitchFamily="34" charset="0"/>
-                <a:ea typeface="Sora" pitchFamily="34" charset="-122"/>
-                <a:cs typeface="Sora" pitchFamily="34" charset="-120"/>
+                  <a:srgbClr val="14181A"/>
+                </a:solidFill>
+                <a:latin typeface="Archivo" pitchFamily="34" charset="0"/>
+                <a:ea typeface="Archivo" pitchFamily="34" charset="-122"/>
+                <a:cs typeface="Archivo" pitchFamily="34" charset="-120"/>
               </a:rPr>
               <a:t>Le détail, balise par balise</a:t>
             </a:r>
@@ -6965,11 +6897,11 @@
             <a:r>
               <a:rPr lang="en-US" sz="1100" dirty="0">
                 <a:solidFill>
-                  <a:srgbClr val="3D4556"/>
-                </a:solidFill>
-                <a:latin typeface="Inter" pitchFamily="34" charset="0"/>
-                <a:ea typeface="Inter" pitchFamily="34" charset="-122"/>
-                <a:cs typeface="Inter" pitchFamily="34" charset="-120"/>
+                  <a:srgbClr val="3A423F"/>
+                </a:solidFill>
+                <a:latin typeface="Public Sans" pitchFamily="34" charset="0"/>
+                <a:ea typeface="Public Sans" pitchFamily="34" charset="-122"/>
+                <a:cs typeface="Public Sans" pitchFamily="34" charset="-120"/>
               </a:rPr>
               <a:t>Touchez une balise : les articles, leur code, leur quantité, telles qu'elles sont arrivées.</a:t>
             </a:r>
@@ -6990,15 +6922,15 @@
           </a:xfrm>
           <a:prstGeom prst="roundRect">
             <a:avLst>
-              <a:gd name="adj" fmla="val 4023"/>
+              <a:gd name="adj" fmla="val 1149"/>
             </a:avLst>
           </a:prstGeom>
           <a:solidFill>
-            <a:srgbClr val="F4F5F9"/>
+            <a:srgbClr val="F2F3F1"/>
           </a:solidFill>
           <a:ln w="12700">
             <a:solidFill>
-              <a:srgbClr val="F4F5F9"/>
+              <a:srgbClr val="F2F3F1"/>
             </a:solidFill>
             <a:prstDash val="solid"/>
           </a:ln>
@@ -7058,11 +6990,11 @@
             <a:r>
               <a:rPr lang="en-US" sz="1350" b="1" dirty="0">
                 <a:solidFill>
-                  <a:srgbClr val="4636B0"/>
-                </a:solidFill>
-                <a:latin typeface="Sora" pitchFamily="34" charset="0"/>
-                <a:ea typeface="Sora" pitchFamily="34" charset="-122"/>
-                <a:cs typeface="Sora" pitchFamily="34" charset="-120"/>
+                  <a:srgbClr val="14181A"/>
+                </a:solidFill>
+                <a:latin typeface="Archivo" pitchFamily="34" charset="0"/>
+                <a:ea typeface="Archivo" pitchFamily="34" charset="-122"/>
+                <a:cs typeface="Archivo" pitchFamily="34" charset="-120"/>
               </a:rPr>
               <a:t>Hors ligne, rien n’est perdu</a:t>
             </a:r>
@@ -7100,11 +7032,11 @@
             <a:r>
               <a:rPr lang="en-US" sz="1100" dirty="0">
                 <a:solidFill>
-                  <a:srgbClr val="3D4556"/>
-                </a:solidFill>
-                <a:latin typeface="Inter" pitchFamily="34" charset="0"/>
-                <a:ea typeface="Inter" pitchFamily="34" charset="-122"/>
-                <a:cs typeface="Inter" pitchFamily="34" charset="-120"/>
+                  <a:srgbClr val="3A423F"/>
+                </a:solidFill>
+                <a:latin typeface="Public Sans" pitchFamily="34" charset="0"/>
+                <a:ea typeface="Public Sans" pitchFamily="34" charset="-122"/>
+                <a:cs typeface="Public Sans" pitchFamily="34" charset="-120"/>
               </a:rPr>
               <a:t>En réserve, les scans attendent sur l'appareil et partent seuls au retour du réseau.</a:t>
             </a:r>
@@ -7125,15 +7057,15 @@
           </a:xfrm>
           <a:prstGeom prst="roundRect">
             <a:avLst>
-              <a:gd name="adj" fmla="val 4023"/>
+              <a:gd name="adj" fmla="val 1149"/>
             </a:avLst>
           </a:prstGeom>
           <a:solidFill>
-            <a:srgbClr val="F4F5F9"/>
+            <a:srgbClr val="F2F3F1"/>
           </a:solidFill>
           <a:ln w="12700">
             <a:solidFill>
-              <a:srgbClr val="F4F5F9"/>
+              <a:srgbClr val="F2F3F1"/>
             </a:solidFill>
             <a:prstDash val="solid"/>
           </a:ln>
@@ -7190,11 +7122,11 @@
             <a:r>
               <a:rPr lang="en-US" sz="900" dirty="0">
                 <a:solidFill>
-                  <a:srgbClr val="5B6475"/>
-                </a:solidFill>
-                <a:latin typeface="Inter" pitchFamily="34" charset="0"/>
-                <a:ea typeface="Inter" pitchFamily="34" charset="-122"/>
-                <a:cs typeface="Inter" pitchFamily="34" charset="-120"/>
+                  <a:srgbClr val="575F5C"/>
+                </a:solidFill>
+                <a:latin typeface="Public Sans" pitchFamily="34" charset="0"/>
+                <a:ea typeface="Public Sans" pitchFamily="34" charset="-122"/>
+                <a:cs typeface="Public Sans" pitchFamily="34" charset="-120"/>
               </a:rPr>
               <a:t>Quantinvo · prise en main · août 2026</a:t>
             </a:r>
@@ -7229,11 +7161,11 @@
             <a:r>
               <a:rPr lang="en-US" sz="900" dirty="0">
                 <a:solidFill>
-                  <a:srgbClr val="5B6475"/>
-                </a:solidFill>
-                <a:latin typeface="Inter" pitchFamily="34" charset="0"/>
-                <a:ea typeface="Inter" pitchFamily="34" charset="-122"/>
-                <a:cs typeface="Inter" pitchFamily="34" charset="-120"/>
+                  <a:srgbClr val="575F5C"/>
+                </a:solidFill>
+                <a:latin typeface="Public Sans" pitchFamily="34" charset="0"/>
+                <a:ea typeface="Public Sans" pitchFamily="34" charset="-122"/>
+                <a:cs typeface="Public Sans" pitchFamily="34" charset="-120"/>
               </a:rPr>
               <a:t>17</a:t>
             </a:r>
@@ -7324,11 +7256,11 @@
             <a:r>
               <a:rPr lang="en-US" sz="1600" b="1" dirty="0">
                 <a:solidFill>
-                  <a:srgbClr val="0B0F19"/>
-                </a:solidFill>
-                <a:latin typeface="Sora" pitchFamily="34" charset="0"/>
-                <a:ea typeface="Sora" pitchFamily="34" charset="-122"/>
-                <a:cs typeface="Sora" pitchFamily="34" charset="-120"/>
+                  <a:srgbClr val="14181A"/>
+                </a:solidFill>
+                <a:latin typeface="Archivo" pitchFamily="34" charset="0"/>
+                <a:ea typeface="Archivo" pitchFamily="34" charset="-122"/>
+                <a:cs typeface="Archivo" pitchFamily="34" charset="-120"/>
               </a:rPr>
               <a:t>Quantinvo</a:t>
             </a:r>
@@ -7363,11 +7295,11 @@
             <a:r>
               <a:rPr lang="en-US" sz="1000" dirty="0">
                 <a:solidFill>
-                  <a:srgbClr val="5B6475"/>
-                </a:solidFill>
-                <a:latin typeface="Inter" pitchFamily="34" charset="0"/>
-                <a:ea typeface="Inter" pitchFamily="34" charset="-122"/>
-                <a:cs typeface="Inter" pitchFamily="34" charset="-120"/>
+                  <a:srgbClr val="575F5C"/>
+                </a:solidFill>
+                <a:latin typeface="Public Sans" pitchFamily="34" charset="0"/>
+                <a:ea typeface="Public Sans" pitchFamily="34" charset="-122"/>
+                <a:cs typeface="Public Sans" pitchFamily="34" charset="-120"/>
               </a:rPr>
               <a:t>Compteur</a:t>
             </a:r>
@@ -7384,17 +7316,17 @@
         <p:spPr>
           <a:xfrm>
             <a:off x="731520" y="877824"/>
-            <a:ext cx="10725912" cy="25603"/>
+            <a:ext cx="10725912" cy="10973"/>
           </a:xfrm>
           <a:prstGeom prst="rect">
             <a:avLst/>
           </a:prstGeom>
           <a:solidFill>
-            <a:srgbClr val="38C9FF"/>
+            <a:srgbClr val="E2E5E1"/>
           </a:solidFill>
           <a:ln w="12700">
             <a:solidFill>
-              <a:srgbClr val="38C9FF"/>
+              <a:srgbClr val="E2E5E1"/>
             </a:solidFill>
             <a:prstDash val="solid"/>
           </a:ln>
@@ -7430,11 +7362,11 @@
             <a:r>
               <a:rPr lang="en-US" sz="2600" b="1" dirty="0">
                 <a:solidFill>
-                  <a:srgbClr val="4636B0"/>
-                </a:solidFill>
-                <a:latin typeface="Sora" pitchFamily="34" charset="0"/>
-                <a:ea typeface="Sora" pitchFamily="34" charset="-122"/>
-                <a:cs typeface="Sora" pitchFamily="34" charset="-120"/>
+                  <a:srgbClr val="14181A"/>
+                </a:solidFill>
+                <a:latin typeface="Archivo" pitchFamily="34" charset="0"/>
+                <a:ea typeface="Archivo" pitchFamily="34" charset="-122"/>
+                <a:cs typeface="Archivo" pitchFamily="34" charset="-120"/>
               </a:rPr>
               <a:t>Quand ça ne se passe pas comme prévu.</a:t>
             </a:r>
@@ -7469,11 +7401,11 @@
             <a:r>
               <a:rPr lang="en-US" sz="1300" b="1" dirty="0">
                 <a:solidFill>
-                  <a:srgbClr val="0B0F19"/>
-                </a:solidFill>
-                <a:latin typeface="Sora" pitchFamily="34" charset="0"/>
-                <a:ea typeface="Sora" pitchFamily="34" charset="-122"/>
-                <a:cs typeface="Sora" pitchFamily="34" charset="-120"/>
+                  <a:srgbClr val="14181A"/>
+                </a:solidFill>
+                <a:latin typeface="Archivo" pitchFamily="34" charset="0"/>
+                <a:ea typeface="Archivo" pitchFamily="34" charset="-122"/>
+                <a:cs typeface="Archivo" pitchFamily="34" charset="-120"/>
               </a:rPr>
               <a:t>« Balise hors plage »</a:t>
             </a:r>
@@ -7511,11 +7443,11 @@
             <a:r>
               <a:rPr lang="en-US" sz="1100" dirty="0">
                 <a:solidFill>
-                  <a:srgbClr val="3D4556"/>
-                </a:solidFill>
-                <a:latin typeface="Inter" pitchFamily="34" charset="0"/>
-                <a:ea typeface="Inter" pitchFamily="34" charset="-122"/>
-                <a:cs typeface="Inter" pitchFamily="34" charset="-120"/>
+                  <a:srgbClr val="3A423F"/>
+                </a:solidFill>
+                <a:latin typeface="Public Sans" pitchFamily="34" charset="0"/>
+                <a:ea typeface="Public Sans" pitchFamily="34" charset="-122"/>
+                <a:cs typeface="Public Sans" pitchFamily="34" charset="-120"/>
               </a:rPr>
               <a:t>Le numéro n'est dans aucune plage. Si l'étiquette est bien collée dans ce magasin, touchez « Ajouter » : la zone est créée, le superviseur la nommera. Sinon, vérifiez le numéro.</a:t>
             </a:r>
@@ -7550,11 +7482,11 @@
             <a:r>
               <a:rPr lang="en-US" sz="1300" b="1" dirty="0">
                 <a:solidFill>
-                  <a:srgbClr val="0B0F19"/>
-                </a:solidFill>
-                <a:latin typeface="Sora" pitchFamily="34" charset="0"/>
-                <a:ea typeface="Sora" pitchFamily="34" charset="-122"/>
-                <a:cs typeface="Sora" pitchFamily="34" charset="-120"/>
+                  <a:srgbClr val="14181A"/>
+                </a:solidFill>
+                <a:latin typeface="Archivo" pitchFamily="34" charset="0"/>
+                <a:ea typeface="Archivo" pitchFamily="34" charset="-122"/>
+                <a:cs typeface="Archivo" pitchFamily="34" charset="-120"/>
               </a:rPr>
               <a:t>« Article inconnu »</a:t>
             </a:r>
@@ -7592,11 +7524,11 @@
             <a:r>
               <a:rPr lang="en-US" sz="1100" dirty="0">
                 <a:solidFill>
-                  <a:srgbClr val="3D4556"/>
-                </a:solidFill>
-                <a:latin typeface="Inter" pitchFamily="34" charset="0"/>
-                <a:ea typeface="Inter" pitchFamily="34" charset="-122"/>
-                <a:cs typeface="Inter" pitchFamily="34" charset="-120"/>
+                  <a:srgbClr val="3A423F"/>
+                </a:solidFill>
+                <a:latin typeface="Public Sans" pitchFamily="34" charset="0"/>
+                <a:ea typeface="Public Sans" pitchFamily="34" charset="-122"/>
+                <a:cs typeface="Public Sans" pitchFamily="34" charset="-120"/>
               </a:rPr>
               <a:t>Il n'est pas dans le référentiel. Ajoutez-le avec un libellé : il entrera dans le rapport avec un prix d'achat à zéro, que le superviseur complétera.</a:t>
             </a:r>
@@ -7631,11 +7563,11 @@
             <a:r>
               <a:rPr lang="en-US" sz="1300" b="1" dirty="0">
                 <a:solidFill>
-                  <a:srgbClr val="0B0F19"/>
-                </a:solidFill>
-                <a:latin typeface="Sora" pitchFamily="34" charset="0"/>
-                <a:ea typeface="Sora" pitchFamily="34" charset="-122"/>
-                <a:cs typeface="Sora" pitchFamily="34" charset="-120"/>
+                  <a:srgbClr val="14181A"/>
+                </a:solidFill>
+                <a:latin typeface="Archivo" pitchFamily="34" charset="0"/>
+                <a:ea typeface="Archivo" pitchFamily="34" charset="-122"/>
+                <a:cs typeface="Archivo" pitchFamily="34" charset="-120"/>
               </a:rPr>
               <a:t>Plus de réseau</a:t>
             </a:r>
@@ -7673,11 +7605,11 @@
             <a:r>
               <a:rPr lang="en-US" sz="1100" dirty="0">
                 <a:solidFill>
-                  <a:srgbClr val="3D4556"/>
-                </a:solidFill>
-                <a:latin typeface="Inter" pitchFamily="34" charset="0"/>
-                <a:ea typeface="Inter" pitchFamily="34" charset="-122"/>
-                <a:cs typeface="Inter" pitchFamily="34" charset="-120"/>
+                  <a:srgbClr val="3A423F"/>
+                </a:solidFill>
+                <a:latin typeface="Public Sans" pitchFamily="34" charset="0"/>
+                <a:ea typeface="Public Sans" pitchFamily="34" charset="-122"/>
+                <a:cs typeface="Public Sans" pitchFamily="34" charset="-120"/>
               </a:rPr>
               <a:t>Continuez à compter. Tout part au retour du réseau. Ne désinstallez pas l'application, et ne laissez pas effacer le téléphone avant que ce soit parti.</a:t>
             </a:r>
@@ -7712,11 +7644,11 @@
             <a:r>
               <a:rPr lang="en-US" sz="1300" b="1" dirty="0">
                 <a:solidFill>
-                  <a:srgbClr val="0B0F19"/>
-                </a:solidFill>
-                <a:latin typeface="Sora" pitchFamily="34" charset="0"/>
-                <a:ea typeface="Sora" pitchFamily="34" charset="-122"/>
-                <a:cs typeface="Sora" pitchFamily="34" charset="-120"/>
+                  <a:srgbClr val="14181A"/>
+                </a:solidFill>
+                <a:latin typeface="Archivo" pitchFamily="34" charset="0"/>
+                <a:ea typeface="Archivo" pitchFamily="34" charset="-122"/>
+                <a:cs typeface="Archivo" pitchFamily="34" charset="-120"/>
               </a:rPr>
               <a:t>Vous changez de téléphone</a:t>
             </a:r>
@@ -7754,11 +7686,11 @@
             <a:r>
               <a:rPr lang="en-US" sz="1100" dirty="0">
                 <a:solidFill>
-                  <a:srgbClr val="3D4556"/>
-                </a:solidFill>
-                <a:latin typeface="Inter" pitchFamily="34" charset="0"/>
-                <a:ea typeface="Inter" pitchFamily="34" charset="-122"/>
-                <a:cs typeface="Inter" pitchFamily="34" charset="-120"/>
+                  <a:srgbClr val="3A423F"/>
+                </a:solidFill>
+                <a:latin typeface="Public Sans" pitchFamily="34" charset="0"/>
+                <a:ea typeface="Public Sans" pitchFamily="34" charset="-122"/>
+                <a:cs typeface="Public Sans" pitchFamily="34" charset="-120"/>
               </a:rPr>
               <a:t>Reconnectez-vous : ce qui est déjà parti est sur le serveur. Ce qui attendait sur l'ancien partira quand il retrouvera du réseau.</a:t>
             </a:r>
@@ -7796,11 +7728,11 @@
             <a:r>
               <a:rPr lang="en-US" sz="1350" b="1" dirty="0">
                 <a:solidFill>
-                  <a:srgbClr val="4636B0"/>
-                </a:solidFill>
-                <a:latin typeface="Sora" pitchFamily="34" charset="0"/>
-                <a:ea typeface="Sora" pitchFamily="34" charset="-122"/>
-                <a:cs typeface="Sora" pitchFamily="34" charset="-120"/>
+                  <a:srgbClr val="14181A"/>
+                </a:solidFill>
+                <a:latin typeface="Archivo" pitchFamily="34" charset="0"/>
+                <a:ea typeface="Archivo" pitchFamily="34" charset="-122"/>
+                <a:cs typeface="Archivo" pitchFamily="34" charset="-120"/>
               </a:rPr>
               <a:t>Une balise inconnue se rattrape</a:t>
             </a:r>
@@ -7838,11 +7770,11 @@
             <a:r>
               <a:rPr lang="en-US" sz="1100" dirty="0">
                 <a:solidFill>
-                  <a:srgbClr val="3D4556"/>
-                </a:solidFill>
-                <a:latin typeface="Inter" pitchFamily="34" charset="0"/>
-                <a:ea typeface="Inter" pitchFamily="34" charset="-122"/>
-                <a:cs typeface="Inter" pitchFamily="34" charset="-120"/>
+                  <a:srgbClr val="3A423F"/>
+                </a:solidFill>
+                <a:latin typeface="Public Sans" pitchFamily="34" charset="0"/>
+                <a:ea typeface="Public Sans" pitchFamily="34" charset="-122"/>
+                <a:cs typeface="Public Sans" pitchFamily="34" charset="-120"/>
               </a:rPr>
               <a:t>L'alerte ne bloque pas : elle propose d'ajouter la balise et de compter tout de suite.</a:t>
             </a:r>
@@ -7863,15 +7795,15 @@
           </a:xfrm>
           <a:prstGeom prst="roundRect">
             <a:avLst>
-              <a:gd name="adj" fmla="val 4000"/>
+              <a:gd name="adj" fmla="val 1143"/>
             </a:avLst>
           </a:prstGeom>
           <a:solidFill>
-            <a:srgbClr val="F4F5F9"/>
+            <a:srgbClr val="F2F3F1"/>
           </a:solidFill>
           <a:ln w="12700">
             <a:solidFill>
-              <a:srgbClr val="F4F5F9"/>
+              <a:srgbClr val="F2F3F1"/>
             </a:solidFill>
             <a:prstDash val="solid"/>
           </a:ln>
@@ -7928,11 +7860,11 @@
             <a:r>
               <a:rPr lang="en-US" sz="900" dirty="0">
                 <a:solidFill>
-                  <a:srgbClr val="5B6475"/>
-                </a:solidFill>
-                <a:latin typeface="Inter" pitchFamily="34" charset="0"/>
-                <a:ea typeface="Inter" pitchFamily="34" charset="-122"/>
-                <a:cs typeface="Inter" pitchFamily="34" charset="-120"/>
+                  <a:srgbClr val="575F5C"/>
+                </a:solidFill>
+                <a:latin typeface="Public Sans" pitchFamily="34" charset="0"/>
+                <a:ea typeface="Public Sans" pitchFamily="34" charset="-122"/>
+                <a:cs typeface="Public Sans" pitchFamily="34" charset="-120"/>
               </a:rPr>
               <a:t>Quantinvo · prise en main · août 2026</a:t>
             </a:r>
@@ -7967,11 +7899,11 @@
             <a:r>
               <a:rPr lang="en-US" sz="900" dirty="0">
                 <a:solidFill>
-                  <a:srgbClr val="5B6475"/>
-                </a:solidFill>
-                <a:latin typeface="Inter" pitchFamily="34" charset="0"/>
-                <a:ea typeface="Inter" pitchFamily="34" charset="-122"/>
-                <a:cs typeface="Inter" pitchFamily="34" charset="-120"/>
+                  <a:srgbClr val="575F5C"/>
+                </a:solidFill>
+                <a:latin typeface="Public Sans" pitchFamily="34" charset="0"/>
+                <a:ea typeface="Public Sans" pitchFamily="34" charset="-122"/>
+                <a:cs typeface="Public Sans" pitchFamily="34" charset="-120"/>
               </a:rPr>
               <a:t>18</a:t>
             </a:r>
@@ -8062,11 +7994,11 @@
             <a:r>
               <a:rPr lang="en-US" sz="2400" b="1" dirty="0">
                 <a:solidFill>
-                  <a:srgbClr val="0B0F19"/>
-                </a:solidFill>
-                <a:latin typeface="Sora" pitchFamily="34" charset="0"/>
-                <a:ea typeface="Sora" pitchFamily="34" charset="-122"/>
-                <a:cs typeface="Sora" pitchFamily="34" charset="-120"/>
+                  <a:srgbClr val="14181A"/>
+                </a:solidFill>
+                <a:latin typeface="Archivo" pitchFamily="34" charset="0"/>
+                <a:ea typeface="Archivo" pitchFamily="34" charset="-122"/>
+                <a:cs typeface="Archivo" pitchFamily="34" charset="-120"/>
               </a:rPr>
               <a:t>Quantinvo</a:t>
             </a:r>
@@ -8083,17 +8015,17 @@
         <p:spPr>
           <a:xfrm>
             <a:off x="731520" y="1481328"/>
-            <a:ext cx="2377440" cy="25603"/>
+            <a:ext cx="2011680" cy="20117"/>
           </a:xfrm>
           <a:prstGeom prst="rect">
             <a:avLst/>
           </a:prstGeom>
           <a:solidFill>
-            <a:srgbClr val="38C9FF"/>
+            <a:srgbClr val="14181A"/>
           </a:solidFill>
           <a:ln w="12700">
             <a:solidFill>
-              <a:srgbClr val="38C9FF"/>
+              <a:srgbClr val="14181A"/>
             </a:solidFill>
             <a:prstDash val="solid"/>
           </a:ln>
@@ -8129,11 +8061,11 @@
             <a:r>
               <a:rPr lang="en-US" sz="3600" b="1" dirty="0">
                 <a:solidFill>
-                  <a:srgbClr val="4636B0"/>
-                </a:solidFill>
-                <a:latin typeface="Sora" pitchFamily="34" charset="0"/>
-                <a:ea typeface="Sora" pitchFamily="34" charset="-122"/>
-                <a:cs typeface="Sora" pitchFamily="34" charset="-120"/>
+                  <a:srgbClr val="14181A"/>
+                </a:solidFill>
+                <a:latin typeface="Archivo" pitchFamily="34" charset="0"/>
+                <a:ea typeface="Archivo" pitchFamily="34" charset="-122"/>
+                <a:cs typeface="Archivo" pitchFamily="34" charset="-120"/>
               </a:rPr>
               <a:t>Le matin de l'inventaire.</a:t>
             </a:r>
@@ -8171,11 +8103,11 @@
             <a:r>
               <a:rPr lang="en-US" sz="1450" dirty="0">
                 <a:solidFill>
-                  <a:srgbClr val="3D4556"/>
-                </a:solidFill>
-                <a:latin typeface="Inter" pitchFamily="34" charset="0"/>
-                <a:ea typeface="Inter" pitchFamily="34" charset="-122"/>
-                <a:cs typeface="Inter" pitchFamily="34" charset="-120"/>
+                  <a:srgbClr val="3A423F"/>
+                </a:solidFill>
+                <a:latin typeface="Public Sans" pitchFamily="34" charset="0"/>
+                <a:ea typeface="Public Sans" pitchFamily="34" charset="-122"/>
+                <a:cs typeface="Public Sans" pitchFamily="34" charset="-120"/>
               </a:rPr>
               <a:t>Les balises sont collées et affectées. Les deux fichiers sont importés. L'équipe est invitée et chacun s'est connecté une fois. Les téléphones sont chargés, le réseau a été essayé en réserve. Le superviseur a le tableau de bord ouvert. On peut compter.</a:t>
             </a:r>
@@ -8210,11 +8142,11 @@
             <a:r>
               <a:rPr lang="en-US" sz="1500" b="1" dirty="0">
                 <a:solidFill>
-                  <a:srgbClr val="4636B0"/>
-                </a:solidFill>
-                <a:latin typeface="Sora" pitchFamily="34" charset="0"/>
-                <a:ea typeface="Sora" pitchFamily="34" charset="-122"/>
-                <a:cs typeface="Sora" pitchFamily="34" charset="-120"/>
+                  <a:srgbClr val="14181A"/>
+                </a:solidFill>
+                <a:latin typeface="Archivo" pitchFamily="34" charset="0"/>
+                <a:ea typeface="Archivo" pitchFamily="34" charset="-122"/>
+                <a:cs typeface="Archivo" pitchFamily="34" charset="-120"/>
               </a:rPr>
               <a:t>Une question : contact@quantinvo.com</a:t>
             </a:r>
@@ -8249,11 +8181,11 @@
             <a:r>
               <a:rPr lang="en-US" sz="1050" dirty="0">
                 <a:solidFill>
-                  <a:srgbClr val="5B6475"/>
-                </a:solidFill>
-                <a:latin typeface="Inter" pitchFamily="34" charset="0"/>
-                <a:ea typeface="Inter" pitchFamily="34" charset="-122"/>
-                <a:cs typeface="Inter" pitchFamily="34" charset="-120"/>
+                  <a:srgbClr val="575F5C"/>
+                </a:solidFill>
+                <a:latin typeface="Public Sans" pitchFamily="34" charset="0"/>
+                <a:ea typeface="Public Sans" pitchFamily="34" charset="-122"/>
+                <a:cs typeface="Public Sans" pitchFamily="34" charset="-120"/>
               </a:rPr>
               <a:t>Quantinvo, par Devkaylab. L’outil d’inventaire pour le commerce.</a:t>
             </a:r>
@@ -8344,11 +8276,11 @@
             <a:r>
               <a:rPr lang="en-US" sz="1600" b="1" dirty="0">
                 <a:solidFill>
-                  <a:srgbClr val="0B0F19"/>
-                </a:solidFill>
-                <a:latin typeface="Sora" pitchFamily="34" charset="0"/>
-                <a:ea typeface="Sora" pitchFamily="34" charset="-122"/>
-                <a:cs typeface="Sora" pitchFamily="34" charset="-120"/>
+                  <a:srgbClr val="14181A"/>
+                </a:solidFill>
+                <a:latin typeface="Archivo" pitchFamily="34" charset="0"/>
+                <a:ea typeface="Archivo" pitchFamily="34" charset="-122"/>
+                <a:cs typeface="Archivo" pitchFamily="34" charset="-120"/>
               </a:rPr>
               <a:t>Quantinvo</a:t>
             </a:r>
@@ -8383,11 +8315,11 @@
             <a:r>
               <a:rPr lang="en-US" sz="1000" dirty="0">
                 <a:solidFill>
-                  <a:srgbClr val="5B6475"/>
-                </a:solidFill>
-                <a:latin typeface="Inter" pitchFamily="34" charset="0"/>
-                <a:ea typeface="Inter" pitchFamily="34" charset="-122"/>
-                <a:cs typeface="Inter" pitchFamily="34" charset="-120"/>
+                  <a:srgbClr val="575F5C"/>
+                </a:solidFill>
+                <a:latin typeface="Public Sans" pitchFamily="34" charset="0"/>
+                <a:ea typeface="Public Sans" pitchFamily="34" charset="-122"/>
+                <a:cs typeface="Public Sans" pitchFamily="34" charset="-120"/>
               </a:rPr>
               <a:t>Avant de commencer</a:t>
             </a:r>
@@ -8404,17 +8336,17 @@
         <p:spPr>
           <a:xfrm>
             <a:off x="731520" y="877824"/>
-            <a:ext cx="10725912" cy="25603"/>
+            <a:ext cx="10725912" cy="10973"/>
           </a:xfrm>
           <a:prstGeom prst="rect">
             <a:avLst/>
           </a:prstGeom>
           <a:solidFill>
-            <a:srgbClr val="38C9FF"/>
+            <a:srgbClr val="E2E5E1"/>
           </a:solidFill>
           <a:ln w="12700">
             <a:solidFill>
-              <a:srgbClr val="38C9FF"/>
+              <a:srgbClr val="E2E5E1"/>
             </a:solidFill>
             <a:prstDash val="solid"/>
           </a:ln>
@@ -8450,11 +8382,11 @@
             <a:r>
               <a:rPr lang="en-US" sz="2600" b="1" dirty="0">
                 <a:solidFill>
-                  <a:srgbClr val="4636B0"/>
-                </a:solidFill>
-                <a:latin typeface="Sora" pitchFamily="34" charset="0"/>
-                <a:ea typeface="Sora" pitchFamily="34" charset="-122"/>
-                <a:cs typeface="Sora" pitchFamily="34" charset="-120"/>
+                  <a:srgbClr val="14181A"/>
+                </a:solidFill>
+                <a:latin typeface="Archivo" pitchFamily="34" charset="0"/>
+                <a:ea typeface="Archivo" pitchFamily="34" charset="-122"/>
+                <a:cs typeface="Archivo" pitchFamily="34" charset="-120"/>
               </a:rPr>
               <a:t>Trois rôles. Chacun voit ce qui le concerne, et rien d’autre.</a:t>
             </a:r>
@@ -8492,11 +8424,11 @@
             <a:r>
               <a:rPr lang="en-US" sz="1200" i="1" dirty="0">
                 <a:solidFill>
-                  <a:srgbClr val="5B6475"/>
-                </a:solidFill>
-                <a:latin typeface="Inter" pitchFamily="34" charset="0"/>
-                <a:ea typeface="Inter" pitchFamily="34" charset="-122"/>
-                <a:cs typeface="Inter" pitchFamily="34" charset="-120"/>
+                  <a:srgbClr val="575F5C"/>
+                </a:solidFill>
+                <a:latin typeface="Public Sans" pitchFamily="34" charset="0"/>
+                <a:ea typeface="Public Sans" pitchFamily="34" charset="-122"/>
+                <a:cs typeface="Public Sans" pitchFamily="34" charset="-120"/>
               </a:rPr>
               <a:t>Le rôle est fixé à l'invitation. Un compteur n'a pas accès au site ; un superviseur a les deux.</a:t>
             </a:r>
@@ -8531,11 +8463,11 @@
             <a:r>
               <a:rPr lang="en-US" sz="1400" b="1" dirty="0">
                 <a:solidFill>
-                  <a:srgbClr val="0B0F19"/>
-                </a:solidFill>
-                <a:latin typeface="Sora" pitchFamily="34" charset="0"/>
-                <a:ea typeface="Sora" pitchFamily="34" charset="-122"/>
-                <a:cs typeface="Sora" pitchFamily="34" charset="-120"/>
+                  <a:srgbClr val="14181A"/>
+                </a:solidFill>
+                <a:latin typeface="Archivo" pitchFamily="34" charset="0"/>
+                <a:ea typeface="Archivo" pitchFamily="34" charset="-122"/>
+                <a:cs typeface="Archivo" pitchFamily="34" charset="-120"/>
               </a:rPr>
               <a:t>Administrateur d'entreprise</a:t>
             </a:r>
@@ -8570,11 +8502,11 @@
             <a:r>
               <a:rPr lang="en-US" sz="1050" dirty="0">
                 <a:solidFill>
-                  <a:srgbClr val="6366F1"/>
-                </a:solidFill>
-                <a:latin typeface="Inter" pitchFamily="34" charset="0"/>
-                <a:ea typeface="Inter" pitchFamily="34" charset="-122"/>
-                <a:cs typeface="Inter" pitchFamily="34" charset="-120"/>
+                  <a:srgbClr val="1E4D3B"/>
+                </a:solidFill>
+                <a:latin typeface="Public Sans" pitchFamily="34" charset="0"/>
+                <a:ea typeface="Public Sans" pitchFamily="34" charset="-122"/>
+                <a:cs typeface="Public Sans" pitchFamily="34" charset="-120"/>
               </a:rPr>
               <a:t>Sur le site</a:t>
             </a:r>
@@ -8612,11 +8544,11 @@
             <a:r>
               <a:rPr lang="en-US" sz="1200" dirty="0">
                 <a:solidFill>
-                  <a:srgbClr val="3D4556"/>
-                </a:solidFill>
-                <a:latin typeface="Inter" pitchFamily="34" charset="0"/>
-                <a:ea typeface="Inter" pitchFamily="34" charset="-122"/>
-                <a:cs typeface="Inter" pitchFamily="34" charset="-120"/>
+                  <a:srgbClr val="3A423F"/>
+                </a:solidFill>
+                <a:latin typeface="Public Sans" pitchFamily="34" charset="0"/>
+                <a:ea typeface="Public Sans" pitchFamily="34" charset="-122"/>
+                <a:cs typeface="Public Sans" pitchFamily="34" charset="-120"/>
               </a:rPr>
               <a:t>Il voit tous les magasins, toutes les personnes et tous les inventaires de son entreprise. Il invite les superviseurs, ajoute et retire des comptes, lit le journal. C'est lui qu'on appelle quand quelqu'un arrive ou part.</a:t>
             </a:r>
@@ -8641,7 +8573,7 @@
           <a:noFill/>
           <a:ln w="9525">
             <a:solidFill>
-              <a:srgbClr val="E3E6EE"/>
+              <a:srgbClr val="E2E5E1"/>
             </a:solidFill>
             <a:prstDash val="solid"/>
           </a:ln>
@@ -8674,11 +8606,11 @@
             <a:r>
               <a:rPr lang="en-US" sz="1400" b="1" dirty="0">
                 <a:solidFill>
-                  <a:srgbClr val="0B0F19"/>
-                </a:solidFill>
-                <a:latin typeface="Sora" pitchFamily="34" charset="0"/>
-                <a:ea typeface="Sora" pitchFamily="34" charset="-122"/>
-                <a:cs typeface="Sora" pitchFamily="34" charset="-120"/>
+                  <a:srgbClr val="14181A"/>
+                </a:solidFill>
+                <a:latin typeface="Archivo" pitchFamily="34" charset="0"/>
+                <a:ea typeface="Archivo" pitchFamily="34" charset="-122"/>
+                <a:cs typeface="Archivo" pitchFamily="34" charset="-120"/>
               </a:rPr>
               <a:t>Superviseur</a:t>
             </a:r>
@@ -8713,11 +8645,11 @@
             <a:r>
               <a:rPr lang="en-US" sz="1050" dirty="0">
                 <a:solidFill>
-                  <a:srgbClr val="6366F1"/>
-                </a:solidFill>
-                <a:latin typeface="Inter" pitchFamily="34" charset="0"/>
-                <a:ea typeface="Inter" pitchFamily="34" charset="-122"/>
-                <a:cs typeface="Inter" pitchFamily="34" charset="-120"/>
+                  <a:srgbClr val="1E4D3B"/>
+                </a:solidFill>
+                <a:latin typeface="Public Sans" pitchFamily="34" charset="0"/>
+                <a:ea typeface="Public Sans" pitchFamily="34" charset="-122"/>
+                <a:cs typeface="Public Sans" pitchFamily="34" charset="-120"/>
               </a:rPr>
               <a:t>Sur le site et dans l'application</a:t>
             </a:r>
@@ -8755,11 +8687,11 @@
             <a:r>
               <a:rPr lang="en-US" sz="1200" dirty="0">
                 <a:solidFill>
-                  <a:srgbClr val="3D4556"/>
-                </a:solidFill>
-                <a:latin typeface="Inter" pitchFamily="34" charset="0"/>
-                <a:ea typeface="Inter" pitchFamily="34" charset="-122"/>
-                <a:cs typeface="Inter" pitchFamily="34" charset="-120"/>
+                  <a:srgbClr val="3A423F"/>
+                </a:solidFill>
+                <a:latin typeface="Public Sans" pitchFamily="34" charset="0"/>
+                <a:ea typeface="Public Sans" pitchFamily="34" charset="-122"/>
+                <a:cs typeface="Public Sans" pitchFamily="34" charset="-120"/>
               </a:rPr>
               <a:t>Il prépare l'inventaire (balises, fichiers, équipe), le suit pendant qu'il se déroule, arbitre les écarts et clôture. Il peut compter lui-même. Ce guide lui consacre sept pages.</a:t>
             </a:r>
@@ -8784,7 +8716,7 @@
           <a:noFill/>
           <a:ln w="9525">
             <a:solidFill>
-              <a:srgbClr val="E3E6EE"/>
+              <a:srgbClr val="E2E5E1"/>
             </a:solidFill>
             <a:prstDash val="solid"/>
           </a:ln>
@@ -8817,11 +8749,11 @@
             <a:r>
               <a:rPr lang="en-US" sz="1400" b="1" dirty="0">
                 <a:solidFill>
-                  <a:srgbClr val="0B0F19"/>
-                </a:solidFill>
-                <a:latin typeface="Sora" pitchFamily="34" charset="0"/>
-                <a:ea typeface="Sora" pitchFamily="34" charset="-122"/>
-                <a:cs typeface="Sora" pitchFamily="34" charset="-120"/>
+                  <a:srgbClr val="14181A"/>
+                </a:solidFill>
+                <a:latin typeface="Archivo" pitchFamily="34" charset="0"/>
+                <a:ea typeface="Archivo" pitchFamily="34" charset="-122"/>
+                <a:cs typeface="Archivo" pitchFamily="34" charset="-120"/>
               </a:rPr>
               <a:t>Compteur</a:t>
             </a:r>
@@ -8856,11 +8788,11 @@
             <a:r>
               <a:rPr lang="en-US" sz="1050" dirty="0">
                 <a:solidFill>
-                  <a:srgbClr val="6366F1"/>
-                </a:solidFill>
-                <a:latin typeface="Inter" pitchFamily="34" charset="0"/>
-                <a:ea typeface="Inter" pitchFamily="34" charset="-122"/>
-                <a:cs typeface="Inter" pitchFamily="34" charset="-120"/>
+                  <a:srgbClr val="1E4D3B"/>
+                </a:solidFill>
+                <a:latin typeface="Public Sans" pitchFamily="34" charset="0"/>
+                <a:ea typeface="Public Sans" pitchFamily="34" charset="-122"/>
+                <a:cs typeface="Public Sans" pitchFamily="34" charset="-120"/>
               </a:rPr>
               <a:t>Dans l'application seulement</a:t>
             </a:r>
@@ -8898,11 +8830,11 @@
             <a:r>
               <a:rPr lang="en-US" sz="1200" dirty="0">
                 <a:solidFill>
-                  <a:srgbClr val="3D4556"/>
-                </a:solidFill>
-                <a:latin typeface="Inter" pitchFamily="34" charset="0"/>
-                <a:ea typeface="Inter" pitchFamily="34" charset="-122"/>
-                <a:cs typeface="Inter" pitchFamily="34" charset="-120"/>
+                  <a:srgbClr val="3A423F"/>
+                </a:solidFill>
+                <a:latin typeface="Public Sans" pitchFamily="34" charset="0"/>
+                <a:ea typeface="Public Sans" pitchFamily="34" charset="-122"/>
+                <a:cs typeface="Public Sans" pitchFamily="34" charset="-120"/>
               </a:rPr>
               <a:t>Il ouvre l'inventaire sur son téléphone, scanne la balise du rayon, puis les articles. Il peut aussi auditer, c'est-à-dire recompter une zone déjà comptée par quelqu'un d'autre. Cinq pages lui suffisent.</a:t>
             </a:r>
@@ -8927,7 +8859,7 @@
           <a:noFill/>
           <a:ln w="9525">
             <a:solidFill>
-              <a:srgbClr val="E3E6EE"/>
+              <a:srgbClr val="E2E5E1"/>
             </a:solidFill>
             <a:prstDash val="solid"/>
           </a:ln>
@@ -8960,11 +8892,11 @@
             <a:r>
               <a:rPr lang="en-US" sz="900" dirty="0">
                 <a:solidFill>
-                  <a:srgbClr val="5B6475"/>
-                </a:solidFill>
-                <a:latin typeface="Inter" pitchFamily="34" charset="0"/>
-                <a:ea typeface="Inter" pitchFamily="34" charset="-122"/>
-                <a:cs typeface="Inter" pitchFamily="34" charset="-120"/>
+                  <a:srgbClr val="575F5C"/>
+                </a:solidFill>
+                <a:latin typeface="Public Sans" pitchFamily="34" charset="0"/>
+                <a:ea typeface="Public Sans" pitchFamily="34" charset="-122"/>
+                <a:cs typeface="Public Sans" pitchFamily="34" charset="-120"/>
               </a:rPr>
               <a:t>Quantinvo · prise en main · août 2026</a:t>
             </a:r>
@@ -8999,11 +8931,11 @@
             <a:r>
               <a:rPr lang="en-US" sz="900" dirty="0">
                 <a:solidFill>
-                  <a:srgbClr val="5B6475"/>
-                </a:solidFill>
-                <a:latin typeface="Inter" pitchFamily="34" charset="0"/>
-                <a:ea typeface="Inter" pitchFamily="34" charset="-122"/>
-                <a:cs typeface="Inter" pitchFamily="34" charset="-120"/>
+                  <a:srgbClr val="575F5C"/>
+                </a:solidFill>
+                <a:latin typeface="Public Sans" pitchFamily="34" charset="0"/>
+                <a:ea typeface="Public Sans" pitchFamily="34" charset="-122"/>
+                <a:cs typeface="Public Sans" pitchFamily="34" charset="-120"/>
               </a:rPr>
               <a:t>2</a:t>
             </a:r>
@@ -9094,11 +9026,11 @@
             <a:r>
               <a:rPr lang="en-US" sz="1600" b="1" dirty="0">
                 <a:solidFill>
-                  <a:srgbClr val="0B0F19"/>
-                </a:solidFill>
-                <a:latin typeface="Sora" pitchFamily="34" charset="0"/>
-                <a:ea typeface="Sora" pitchFamily="34" charset="-122"/>
-                <a:cs typeface="Sora" pitchFamily="34" charset="-120"/>
+                  <a:srgbClr val="14181A"/>
+                </a:solidFill>
+                <a:latin typeface="Archivo" pitchFamily="34" charset="0"/>
+                <a:ea typeface="Archivo" pitchFamily="34" charset="-122"/>
+                <a:cs typeface="Archivo" pitchFamily="34" charset="-120"/>
               </a:rPr>
               <a:t>Quantinvo</a:t>
             </a:r>
@@ -9133,11 +9065,11 @@
             <a:r>
               <a:rPr lang="en-US" sz="1000" dirty="0">
                 <a:solidFill>
-                  <a:srgbClr val="5B6475"/>
-                </a:solidFill>
-                <a:latin typeface="Inter" pitchFamily="34" charset="0"/>
-                <a:ea typeface="Inter" pitchFamily="34" charset="-122"/>
-                <a:cs typeface="Inter" pitchFamily="34" charset="-120"/>
+                  <a:srgbClr val="575F5C"/>
+                </a:solidFill>
+                <a:latin typeface="Public Sans" pitchFamily="34" charset="0"/>
+                <a:ea typeface="Public Sans" pitchFamily="34" charset="-122"/>
+                <a:cs typeface="Public Sans" pitchFamily="34" charset="-120"/>
               </a:rPr>
               <a:t>Avant de commencer</a:t>
             </a:r>
@@ -9154,17 +9086,17 @@
         <p:spPr>
           <a:xfrm>
             <a:off x="731520" y="877824"/>
-            <a:ext cx="10725912" cy="25603"/>
+            <a:ext cx="10725912" cy="10973"/>
           </a:xfrm>
           <a:prstGeom prst="rect">
             <a:avLst/>
           </a:prstGeom>
           <a:solidFill>
-            <a:srgbClr val="38C9FF"/>
+            <a:srgbClr val="E2E5E1"/>
           </a:solidFill>
           <a:ln w="12700">
             <a:solidFill>
-              <a:srgbClr val="38C9FF"/>
+              <a:srgbClr val="E2E5E1"/>
             </a:solidFill>
             <a:prstDash val="solid"/>
           </a:ln>
@@ -9200,11 +9132,11 @@
             <a:r>
               <a:rPr lang="en-US" sz="2600" b="1" dirty="0">
                 <a:solidFill>
-                  <a:srgbClr val="4636B0"/>
-                </a:solidFill>
-                <a:latin typeface="Sora" pitchFamily="34" charset="0"/>
-                <a:ea typeface="Sora" pitchFamily="34" charset="-122"/>
-                <a:cs typeface="Sora" pitchFamily="34" charset="-120"/>
+                  <a:srgbClr val="14181A"/>
+                </a:solidFill>
+                <a:latin typeface="Archivo" pitchFamily="34" charset="0"/>
+                <a:ea typeface="Archivo" pitchFamily="34" charset="-122"/>
+                <a:cs typeface="Archivo" pitchFamily="34" charset="-120"/>
               </a:rPr>
               <a:t>Votre premier accès. Personne ne s’inscrit : on vous invite.</a:t>
             </a:r>
@@ -9242,11 +9174,11 @@
             <a:r>
               <a:rPr lang="en-US" sz="1350" b="1" dirty="0">
                 <a:solidFill>
-                  <a:srgbClr val="4636B0"/>
-                </a:solidFill>
-                <a:latin typeface="Sora" pitchFamily="34" charset="0"/>
-                <a:ea typeface="Sora" pitchFamily="34" charset="-122"/>
-                <a:cs typeface="Sora" pitchFamily="34" charset="-120"/>
+                  <a:srgbClr val="14181A"/>
+                </a:solidFill>
+                <a:latin typeface="Archivo" pitchFamily="34" charset="0"/>
+                <a:ea typeface="Archivo" pitchFamily="34" charset="-122"/>
+                <a:cs typeface="Archivo" pitchFamily="34" charset="-120"/>
               </a:rPr>
               <a:t>1 — L’e-mail, puis « Bienvenue »</a:t>
             </a:r>
@@ -9284,11 +9216,11 @@
             <a:r>
               <a:rPr lang="en-US" sz="1100" dirty="0">
                 <a:solidFill>
-                  <a:srgbClr val="3D4556"/>
-                </a:solidFill>
-                <a:latin typeface="Inter" pitchFamily="34" charset="0"/>
-                <a:ea typeface="Inter" pitchFamily="34" charset="-122"/>
-                <a:cs typeface="Inter" pitchFamily="34" charset="-120"/>
+                  <a:srgbClr val="3A423F"/>
+                </a:solidFill>
+                <a:latin typeface="Public Sans" pitchFamily="34" charset="0"/>
+                <a:ea typeface="Public Sans" pitchFamily="34" charset="-122"/>
+                <a:cs typeface="Public Sans" pitchFamily="34" charset="-120"/>
               </a:rPr>
               <a:t>Le lien est personnel. Vous vérifiez votre nom, puis choisissez un mot de passe de douze caractères.</a:t>
             </a:r>
@@ -9309,15 +9241,15 @@
           </a:xfrm>
           <a:prstGeom prst="roundRect">
             <a:avLst>
-              <a:gd name="adj" fmla="val 4023"/>
+              <a:gd name="adj" fmla="val 1149"/>
             </a:avLst>
           </a:prstGeom>
           <a:solidFill>
-            <a:srgbClr val="F4F5F9"/>
+            <a:srgbClr val="F2F3F1"/>
           </a:solidFill>
           <a:ln w="12700">
             <a:solidFill>
-              <a:srgbClr val="F4F5F9"/>
+              <a:srgbClr val="F2F3F1"/>
             </a:solidFill>
             <a:prstDash val="solid"/>
           </a:ln>
@@ -9377,11 +9309,11 @@
             <a:r>
               <a:rPr lang="en-US" sz="1350" b="1" dirty="0">
                 <a:solidFill>
-                  <a:srgbClr val="4636B0"/>
-                </a:solidFill>
-                <a:latin typeface="Sora" pitchFamily="34" charset="0"/>
-                <a:ea typeface="Sora" pitchFamily="34" charset="-122"/>
-                <a:cs typeface="Sora" pitchFamily="34" charset="-120"/>
+                  <a:srgbClr val="14181A"/>
+                </a:solidFill>
+                <a:latin typeface="Archivo" pitchFamily="34" charset="0"/>
+                <a:ea typeface="Archivo" pitchFamily="34" charset="-122"/>
+                <a:cs typeface="Archivo" pitchFamily="34" charset="-120"/>
               </a:rPr>
               <a:t>2 — L’application se connecte</a:t>
             </a:r>
@@ -9419,11 +9351,11 @@
             <a:r>
               <a:rPr lang="en-US" sz="1100" dirty="0">
                 <a:solidFill>
-                  <a:srgbClr val="3D4556"/>
-                </a:solidFill>
-                <a:latin typeface="Inter" pitchFamily="34" charset="0"/>
-                <a:ea typeface="Inter" pitchFamily="34" charset="-122"/>
-                <a:cs typeface="Inter" pitchFamily="34" charset="-120"/>
+                  <a:srgbClr val="3A423F"/>
+                </a:solidFill>
+                <a:latin typeface="Public Sans" pitchFamily="34" charset="0"/>
+                <a:ea typeface="Public Sans" pitchFamily="34" charset="-122"/>
+                <a:cs typeface="Public Sans" pitchFamily="34" charset="-120"/>
               </a:rPr>
               <a:t>Elle arrive par le catalogue de votre entreprise. Adresse e-mail et mot de passe, rien d'autre.</a:t>
             </a:r>
@@ -9444,15 +9376,15 @@
           </a:xfrm>
           <a:prstGeom prst="roundRect">
             <a:avLst>
-              <a:gd name="adj" fmla="val 4023"/>
+              <a:gd name="adj" fmla="val 1149"/>
             </a:avLst>
           </a:prstGeom>
           <a:solidFill>
-            <a:srgbClr val="F4F5F9"/>
+            <a:srgbClr val="F2F3F1"/>
           </a:solidFill>
           <a:ln w="12700">
             <a:solidFill>
-              <a:srgbClr val="F4F5F9"/>
+              <a:srgbClr val="F2F3F1"/>
             </a:solidFill>
             <a:prstDash val="solid"/>
           </a:ln>
@@ -9512,11 +9444,11 @@
             <a:r>
               <a:rPr lang="en-US" sz="1350" b="1" dirty="0">
                 <a:solidFill>
-                  <a:srgbClr val="4636B0"/>
-                </a:solidFill>
-                <a:latin typeface="Sora" pitchFamily="34" charset="0"/>
-                <a:ea typeface="Sora" pitchFamily="34" charset="-122"/>
-                <a:cs typeface="Sora" pitchFamily="34" charset="-120"/>
+                  <a:srgbClr val="14181A"/>
+                </a:solidFill>
+                <a:latin typeface="Archivo" pitchFamily="34" charset="0"/>
+                <a:ea typeface="Archivo" pitchFamily="34" charset="-122"/>
+                <a:cs typeface="Archivo" pitchFamily="34" charset="-120"/>
               </a:rPr>
               <a:t>3 — Si vous le voulez, un second code</a:t>
             </a:r>
@@ -9554,11 +9486,11 @@
             <a:r>
               <a:rPr lang="en-US" sz="1100" dirty="0">
                 <a:solidFill>
-                  <a:srgbClr val="3D4556"/>
-                </a:solidFill>
-                <a:latin typeface="Inter" pitchFamily="34" charset="0"/>
-                <a:ea typeface="Inter" pitchFamily="34" charset="-122"/>
-                <a:cs typeface="Inter" pitchFamily="34" charset="-120"/>
+                  <a:srgbClr val="3A423F"/>
+                </a:solidFill>
+                <a:latin typeface="Public Sans" pitchFamily="34" charset="0"/>
+                <a:ea typeface="Public Sans" pitchFamily="34" charset="-122"/>
+                <a:cs typeface="Public Sans" pitchFamily="34" charset="-120"/>
               </a:rPr>
               <a:t>« Mon compte » active la double authentification. Sans code de secours : voyez votre administrateur.</a:t>
             </a:r>
@@ -9579,15 +9511,15 @@
           </a:xfrm>
           <a:prstGeom prst="roundRect">
             <a:avLst>
-              <a:gd name="adj" fmla="val 4023"/>
+              <a:gd name="adj" fmla="val 1149"/>
             </a:avLst>
           </a:prstGeom>
           <a:solidFill>
-            <a:srgbClr val="F4F5F9"/>
+            <a:srgbClr val="F2F3F1"/>
           </a:solidFill>
           <a:ln w="12700">
             <a:solidFill>
-              <a:srgbClr val="F4F5F9"/>
+              <a:srgbClr val="F2F3F1"/>
             </a:solidFill>
             <a:prstDash val="solid"/>
           </a:ln>
@@ -9644,11 +9576,11 @@
             <a:r>
               <a:rPr lang="en-US" sz="900" dirty="0">
                 <a:solidFill>
-                  <a:srgbClr val="5B6475"/>
-                </a:solidFill>
-                <a:latin typeface="Inter" pitchFamily="34" charset="0"/>
-                <a:ea typeface="Inter" pitchFamily="34" charset="-122"/>
-                <a:cs typeface="Inter" pitchFamily="34" charset="-120"/>
+                  <a:srgbClr val="575F5C"/>
+                </a:solidFill>
+                <a:latin typeface="Public Sans" pitchFamily="34" charset="0"/>
+                <a:ea typeface="Public Sans" pitchFamily="34" charset="-122"/>
+                <a:cs typeface="Public Sans" pitchFamily="34" charset="-120"/>
               </a:rPr>
               <a:t>Quantinvo · prise en main · août 2026</a:t>
             </a:r>
@@ -9683,11 +9615,11 @@
             <a:r>
               <a:rPr lang="en-US" sz="900" dirty="0">
                 <a:solidFill>
-                  <a:srgbClr val="5B6475"/>
-                </a:solidFill>
-                <a:latin typeface="Inter" pitchFamily="34" charset="0"/>
-                <a:ea typeface="Inter" pitchFamily="34" charset="-122"/>
-                <a:cs typeface="Inter" pitchFamily="34" charset="-120"/>
+                  <a:srgbClr val="575F5C"/>
+                </a:solidFill>
+                <a:latin typeface="Public Sans" pitchFamily="34" charset="0"/>
+                <a:ea typeface="Public Sans" pitchFamily="34" charset="-122"/>
+                <a:cs typeface="Public Sans" pitchFamily="34" charset="-120"/>
               </a:rPr>
               <a:t>3</a:t>
             </a:r>
@@ -9778,11 +9710,11 @@
             <a:r>
               <a:rPr lang="en-US" sz="1600" b="1" dirty="0">
                 <a:solidFill>
-                  <a:srgbClr val="0B0F19"/>
-                </a:solidFill>
-                <a:latin typeface="Sora" pitchFamily="34" charset="0"/>
-                <a:ea typeface="Sora" pitchFamily="34" charset="-122"/>
-                <a:cs typeface="Sora" pitchFamily="34" charset="-120"/>
+                  <a:srgbClr val="14181A"/>
+                </a:solidFill>
+                <a:latin typeface="Archivo" pitchFamily="34" charset="0"/>
+                <a:ea typeface="Archivo" pitchFamily="34" charset="-122"/>
+                <a:cs typeface="Archivo" pitchFamily="34" charset="-120"/>
               </a:rPr>
               <a:t>Quantinvo</a:t>
             </a:r>
@@ -9817,11 +9749,11 @@
             <a:r>
               <a:rPr lang="en-US" sz="1000" dirty="0">
                 <a:solidFill>
-                  <a:srgbClr val="5B6475"/>
-                </a:solidFill>
-                <a:latin typeface="Inter" pitchFamily="34" charset="0"/>
-                <a:ea typeface="Inter" pitchFamily="34" charset="-122"/>
-                <a:cs typeface="Inter" pitchFamily="34" charset="-120"/>
+                  <a:srgbClr val="575F5C"/>
+                </a:solidFill>
+                <a:latin typeface="Public Sans" pitchFamily="34" charset="0"/>
+                <a:ea typeface="Public Sans" pitchFamily="34" charset="-122"/>
+                <a:cs typeface="Public Sans" pitchFamily="34" charset="-120"/>
               </a:rPr>
               <a:t>Superviseur</a:t>
             </a:r>
@@ -9838,17 +9770,17 @@
         <p:spPr>
           <a:xfrm>
             <a:off x="731520" y="877824"/>
-            <a:ext cx="10725912" cy="25603"/>
+            <a:ext cx="10725912" cy="10973"/>
           </a:xfrm>
           <a:prstGeom prst="rect">
             <a:avLst/>
           </a:prstGeom>
           <a:solidFill>
-            <a:srgbClr val="38C9FF"/>
+            <a:srgbClr val="E2E5E1"/>
           </a:solidFill>
           <a:ln w="12700">
             <a:solidFill>
-              <a:srgbClr val="38C9FF"/>
+              <a:srgbClr val="E2E5E1"/>
             </a:solidFill>
             <a:prstDash val="solid"/>
           </a:ln>
@@ -9881,11 +9813,11 @@
             <a:r>
               <a:rPr lang="en-US" sz="7200" b="1" dirty="0">
                 <a:solidFill>
-                  <a:srgbClr val="EEEEFC"/>
-                </a:solidFill>
-                <a:latin typeface="Sora" pitchFamily="34" charset="0"/>
-                <a:ea typeface="Sora" pitchFamily="34" charset="-122"/>
-                <a:cs typeface="Sora" pitchFamily="34" charset="-120"/>
+                  <a:srgbClr val="E7EDE9"/>
+                </a:solidFill>
+                <a:latin typeface="Archivo" pitchFamily="34" charset="0"/>
+                <a:ea typeface="Archivo" pitchFamily="34" charset="-122"/>
+                <a:cs typeface="Archivo" pitchFamily="34" charset="-120"/>
               </a:rPr>
               <a:t>1</a:t>
             </a:r>
@@ -9920,11 +9852,11 @@
             <a:r>
               <a:rPr lang="en-US" sz="3400" b="1" dirty="0">
                 <a:solidFill>
-                  <a:srgbClr val="4636B0"/>
-                </a:solidFill>
-                <a:latin typeface="Sora" pitchFamily="34" charset="0"/>
-                <a:ea typeface="Sora" pitchFamily="34" charset="-122"/>
-                <a:cs typeface="Sora" pitchFamily="34" charset="-120"/>
+                  <a:srgbClr val="14181A"/>
+                </a:solidFill>
+                <a:latin typeface="Archivo" pitchFamily="34" charset="0"/>
+                <a:ea typeface="Archivo" pitchFamily="34" charset="-122"/>
+                <a:cs typeface="Archivo" pitchFamily="34" charset="-120"/>
               </a:rPr>
               <a:t>Préparer et piloter</a:t>
             </a:r>
@@ -9962,11 +9894,11 @@
             <a:r>
               <a:rPr lang="en-US" sz="1400" dirty="0">
                 <a:solidFill>
-                  <a:srgbClr val="3D4556"/>
-                </a:solidFill>
-                <a:latin typeface="Inter" pitchFamily="34" charset="0"/>
-                <a:ea typeface="Inter" pitchFamily="34" charset="-122"/>
-                <a:cs typeface="Inter" pitchFamily="34" charset="-120"/>
+                  <a:srgbClr val="3A423F"/>
+                </a:solidFill>
+                <a:latin typeface="Public Sans" pitchFamily="34" charset="0"/>
+                <a:ea typeface="Public Sans" pitchFamily="34" charset="-122"/>
+                <a:cs typeface="Public Sans" pitchFamily="34" charset="-120"/>
               </a:rPr>
               <a:t>La partie du superviseur. Une fois pour toutes : les balises et l'équipe. Puis, à chaque inventaire : le créer, importer les fichiers, suivre, arbitrer, clôturer.</a:t>
             </a:r>
@@ -10001,11 +9933,11 @@
             <a:r>
               <a:rPr lang="en-US" sz="900" dirty="0">
                 <a:solidFill>
-                  <a:srgbClr val="5B6475"/>
-                </a:solidFill>
-                <a:latin typeface="Inter" pitchFamily="34" charset="0"/>
-                <a:ea typeface="Inter" pitchFamily="34" charset="-122"/>
-                <a:cs typeface="Inter" pitchFamily="34" charset="-120"/>
+                  <a:srgbClr val="575F5C"/>
+                </a:solidFill>
+                <a:latin typeface="Public Sans" pitchFamily="34" charset="0"/>
+                <a:ea typeface="Public Sans" pitchFamily="34" charset="-122"/>
+                <a:cs typeface="Public Sans" pitchFamily="34" charset="-120"/>
               </a:rPr>
               <a:t>Quantinvo · prise en main · août 2026</a:t>
             </a:r>
@@ -10040,11 +9972,11 @@
             <a:r>
               <a:rPr lang="en-US" sz="900" dirty="0">
                 <a:solidFill>
-                  <a:srgbClr val="5B6475"/>
-                </a:solidFill>
-                <a:latin typeface="Inter" pitchFamily="34" charset="0"/>
-                <a:ea typeface="Inter" pitchFamily="34" charset="-122"/>
-                <a:cs typeface="Inter" pitchFamily="34" charset="-120"/>
+                  <a:srgbClr val="575F5C"/>
+                </a:solidFill>
+                <a:latin typeface="Public Sans" pitchFamily="34" charset="0"/>
+                <a:ea typeface="Public Sans" pitchFamily="34" charset="-122"/>
+                <a:cs typeface="Public Sans" pitchFamily="34" charset="-120"/>
               </a:rPr>
               <a:t>4</a:t>
             </a:r>
@@ -10135,11 +10067,11 @@
             <a:r>
               <a:rPr lang="en-US" sz="1600" b="1" dirty="0">
                 <a:solidFill>
-                  <a:srgbClr val="0B0F19"/>
-                </a:solidFill>
-                <a:latin typeface="Sora" pitchFamily="34" charset="0"/>
-                <a:ea typeface="Sora" pitchFamily="34" charset="-122"/>
-                <a:cs typeface="Sora" pitchFamily="34" charset="-120"/>
+                  <a:srgbClr val="14181A"/>
+                </a:solidFill>
+                <a:latin typeface="Archivo" pitchFamily="34" charset="0"/>
+                <a:ea typeface="Archivo" pitchFamily="34" charset="-122"/>
+                <a:cs typeface="Archivo" pitchFamily="34" charset="-120"/>
               </a:rPr>
               <a:t>Quantinvo</a:t>
             </a:r>
@@ -10174,11 +10106,11 @@
             <a:r>
               <a:rPr lang="en-US" sz="1000" dirty="0">
                 <a:solidFill>
-                  <a:srgbClr val="5B6475"/>
-                </a:solidFill>
-                <a:latin typeface="Inter" pitchFamily="34" charset="0"/>
-                <a:ea typeface="Inter" pitchFamily="34" charset="-122"/>
-                <a:cs typeface="Inter" pitchFamily="34" charset="-120"/>
+                  <a:srgbClr val="575F5C"/>
+                </a:solidFill>
+                <a:latin typeface="Public Sans" pitchFamily="34" charset="0"/>
+                <a:ea typeface="Public Sans" pitchFamily="34" charset="-122"/>
+                <a:cs typeface="Public Sans" pitchFamily="34" charset="-120"/>
               </a:rPr>
               <a:t>Superviseur · une fois pour toutes</a:t>
             </a:r>
@@ -10195,17 +10127,17 @@
         <p:spPr>
           <a:xfrm>
             <a:off x="731520" y="877824"/>
-            <a:ext cx="10725912" cy="25603"/>
+            <a:ext cx="10725912" cy="10973"/>
           </a:xfrm>
           <a:prstGeom prst="rect">
             <a:avLst/>
           </a:prstGeom>
           <a:solidFill>
-            <a:srgbClr val="38C9FF"/>
+            <a:srgbClr val="E2E5E1"/>
           </a:solidFill>
           <a:ln w="12700">
             <a:solidFill>
-              <a:srgbClr val="38C9FF"/>
+              <a:srgbClr val="E2E5E1"/>
             </a:solidFill>
             <a:prstDash val="solid"/>
           </a:ln>
@@ -10241,11 +10173,11 @@
             <a:r>
               <a:rPr lang="en-US" sz="2600" b="1" dirty="0">
                 <a:solidFill>
-                  <a:srgbClr val="4636B0"/>
-                </a:solidFill>
-                <a:latin typeface="Sora" pitchFamily="34" charset="0"/>
-                <a:ea typeface="Sora" pitchFamily="34" charset="-122"/>
-                <a:cs typeface="Sora" pitchFamily="34" charset="-120"/>
+                  <a:srgbClr val="14181A"/>
+                </a:solidFill>
+                <a:latin typeface="Archivo" pitchFamily="34" charset="0"/>
+                <a:ea typeface="Archivo" pitchFamily="34" charset="-122"/>
+                <a:cs typeface="Archivo" pitchFamily="34" charset="-120"/>
               </a:rPr>
               <a:t>Deux choses à faire une seule fois : les balises, l’équipe.</a:t>
             </a:r>
@@ -10283,11 +10215,11 @@
             <a:r>
               <a:rPr lang="en-US" sz="1350" b="1" dirty="0">
                 <a:solidFill>
-                  <a:srgbClr val="4636B0"/>
-                </a:solidFill>
-                <a:latin typeface="Sora" pitchFamily="34" charset="0"/>
-                <a:ea typeface="Sora" pitchFamily="34" charset="-122"/>
-                <a:cs typeface="Sora" pitchFamily="34" charset="-120"/>
+                  <a:srgbClr val="14181A"/>
+                </a:solidFill>
+                <a:latin typeface="Archivo" pitchFamily="34" charset="0"/>
+                <a:ea typeface="Archivo" pitchFamily="34" charset="-122"/>
+                <a:cs typeface="Archivo" pitchFamily="34" charset="-120"/>
               </a:rPr>
               <a:t>La boîte à outils</a:t>
             </a:r>
@@ -10325,11 +10257,11 @@
             <a:r>
               <a:rPr lang="en-US" sz="1100" dirty="0">
                 <a:solidFill>
-                  <a:srgbClr val="3D4556"/>
-                </a:solidFill>
-                <a:latin typeface="Inter" pitchFamily="34" charset="0"/>
-                <a:ea typeface="Inter" pitchFamily="34" charset="-122"/>
-                <a:cs typeface="Inter" pitchFamily="34" charset="-120"/>
+                  <a:srgbClr val="3A423F"/>
+                </a:solidFill>
+                <a:latin typeface="Public Sans" pitchFamily="34" charset="0"/>
+                <a:ea typeface="Public Sans" pitchFamily="34" charset="-122"/>
+                <a:cs typeface="Public Sans" pitchFamily="34" charset="-120"/>
               </a:rPr>
               <a:t>Imprimez, collez, indiquez. C'est de là que part la planche d'étiquettes.</a:t>
             </a:r>
@@ -10350,15 +10282,15 @@
           </a:xfrm>
           <a:prstGeom prst="roundRect">
             <a:avLst>
-              <a:gd name="adj" fmla="val 4023"/>
+              <a:gd name="adj" fmla="val 1149"/>
             </a:avLst>
           </a:prstGeom>
           <a:solidFill>
-            <a:srgbClr val="F4F5F9"/>
+            <a:srgbClr val="F2F3F1"/>
           </a:solidFill>
           <a:ln w="12700">
             <a:solidFill>
-              <a:srgbClr val="F4F5F9"/>
+              <a:srgbClr val="F2F3F1"/>
             </a:solidFill>
             <a:prstDash val="solid"/>
           </a:ln>
@@ -10418,11 +10350,11 @@
             <a:r>
               <a:rPr lang="en-US" sz="1350" b="1" dirty="0">
                 <a:solidFill>
-                  <a:srgbClr val="4636B0"/>
-                </a:solidFill>
-                <a:latin typeface="Sora" pitchFamily="34" charset="0"/>
-                <a:ea typeface="Sora" pitchFamily="34" charset="-122"/>
-                <a:cs typeface="Sora" pitchFamily="34" charset="-120"/>
+                  <a:srgbClr val="14181A"/>
+                </a:solidFill>
+                <a:latin typeface="Archivo" pitchFamily="34" charset="0"/>
+                <a:ea typeface="Archivo" pitchFamily="34" charset="-122"/>
+                <a:cs typeface="Archivo" pitchFamily="34" charset="-120"/>
               </a:rPr>
               <a:t>Choisir la série, imprimer</a:t>
             </a:r>
@@ -10460,11 +10392,11 @@
             <a:r>
               <a:rPr lang="en-US" sz="1100" dirty="0">
                 <a:solidFill>
-                  <a:srgbClr val="3D4556"/>
-                </a:solidFill>
-                <a:latin typeface="Inter" pitchFamily="34" charset="0"/>
-                <a:ea typeface="Inter" pitchFamily="34" charset="-122"/>
-                <a:cs typeface="Inter" pitchFamily="34" charset="-120"/>
+                  <a:srgbClr val="3A423F"/>
+                </a:solidFill>
+                <a:latin typeface="Public Sans" pitchFamily="34" charset="0"/>
+                <a:ea typeface="Public Sans" pitchFamily="34" charset="-122"/>
+                <a:cs typeface="Public Sans" pitchFamily="34" charset="-120"/>
               </a:rPr>
               <a:t>Numérotation, premier numéro, nombre. Le PDF sort sur planche Avery L7160, 21 par page.</a:t>
             </a:r>
@@ -10485,15 +10417,15 @@
           </a:xfrm>
           <a:prstGeom prst="roundRect">
             <a:avLst>
-              <a:gd name="adj" fmla="val 4023"/>
+              <a:gd name="adj" fmla="val 1149"/>
             </a:avLst>
           </a:prstGeom>
           <a:solidFill>
-            <a:srgbClr val="F4F5F9"/>
+            <a:srgbClr val="F2F3F1"/>
           </a:solidFill>
           <a:ln w="12700">
             <a:solidFill>
-              <a:srgbClr val="F4F5F9"/>
+              <a:srgbClr val="F2F3F1"/>
             </a:solidFill>
             <a:prstDash val="solid"/>
           </a:ln>
@@ -10553,11 +10485,11 @@
             <a:r>
               <a:rPr lang="en-US" sz="1350" b="1" dirty="0">
                 <a:solidFill>
-                  <a:srgbClr val="4636B0"/>
-                </a:solidFill>
-                <a:latin typeface="Sora" pitchFamily="34" charset="0"/>
-                <a:ea typeface="Sora" pitchFamily="34" charset="-122"/>
-                <a:cs typeface="Sora" pitchFamily="34" charset="-120"/>
+                  <a:srgbClr val="14181A"/>
+                </a:solidFill>
+                <a:latin typeface="Archivo" pitchFamily="34" charset="0"/>
+                <a:ea typeface="Archivo" pitchFamily="34" charset="-122"/>
+                <a:cs typeface="Archivo" pitchFamily="34" charset="-120"/>
               </a:rPr>
               <a:t>Constituer son équipe</a:t>
             </a:r>
@@ -10595,11 +10527,11 @@
             <a:r>
               <a:rPr lang="en-US" sz="1100" dirty="0">
                 <a:solidFill>
-                  <a:srgbClr val="3D4556"/>
-                </a:solidFill>
-                <a:latin typeface="Inter" pitchFamily="34" charset="0"/>
-                <a:ea typeface="Inter" pitchFamily="34" charset="-122"/>
-                <a:cs typeface="Inter" pitchFamily="34" charset="-120"/>
+                  <a:srgbClr val="3A423F"/>
+                </a:solidFill>
+                <a:latin typeface="Public Sans" pitchFamily="34" charset="0"/>
+                <a:ea typeface="Public Sans" pitchFamily="34" charset="-122"/>
+                <a:cs typeface="Public Sans" pitchFamily="34" charset="-120"/>
               </a:rPr>
               <a:t>Prénom, nom, adresse. L'invitation part tout de suite.</a:t>
             </a:r>
@@ -10620,15 +10552,15 @@
           </a:xfrm>
           <a:prstGeom prst="roundRect">
             <a:avLst>
-              <a:gd name="adj" fmla="val 4023"/>
+              <a:gd name="adj" fmla="val 1149"/>
             </a:avLst>
           </a:prstGeom>
           <a:solidFill>
-            <a:srgbClr val="F4F5F9"/>
+            <a:srgbClr val="F2F3F1"/>
           </a:solidFill>
           <a:ln w="12700">
             <a:solidFill>
-              <a:srgbClr val="F4F5F9"/>
+              <a:srgbClr val="F2F3F1"/>
             </a:solidFill>
             <a:prstDash val="solid"/>
           </a:ln>
@@ -10685,11 +10617,11 @@
             <a:r>
               <a:rPr lang="en-US" sz="900" dirty="0">
                 <a:solidFill>
-                  <a:srgbClr val="5B6475"/>
-                </a:solidFill>
-                <a:latin typeface="Inter" pitchFamily="34" charset="0"/>
-                <a:ea typeface="Inter" pitchFamily="34" charset="-122"/>
-                <a:cs typeface="Inter" pitchFamily="34" charset="-120"/>
+                  <a:srgbClr val="575F5C"/>
+                </a:solidFill>
+                <a:latin typeface="Public Sans" pitchFamily="34" charset="0"/>
+                <a:ea typeface="Public Sans" pitchFamily="34" charset="-122"/>
+                <a:cs typeface="Public Sans" pitchFamily="34" charset="-120"/>
               </a:rPr>
               <a:t>Quantinvo · prise en main · août 2026</a:t>
             </a:r>
@@ -10724,11 +10656,11 @@
             <a:r>
               <a:rPr lang="en-US" sz="900" dirty="0">
                 <a:solidFill>
-                  <a:srgbClr val="5B6475"/>
-                </a:solidFill>
-                <a:latin typeface="Inter" pitchFamily="34" charset="0"/>
-                <a:ea typeface="Inter" pitchFamily="34" charset="-122"/>
-                <a:cs typeface="Inter" pitchFamily="34" charset="-120"/>
+                  <a:srgbClr val="575F5C"/>
+                </a:solidFill>
+                <a:latin typeface="Public Sans" pitchFamily="34" charset="0"/>
+                <a:ea typeface="Public Sans" pitchFamily="34" charset="-122"/>
+                <a:cs typeface="Public Sans" pitchFamily="34" charset="-120"/>
               </a:rPr>
               <a:t>5</a:t>
             </a:r>
@@ -10819,11 +10751,11 @@
             <a:r>
               <a:rPr lang="en-US" sz="1600" b="1" dirty="0">
                 <a:solidFill>
-                  <a:srgbClr val="0B0F19"/>
-                </a:solidFill>
-                <a:latin typeface="Sora" pitchFamily="34" charset="0"/>
-                <a:ea typeface="Sora" pitchFamily="34" charset="-122"/>
-                <a:cs typeface="Sora" pitchFamily="34" charset="-120"/>
+                  <a:srgbClr val="14181A"/>
+                </a:solidFill>
+                <a:latin typeface="Archivo" pitchFamily="34" charset="0"/>
+                <a:ea typeface="Archivo" pitchFamily="34" charset="-122"/>
+                <a:cs typeface="Archivo" pitchFamily="34" charset="-120"/>
               </a:rPr>
               <a:t>Quantinvo</a:t>
             </a:r>
@@ -10858,11 +10790,11 @@
             <a:r>
               <a:rPr lang="en-US" sz="1000" dirty="0">
                 <a:solidFill>
-                  <a:srgbClr val="5B6475"/>
-                </a:solidFill>
-                <a:latin typeface="Inter" pitchFamily="34" charset="0"/>
-                <a:ea typeface="Inter" pitchFamily="34" charset="-122"/>
-                <a:cs typeface="Inter" pitchFamily="34" charset="-120"/>
+                  <a:srgbClr val="575F5C"/>
+                </a:solidFill>
+                <a:latin typeface="Public Sans" pitchFamily="34" charset="0"/>
+                <a:ea typeface="Public Sans" pitchFamily="34" charset="-122"/>
+                <a:cs typeface="Public Sans" pitchFamily="34" charset="-120"/>
               </a:rPr>
               <a:t>Superviseur · une fois pour toutes</a:t>
             </a:r>
@@ -10879,17 +10811,17 @@
         <p:spPr>
           <a:xfrm>
             <a:off x="731520" y="877824"/>
-            <a:ext cx="10725912" cy="25603"/>
+            <a:ext cx="10725912" cy="10973"/>
           </a:xfrm>
           <a:prstGeom prst="rect">
             <a:avLst/>
           </a:prstGeom>
           <a:solidFill>
-            <a:srgbClr val="38C9FF"/>
+            <a:srgbClr val="E2E5E1"/>
           </a:solidFill>
           <a:ln w="12700">
             <a:solidFill>
-              <a:srgbClr val="38C9FF"/>
+              <a:srgbClr val="E2E5E1"/>
             </a:solidFill>
             <a:prstDash val="solid"/>
           </a:ln>
@@ -10925,11 +10857,11 @@
             <a:r>
               <a:rPr lang="en-US" sz="2600" b="1" dirty="0">
                 <a:solidFill>
-                  <a:srgbClr val="4636B0"/>
-                </a:solidFill>
-                <a:latin typeface="Sora" pitchFamily="34" charset="0"/>
-                <a:ea typeface="Sora" pitchFamily="34" charset="-122"/>
-                <a:cs typeface="Sora" pitchFamily="34" charset="-120"/>
+                  <a:srgbClr val="14181A"/>
+                </a:solidFill>
+                <a:latin typeface="Archivo" pitchFamily="34" charset="0"/>
+                <a:ea typeface="Archivo" pitchFamily="34" charset="-122"/>
+                <a:cs typeface="Archivo" pitchFamily="34" charset="-120"/>
               </a:rPr>
               <a:t>Où coller les balises, et combien.</a:t>
             </a:r>
@@ -10970,11 +10902,11 @@
             <a:r>
               <a:rPr lang="en-US" sz="1200" b="1" dirty="0">
                 <a:solidFill>
-                  <a:srgbClr val="0B0F19"/>
-                </a:solidFill>
-                <a:latin typeface="Inter" pitchFamily="34" charset="0"/>
-                <a:ea typeface="Inter" pitchFamily="34" charset="-122"/>
-                <a:cs typeface="Inter" pitchFamily="34" charset="-120"/>
+                  <a:srgbClr val="14181A"/>
+                </a:solidFill>
+                <a:latin typeface="Public Sans" pitchFamily="34" charset="0"/>
+                <a:ea typeface="Public Sans" pitchFamily="34" charset="-122"/>
+                <a:cs typeface="Public Sans" pitchFamily="34" charset="-120"/>
               </a:rPr>
               <a:t>Une par rayon, </a:t>
             </a:r>
@@ -10990,11 +10922,11 @@
             <a:r>
               <a:rPr lang="en-US" sz="1200" dirty="0">
                 <a:solidFill>
-                  <a:srgbClr val="3D4556"/>
-                </a:solidFill>
-                <a:latin typeface="Inter" pitchFamily="34" charset="0"/>
-                <a:ea typeface="Inter" pitchFamily="34" charset="-122"/>
-                <a:cs typeface="Inter" pitchFamily="34" charset="-120"/>
+                  <a:srgbClr val="3A423F"/>
+                </a:solidFill>
+                <a:latin typeface="Public Sans" pitchFamily="34" charset="0"/>
+                <a:ea typeface="Public Sans" pitchFamily="34" charset="-122"/>
+                <a:cs typeface="Public Sans" pitchFamily="34" charset="-120"/>
               </a:rPr>
               <a:t>à hauteur d'yeux, au début du linéaire. Dans une réserve, une par travée ou par étagère.</a:t>
             </a:r>
@@ -11013,11 +10945,11 @@
             <a:r>
               <a:rPr lang="en-US" sz="1200" b="1" dirty="0">
                 <a:solidFill>
-                  <a:srgbClr val="0B0F19"/>
-                </a:solidFill>
-                <a:latin typeface="Inter" pitchFamily="34" charset="0"/>
-                <a:ea typeface="Inter" pitchFamily="34" charset="-122"/>
-                <a:cs typeface="Inter" pitchFamily="34" charset="-120"/>
+                  <a:srgbClr val="14181A"/>
+                </a:solidFill>
+                <a:latin typeface="Public Sans" pitchFamily="34" charset="0"/>
+                <a:ea typeface="Public Sans" pitchFamily="34" charset="-122"/>
+                <a:cs typeface="Public Sans" pitchFamily="34" charset="-120"/>
               </a:rPr>
               <a:t>Dans l’ordre des numéros. </a:t>
             </a:r>
@@ -11033,11 +10965,11 @@
             <a:r>
               <a:rPr lang="en-US" sz="1200" dirty="0">
                 <a:solidFill>
-                  <a:srgbClr val="3D4556"/>
-                </a:solidFill>
-                <a:latin typeface="Inter" pitchFamily="34" charset="0"/>
-                <a:ea typeface="Inter" pitchFamily="34" charset="-122"/>
-                <a:cs typeface="Inter" pitchFamily="34" charset="-120"/>
+                  <a:srgbClr val="3A423F"/>
+                </a:solidFill>
+                <a:latin typeface="Public Sans" pitchFamily="34" charset="0"/>
+                <a:ea typeface="Public Sans" pitchFamily="34" charset="-122"/>
+                <a:cs typeface="Public Sans" pitchFamily="34" charset="-120"/>
               </a:rPr>
               <a:t>C'est ce qui rend les plages lisibles : « Textile femme, 1 à 12 », « Réserve, 25 à 36 ».</a:t>
             </a:r>
@@ -11056,11 +10988,11 @@
             <a:r>
               <a:rPr lang="en-US" sz="1200" b="1" dirty="0">
                 <a:solidFill>
-                  <a:srgbClr val="0B0F19"/>
-                </a:solidFill>
-                <a:latin typeface="Inter" pitchFamily="34" charset="0"/>
-                <a:ea typeface="Inter" pitchFamily="34" charset="-122"/>
-                <a:cs typeface="Inter" pitchFamily="34" charset="-120"/>
+                  <a:srgbClr val="14181A"/>
+                </a:solidFill>
+                <a:latin typeface="Public Sans" pitchFamily="34" charset="0"/>
+                <a:ea typeface="Public Sans" pitchFamily="34" charset="-122"/>
+                <a:cs typeface="Public Sans" pitchFamily="34" charset="-120"/>
               </a:rPr>
               <a:t>Trop plutôt que pas assez. </a:t>
             </a:r>
@@ -11076,11 +11008,11 @@
             <a:r>
               <a:rPr lang="en-US" sz="1200" dirty="0">
                 <a:solidFill>
-                  <a:srgbClr val="3D4556"/>
-                </a:solidFill>
-                <a:latin typeface="Inter" pitchFamily="34" charset="0"/>
-                <a:ea typeface="Inter" pitchFamily="34" charset="-122"/>
-                <a:cs typeface="Inter" pitchFamily="34" charset="-120"/>
+                  <a:srgbClr val="3A423F"/>
+                </a:solidFill>
+                <a:latin typeface="Public Sans" pitchFamily="34" charset="0"/>
+                <a:ea typeface="Public Sans" pitchFamily="34" charset="-122"/>
+                <a:cs typeface="Public Sans" pitchFamily="34" charset="-120"/>
               </a:rPr>
               <a:t>Une zone trop grande se compte mal à deux, et l'audit devient un second inventaire complet. Une balise coûte une étiquette.</a:t>
             </a:r>
@@ -11099,11 +11031,11 @@
             <a:r>
               <a:rPr lang="en-US" sz="1200" b="1" dirty="0">
                 <a:solidFill>
-                  <a:srgbClr val="0B0F19"/>
-                </a:solidFill>
-                <a:latin typeface="Inter" pitchFamily="34" charset="0"/>
-                <a:ea typeface="Inter" pitchFamily="34" charset="-122"/>
-                <a:cs typeface="Inter" pitchFamily="34" charset="-120"/>
+                  <a:srgbClr val="14181A"/>
+                </a:solidFill>
+                <a:latin typeface="Public Sans" pitchFamily="34" charset="0"/>
+                <a:ea typeface="Public Sans" pitchFamily="34" charset="-122"/>
+                <a:cs typeface="Public Sans" pitchFamily="34" charset="-120"/>
               </a:rPr>
               <a:t>Elles restent en place. </a:t>
             </a:r>
@@ -11119,11 +11051,11 @@
             <a:r>
               <a:rPr lang="en-US" sz="1200" dirty="0">
                 <a:solidFill>
-                  <a:srgbClr val="3D4556"/>
-                </a:solidFill>
-                <a:latin typeface="Inter" pitchFamily="34" charset="0"/>
-                <a:ea typeface="Inter" pitchFamily="34" charset="-122"/>
-                <a:cs typeface="Inter" pitchFamily="34" charset="-120"/>
+                  <a:srgbClr val="3A423F"/>
+                </a:solidFill>
+                <a:latin typeface="Public Sans" pitchFamily="34" charset="0"/>
+                <a:ea typeface="Public Sans" pitchFamily="34" charset="-122"/>
+                <a:cs typeface="Public Sans" pitchFamily="34" charset="-120"/>
               </a:rPr>
               <a:t>Elles ne portent ni date ni inventaire : la même planche sert en janvier et en juin. On ne réimprime que pour agrandir la série.</a:t>
             </a:r>
@@ -11144,7 +11076,7 @@
           </a:xfrm>
           <a:prstGeom prst="roundRect">
             <a:avLst>
-              <a:gd name="adj" fmla="val 2792"/>
+              <a:gd name="adj" fmla="val 1396"/>
             </a:avLst>
           </a:prstGeom>
           <a:solidFill>
@@ -11152,7 +11084,7 @@
           </a:solidFill>
           <a:ln w="12700">
             <a:solidFill>
-              <a:srgbClr val="E3E6EE"/>
+              <a:srgbClr val="E2E5E1"/>
             </a:solidFill>
             <a:prstDash val="solid"/>
           </a:ln>
@@ -11209,11 +11141,11 @@
             <a:r>
               <a:rPr lang="en-US" sz="1000" i="1" dirty="0">
                 <a:solidFill>
-                  <a:srgbClr val="5B6475"/>
-                </a:solidFill>
-                <a:latin typeface="Inter" pitchFamily="34" charset="0"/>
-                <a:ea typeface="Inter" pitchFamily="34" charset="-122"/>
-                <a:cs typeface="Inter" pitchFamily="34" charset="-120"/>
+                  <a:srgbClr val="575F5C"/>
+                </a:solidFill>
+                <a:latin typeface="Public Sans" pitchFamily="34" charset="0"/>
+                <a:ea typeface="Public Sans" pitchFamily="34" charset="-122"/>
+                <a:cs typeface="Public Sans" pitchFamily="34" charset="-120"/>
               </a:rPr>
               <a:t>Une fois collées et affectées, les balises deviennent l'avancement que le superviseur suit sur le site.</a:t>
             </a:r>
@@ -11248,11 +11180,11 @@
             <a:r>
               <a:rPr lang="en-US" sz="900" dirty="0">
                 <a:solidFill>
-                  <a:srgbClr val="5B6475"/>
-                </a:solidFill>
-                <a:latin typeface="Inter" pitchFamily="34" charset="0"/>
-                <a:ea typeface="Inter" pitchFamily="34" charset="-122"/>
-                <a:cs typeface="Inter" pitchFamily="34" charset="-120"/>
+                  <a:srgbClr val="575F5C"/>
+                </a:solidFill>
+                <a:latin typeface="Public Sans" pitchFamily="34" charset="0"/>
+                <a:ea typeface="Public Sans" pitchFamily="34" charset="-122"/>
+                <a:cs typeface="Public Sans" pitchFamily="34" charset="-120"/>
               </a:rPr>
               <a:t>Quantinvo · prise en main · août 2026</a:t>
             </a:r>
@@ -11287,11 +11219,11 @@
             <a:r>
               <a:rPr lang="en-US" sz="900" dirty="0">
                 <a:solidFill>
-                  <a:srgbClr val="5B6475"/>
-                </a:solidFill>
-                <a:latin typeface="Inter" pitchFamily="34" charset="0"/>
-                <a:ea typeface="Inter" pitchFamily="34" charset="-122"/>
-                <a:cs typeface="Inter" pitchFamily="34" charset="-120"/>
+                  <a:srgbClr val="575F5C"/>
+                </a:solidFill>
+                <a:latin typeface="Public Sans" pitchFamily="34" charset="0"/>
+                <a:ea typeface="Public Sans" pitchFamily="34" charset="-122"/>
+                <a:cs typeface="Public Sans" pitchFamily="34" charset="-120"/>
               </a:rPr>
               <a:t>6</a:t>
             </a:r>
@@ -11382,11 +11314,11 @@
             <a:r>
               <a:rPr lang="en-US" sz="1600" b="1" dirty="0">
                 <a:solidFill>
-                  <a:srgbClr val="0B0F19"/>
-                </a:solidFill>
-                <a:latin typeface="Sora" pitchFamily="34" charset="0"/>
-                <a:ea typeface="Sora" pitchFamily="34" charset="-122"/>
-                <a:cs typeface="Sora" pitchFamily="34" charset="-120"/>
+                  <a:srgbClr val="14181A"/>
+                </a:solidFill>
+                <a:latin typeface="Archivo" pitchFamily="34" charset="0"/>
+                <a:ea typeface="Archivo" pitchFamily="34" charset="-122"/>
+                <a:cs typeface="Archivo" pitchFamily="34" charset="-120"/>
               </a:rPr>
               <a:t>Quantinvo</a:t>
             </a:r>
@@ -11421,11 +11353,11 @@
             <a:r>
               <a:rPr lang="en-US" sz="1000" dirty="0">
                 <a:solidFill>
-                  <a:srgbClr val="5B6475"/>
-                </a:solidFill>
-                <a:latin typeface="Inter" pitchFamily="34" charset="0"/>
-                <a:ea typeface="Inter" pitchFamily="34" charset="-122"/>
-                <a:cs typeface="Inter" pitchFamily="34" charset="-120"/>
+                  <a:srgbClr val="575F5C"/>
+                </a:solidFill>
+                <a:latin typeface="Public Sans" pitchFamily="34" charset="0"/>
+                <a:ea typeface="Public Sans" pitchFamily="34" charset="-122"/>
+                <a:cs typeface="Public Sans" pitchFamily="34" charset="-120"/>
               </a:rPr>
               <a:t>Superviseur · à chaque inventaire</a:t>
             </a:r>
@@ -11442,17 +11374,17 @@
         <p:spPr>
           <a:xfrm>
             <a:off x="731520" y="877824"/>
-            <a:ext cx="10725912" cy="25603"/>
+            <a:ext cx="10725912" cy="10973"/>
           </a:xfrm>
           <a:prstGeom prst="rect">
             <a:avLst/>
           </a:prstGeom>
           <a:solidFill>
-            <a:srgbClr val="38C9FF"/>
+            <a:srgbClr val="E2E5E1"/>
           </a:solidFill>
           <a:ln w="12700">
             <a:solidFill>
-              <a:srgbClr val="38C9FF"/>
+              <a:srgbClr val="E2E5E1"/>
             </a:solidFill>
             <a:prstDash val="solid"/>
           </a:ln>
@@ -11488,11 +11420,11 @@
             <a:r>
               <a:rPr lang="en-US" sz="2600" b="1" dirty="0">
                 <a:solidFill>
-                  <a:srgbClr val="4636B0"/>
-                </a:solidFill>
-                <a:latin typeface="Sora" pitchFamily="34" charset="0"/>
-                <a:ea typeface="Sora" pitchFamily="34" charset="-122"/>
-                <a:cs typeface="Sora" pitchFamily="34" charset="-120"/>
+                  <a:srgbClr val="14181A"/>
+                </a:solidFill>
+                <a:latin typeface="Archivo" pitchFamily="34" charset="0"/>
+                <a:ea typeface="Archivo" pitchFamily="34" charset="-122"/>
+                <a:cs typeface="Archivo" pitchFamily="34" charset="-120"/>
               </a:rPr>
               <a:t>Créer un inventaire prend une minute. Le préparer, dix.</a:t>
             </a:r>
@@ -11530,11 +11462,11 @@
             <a:r>
               <a:rPr lang="en-US" sz="1350" b="1" dirty="0">
                 <a:solidFill>
-                  <a:srgbClr val="4636B0"/>
-                </a:solidFill>
-                <a:latin typeface="Sora" pitchFamily="34" charset="0"/>
-                <a:ea typeface="Sora" pitchFamily="34" charset="-122"/>
-                <a:cs typeface="Sora" pitchFamily="34" charset="-120"/>
+                  <a:srgbClr val="14181A"/>
+                </a:solidFill>
+                <a:latin typeface="Archivo" pitchFamily="34" charset="0"/>
+                <a:ea typeface="Archivo" pitchFamily="34" charset="-122"/>
+                <a:cs typeface="Archivo" pitchFamily="34" charset="-120"/>
               </a:rPr>
               <a:t>1 — L’inventaire</a:t>
             </a:r>
@@ -11572,11 +11504,11 @@
             <a:r>
               <a:rPr lang="en-US" sz="1100" dirty="0">
                 <a:solidFill>
-                  <a:srgbClr val="3D4556"/>
-                </a:solidFill>
-                <a:latin typeface="Inter" pitchFamily="34" charset="0"/>
-                <a:ea typeface="Inter" pitchFamily="34" charset="-122"/>
-                <a:cs typeface="Inter" pitchFamily="34" charset="-120"/>
+                  <a:srgbClr val="3A423F"/>
+                </a:solidFill>
+                <a:latin typeface="Public Sans" pitchFamily="34" charset="0"/>
+                <a:ea typeface="Public Sans" pitchFamily="34" charset="-122"/>
+                <a:cs typeface="Public Sans" pitchFamily="34" charset="-120"/>
               </a:rPr>
               <a:t>Un nom, un magasin, un code d'accès. « Utiliser des zones » reste activé : c'est ce qui permet les balises.</a:t>
             </a:r>
@@ -11597,15 +11529,15 @@
           </a:xfrm>
           <a:prstGeom prst="roundRect">
             <a:avLst>
-              <a:gd name="adj" fmla="val 4023"/>
+              <a:gd name="adj" fmla="val 1149"/>
             </a:avLst>
           </a:prstGeom>
           <a:solidFill>
-            <a:srgbClr val="F4F5F9"/>
+            <a:srgbClr val="F2F3F1"/>
           </a:solidFill>
           <a:ln w="12700">
             <a:solidFill>
-              <a:srgbClr val="F4F5F9"/>
+              <a:srgbClr val="F2F3F1"/>
             </a:solidFill>
             <a:prstDash val="solid"/>
           </a:ln>
@@ -11665,11 +11597,11 @@
             <a:r>
               <a:rPr lang="en-US" sz="1350" b="1" dirty="0">
                 <a:solidFill>
-                  <a:srgbClr val="4636B0"/>
-                </a:solidFill>
-                <a:latin typeface="Sora" pitchFamily="34" charset="0"/>
-                <a:ea typeface="Sora" pitchFamily="34" charset="-122"/>
-                <a:cs typeface="Sora" pitchFamily="34" charset="-120"/>
+                  <a:srgbClr val="14181A"/>
+                </a:solidFill>
+                <a:latin typeface="Archivo" pitchFamily="34" charset="0"/>
+                <a:ea typeface="Archivo" pitchFamily="34" charset="-122"/>
+                <a:cs typeface="Archivo" pitchFamily="34" charset="-120"/>
               </a:rPr>
               <a:t>2 — Les zones</a:t>
             </a:r>
@@ -11707,11 +11639,11 @@
             <a:r>
               <a:rPr lang="en-US" sz="1100" dirty="0">
                 <a:solidFill>
-                  <a:srgbClr val="3D4556"/>
-                </a:solidFill>
-                <a:latin typeface="Inter" pitchFamily="34" charset="0"/>
-                <a:ea typeface="Inter" pitchFamily="34" charset="-122"/>
-                <a:cs typeface="Inter" pitchFamily="34" charset="-120"/>
+                  <a:srgbClr val="3A423F"/>
+                </a:solidFill>
+                <a:latin typeface="Public Sans" pitchFamily="34" charset="0"/>
+                <a:ea typeface="Public Sans" pitchFamily="34" charset="-122"/>
+                <a:cs typeface="Public Sans" pitchFamily="34" charset="-120"/>
               </a:rPr>
               <a:t>Une plage par emplacement : « Textile femme, 1 à 12 ». Les compteurs verront ce nom en scannant.</a:t>
             </a:r>
@@ -11732,15 +11664,15 @@
           </a:xfrm>
           <a:prstGeom prst="roundRect">
             <a:avLst>
-              <a:gd name="adj" fmla="val 4023"/>
+              <a:gd name="adj" fmla="val 1149"/>
             </a:avLst>
           </a:prstGeom>
           <a:solidFill>
-            <a:srgbClr val="F4F5F9"/>
+            <a:srgbClr val="F2F3F1"/>
           </a:solidFill>
           <a:ln w="12700">
             <a:solidFill>
-              <a:srgbClr val="F4F5F9"/>
+              <a:srgbClr val="F2F3F1"/>
             </a:solidFill>
             <a:prstDash val="solid"/>
           </a:ln>
@@ -11800,11 +11732,11 @@
             <a:r>
               <a:rPr lang="en-US" sz="1350" b="1" dirty="0">
                 <a:solidFill>
-                  <a:srgbClr val="4636B0"/>
-                </a:solidFill>
-                <a:latin typeface="Sora" pitchFamily="34" charset="0"/>
-                <a:ea typeface="Sora" pitchFamily="34" charset="-122"/>
-                <a:cs typeface="Sora" pitchFamily="34" charset="-120"/>
+                  <a:srgbClr val="14181A"/>
+                </a:solidFill>
+                <a:latin typeface="Archivo" pitchFamily="34" charset="0"/>
+                <a:ea typeface="Archivo" pitchFamily="34" charset="-122"/>
+                <a:cs typeface="Archivo" pitchFamily="34" charset="-120"/>
               </a:rPr>
               <a:t>3 — Les fichiers</a:t>
             </a:r>
@@ -11842,11 +11774,11 @@
             <a:r>
               <a:rPr lang="en-US" sz="1100" dirty="0">
                 <a:solidFill>
-                  <a:srgbClr val="3D4556"/>
-                </a:solidFill>
-                <a:latin typeface="Inter" pitchFamily="34" charset="0"/>
-                <a:ea typeface="Inter" pitchFamily="34" charset="-122"/>
-                <a:cs typeface="Inter" pitchFamily="34" charset="-120"/>
+                  <a:srgbClr val="3A423F"/>
+                </a:solidFill>
+                <a:latin typeface="Public Sans" pitchFamily="34" charset="0"/>
+                <a:ea typeface="Public Sans" pitchFamily="34" charset="-122"/>
+                <a:cs typeface="Public Sans" pitchFamily="34" charset="-120"/>
               </a:rPr>
               <a:t>Référentiel et stock théorique, en CSV ou Excel, tels qu'ils sortent de votre système.</a:t>
             </a:r>
@@ -11867,15 +11799,15 @@
           </a:xfrm>
           <a:prstGeom prst="roundRect">
             <a:avLst>
-              <a:gd name="adj" fmla="val 4023"/>
+              <a:gd name="adj" fmla="val 1149"/>
             </a:avLst>
           </a:prstGeom>
           <a:solidFill>
-            <a:srgbClr val="F4F5F9"/>
+            <a:srgbClr val="F2F3F1"/>
           </a:solidFill>
           <a:ln w="12700">
             <a:solidFill>
-              <a:srgbClr val="F4F5F9"/>
+              <a:srgbClr val="F2F3F1"/>
             </a:solidFill>
             <a:prstDash val="solid"/>
           </a:ln>
@@ -11932,11 +11864,11 @@
             <a:r>
               <a:rPr lang="en-US" sz="900" dirty="0">
                 <a:solidFill>
-                  <a:srgbClr val="5B6475"/>
-                </a:solidFill>
-                <a:latin typeface="Inter" pitchFamily="34" charset="0"/>
-                <a:ea typeface="Inter" pitchFamily="34" charset="-122"/>
-                <a:cs typeface="Inter" pitchFamily="34" charset="-120"/>
+                  <a:srgbClr val="575F5C"/>
+                </a:solidFill>
+                <a:latin typeface="Public Sans" pitchFamily="34" charset="0"/>
+                <a:ea typeface="Public Sans" pitchFamily="34" charset="-122"/>
+                <a:cs typeface="Public Sans" pitchFamily="34" charset="-120"/>
               </a:rPr>
               <a:t>Quantinvo · prise en main · août 2026</a:t>
             </a:r>
@@ -11971,11 +11903,11 @@
             <a:r>
               <a:rPr lang="en-US" sz="900" dirty="0">
                 <a:solidFill>
-                  <a:srgbClr val="5B6475"/>
-                </a:solidFill>
-                <a:latin typeface="Inter" pitchFamily="34" charset="0"/>
-                <a:ea typeface="Inter" pitchFamily="34" charset="-122"/>
-                <a:cs typeface="Inter" pitchFamily="34" charset="-120"/>
+                  <a:srgbClr val="575F5C"/>
+                </a:solidFill>
+                <a:latin typeface="Public Sans" pitchFamily="34" charset="0"/>
+                <a:ea typeface="Public Sans" pitchFamily="34" charset="-122"/>
+                <a:cs typeface="Public Sans" pitchFamily="34" charset="-120"/>
               </a:rPr>
               <a:t>7</a:t>
             </a:r>
@@ -12066,11 +11998,11 @@
             <a:r>
               <a:rPr lang="en-US" sz="1600" b="1" dirty="0">
                 <a:solidFill>
-                  <a:srgbClr val="0B0F19"/>
-                </a:solidFill>
-                <a:latin typeface="Sora" pitchFamily="34" charset="0"/>
-                <a:ea typeface="Sora" pitchFamily="34" charset="-122"/>
-                <a:cs typeface="Sora" pitchFamily="34" charset="-120"/>
+                  <a:srgbClr val="14181A"/>
+                </a:solidFill>
+                <a:latin typeface="Archivo" pitchFamily="34" charset="0"/>
+                <a:ea typeface="Archivo" pitchFamily="34" charset="-122"/>
+                <a:cs typeface="Archivo" pitchFamily="34" charset="-120"/>
               </a:rPr>
               <a:t>Quantinvo</a:t>
             </a:r>
@@ -12105,11 +12037,11 @@
             <a:r>
               <a:rPr lang="en-US" sz="1000" dirty="0">
                 <a:solidFill>
-                  <a:srgbClr val="5B6475"/>
-                </a:solidFill>
-                <a:latin typeface="Inter" pitchFamily="34" charset="0"/>
-                <a:ea typeface="Inter" pitchFamily="34" charset="-122"/>
-                <a:cs typeface="Inter" pitchFamily="34" charset="-120"/>
+                  <a:srgbClr val="575F5C"/>
+                </a:solidFill>
+                <a:latin typeface="Public Sans" pitchFamily="34" charset="0"/>
+                <a:ea typeface="Public Sans" pitchFamily="34" charset="-122"/>
+                <a:cs typeface="Public Sans" pitchFamily="34" charset="-120"/>
               </a:rPr>
               <a:t>Superviseur · à chaque inventaire</a:t>
             </a:r>
@@ -12126,17 +12058,17 @@
         <p:spPr>
           <a:xfrm>
             <a:off x="731520" y="877824"/>
-            <a:ext cx="10725912" cy="25603"/>
+            <a:ext cx="10725912" cy="10973"/>
           </a:xfrm>
           <a:prstGeom prst="rect">
             <a:avLst/>
           </a:prstGeom>
           <a:solidFill>
-            <a:srgbClr val="38C9FF"/>
+            <a:srgbClr val="E2E5E1"/>
           </a:solidFill>
           <a:ln w="12700">
             <a:solidFill>
-              <a:srgbClr val="38C9FF"/>
+              <a:srgbClr val="E2E5E1"/>
             </a:solidFill>
             <a:prstDash val="solid"/>
           </a:ln>
@@ -12172,11 +12104,11 @@
             <a:r>
               <a:rPr lang="en-US" sz="2600" b="1" dirty="0">
                 <a:solidFill>
-                  <a:srgbClr val="4636B0"/>
-                </a:solidFill>
-                <a:latin typeface="Sora" pitchFamily="34" charset="0"/>
-                <a:ea typeface="Sora" pitchFamily="34" charset="-122"/>
-                <a:cs typeface="Sora" pitchFamily="34" charset="-120"/>
+                  <a:srgbClr val="14181A"/>
+                </a:solidFill>
+                <a:latin typeface="Archivo" pitchFamily="34" charset="0"/>
+                <a:ea typeface="Archivo" pitchFamily="34" charset="-122"/>
+                <a:cs typeface="Archivo" pitchFamily="34" charset="-120"/>
               </a:rPr>
               <a:t>Deux fichiers, et ce que chacun change.</a:t>
             </a:r>
@@ -12217,11 +12149,11 @@
             <a:r>
               <a:rPr lang="en-US" sz="1200" b="1" dirty="0">
                 <a:solidFill>
-                  <a:srgbClr val="0B0F19"/>
-                </a:solidFill>
-                <a:latin typeface="Inter" pitchFamily="34" charset="0"/>
-                <a:ea typeface="Inter" pitchFamily="34" charset="-122"/>
-                <a:cs typeface="Inter" pitchFamily="34" charset="-120"/>
+                  <a:srgbClr val="14181A"/>
+                </a:solidFill>
+                <a:latin typeface="Public Sans" pitchFamily="34" charset="0"/>
+                <a:ea typeface="Public Sans" pitchFamily="34" charset="-122"/>
+                <a:cs typeface="Public Sans" pitchFamily="34" charset="-120"/>
               </a:rPr>
               <a:t>Le référentiel articles. </a:t>
             </a:r>
@@ -12237,11 +12169,11 @@
             <a:r>
               <a:rPr lang="en-US" sz="1200" dirty="0">
                 <a:solidFill>
-                  <a:srgbClr val="3D4556"/>
-                </a:solidFill>
-                <a:latin typeface="Inter" pitchFamily="34" charset="0"/>
-                <a:ea typeface="Inter" pitchFamily="34" charset="-122"/>
-                <a:cs typeface="Inter" pitchFamily="34" charset="-120"/>
+                  <a:srgbClr val="3A423F"/>
+                </a:solidFill>
+                <a:latin typeface="Public Sans" pitchFamily="34" charset="0"/>
+                <a:ea typeface="Public Sans" pitchFamily="34" charset="-122"/>
+                <a:cs typeface="Public Sans" pitchFamily="34" charset="-120"/>
               </a:rPr>
               <a:t>Code, libellé, prix d'achat. Il permet de reconnaître ce qu'on scanne : sans lui, chaque article scanné sort en « inconnu ».</a:t>
             </a:r>
@@ -12260,11 +12192,11 @@
             <a:r>
               <a:rPr lang="en-US" sz="1200" b="1" dirty="0">
                 <a:solidFill>
-                  <a:srgbClr val="0B0F19"/>
-                </a:solidFill>
-                <a:latin typeface="Inter" pitchFamily="34" charset="0"/>
-                <a:ea typeface="Inter" pitchFamily="34" charset="-122"/>
-                <a:cs typeface="Inter" pitchFamily="34" charset="-120"/>
+                  <a:srgbClr val="14181A"/>
+                </a:solidFill>
+                <a:latin typeface="Public Sans" pitchFamily="34" charset="0"/>
+                <a:ea typeface="Public Sans" pitchFamily="34" charset="-122"/>
+                <a:cs typeface="Public Sans" pitchFamily="34" charset="-120"/>
               </a:rPr>
               <a:t>Le stock théorique. </a:t>
             </a:r>
@@ -12280,11 +12212,11 @@
             <a:r>
               <a:rPr lang="en-US" sz="1200" dirty="0">
                 <a:solidFill>
-                  <a:srgbClr val="3D4556"/>
-                </a:solidFill>
-                <a:latin typeface="Inter" pitchFamily="34" charset="0"/>
-                <a:ea typeface="Inter" pitchFamily="34" charset="-122"/>
-                <a:cs typeface="Inter" pitchFamily="34" charset="-120"/>
+                  <a:srgbClr val="3A423F"/>
+                </a:solidFill>
+                <a:latin typeface="Public Sans" pitchFamily="34" charset="0"/>
+                <a:ea typeface="Public Sans" pitchFamily="34" charset="-122"/>
+                <a:cs typeface="Public Sans" pitchFamily="34" charset="-120"/>
               </a:rPr>
               <a:t>Code et quantité attendue. C'est lui qui permet de calculer les écarts — et de révéler la démarque.</a:t>
             </a:r>
@@ -12303,11 +12235,11 @@
             <a:r>
               <a:rPr lang="en-US" sz="1200" b="1" dirty="0">
                 <a:solidFill>
-                  <a:srgbClr val="0B0F19"/>
-                </a:solidFill>
-                <a:latin typeface="Inter" pitchFamily="34" charset="0"/>
-                <a:ea typeface="Inter" pitchFamily="34" charset="-122"/>
-                <a:cs typeface="Inter" pitchFamily="34" charset="-120"/>
+                  <a:srgbClr val="14181A"/>
+                </a:solidFill>
+                <a:latin typeface="Public Sans" pitchFamily="34" charset="0"/>
+                <a:ea typeface="Public Sans" pitchFamily="34" charset="-122"/>
+                <a:cs typeface="Public Sans" pitchFamily="34" charset="-120"/>
               </a:rPr>
               <a:t>Ce que le second change. </a:t>
             </a:r>
@@ -12323,11 +12255,11 @@
             <a:r>
               <a:rPr lang="en-US" sz="1200" dirty="0">
                 <a:solidFill>
-                  <a:srgbClr val="3D4556"/>
-                </a:solidFill>
-                <a:latin typeface="Inter" pitchFamily="34" charset="0"/>
-                <a:ea typeface="Inter" pitchFamily="34" charset="-122"/>
-                <a:cs typeface="Inter" pitchFamily="34" charset="-120"/>
+                  <a:srgbClr val="3A423F"/>
+                </a:solidFill>
+                <a:latin typeface="Public Sans" pitchFamily="34" charset="0"/>
+                <a:ea typeface="Public Sans" pitchFamily="34" charset="-122"/>
+                <a:cs typeface="Public Sans" pitchFamily="34" charset="-120"/>
               </a:rPr>
               <a:t>Avec lui, le rapport part de l'attendu : un article jamais scanné apparaît « Non compté », avec son manque. Sans lui, le rapport ne montre que ce qui a été compté.</a:t>
             </a:r>
@@ -12348,15 +12280,15 @@
           </a:xfrm>
           <a:prstGeom prst="roundRect">
             <a:avLst>
-              <a:gd name="adj" fmla="val 8421"/>
+              <a:gd name="adj" fmla="val 4211"/>
             </a:avLst>
           </a:prstGeom>
           <a:solidFill>
-            <a:srgbClr val="F4F5F9"/>
+            <a:srgbClr val="F2F3F1"/>
           </a:solidFill>
           <a:ln w="12700">
             <a:solidFill>
-              <a:srgbClr val="F4F5F9"/>
+              <a:srgbClr val="F2F3F1"/>
             </a:solidFill>
             <a:prstDash val="solid"/>
           </a:ln>
@@ -12389,11 +12321,11 @@
             <a:r>
               <a:rPr lang="en-US" sz="950" b="1" dirty="0">
                 <a:solidFill>
-                  <a:srgbClr val="5B6475"/>
-                </a:solidFill>
-                <a:latin typeface="Inter" pitchFamily="34" charset="0"/>
-                <a:ea typeface="Inter" pitchFamily="34" charset="-122"/>
-                <a:cs typeface="Inter" pitchFamily="34" charset="-120"/>
+                  <a:srgbClr val="575F5C"/>
+                </a:solidFill>
+                <a:latin typeface="Public Sans" pitchFamily="34" charset="0"/>
+                <a:ea typeface="Public Sans" pitchFamily="34" charset="-122"/>
+                <a:cs typeface="Public Sans" pitchFamily="34" charset="-120"/>
               </a:rPr>
               <a:t>Vos colonnes sont reconnues</a:t>
             </a:r>
@@ -12431,11 +12363,11 @@
             <a:r>
               <a:rPr lang="en-US" sz="1050" i="1" dirty="0">
                 <a:solidFill>
-                  <a:srgbClr val="3D4556"/>
-                </a:solidFill>
-                <a:latin typeface="Inter" pitchFamily="34" charset="0"/>
-                <a:ea typeface="Inter" pitchFamily="34" charset="-122"/>
-                <a:cs typeface="Inter" pitchFamily="34" charset="-120"/>
+                  <a:srgbClr val="3A423F"/>
+                </a:solidFill>
+                <a:latin typeface="Public Sans" pitchFamily="34" charset="0"/>
+                <a:ea typeface="Public Sans" pitchFamily="34" charset="-122"/>
+                <a:cs typeface="Public Sans" pitchFamily="34" charset="-120"/>
               </a:rPr>
               <a:t>SKU, Code article, Référence · EAN, Code-barres, GTIN, Gencod · Quantité, Qté, Stock. Majuscules, accents et séparateurs n'ont pas d'importance. Si une colonne manque, l'écran le dit avant d'importer.</a:t>
             </a:r>
@@ -12456,7 +12388,7 @@
           </a:xfrm>
           <a:prstGeom prst="roundRect">
             <a:avLst>
-              <a:gd name="adj" fmla="val 1717"/>
+              <a:gd name="adj" fmla="val 859"/>
             </a:avLst>
           </a:prstGeom>
           <a:solidFill>
@@ -12464,7 +12396,7 @@
           </a:solidFill>
           <a:ln w="12700">
             <a:solidFill>
-              <a:srgbClr val="E3E6EE"/>
+              <a:srgbClr val="E2E5E1"/>
             </a:solidFill>
             <a:prstDash val="solid"/>
           </a:ln>
@@ -12521,11 +12453,11 @@
             <a:r>
               <a:rPr lang="en-US" sz="1000" i="1" dirty="0">
                 <a:solidFill>
-                  <a:srgbClr val="5B6475"/>
-                </a:solidFill>
-                <a:latin typeface="Inter" pitchFamily="34" charset="0"/>
-                <a:ea typeface="Inter" pitchFamily="34" charset="-122"/>
-                <a:cs typeface="Inter" pitchFamily="34" charset="-120"/>
+                  <a:srgbClr val="575F5C"/>
+                </a:solidFill>
+                <a:latin typeface="Public Sans" pitchFamily="34" charset="0"/>
+                <a:ea typeface="Public Sans" pitchFamily="34" charset="-122"/>
+                <a:cs typeface="Public Sans" pitchFamily="34" charset="-120"/>
               </a:rPr>
               <a:t>Le rapport, sur le site : la ligne « Non compté » n'existe que si le stock théorique a été importé.</a:t>
             </a:r>
@@ -12560,11 +12492,11 @@
             <a:r>
               <a:rPr lang="en-US" sz="900" dirty="0">
                 <a:solidFill>
-                  <a:srgbClr val="5B6475"/>
-                </a:solidFill>
-                <a:latin typeface="Inter" pitchFamily="34" charset="0"/>
-                <a:ea typeface="Inter" pitchFamily="34" charset="-122"/>
-                <a:cs typeface="Inter" pitchFamily="34" charset="-120"/>
+                  <a:srgbClr val="575F5C"/>
+                </a:solidFill>
+                <a:latin typeface="Public Sans" pitchFamily="34" charset="0"/>
+                <a:ea typeface="Public Sans" pitchFamily="34" charset="-122"/>
+                <a:cs typeface="Public Sans" pitchFamily="34" charset="-120"/>
               </a:rPr>
               <a:t>Quantinvo · prise en main · août 2026</a:t>
             </a:r>
@@ -12599,11 +12531,11 @@
             <a:r>
               <a:rPr lang="en-US" sz="900" dirty="0">
                 <a:solidFill>
-                  <a:srgbClr val="5B6475"/>
-                </a:solidFill>
-                <a:latin typeface="Inter" pitchFamily="34" charset="0"/>
-                <a:ea typeface="Inter" pitchFamily="34" charset="-122"/>
-                <a:cs typeface="Inter" pitchFamily="34" charset="-120"/>
+                  <a:srgbClr val="575F5C"/>
+                </a:solidFill>
+                <a:latin typeface="Public Sans" pitchFamily="34" charset="0"/>
+                <a:ea typeface="Public Sans" pitchFamily="34" charset="-122"/>
+                <a:cs typeface="Public Sans" pitchFamily="34" charset="-120"/>
               </a:rPr>
               <a:t>8</a:t>
             </a:r>
@@ -12694,11 +12626,11 @@
             <a:r>
               <a:rPr lang="en-US" sz="1600" b="1" dirty="0">
                 <a:solidFill>
-                  <a:srgbClr val="0B0F19"/>
-                </a:solidFill>
-                <a:latin typeface="Sora" pitchFamily="34" charset="0"/>
-                <a:ea typeface="Sora" pitchFamily="34" charset="-122"/>
-                <a:cs typeface="Sora" pitchFamily="34" charset="-120"/>
+                  <a:srgbClr val="14181A"/>
+                </a:solidFill>
+                <a:latin typeface="Archivo" pitchFamily="34" charset="0"/>
+                <a:ea typeface="Archivo" pitchFamily="34" charset="-122"/>
+                <a:cs typeface="Archivo" pitchFamily="34" charset="-120"/>
               </a:rPr>
               <a:t>Quantinvo</a:t>
             </a:r>
@@ -12733,11 +12665,11 @@
             <a:r>
               <a:rPr lang="en-US" sz="1000" dirty="0">
                 <a:solidFill>
-                  <a:srgbClr val="5B6475"/>
-                </a:solidFill>
-                <a:latin typeface="Inter" pitchFamily="34" charset="0"/>
-                <a:ea typeface="Inter" pitchFamily="34" charset="-122"/>
-                <a:cs typeface="Inter" pitchFamily="34" charset="-120"/>
+                  <a:srgbClr val="575F5C"/>
+                </a:solidFill>
+                <a:latin typeface="Public Sans" pitchFamily="34" charset="0"/>
+                <a:ea typeface="Public Sans" pitchFamily="34" charset="-122"/>
+                <a:cs typeface="Public Sans" pitchFamily="34" charset="-120"/>
               </a:rPr>
               <a:t>Superviseur · pendant</a:t>
             </a:r>
@@ -12754,17 +12686,17 @@
         <p:spPr>
           <a:xfrm>
             <a:off x="731520" y="877824"/>
-            <a:ext cx="10725912" cy="25603"/>
+            <a:ext cx="10725912" cy="10973"/>
           </a:xfrm>
           <a:prstGeom prst="rect">
             <a:avLst/>
           </a:prstGeom>
           <a:solidFill>
-            <a:srgbClr val="38C9FF"/>
+            <a:srgbClr val="E2E5E1"/>
           </a:solidFill>
           <a:ln w="12700">
             <a:solidFill>
-              <a:srgbClr val="38C9FF"/>
+              <a:srgbClr val="E2E5E1"/>
             </a:solidFill>
             <a:prstDash val="solid"/>
           </a:ln>
@@ -12800,11 +12732,11 @@
             <a:r>
               <a:rPr lang="en-US" sz="2600" b="1" dirty="0">
                 <a:solidFill>
-                  <a:srgbClr val="4636B0"/>
-                </a:solidFill>
-                <a:latin typeface="Sora" pitchFamily="34" charset="0"/>
-                <a:ea typeface="Sora" pitchFamily="34" charset="-122"/>
-                <a:cs typeface="Sora" pitchFamily="34" charset="-120"/>
+                  <a:srgbClr val="14181A"/>
+                </a:solidFill>
+                <a:latin typeface="Archivo" pitchFamily="34" charset="0"/>
+                <a:ea typeface="Archivo" pitchFamily="34" charset="-122"/>
+                <a:cs typeface="Archivo" pitchFamily="34" charset="-120"/>
               </a:rPr>
               <a:t>Pendant l’inventaire, deux écrans et un geste.</a:t>
             </a:r>
@@ -12842,11 +12774,11 @@
             <a:r>
               <a:rPr lang="en-US" sz="1350" b="1" dirty="0">
                 <a:solidFill>
-                  <a:srgbClr val="4636B0"/>
-                </a:solidFill>
-                <a:latin typeface="Sora" pitchFamily="34" charset="0"/>
-                <a:ea typeface="Sora" pitchFamily="34" charset="-122"/>
-                <a:cs typeface="Sora" pitchFamily="34" charset="-120"/>
+                  <a:srgbClr val="14181A"/>
+                </a:solidFill>
+                <a:latin typeface="Archivo" pitchFamily="34" charset="0"/>
+                <a:ea typeface="Archivo" pitchFamily="34" charset="-122"/>
+                <a:cs typeface="Archivo" pitchFamily="34" charset="-120"/>
               </a:rPr>
               <a:t>La progression, en un chiffre</a:t>
             </a:r>
@@ -12884,11 +12816,11 @@
             <a:r>
               <a:rPr lang="en-US" sz="1100" dirty="0">
                 <a:solidFill>
-                  <a:srgbClr val="3D4556"/>
-                </a:solidFill>
-                <a:latin typeface="Inter" pitchFamily="34" charset="0"/>
-                <a:ea typeface="Inter" pitchFamily="34" charset="-122"/>
-                <a:cs typeface="Inter" pitchFamily="34" charset="-120"/>
+                  <a:srgbClr val="3A423F"/>
+                </a:solidFill>
+                <a:latin typeface="Public Sans" pitchFamily="34" charset="0"/>
+                <a:ea typeface="Public Sans" pitchFamily="34" charset="-122"/>
+                <a:cs typeface="Public Sans" pitchFamily="34" charset="-120"/>
               </a:rPr>
               <a:t>Comptées, auditées, et ce qui reste. Le bandeau ambre mène aux emplacements concernés.</a:t>
             </a:r>
@@ -12909,15 +12841,15 @@
           </a:xfrm>
           <a:prstGeom prst="roundRect">
             <a:avLst>
-              <a:gd name="adj" fmla="val 4023"/>
+              <a:gd name="adj" fmla="val 1149"/>
             </a:avLst>
           </a:prstGeom>
           <a:solidFill>
-            <a:srgbClr val="F4F5F9"/>
+            <a:srgbClr val="F2F3F1"/>
           </a:solidFill>
           <a:ln w="12700">
             <a:solidFill>
-              <a:srgbClr val="F4F5F9"/>
+              <a:srgbClr val="F2F3F1"/>
             </a:solidFill>
             <a:prstDash val="solid"/>
           </a:ln>
@@ -12977,11 +12909,11 @@
             <a:r>
               <a:rPr lang="en-US" sz="1350" b="1" dirty="0">
                 <a:solidFill>
-                  <a:srgbClr val="4636B0"/>
-                </a:solidFill>
-                <a:latin typeface="Sora" pitchFamily="34" charset="0"/>
-                <a:ea typeface="Sora" pitchFamily="34" charset="-122"/>
-                <a:cs typeface="Sora" pitchFamily="34" charset="-120"/>
+                  <a:srgbClr val="14181A"/>
+                </a:solidFill>
+                <a:latin typeface="Archivo" pitchFamily="34" charset="0"/>
+                <a:ea typeface="Archivo" pitchFamily="34" charset="-122"/>
+                <a:cs typeface="Archivo" pitchFamily="34" charset="-120"/>
               </a:rPr>
               <a:t>La fiche de l’inventaire</a:t>
             </a:r>
@@ -13019,11 +12951,11 @@
             <a:r>
               <a:rPr lang="en-US" sz="1100" dirty="0">
                 <a:solidFill>
-                  <a:srgbClr val="3D4556"/>
-                </a:solidFill>
-                <a:latin typeface="Inter" pitchFamily="34" charset="0"/>
-                <a:ea typeface="Inter" pitchFamily="34" charset="-122"/>
-                <a:cs typeface="Inter" pitchFamily="34" charset="-120"/>
+                  <a:srgbClr val="3A423F"/>
+                </a:solidFill>
+                <a:latin typeface="Public Sans" pitchFamily="34" charset="0"/>
+                <a:ea typeface="Public Sans" pitchFamily="34" charset="-122"/>
+                <a:cs typeface="Public Sans" pitchFamily="34" charset="-120"/>
               </a:rPr>
               <a:t>Numéro, code d'accès et partage, membres. Le bouton « i » l'ouvre de n'importe où.</a:t>
             </a:r>
@@ -13044,15 +12976,15 @@
           </a:xfrm>
           <a:prstGeom prst="roundRect">
             <a:avLst>
-              <a:gd name="adj" fmla="val 4023"/>
+              <a:gd name="adj" fmla="val 1149"/>
             </a:avLst>
           </a:prstGeom>
           <a:solidFill>
-            <a:srgbClr val="F4F5F9"/>
+            <a:srgbClr val="F2F3F1"/>
           </a:solidFill>
           <a:ln w="12700">
             <a:solidFill>
-              <a:srgbClr val="F4F5F9"/>
+              <a:srgbClr val="F2F3F1"/>
             </a:solidFill>
             <a:prstDash val="solid"/>
           </a:ln>
@@ -13112,11 +13044,11 @@
             <a:r>
               <a:rPr lang="en-US" sz="1350" b="1" dirty="0">
                 <a:solidFill>
-                  <a:srgbClr val="4636B0"/>
-                </a:solidFill>
-                <a:latin typeface="Sora" pitchFamily="34" charset="0"/>
-                <a:ea typeface="Sora" pitchFamily="34" charset="-122"/>
-                <a:cs typeface="Sora" pitchFamily="34" charset="-120"/>
+                  <a:srgbClr val="14181A"/>
+                </a:solidFill>
+                <a:latin typeface="Archivo" pitchFamily="34" charset="0"/>
+                <a:ea typeface="Archivo" pitchFamily="34" charset="-122"/>
+                <a:cs typeface="Archivo" pitchFamily="34" charset="-120"/>
               </a:rPr>
               <a:t>Qui est dans l’équipe</a:t>
             </a:r>
@@ -13154,11 +13086,11 @@
             <a:r>
               <a:rPr lang="en-US" sz="1100" dirty="0">
                 <a:solidFill>
-                  <a:srgbClr val="3D4556"/>
-                </a:solidFill>
-                <a:latin typeface="Inter" pitchFamily="34" charset="0"/>
-                <a:ea typeface="Inter" pitchFamily="34" charset="-122"/>
-                <a:cs typeface="Inter" pitchFamily="34" charset="-120"/>
+                  <a:srgbClr val="3A423F"/>
+                </a:solidFill>
+                <a:latin typeface="Public Sans" pitchFamily="34" charset="0"/>
+                <a:ea typeface="Public Sans" pitchFamily="34" charset="-122"/>
+                <a:cs typeface="Public Sans" pitchFamily="34" charset="-120"/>
               </a:rPr>
               <a:t>« Mot de passe à créer » veut dire : invitée, pas encore connectée. C'est un état, pas une erreur.</a:t>
             </a:r>
@@ -13179,15 +13111,15 @@
           </a:xfrm>
           <a:prstGeom prst="roundRect">
             <a:avLst>
-              <a:gd name="adj" fmla="val 4023"/>
+              <a:gd name="adj" fmla="val 1149"/>
             </a:avLst>
           </a:prstGeom>
           <a:solidFill>
-            <a:srgbClr val="F4F5F9"/>
+            <a:srgbClr val="F2F3F1"/>
           </a:solidFill>
           <a:ln w="12700">
             <a:solidFill>
-              <a:srgbClr val="F4F5F9"/>
+              <a:srgbClr val="F2F3F1"/>
             </a:solidFill>
             <a:prstDash val="solid"/>
           </a:ln>
@@ -13244,11 +13176,11 @@
             <a:r>
               <a:rPr lang="en-US" sz="900" dirty="0">
                 <a:solidFill>
-                  <a:srgbClr val="5B6475"/>
-                </a:solidFill>
-                <a:latin typeface="Inter" pitchFamily="34" charset="0"/>
-                <a:ea typeface="Inter" pitchFamily="34" charset="-122"/>
-                <a:cs typeface="Inter" pitchFamily="34" charset="-120"/>
+                  <a:srgbClr val="575F5C"/>
+                </a:solidFill>
+                <a:latin typeface="Public Sans" pitchFamily="34" charset="0"/>
+                <a:ea typeface="Public Sans" pitchFamily="34" charset="-122"/>
+                <a:cs typeface="Public Sans" pitchFamily="34" charset="-120"/>
               </a:rPr>
               <a:t>Quantinvo · prise en main · août 2026</a:t>
             </a:r>
@@ -13283,11 +13215,11 @@
             <a:r>
               <a:rPr lang="en-US" sz="900" dirty="0">
                 <a:solidFill>
-                  <a:srgbClr val="5B6475"/>
-                </a:solidFill>
-                <a:latin typeface="Inter" pitchFamily="34" charset="0"/>
-                <a:ea typeface="Inter" pitchFamily="34" charset="-122"/>
-                <a:cs typeface="Inter" pitchFamily="34" charset="-120"/>
+                  <a:srgbClr val="575F5C"/>
+                </a:solidFill>
+                <a:latin typeface="Public Sans" pitchFamily="34" charset="0"/>
+                <a:ea typeface="Public Sans" pitchFamily="34" charset="-122"/>
+                <a:cs typeface="Public Sans" pitchFamily="34" charset="-120"/>
               </a:rPr>
               <a:t>9</a:t>
             </a:r>

--- a/docs/entreprise/deck/Quantinvo-prise-en-main-marque.pptx
+++ b/docs/entreprise/deck/Quantinvo-prise-en-main-marque.pptx
@@ -2721,7 +2721,7 @@
                 <a:ea typeface="Public Sans" pitchFamily="34" charset="-122"/>
                 <a:cs typeface="Public Sans" pitchFamily="34" charset="-120"/>
               </a:rPr>
-              <a:t>Devkaylab  ·  août 2026  ·  contact@quantinvo.com</a:t>
+              <a:t>Devkaylab  ·  septembre 2026  ·  contact@quantinvo.com</a:t>
             </a:r>
             <a:endParaRPr lang="en-US" sz="1050" dirty="0"/>
           </a:p>
@@ -3093,7 +3093,7 @@
                 <a:ea typeface="Public Sans" pitchFamily="34" charset="-122"/>
                 <a:cs typeface="Public Sans" pitchFamily="34" charset="-120"/>
               </a:rPr>
-              <a:t>Quantinvo · prise en main · août 2026</a:t>
+              <a:t>Quantinvo · prise en main · septembre 2026</a:t>
             </a:r>
             <a:endParaRPr lang="en-US" sz="900" dirty="0"/>
           </a:p>
@@ -3701,7 +3701,7 @@
                 <a:ea typeface="Public Sans" pitchFamily="34" charset="-122"/>
                 <a:cs typeface="Public Sans" pitchFamily="34" charset="-120"/>
               </a:rPr>
-              <a:t>Quantinvo · prise en main · août 2026</a:t>
+              <a:t>Quantinvo · prise en main · septembre 2026</a:t>
             </a:r>
             <a:endParaRPr lang="en-US" sz="900" dirty="0"/>
           </a:p>
@@ -4058,7 +4058,7 @@
                 <a:ea typeface="Public Sans" pitchFamily="34" charset="-122"/>
                 <a:cs typeface="Public Sans" pitchFamily="34" charset="-120"/>
               </a:rPr>
-              <a:t>Quantinvo · prise en main · août 2026</a:t>
+              <a:t>Quantinvo · prise en main · septembre 2026</a:t>
             </a:r>
             <a:endParaRPr lang="en-US" sz="900" dirty="0"/>
           </a:p>
@@ -4623,7 +4623,7 @@
                 <a:ea typeface="Public Sans" pitchFamily="34" charset="-122"/>
                 <a:cs typeface="Public Sans" pitchFamily="34" charset="-120"/>
               </a:rPr>
-              <a:t>Quantinvo · prise en main · août 2026</a:t>
+              <a:t>Quantinvo · prise en main · septembre 2026</a:t>
             </a:r>
             <a:endParaRPr lang="en-US" sz="900" dirty="0"/>
           </a:p>
@@ -5343,7 +5343,7 @@
                 <a:ea typeface="Public Sans" pitchFamily="34" charset="-122"/>
                 <a:cs typeface="Public Sans" pitchFamily="34" charset="-120"/>
               </a:rPr>
-              <a:t>Quantinvo · prise en main · août 2026</a:t>
+              <a:t>Quantinvo · prise en main · septembre 2026</a:t>
             </a:r>
             <a:endParaRPr lang="en-US" sz="900" dirty="0"/>
           </a:p>
@@ -5836,7 +5836,7 @@
                 <a:ea typeface="Public Sans" pitchFamily="34" charset="-122"/>
                 <a:cs typeface="Public Sans" pitchFamily="34" charset="-120"/>
               </a:rPr>
-              <a:t>Quantinvo · prise en main · août 2026</a:t>
+              <a:t>Quantinvo · prise en main · septembre 2026</a:t>
             </a:r>
             <a:endParaRPr lang="en-US" sz="900" dirty="0"/>
           </a:p>
@@ -6444,7 +6444,7 @@
                 <a:ea typeface="Public Sans" pitchFamily="34" charset="-122"/>
                 <a:cs typeface="Public Sans" pitchFamily="34" charset="-120"/>
               </a:rPr>
-              <a:t>Quantinvo · prise en main · août 2026</a:t>
+              <a:t>Quantinvo · prise en main · septembre 2026</a:t>
             </a:r>
             <a:endParaRPr lang="en-US" sz="900" dirty="0"/>
           </a:p>
@@ -7128,7 +7128,7 @@
                 <a:ea typeface="Public Sans" pitchFamily="34" charset="-122"/>
                 <a:cs typeface="Public Sans" pitchFamily="34" charset="-120"/>
               </a:rPr>
-              <a:t>Quantinvo · prise en main · août 2026</a:t>
+              <a:t>Quantinvo · prise en main · septembre 2026</a:t>
             </a:r>
             <a:endParaRPr lang="en-US" sz="900" dirty="0"/>
           </a:p>
@@ -7866,7 +7866,7 @@
                 <a:ea typeface="Public Sans" pitchFamily="34" charset="-122"/>
                 <a:cs typeface="Public Sans" pitchFamily="34" charset="-120"/>
               </a:rPr>
-              <a:t>Quantinvo · prise en main · août 2026</a:t>
+              <a:t>Quantinvo · prise en main · septembre 2026</a:t>
             </a:r>
             <a:endParaRPr lang="en-US" sz="900" dirty="0"/>
           </a:p>
@@ -8898,7 +8898,7 @@
                 <a:ea typeface="Public Sans" pitchFamily="34" charset="-122"/>
                 <a:cs typeface="Public Sans" pitchFamily="34" charset="-120"/>
               </a:rPr>
-              <a:t>Quantinvo · prise en main · août 2026</a:t>
+              <a:t>Quantinvo · prise en main · septembre 2026</a:t>
             </a:r>
             <a:endParaRPr lang="en-US" sz="900" dirty="0"/>
           </a:p>
@@ -9582,7 +9582,7 @@
                 <a:ea typeface="Public Sans" pitchFamily="34" charset="-122"/>
                 <a:cs typeface="Public Sans" pitchFamily="34" charset="-120"/>
               </a:rPr>
-              <a:t>Quantinvo · prise en main · août 2026</a:t>
+              <a:t>Quantinvo · prise en main · septembre 2026</a:t>
             </a:r>
             <a:endParaRPr lang="en-US" sz="900" dirty="0"/>
           </a:p>
@@ -9939,7 +9939,7 @@
                 <a:ea typeface="Public Sans" pitchFamily="34" charset="-122"/>
                 <a:cs typeface="Public Sans" pitchFamily="34" charset="-120"/>
               </a:rPr>
-              <a:t>Quantinvo · prise en main · août 2026</a:t>
+              <a:t>Quantinvo · prise en main · septembre 2026</a:t>
             </a:r>
             <a:endParaRPr lang="en-US" sz="900" dirty="0"/>
           </a:p>
@@ -10623,7 +10623,7 @@
                 <a:ea typeface="Public Sans" pitchFamily="34" charset="-122"/>
                 <a:cs typeface="Public Sans" pitchFamily="34" charset="-120"/>
               </a:rPr>
-              <a:t>Quantinvo · prise en main · août 2026</a:t>
+              <a:t>Quantinvo · prise en main · septembre 2026</a:t>
             </a:r>
             <a:endParaRPr lang="en-US" sz="900" dirty="0"/>
           </a:p>
@@ -11186,7 +11186,7 @@
                 <a:ea typeface="Public Sans" pitchFamily="34" charset="-122"/>
                 <a:cs typeface="Public Sans" pitchFamily="34" charset="-120"/>
               </a:rPr>
-              <a:t>Quantinvo · prise en main · août 2026</a:t>
+              <a:t>Quantinvo · prise en main · septembre 2026</a:t>
             </a:r>
             <a:endParaRPr lang="en-US" sz="900" dirty="0"/>
           </a:p>
@@ -11870,7 +11870,7 @@
                 <a:ea typeface="Public Sans" pitchFamily="34" charset="-122"/>
                 <a:cs typeface="Public Sans" pitchFamily="34" charset="-120"/>
               </a:rPr>
-              <a:t>Quantinvo · prise en main · août 2026</a:t>
+              <a:t>Quantinvo · prise en main · septembre 2026</a:t>
             </a:r>
             <a:endParaRPr lang="en-US" sz="900" dirty="0"/>
           </a:p>
@@ -12498,7 +12498,7 @@
                 <a:ea typeface="Public Sans" pitchFamily="34" charset="-122"/>
                 <a:cs typeface="Public Sans" pitchFamily="34" charset="-120"/>
               </a:rPr>
-              <a:t>Quantinvo · prise en main · août 2026</a:t>
+              <a:t>Quantinvo · prise en main · septembre 2026</a:t>
             </a:r>
             <a:endParaRPr lang="en-US" sz="900" dirty="0"/>
           </a:p>
@@ -13182,7 +13182,7 @@
                 <a:ea typeface="Public Sans" pitchFamily="34" charset="-122"/>
                 <a:cs typeface="Public Sans" pitchFamily="34" charset="-120"/>
               </a:rPr>
-              <a:t>Quantinvo · prise en main · août 2026</a:t>
+              <a:t>Quantinvo · prise en main · septembre 2026</a:t>
             </a:r>
             <a:endParaRPr lang="en-US" sz="900" dirty="0"/>
           </a:p>
